--- a/consegna/EnerGuard_Presentazione.pptx
+++ b/consegna/EnerGuard_Presentazione.pptx
@@ -9418,8 +9418,8 @@
         </p:blipFill>
         <p:spPr>
           <a:xfrm>
-            <a:off x="924098" y="1234440"/>
-            <a:ext cx="6107083" cy="5303520"/>
+            <a:off x="696858" y="1234440"/>
+            <a:ext cx="6561564" cy="5303520"/>
           </a:xfrm>
           <a:prstGeom prst="rect">
             <a:avLst/>
@@ -9674,7 +9674,23 @@
                   <a:srgbClr val="0B1F3A"/>
                 </a:solidFill>
               </a:rPr>
-              <a:t>Nello screenshot l'LLM non era raggiungibile: la card resta spiegata e la fonte dice </a:t>
+              <a:t>Fonte dichiarata: </a:t>
+            </a:r>
+            <a:r>
+              <a:rPr sz="1600" b="1">
+                <a:solidFill>
+                  <a:srgbClr val="0B1F3A"/>
+                </a:solidFill>
+              </a:rPr>
+              <a:t>llm:azure/gpt-5.6-luna</a:t>
+            </a:r>
+            <a:r>
+              <a:rPr sz="1600" b="0">
+                <a:solidFill>
+                  <a:srgbClr val="0B1F3A"/>
+                </a:solidFill>
+              </a:rPr>
+              <a:t>, circa 2 s. Senza rete la card resta spiegata con </a:t>
             </a:r>
             <a:r>
               <a:rPr sz="1600" b="1">

--- a/consegna/EnerGuard_Presentazione.pptx
+++ b/consegna/EnerGuard_Presentazione.pptx
@@ -20,6 +20,7 @@
     <p:sldId id="268" r:id="rId20"/>
     <p:sldId id="269" r:id="rId21"/>
     <p:sldId id="270" r:id="rId22"/>
+    <p:sldId id="271" r:id="rId23"/>
   </p:sldIdLst>
   <p:sldSz cx="12191695" cy="6858000" type="screen4x3"/>
   <p:notesSz cx="6858000" cy="9144000"/>
@@ -796,7 +797,7 @@
           <a:lstStyle/>
           <a:p>
             <a:r>
-              <a:t>Un limite dichiarato vale più di uno scoperto. Elenco completo nell'allegato della relazione d'impatto.</a:t>
+              <a:t>Un sistema di oversight che non misura la propria supervisione non è supervisionabile. Ma attenzione: misurare i revisori è anche controllo dei lavoratori.</a:t>
             </a:r>
           </a:p>
         </p:txBody>
@@ -866,7 +867,7 @@
           <a:lstStyle/>
           <a:p>
             <a:r>
-              <a:t>Domanda finale della guida: chi è provider e chi deployer. Poi alcuni spunti che non hanno una risposta unica.</a:t>
+              <a:t>Un limite dichiarato vale più di uno scoperto. Elenco completo nell'allegato della relazione d'impatto.</a:t>
             </a:r>
           </a:p>
         </p:txBody>
@@ -892,6 +893,76 @@
 </file>
 
 <file path=ppt/notesSlides/notesSlide15.xml><?xml version="1.0" encoding="utf-8"?>
+<p:notes xmlns:a="http://schemas.openxmlformats.org/drawingml/2006/main" xmlns:p="http://schemas.openxmlformats.org/presentationml/2006/main" xmlns:r="http://schemas.openxmlformats.org/officeDocument/2006/relationships">
+  <p:cSld>
+    <p:spTree>
+      <p:nvGrpSpPr>
+        <p:cNvPr id="1" name=""/>
+        <p:cNvGrpSpPr/>
+        <p:nvPr/>
+      </p:nvGrpSpPr>
+      <p:grpSpPr>
+        <a:xfrm>
+          <a:off x="0" y="0"/>
+          <a:ext cx="0" cy="0"/>
+          <a:chOff x="0" y="0"/>
+          <a:chExt cx="0" cy="0"/>
+        </a:xfrm>
+      </p:grpSpPr>
+      <p:sp>
+        <p:nvSpPr>
+          <p:cNvPr id="2" name="Slide Image Placeholder 1"/>
+          <p:cNvSpPr>
+            <a:spLocks noGrp="1"/>
+          </p:cNvSpPr>
+          <p:nvPr>
+            <p:ph type="sldImg" idx="2"/>
+          </p:nvPr>
+        </p:nvSpPr>
+        <p:spPr/>
+      </p:sp>
+      <p:sp>
+        <p:nvSpPr>
+          <p:cNvPr id="3" name="Notes Placeholder 2"/>
+          <p:cNvSpPr>
+            <a:spLocks noGrp="1"/>
+          </p:cNvSpPr>
+          <p:nvPr>
+            <p:ph type="body" idx="3" sz="quarter"/>
+          </p:nvPr>
+        </p:nvSpPr>
+        <p:spPr/>
+        <p:txBody>
+          <a:bodyPr/>
+          <a:lstStyle/>
+          <a:p>
+            <a:r>
+              <a:t>Domanda finale della guida: chi è provider e chi deployer. Poi alcuni spunti che non hanno una risposta unica.</a:t>
+            </a:r>
+          </a:p>
+        </p:txBody>
+      </p:sp>
+      <p:sp>
+        <p:nvSpPr>
+          <p:cNvPr id="4" name="Slide Number Placeholder 3"/>
+          <p:cNvSpPr>
+            <a:spLocks noGrp="1"/>
+          </p:cNvSpPr>
+          <p:nvPr>
+            <p:ph type="sldNum" idx="5" sz="quarter"/>
+          </p:nvPr>
+        </p:nvSpPr>
+        <p:spPr/>
+      </p:sp>
+    </p:spTree>
+  </p:cSld>
+  <p:clrMapOvr>
+    <a:masterClrMapping/>
+  </p:clrMapOvr>
+</p:notes>
+</file>
+
+<file path=ppt/notesSlides/notesSlide16.xml><?xml version="1.0" encoding="utf-8"?>
 <p:notes xmlns:a="http://schemas.openxmlformats.org/drawingml/2006/main" xmlns:p="http://schemas.openxmlformats.org/presentationml/2006/main" xmlns:r="http://schemas.openxmlformats.org/officeDocument/2006/relationships">
   <p:cSld>
     <p:spTree>
@@ -5892,7 +5963,7 @@
                   <a:srgbClr val="555F6D"/>
                 </a:solidFill>
               </a:rPr>
-              <a:t>Screenshot a sessione appena avviata: i KPI sulle revisioni (A2-A4) sono n/d finché nessuno decide.</a:t>
+              <a:t>Dati reali: 17 revisioni di 3 operatori. A3 oltre target perché misura anche l'attesa in coda; B3c conta le risposte LLM scartate dai guardrail.</a:t>
             </a:r>
           </a:p>
         </p:txBody>
@@ -5991,7 +6062,7 @@
                   <a:srgbClr val="FFFFFF"/>
                 </a:solidFill>
               </a:rPr>
-              <a:t>Cosa NON abbiamo risolto</a:t>
+              <a:t>Chi controlla i controllori</a:t>
             </a:r>
           </a:p>
         </p:txBody>
@@ -6029,7 +6100,7 @@
                   <a:srgbClr val="C9D8EA"/>
                 </a:solidFill>
               </a:rPr>
-              <a:t>10% del punteggio</a:t>
+              <a:t>Art. 14(4)(b) · A2-A4 · C3</a:t>
             </a:r>
           </a:p>
         </p:txBody>
@@ -6077,16 +6148,74 @@
           </a:p>
         </p:txBody>
       </p:sp>
-      <p:sp>
-        <p:nvSpPr>
-          <p:cNvPr id="6" name="TextBox 5"/>
+      <p:pic>
+        <p:nvPicPr>
+          <p:cNvPr id="6" name="Picture 5" descr="kpi_3.png"/>
+          <p:cNvPicPr>
+            <a:picLocks noChangeAspect="1"/>
+          </p:cNvPicPr>
+          <p:nvPr/>
+        </p:nvPicPr>
+        <p:blipFill>
+          <a:blip r:embed="rId2"/>
+          <a:stretch>
+            <a:fillRect/>
+          </a:stretch>
+        </p:blipFill>
+        <p:spPr>
+          <a:xfrm>
+            <a:off x="365760" y="1234440"/>
+            <a:ext cx="5760720" cy="2014086"/>
+          </a:xfrm>
+          <a:prstGeom prst="rect">
+            <a:avLst/>
+          </a:prstGeom>
+          <a:ln w="12700">
+            <a:solidFill>
+              <a:srgbClr val="D0D5DD"/>
+            </a:solidFill>
+          </a:ln>
+        </p:spPr>
+      </p:pic>
+      <p:pic>
+        <p:nvPicPr>
+          <p:cNvPr id="7" name="Picture 6" descr="bias_5.png"/>
+          <p:cNvPicPr>
+            <a:picLocks noChangeAspect="1"/>
+          </p:cNvPicPr>
+          <p:nvPr/>
+        </p:nvPicPr>
+        <p:blipFill>
+          <a:blip r:embed="rId3"/>
+          <a:stretch>
+            <a:fillRect/>
+          </a:stretch>
+        </p:blipFill>
+        <p:spPr>
+          <a:xfrm>
+            <a:off x="373320" y="3840480"/>
+            <a:ext cx="5745600" cy="1828800"/>
+          </a:xfrm>
+          <a:prstGeom prst="rect">
+            <a:avLst/>
+          </a:prstGeom>
+          <a:ln w="12700">
+            <a:solidFill>
+              <a:srgbClr val="D0D5DD"/>
+            </a:solidFill>
+          </a:ln>
+        </p:spPr>
+      </p:pic>
+      <p:sp>
+        <p:nvSpPr>
+          <p:cNvPr id="8" name="TextBox 7"/>
           <p:cNvSpPr txBox="1"/>
           <p:nvPr/>
         </p:nvSpPr>
         <p:spPr>
           <a:xfrm>
-            <a:off x="548640" y="1280160"/>
-            <a:ext cx="11064240" cy="5303520"/>
+            <a:off x="6400800" y="1280160"/>
+            <a:ext cx="5394960" cy="5303520"/>
           </a:xfrm>
           <a:prstGeom prst="rect">
             <a:avLst/>
@@ -6105,7 +6234,7 @@
               </a:spcAft>
             </a:pPr>
             <a:r>
-              <a:rPr sz="1900" b="1">
+              <a:rPr sz="1600" b="1">
                 <a:solidFill>
                   <a:srgbClr val="0F6CBD"/>
                 </a:solidFill>
@@ -6113,28 +6242,20 @@
               <a:t>•  </a:t>
             </a:r>
             <a:r>
-              <a:rPr sz="1900" b="0">
-                <a:solidFill>
-                  <a:srgbClr val="0B1F3A"/>
-                </a:solidFill>
-              </a:rPr>
-              <a:t>La sotto-segnalazione al Sud è un'</a:t>
-            </a:r>
-            <a:r>
-              <a:rPr sz="1900" b="1">
-                <a:solidFill>
-                  <a:srgbClr val="0B1F3A"/>
-                </a:solidFill>
-              </a:rPr>
-              <a:t>ipotesi</a:t>
-            </a:r>
-            <a:r>
-              <a:rPr sz="1900" b="0">
-                <a:solidFill>
-                  <a:srgbClr val="0B1F3A"/>
-                </a:solidFill>
-              </a:rPr>
-              <a:t>: serve una verifica sul campo.</a:t>
+              <a:rPr sz="1600" b="1">
+                <a:solidFill>
+                  <a:srgbClr val="0B1F3A"/>
+                </a:solidFill>
+              </a:rPr>
+              <a:t>Override 35%</a:t>
+            </a:r>
+            <a:r>
+              <a:rPr sz="1600" b="0">
+                <a:solidFill>
+                  <a:srgbClr val="0B1F3A"/>
+                </a:solidFill>
+              </a:rPr>
+              <a:t>: dentro il target 5-40%, nessun segno di approvazione automatica.</a:t>
             </a:r>
           </a:p>
           <a:p>
@@ -6144,7 +6265,7 @@
               </a:spcAft>
             </a:pPr>
             <a:r>
-              <a:rPr sz="1900" b="1">
+              <a:rPr sz="1600" b="1">
                 <a:solidFill>
                   <a:srgbClr val="0F6CBD"/>
                 </a:solidFill>
@@ -6152,28 +6273,20 @@
               <a:t>•  </a:t>
             </a:r>
             <a:r>
-              <a:rPr sz="1900" b="0">
-                <a:solidFill>
-                  <a:srgbClr val="0B1F3A"/>
-                </a:solidFill>
-              </a:rPr>
-              <a:t>Al Nord e al Centro un guasto su quattro arriva </a:t>
-            </a:r>
-            <a:r>
-              <a:rPr sz="1900" b="1">
-                <a:solidFill>
-                  <a:srgbClr val="0B1F3A"/>
-                </a:solidFill>
-              </a:rPr>
-              <a:t>senza segnali nei sensori</a:t>
-            </a:r>
-            <a:r>
-              <a:rPr sz="1900" b="0">
-                <a:solidFill>
-                  <a:srgbClr val="0B1F3A"/>
-                </a:solidFill>
-              </a:rPr>
-              <a:t>.</a:t>
+              <a:rPr sz="1600" b="1">
+                <a:solidFill>
+                  <a:srgbClr val="0B1F3A"/>
+                </a:solidFill>
+              </a:rPr>
+              <a:t>Per revisore</a:t>
+            </a:r>
+            <a:r>
+              <a:rPr sz="1600" b="0">
+                <a:solidFill>
+                  <a:srgbClr val="0B1F3A"/>
+                </a:solidFill>
+              </a:rPr>
+              <a:t>: OP-031 corregge l'AI più spesso (approva il 40%), OP-022 quasi mai (83%) e ha una motivazione troppo breve.</a:t>
             </a:r>
           </a:p>
           <a:p>
@@ -6183,7 +6296,7 @@
               </a:spcAft>
             </a:pPr>
             <a:r>
-              <a:rPr sz="1900" b="1">
+              <a:rPr sz="1600" b="1">
                 <a:solidFill>
                   <a:srgbClr val="0F6CBD"/>
                 </a:solidFill>
@@ -6191,20 +6304,12 @@
               <a:t>•  </a:t>
             </a:r>
             <a:r>
-              <a:rPr sz="1900" b="1">
-                <a:solidFill>
-                  <a:srgbClr val="0B1F3A"/>
-                </a:solidFill>
-              </a:rPr>
-              <a:t>183 ispezioni inutili</a:t>
-            </a:r>
-            <a:r>
-              <a:rPr sz="1900" b="0">
-                <a:solidFill>
-                  <a:srgbClr val="0B1F3A"/>
-                </a:solidFill>
-              </a:rPr>
-              <a:t> su 720: il prezzo di un recall più alto; costo 10:1 ipotizzato.</a:t>
+              <a:rPr sz="1600" b="0">
+                <a:solidFill>
+                  <a:srgbClr val="0B1F3A"/>
+                </a:solidFill>
+              </a:rPr>
+              <a:t>Dopo tre decisioni di OP-022, una con motivazione breve, l'allerta è scattata davvero; con le successive è rientrata.</a:t>
             </a:r>
           </a:p>
           <a:p>
@@ -6214,7 +6319,7 @@
               </a:spcAft>
             </a:pPr>
             <a:r>
-              <a:rPr sz="1900" b="1">
+              <a:rPr sz="1600" b="1">
                 <a:solidFill>
                   <a:srgbClr val="0F6CBD"/>
                 </a:solidFill>
@@ -6222,28 +6327,20 @@
               <a:t>•  </a:t>
             </a:r>
             <a:r>
-              <a:rPr sz="1900" b="0">
-                <a:solidFill>
-                  <a:srgbClr val="0B1F3A"/>
-                </a:solidFill>
-              </a:rPr>
-              <a:t>La correzione del bias è affidata all'</a:t>
-            </a:r>
-            <a:r>
-              <a:rPr sz="1900" b="1">
-                <a:solidFill>
-                  <a:srgbClr val="0B1F3A"/>
-                </a:solidFill>
-              </a:rPr>
-              <a:t>umano</a:t>
-            </a:r>
-            <a:r>
-              <a:rPr sz="1900" b="0">
-                <a:solidFill>
-                  <a:srgbClr val="0B1F3A"/>
-                </a:solidFill>
-              </a:rPr>
-              <a:t>: se approva tutto, la promozione a HITL serve a poco.</a:t>
+              <a:rPr sz="1600" b="1">
+                <a:solidFill>
+                  <a:srgbClr val="0B1F3A"/>
+                </a:solidFill>
+              </a:rPr>
+              <a:t>Per area</a:t>
+            </a:r>
+            <a:r>
+              <a:rPr sz="1600" b="0">
+                <a:solidFill>
+                  <a:srgbClr val="0B1F3A"/>
+                </a:solidFill>
+              </a:rPr>
+              <a:t>: le Isole hanno override 0.50 contro una media di 0.35; sotto il doppio, quindi nessuna allerta.</a:t>
             </a:r>
           </a:p>
           <a:p>
@@ -6253,7 +6350,7 @@
               </a:spcAft>
             </a:pPr>
             <a:r>
-              <a:rPr sz="1900" b="1">
+              <a:rPr sz="1600" b="1">
                 <a:solidFill>
                   <a:srgbClr val="0F6CBD"/>
                 </a:solidFill>
@@ -6261,106 +6358,28 @@
               <a:t>•  </a:t>
             </a:r>
             <a:r>
-              <a:rPr sz="1900" b="1">
-                <a:solidFill>
-                  <a:srgbClr val="0B1F3A"/>
-                </a:solidFill>
-              </a:rPr>
-              <a:t>Confidenza = max(p, 1−p)</a:t>
-            </a:r>
-            <a:r>
-              <a:rPr sz="1900" b="0">
-                <a:solidFill>
-                  <a:srgbClr val="0B1F3A"/>
-                </a:solidFill>
-              </a:rPr>
-              <a:t>: non aggiunge informazione rispetto alla probabilità.</a:t>
-            </a:r>
-          </a:p>
-          <a:p>
-            <a:pPr>
-              <a:spcAft>
-                <a:spcPts val="800"/>
-              </a:spcAft>
-            </a:pPr>
-            <a:r>
-              <a:rPr sz="1900" b="1">
-                <a:solidFill>
-                  <a:srgbClr val="0F6CBD"/>
-                </a:solidFill>
-              </a:rPr>
-              <a:t>•  </a:t>
-            </a:r>
-            <a:r>
-              <a:rPr sz="1900" b="1">
-                <a:solidFill>
-                  <a:srgbClr val="0B1F3A"/>
-                </a:solidFill>
-              </a:rPr>
-              <a:t>Drift simulato</a:t>
-            </a:r>
-            <a:r>
-              <a:rPr sz="1900" b="0">
-                <a:solidFill>
-                  <a:srgbClr val="0B1F3A"/>
-                </a:solidFill>
-              </a:rPr>
-              <a:t>, revisori non differenziati per competenza, </a:t>
-            </a:r>
-            <a:r>
-              <a:rPr sz="1900" b="1">
-                <a:solidFill>
-                  <a:srgbClr val="0B1F3A"/>
-                </a:solidFill>
-              </a:rPr>
-              <a:t>2 guasti</a:t>
-            </a:r>
-            <a:r>
-              <a:rPr sz="1900" b="0">
-                <a:solidFill>
-                  <a:srgbClr val="0B1F3A"/>
-                </a:solidFill>
-              </a:rPr>
-              <a:t> nelle Isole ancora automatici.</a:t>
-            </a:r>
-          </a:p>
-          <a:p>
-            <a:pPr>
-              <a:spcAft>
-                <a:spcPts val="800"/>
-              </a:spcAft>
-            </a:pPr>
-            <a:r>
-              <a:rPr sz="1900" b="1">
-                <a:solidFill>
-                  <a:srgbClr val="0F6CBD"/>
-                </a:solidFill>
-              </a:rPr>
-              <a:t>•  </a:t>
-            </a:r>
-            <a:r>
-              <a:rPr sz="1900" b="0">
-                <a:solidFill>
-                  <a:srgbClr val="0B1F3A"/>
-                </a:solidFill>
-              </a:rPr>
-              <a:t>Catena di hash </a:t>
-            </a:r>
-            <a:r>
-              <a:rPr sz="1900" b="1">
-                <a:solidFill>
-                  <a:srgbClr val="0B1F3A"/>
-                </a:solidFill>
-              </a:rPr>
-              <a:t>senza chiave</a:t>
-            </a:r>
-            <a:r>
-              <a:rPr sz="1900" b="0">
-                <a:solidFill>
-                  <a:srgbClr val="0B1F3A"/>
-                </a:solidFill>
-              </a:rPr>
-              <a:t>: una riscrittura completa del log non verrebbe rilevata.</a:t>
+              <a:rPr sz="1600" b="0">
+                <a:solidFill>
+                  <a:srgbClr val="0B1F3A"/>
+                </a:solidFill>
+              </a:rPr>
+              <a:t>Queste metriche misurano </a:t>
+            </a:r>
+            <a:r>
+              <a:rPr sz="1600" b="1">
+                <a:solidFill>
+                  <a:srgbClr val="0B1F3A"/>
+                </a:solidFill>
+              </a:rPr>
+              <a:t>persone</a:t>
+            </a:r>
+            <a:r>
+              <a:rPr sz="1600" b="0">
+                <a:solidFill>
+                  <a:srgbClr val="0B1F3A"/>
+                </a:solidFill>
+              </a:rPr>
+              <a:t>: in produzione servono informativa ai lavoratori e regole d'uso chiare.</a:t>
             </a:r>
           </a:p>
         </p:txBody>
@@ -6459,7 +6478,7 @@
                   <a:srgbClr val="FFFFFF"/>
                 </a:solidFill>
               </a:rPr>
-              <a:t>AI Act: ruoli e domande aperte</a:t>
+              <a:t>Cosa NON abbiamo risolto</a:t>
             </a:r>
           </a:p>
         </p:txBody>
@@ -6497,7 +6516,7 @@
                   <a:srgbClr val="C9D8EA"/>
                 </a:solidFill>
               </a:rPr>
-              <a:t>Discussione</a:t>
+              <a:t>10% del punteggio</a:t>
             </a:r>
           </a:p>
         </p:txBody>
@@ -6554,6 +6573,474 @@
         <p:spPr>
           <a:xfrm>
             <a:off x="548640" y="1280160"/>
+            <a:ext cx="11064240" cy="5303520"/>
+          </a:xfrm>
+          <a:prstGeom prst="rect">
+            <a:avLst/>
+          </a:prstGeom>
+          <a:noFill/>
+        </p:spPr>
+        <p:txBody>
+          <a:bodyPr wrap="square">
+            <a:spAutoFit/>
+          </a:bodyPr>
+          <a:lstStyle/>
+          <a:p>
+            <a:pPr>
+              <a:spcAft>
+                <a:spcPts val="800"/>
+              </a:spcAft>
+            </a:pPr>
+            <a:r>
+              <a:rPr sz="1900" b="1">
+                <a:solidFill>
+                  <a:srgbClr val="0F6CBD"/>
+                </a:solidFill>
+              </a:rPr>
+              <a:t>•  </a:t>
+            </a:r>
+            <a:r>
+              <a:rPr sz="1900" b="0">
+                <a:solidFill>
+                  <a:srgbClr val="0B1F3A"/>
+                </a:solidFill>
+              </a:rPr>
+              <a:t>La sotto-segnalazione al Sud è un'</a:t>
+            </a:r>
+            <a:r>
+              <a:rPr sz="1900" b="1">
+                <a:solidFill>
+                  <a:srgbClr val="0B1F3A"/>
+                </a:solidFill>
+              </a:rPr>
+              <a:t>ipotesi</a:t>
+            </a:r>
+            <a:r>
+              <a:rPr sz="1900" b="0">
+                <a:solidFill>
+                  <a:srgbClr val="0B1F3A"/>
+                </a:solidFill>
+              </a:rPr>
+              <a:t>: serve una verifica sul campo.</a:t>
+            </a:r>
+          </a:p>
+          <a:p>
+            <a:pPr>
+              <a:spcAft>
+                <a:spcPts val="800"/>
+              </a:spcAft>
+            </a:pPr>
+            <a:r>
+              <a:rPr sz="1900" b="1">
+                <a:solidFill>
+                  <a:srgbClr val="0F6CBD"/>
+                </a:solidFill>
+              </a:rPr>
+              <a:t>•  </a:t>
+            </a:r>
+            <a:r>
+              <a:rPr sz="1900" b="0">
+                <a:solidFill>
+                  <a:srgbClr val="0B1F3A"/>
+                </a:solidFill>
+              </a:rPr>
+              <a:t>Al Nord e al Centro un guasto su quattro arriva </a:t>
+            </a:r>
+            <a:r>
+              <a:rPr sz="1900" b="1">
+                <a:solidFill>
+                  <a:srgbClr val="0B1F3A"/>
+                </a:solidFill>
+              </a:rPr>
+              <a:t>senza segnali nei sensori</a:t>
+            </a:r>
+            <a:r>
+              <a:rPr sz="1900" b="0">
+                <a:solidFill>
+                  <a:srgbClr val="0B1F3A"/>
+                </a:solidFill>
+              </a:rPr>
+              <a:t>.</a:t>
+            </a:r>
+          </a:p>
+          <a:p>
+            <a:pPr>
+              <a:spcAft>
+                <a:spcPts val="800"/>
+              </a:spcAft>
+            </a:pPr>
+            <a:r>
+              <a:rPr sz="1900" b="1">
+                <a:solidFill>
+                  <a:srgbClr val="0F6CBD"/>
+                </a:solidFill>
+              </a:rPr>
+              <a:t>•  </a:t>
+            </a:r>
+            <a:r>
+              <a:rPr sz="1900" b="1">
+                <a:solidFill>
+                  <a:srgbClr val="0B1F3A"/>
+                </a:solidFill>
+              </a:rPr>
+              <a:t>183 ispezioni inutili</a:t>
+            </a:r>
+            <a:r>
+              <a:rPr sz="1900" b="0">
+                <a:solidFill>
+                  <a:srgbClr val="0B1F3A"/>
+                </a:solidFill>
+              </a:rPr>
+              <a:t> su 720: il prezzo di un recall più alto; costo 10:1 ipotizzato.</a:t>
+            </a:r>
+          </a:p>
+          <a:p>
+            <a:pPr>
+              <a:spcAft>
+                <a:spcPts val="800"/>
+              </a:spcAft>
+            </a:pPr>
+            <a:r>
+              <a:rPr sz="1900" b="1">
+                <a:solidFill>
+                  <a:srgbClr val="0F6CBD"/>
+                </a:solidFill>
+              </a:rPr>
+              <a:t>•  </a:t>
+            </a:r>
+            <a:r>
+              <a:rPr sz="1900" b="0">
+                <a:solidFill>
+                  <a:srgbClr val="0B1F3A"/>
+                </a:solidFill>
+              </a:rPr>
+              <a:t>La correzione del bias è affidata all'</a:t>
+            </a:r>
+            <a:r>
+              <a:rPr sz="1900" b="1">
+                <a:solidFill>
+                  <a:srgbClr val="0B1F3A"/>
+                </a:solidFill>
+              </a:rPr>
+              <a:t>umano</a:t>
+            </a:r>
+            <a:r>
+              <a:rPr sz="1900" b="0">
+                <a:solidFill>
+                  <a:srgbClr val="0B1F3A"/>
+                </a:solidFill>
+              </a:rPr>
+              <a:t>: se approva tutto, la promozione a HITL serve a poco.</a:t>
+            </a:r>
+          </a:p>
+          <a:p>
+            <a:pPr>
+              <a:spcAft>
+                <a:spcPts val="800"/>
+              </a:spcAft>
+            </a:pPr>
+            <a:r>
+              <a:rPr sz="1900" b="1">
+                <a:solidFill>
+                  <a:srgbClr val="0F6CBD"/>
+                </a:solidFill>
+              </a:rPr>
+              <a:t>•  </a:t>
+            </a:r>
+            <a:r>
+              <a:rPr sz="1900" b="1">
+                <a:solidFill>
+                  <a:srgbClr val="0B1F3A"/>
+                </a:solidFill>
+              </a:rPr>
+              <a:t>Confidenza = max(p, 1−p)</a:t>
+            </a:r>
+            <a:r>
+              <a:rPr sz="1900" b="0">
+                <a:solidFill>
+                  <a:srgbClr val="0B1F3A"/>
+                </a:solidFill>
+              </a:rPr>
+              <a:t>: non aggiunge informazione rispetto alla probabilità.</a:t>
+            </a:r>
+          </a:p>
+          <a:p>
+            <a:pPr>
+              <a:spcAft>
+                <a:spcPts val="800"/>
+              </a:spcAft>
+            </a:pPr>
+            <a:r>
+              <a:rPr sz="1900" b="1">
+                <a:solidFill>
+                  <a:srgbClr val="0F6CBD"/>
+                </a:solidFill>
+              </a:rPr>
+              <a:t>•  </a:t>
+            </a:r>
+            <a:r>
+              <a:rPr sz="1900" b="1">
+                <a:solidFill>
+                  <a:srgbClr val="0B1F3A"/>
+                </a:solidFill>
+              </a:rPr>
+              <a:t>Drift simulato</a:t>
+            </a:r>
+            <a:r>
+              <a:rPr sz="1900" b="0">
+                <a:solidFill>
+                  <a:srgbClr val="0B1F3A"/>
+                </a:solidFill>
+              </a:rPr>
+              <a:t>, revisori non differenziati per competenza, </a:t>
+            </a:r>
+            <a:r>
+              <a:rPr sz="1900" b="1">
+                <a:solidFill>
+                  <a:srgbClr val="0B1F3A"/>
+                </a:solidFill>
+              </a:rPr>
+              <a:t>2 guasti</a:t>
+            </a:r>
+            <a:r>
+              <a:rPr sz="1900" b="0">
+                <a:solidFill>
+                  <a:srgbClr val="0B1F3A"/>
+                </a:solidFill>
+              </a:rPr>
+              <a:t> nelle Isole ancora automatici.</a:t>
+            </a:r>
+          </a:p>
+          <a:p>
+            <a:pPr>
+              <a:spcAft>
+                <a:spcPts val="800"/>
+              </a:spcAft>
+            </a:pPr>
+            <a:r>
+              <a:rPr sz="1900" b="1">
+                <a:solidFill>
+                  <a:srgbClr val="0F6CBD"/>
+                </a:solidFill>
+              </a:rPr>
+              <a:t>•  </a:t>
+            </a:r>
+            <a:r>
+              <a:rPr sz="1900" b="0">
+                <a:solidFill>
+                  <a:srgbClr val="0B1F3A"/>
+                </a:solidFill>
+              </a:rPr>
+              <a:t>Catena di hash </a:t>
+            </a:r>
+            <a:r>
+              <a:rPr sz="1900" b="1">
+                <a:solidFill>
+                  <a:srgbClr val="0B1F3A"/>
+                </a:solidFill>
+              </a:rPr>
+              <a:t>senza chiave</a:t>
+            </a:r>
+            <a:r>
+              <a:rPr sz="1900" b="0">
+                <a:solidFill>
+                  <a:srgbClr val="0B1F3A"/>
+                </a:solidFill>
+              </a:rPr>
+              <a:t>: una riscrittura completa del log non verrebbe rilevata.</a:t>
+            </a:r>
+          </a:p>
+        </p:txBody>
+      </p:sp>
+    </p:spTree>
+  </p:cSld>
+  <p:clrMapOvr>
+    <a:masterClrMapping/>
+  </p:clrMapOvr>
+</p:sld>
+</file>
+
+<file path=ppt/slides/slide15.xml><?xml version="1.0" encoding="utf-8"?>
+<p:sld xmlns:a="http://schemas.openxmlformats.org/drawingml/2006/main" xmlns:p="http://schemas.openxmlformats.org/presentationml/2006/main" xmlns:r="http://schemas.openxmlformats.org/officeDocument/2006/relationships">
+  <p:cSld>
+    <p:spTree>
+      <p:nvGrpSpPr>
+        <p:cNvPr id="1" name=""/>
+        <p:cNvGrpSpPr/>
+        <p:nvPr/>
+      </p:nvGrpSpPr>
+      <p:grpSpPr/>
+      <p:sp>
+        <p:nvSpPr>
+          <p:cNvPr id="2" name="Rectangle 1"/>
+          <p:cNvSpPr/>
+          <p:nvPr/>
+        </p:nvSpPr>
+        <p:spPr>
+          <a:xfrm>
+            <a:off x="0" y="0"/>
+            <a:ext cx="12191695" cy="914400"/>
+          </a:xfrm>
+          <a:prstGeom prst="rect">
+            <a:avLst/>
+          </a:prstGeom>
+          <a:solidFill>
+            <a:srgbClr val="0B1F3A"/>
+          </a:solidFill>
+          <a:ln>
+            <a:noFill/>
+          </a:ln>
+        </p:spPr>
+        <p:style>
+          <a:lnRef idx="1">
+            <a:schemeClr val="accent1"/>
+          </a:lnRef>
+          <a:fillRef idx="3">
+            <a:schemeClr val="accent1"/>
+          </a:fillRef>
+          <a:effectRef idx="2">
+            <a:schemeClr val="accent1"/>
+          </a:effectRef>
+          <a:fontRef idx="minor">
+            <a:schemeClr val="lt1"/>
+          </a:fontRef>
+        </p:style>
+        <p:txBody>
+          <a:bodyPr rtlCol="0" anchor="ctr"/>
+          <a:lstStyle/>
+          <a:p>
+            <a:pPr algn="ctr"/>
+          </a:p>
+        </p:txBody>
+      </p:sp>
+      <p:sp>
+        <p:nvSpPr>
+          <p:cNvPr id="3" name="TextBox 2"/>
+          <p:cNvSpPr txBox="1"/>
+          <p:nvPr/>
+        </p:nvSpPr>
+        <p:spPr>
+          <a:xfrm>
+            <a:off x="457200" y="164592"/>
+            <a:ext cx="9601200" cy="640080"/>
+          </a:xfrm>
+          <a:prstGeom prst="rect">
+            <a:avLst/>
+          </a:prstGeom>
+          <a:noFill/>
+        </p:spPr>
+        <p:txBody>
+          <a:bodyPr wrap="square">
+            <a:spAutoFit/>
+          </a:bodyPr>
+          <a:lstStyle/>
+          <a:p>
+            <a:pPr>
+              <a:spcAft>
+                <a:spcPts val="800"/>
+              </a:spcAft>
+            </a:pPr>
+            <a:r>
+              <a:rPr sz="2800" b="1">
+                <a:solidFill>
+                  <a:srgbClr val="FFFFFF"/>
+                </a:solidFill>
+              </a:rPr>
+              <a:t>AI Act: ruoli e domande aperte</a:t>
+            </a:r>
+          </a:p>
+        </p:txBody>
+      </p:sp>
+      <p:sp>
+        <p:nvSpPr>
+          <p:cNvPr id="4" name="TextBox 3"/>
+          <p:cNvSpPr txBox="1"/>
+          <p:nvPr/>
+        </p:nvSpPr>
+        <p:spPr>
+          <a:xfrm>
+            <a:off x="9418320" y="274320"/>
+            <a:ext cx="2560320" cy="457200"/>
+          </a:xfrm>
+          <a:prstGeom prst="rect">
+            <a:avLst/>
+          </a:prstGeom>
+          <a:noFill/>
+        </p:spPr>
+        <p:txBody>
+          <a:bodyPr wrap="square">
+            <a:spAutoFit/>
+          </a:bodyPr>
+          <a:lstStyle/>
+          <a:p>
+            <a:pPr algn="r">
+              <a:spcAft>
+                <a:spcPts val="800"/>
+              </a:spcAft>
+            </a:pPr>
+            <a:r>
+              <a:rPr sz="1300" b="0">
+                <a:solidFill>
+                  <a:srgbClr val="C9D8EA"/>
+                </a:solidFill>
+              </a:rPr>
+              <a:t>Discussione</a:t>
+            </a:r>
+          </a:p>
+        </p:txBody>
+      </p:sp>
+      <p:sp>
+        <p:nvSpPr>
+          <p:cNvPr id="5" name="Rectangle 4"/>
+          <p:cNvSpPr/>
+          <p:nvPr/>
+        </p:nvSpPr>
+        <p:spPr>
+          <a:xfrm>
+            <a:off x="0" y="914400"/>
+            <a:ext cx="12191695" cy="54864"/>
+          </a:xfrm>
+          <a:prstGeom prst="rect">
+            <a:avLst/>
+          </a:prstGeom>
+          <a:solidFill>
+            <a:srgbClr val="0F6CBD"/>
+          </a:solidFill>
+          <a:ln>
+            <a:noFill/>
+          </a:ln>
+        </p:spPr>
+        <p:style>
+          <a:lnRef idx="1">
+            <a:schemeClr val="accent1"/>
+          </a:lnRef>
+          <a:fillRef idx="3">
+            <a:schemeClr val="accent1"/>
+          </a:fillRef>
+          <a:effectRef idx="2">
+            <a:schemeClr val="accent1"/>
+          </a:effectRef>
+          <a:fontRef idx="minor">
+            <a:schemeClr val="lt1"/>
+          </a:fontRef>
+        </p:style>
+        <p:txBody>
+          <a:bodyPr rtlCol="0" anchor="ctr"/>
+          <a:lstStyle/>
+          <a:p>
+            <a:pPr algn="ctr"/>
+          </a:p>
+        </p:txBody>
+      </p:sp>
+      <p:sp>
+        <p:nvSpPr>
+          <p:cNvPr id="6" name="TextBox 5"/>
+          <p:cNvSpPr txBox="1"/>
+          <p:nvPr/>
+        </p:nvSpPr>
+        <p:spPr>
+          <a:xfrm>
+            <a:off x="548640" y="1280160"/>
             <a:ext cx="5394960" cy="5303520"/>
           </a:xfrm>
           <a:prstGeom prst="rect">
@@ -6890,7 +7377,7 @@
 </p:sld>
 </file>
 
-<file path=ppt/slides/slide15.xml><?xml version="1.0" encoding="utf-8"?>
+<file path=ppt/slides/slide16.xml><?xml version="1.0" encoding="utf-8"?>
 <p:sld xmlns:a="http://schemas.openxmlformats.org/drawingml/2006/main" xmlns:p="http://schemas.openxmlformats.org/presentationml/2006/main" xmlns:r="http://schemas.openxmlformats.org/officeDocument/2006/relationships">
   <p:cSld>
     <p:spTree>

--- a/consegna/EnerGuard_Presentazione.pptx
+++ b/consegna/EnerGuard_Presentazione.pptx
@@ -23,6 +23,8 @@
     <p:sldId id="271" r:id="rId23"/>
     <p:sldId id="272" r:id="rId24"/>
     <p:sldId id="273" r:id="rId25"/>
+    <p:sldId id="274" r:id="rId26"/>
+    <p:sldId id="275" r:id="rId27"/>
   </p:sldIdLst>
   <p:sldSz cx="12191695" cy="6858000" type="screen4x3"/>
   <p:notesSz cx="6858000" cy="9144000"/>
@@ -869,7 +871,7 @@
           <a:lstStyle/>
           <a:p>
             <a:r>
-              <a:t>Il monitoraggio è continuo. Il sistema misura anche la propria supervisione: questi numeri vengono dalla dashboard dopo 17 decisioni reali.</a:t>
+              <a:t>Una dashboard senza asse temporale è una fotografia, non un monitoraggio.</a:t>
             </a:r>
           </a:p>
         </p:txBody>
@@ -939,7 +941,7 @@
           <a:lstStyle/>
           <a:p>
             <a:r>
-              <a:t>Un sistema di oversight che non misura la propria supervisione non è supervisionabile. Ma misurare i revisori è anche controllo dei lavoratori.</a:t>
+              <a:t>Non volevamo mostrare una dashboard vuota: abbiamo simulato una mezz'ora di control room con tre profili diversi, per vedere se il sistema si accorge dei comportamenti a rischio.</a:t>
             </a:r>
           </a:p>
         </p:txBody>
@@ -1009,7 +1011,7 @@
           <a:lstStyle/>
           <a:p>
             <a:r>
-              <a:t>Un limite dichiarato vale più di uno scoperto. Elenco completo nell'allegato della relazione d'impatto.</a:t>
+              <a:t>Dopo la simulazione abbiamo confrontato ogni decisione con l'esito registrato nei dati. Non lo sapevamo mentre decidevamo.</a:t>
             </a:r>
           </a:p>
         </p:txBody>
@@ -1079,7 +1081,7 @@
           <a:lstStyle/>
           <a:p>
             <a:r>
-              <a:t>Domanda finale della guida: chi è provider e chi deployer. Poi alcuni spunti che non hanno una risposta unica.</a:t>
+              <a:t>Un sistema di oversight che non misura la propria supervisione non è supervisionabile. Ma misurare i revisori è anche controllo dei lavoratori.</a:t>
             </a:r>
           </a:p>
         </p:txBody>
@@ -1149,7 +1151,77 @@
           <a:lstStyle/>
           <a:p>
             <a:r>
-              <a:t>Abbiamo già provato i sei test della giuria, dieci verifiche su dieci. Siamo pronti per le vostre domande.</a:t>
+              <a:t>Un limite dichiarato vale più di uno scoperto. Elenco completo nell'allegato della relazione d'impatto.</a:t>
+            </a:r>
+          </a:p>
+        </p:txBody>
+      </p:sp>
+      <p:sp>
+        <p:nvSpPr>
+          <p:cNvPr id="4" name="Slide Number Placeholder 3"/>
+          <p:cNvSpPr>
+            <a:spLocks noGrp="1"/>
+          </p:cNvSpPr>
+          <p:nvPr>
+            <p:ph type="sldNum" idx="5" sz="quarter"/>
+          </p:nvPr>
+        </p:nvSpPr>
+        <p:spPr/>
+      </p:sp>
+    </p:spTree>
+  </p:cSld>
+  <p:clrMapOvr>
+    <a:masterClrMapping/>
+  </p:clrMapOvr>
+</p:notes>
+</file>
+
+<file path=ppt/notesSlides/notesSlide19.xml><?xml version="1.0" encoding="utf-8"?>
+<p:notes xmlns:a="http://schemas.openxmlformats.org/drawingml/2006/main" xmlns:p="http://schemas.openxmlformats.org/presentationml/2006/main" xmlns:r="http://schemas.openxmlformats.org/officeDocument/2006/relationships">
+  <p:cSld>
+    <p:spTree>
+      <p:nvGrpSpPr>
+        <p:cNvPr id="1" name=""/>
+        <p:cNvGrpSpPr/>
+        <p:nvPr/>
+      </p:nvGrpSpPr>
+      <p:grpSpPr>
+        <a:xfrm>
+          <a:off x="0" y="0"/>
+          <a:ext cx="0" cy="0"/>
+          <a:chOff x="0" y="0"/>
+          <a:chExt cx="0" cy="0"/>
+        </a:xfrm>
+      </p:grpSpPr>
+      <p:sp>
+        <p:nvSpPr>
+          <p:cNvPr id="2" name="Slide Image Placeholder 1"/>
+          <p:cNvSpPr>
+            <a:spLocks noGrp="1"/>
+          </p:cNvSpPr>
+          <p:nvPr>
+            <p:ph type="sldImg" idx="2"/>
+          </p:nvPr>
+        </p:nvSpPr>
+        <p:spPr/>
+      </p:sp>
+      <p:sp>
+        <p:nvSpPr>
+          <p:cNvPr id="3" name="Notes Placeholder 2"/>
+          <p:cNvSpPr>
+            <a:spLocks noGrp="1"/>
+          </p:cNvSpPr>
+          <p:nvPr>
+            <p:ph type="body" idx="3" sz="quarter"/>
+          </p:nvPr>
+        </p:nvSpPr>
+        <p:spPr/>
+        <p:txBody>
+          <a:bodyPr/>
+          <a:lstStyle/>
+          <a:p>
+            <a:r>
+              <a:t>Domanda finale della guida: chi è provider e chi deployer. Poi alcuni spunti che non hanno una risposta unica.</a:t>
             </a:r>
           </a:p>
         </p:txBody>
@@ -1220,6 +1292,76 @@
           <a:p>
             <a:r>
               <a:t>Un guasto mancato su una cabina che alimenta un ospedale non si recupera; un'ispezione inutile costa qualche ora. I quattro verbi sono quelli dell'Art. 14: ogni parte della dashboard risponde ad almeno uno.</a:t>
+            </a:r>
+          </a:p>
+        </p:txBody>
+      </p:sp>
+      <p:sp>
+        <p:nvSpPr>
+          <p:cNvPr id="4" name="Slide Number Placeholder 3"/>
+          <p:cNvSpPr>
+            <a:spLocks noGrp="1"/>
+          </p:cNvSpPr>
+          <p:nvPr>
+            <p:ph type="sldNum" idx="5" sz="quarter"/>
+          </p:nvPr>
+        </p:nvSpPr>
+        <p:spPr/>
+      </p:sp>
+    </p:spTree>
+  </p:cSld>
+  <p:clrMapOvr>
+    <a:masterClrMapping/>
+  </p:clrMapOvr>
+</p:notes>
+</file>
+
+<file path=ppt/notesSlides/notesSlide20.xml><?xml version="1.0" encoding="utf-8"?>
+<p:notes xmlns:a="http://schemas.openxmlformats.org/drawingml/2006/main" xmlns:p="http://schemas.openxmlformats.org/presentationml/2006/main" xmlns:r="http://schemas.openxmlformats.org/officeDocument/2006/relationships">
+  <p:cSld>
+    <p:spTree>
+      <p:nvGrpSpPr>
+        <p:cNvPr id="1" name=""/>
+        <p:cNvGrpSpPr/>
+        <p:nvPr/>
+      </p:nvGrpSpPr>
+      <p:grpSpPr>
+        <a:xfrm>
+          <a:off x="0" y="0"/>
+          <a:ext cx="0" cy="0"/>
+          <a:chOff x="0" y="0"/>
+          <a:chExt cx="0" cy="0"/>
+        </a:xfrm>
+      </p:grpSpPr>
+      <p:sp>
+        <p:nvSpPr>
+          <p:cNvPr id="2" name="Slide Image Placeholder 1"/>
+          <p:cNvSpPr>
+            <a:spLocks noGrp="1"/>
+          </p:cNvSpPr>
+          <p:nvPr>
+            <p:ph type="sldImg" idx="2"/>
+          </p:nvPr>
+        </p:nvSpPr>
+        <p:spPr/>
+      </p:sp>
+      <p:sp>
+        <p:nvSpPr>
+          <p:cNvPr id="3" name="Notes Placeholder 2"/>
+          <p:cNvSpPr>
+            <a:spLocks noGrp="1"/>
+          </p:cNvSpPr>
+          <p:nvPr>
+            <p:ph type="body" idx="3" sz="quarter"/>
+          </p:nvPr>
+        </p:nvSpPr>
+        <p:spPr/>
+        <p:txBody>
+          <a:bodyPr/>
+          <a:lstStyle/>
+          <a:p>
+            <a:r>
+              <a:t>Abbiamo già provato i sei test della giuria, dieci verifiche su dieci. Siamo pronti per le vostre domande.</a:t>
             </a:r>
           </a:p>
         </p:txBody>
@@ -6705,7 +6847,7 @@
                   <a:srgbClr val="FFFFFF"/>
                 </a:solidFill>
               </a:rPr>
-              <a:t>Segnali, non prove</a:t>
+              <a:t>Quanto fidarci dei numeri per zona</a:t>
             </a:r>
           </a:p>
         </p:txBody>
@@ -6843,7 +6985,7 @@
               </a:spcAft>
             </a:pPr>
             <a:r>
-              <a:rPr sz="1600" b="1">
+              <a:rPr sz="1500" b="1">
                 <a:solidFill>
                   <a:srgbClr val="0F6CBD"/>
                 </a:solidFill>
@@ -6851,28 +6993,44 @@
               <a:t>•  </a:t>
             </a:r>
             <a:r>
-              <a:rPr sz="1600" b="0">
-                <a:solidFill>
-                  <a:srgbClr val="0B1F3A"/>
-                </a:solidFill>
-              </a:rPr>
-              <a:t>Il pallino dice </a:t>
-            </a:r>
-            <a:r>
-              <a:rPr sz="1600" b="1">
-                <a:solidFill>
-                  <a:srgbClr val="0B1F3A"/>
-                </a:solidFill>
-              </a:rPr>
-              <a:t>quanti guasti su 10</a:t>
-            </a:r>
-            <a:r>
-              <a:rPr sz="1600" b="0">
-                <a:solidFill>
-                  <a:srgbClr val="0B1F3A"/>
-                </a:solidFill>
-              </a:rPr>
-              <a:t> il sistema vede in ogni zona: Nord 7, Isole più di 9.</a:t>
+              <a:rPr sz="1500" b="0">
+                <a:solidFill>
+                  <a:srgbClr val="0B1F3A"/>
+                </a:solidFill>
+              </a:rPr>
+              <a:t>Contiamo i guasti veri di ogni zona e quanti il sistema ne aveva segnalati: </a:t>
+            </a:r>
+            <a:r>
+              <a:rPr sz="1500" b="1">
+                <a:solidFill>
+                  <a:srgbClr val="0B1F3A"/>
+                </a:solidFill>
+              </a:rPr>
+              <a:t>Nord 20 su 28</a:t>
+            </a:r>
+            <a:r>
+              <a:rPr sz="1500" b="0">
+                <a:solidFill>
+                  <a:srgbClr val="0B1F3A"/>
+                </a:solidFill>
+              </a:rPr>
+              <a:t>, Centro 18 su 24, Sud 30 su 34, </a:t>
+            </a:r>
+            <a:r>
+              <a:rPr sz="1500" b="1">
+                <a:solidFill>
+                  <a:srgbClr val="0B1F3A"/>
+                </a:solidFill>
+              </a:rPr>
+              <a:t>Isole 40 su 43</a:t>
+            </a:r>
+            <a:r>
+              <a:rPr sz="1500" b="0">
+                <a:solidFill>
+                  <a:srgbClr val="0B1F3A"/>
+                </a:solidFill>
+              </a:rPr>
+              <a:t>.</a:t>
             </a:r>
           </a:p>
           <a:p>
@@ -6882,7 +7040,7 @@
               </a:spcAft>
             </a:pPr>
             <a:r>
-              <a:rPr sz="1600" b="1">
+              <a:rPr sz="1500" b="1">
                 <a:solidFill>
                   <a:srgbClr val="0F6CBD"/>
                 </a:solidFill>
@@ -6890,28 +7048,28 @@
               <a:t>•  </a:t>
             </a:r>
             <a:r>
-              <a:rPr sz="1600" b="0">
-                <a:solidFill>
-                  <a:srgbClr val="0B1F3A"/>
-                </a:solidFill>
-              </a:rPr>
-              <a:t>Ma per ogni zona abbiamo solo </a:t>
-            </a:r>
-            <a:r>
-              <a:rPr sz="1600" b="1">
-                <a:solidFill>
-                  <a:srgbClr val="0B1F3A"/>
-                </a:solidFill>
-              </a:rPr>
-              <a:t>24-43 guasti veri</a:t>
-            </a:r>
-            <a:r>
-              <a:rPr sz="1600" b="0">
-                <a:solidFill>
-                  <a:srgbClr val="0B1F3A"/>
-                </a:solidFill>
-              </a:rPr>
-              <a:t>: pochi. Con pochi casi i numeri "ballano", come 10 lanci di moneta che danno 7 teste senza che la moneta sia truccata.</a:t>
+              <a:rPr sz="1500" b="0">
+                <a:solidFill>
+                  <a:srgbClr val="0B1F3A"/>
+                </a:solidFill>
+              </a:rPr>
+              <a:t>Sembra che il Nord sia servito molto peggio. Ma sono </a:t>
+            </a:r>
+            <a:r>
+              <a:rPr sz="1500" b="1">
+                <a:solidFill>
+                  <a:srgbClr val="0B1F3A"/>
+                </a:solidFill>
+              </a:rPr>
+              <a:t>pochi casi</a:t>
+            </a:r>
+            <a:r>
+              <a:rPr sz="1500" b="0">
+                <a:solidFill>
+                  <a:srgbClr val="0B1F3A"/>
+                </a:solidFill>
+              </a:rPr>
+              <a:t>: bastano 3-4 guasti in più o in meno per cambiare il voto di un punto intero.</a:t>
             </a:r>
           </a:p>
           <a:p>
@@ -6921,7 +7079,7 @@
               </a:spcAft>
             </a:pPr>
             <a:r>
-              <a:rPr sz="1600" b="1">
+              <a:rPr sz="1500" b="1">
                 <a:solidFill>
                   <a:srgbClr val="0F6CBD"/>
                 </a:solidFill>
@@ -6929,44 +7087,51 @@
               <a:t>•  </a:t>
             </a:r>
             <a:r>
-              <a:rPr sz="1600" b="0">
-                <a:solidFill>
-                  <a:srgbClr val="0B1F3A"/>
-                </a:solidFill>
-              </a:rPr>
-              <a:t>Le barre mostrano quanto possono ballare: </a:t>
-            </a:r>
-            <a:r>
-              <a:rPr sz="1600" b="1">
-                <a:solidFill>
-                  <a:srgbClr val="0B1F3A"/>
-                </a:solidFill>
-              </a:rPr>
-              <a:t>si sovrappongono</a:t>
-            </a:r>
-            <a:r>
-              <a:rPr sz="1600" b="0">
-                <a:solidFill>
-                  <a:srgbClr val="0B1F3A"/>
-                </a:solidFill>
-              </a:rPr>
-              <a:t>. Non possiamo dire che una zona sia trattata peggio; possiamo dire che </a:t>
-            </a:r>
-            <a:r>
-              <a:rPr sz="1600" b="1">
-                <a:solidFill>
-                  <a:srgbClr val="0B1F3A"/>
-                </a:solidFill>
-              </a:rPr>
-              <a:t>va tenuta d'occhio</a:t>
-            </a:r>
-            <a:r>
-              <a:rPr sz="1600" b="0">
-                <a:solidFill>
-                  <a:srgbClr val="0B1F3A"/>
-                </a:solidFill>
-              </a:rPr>
-              <a:t>.</a:t>
+              <a:rPr sz="1500" b="0">
+                <a:solidFill>
+                  <a:srgbClr val="0B1F3A"/>
+                </a:solidFill>
+              </a:rPr>
+              <a:t>È come lanciare una moneta 10 volte e ottenere 7 teste: non basta per dire che è truccata.</a:t>
+            </a:r>
+          </a:p>
+          <a:p>
+            <a:pPr>
+              <a:spcAft>
+                <a:spcPts val="800"/>
+              </a:spcAft>
+            </a:pPr>
+            <a:r>
+              <a:rPr sz="1500" b="1">
+                <a:solidFill>
+                  <a:srgbClr val="0F6CBD"/>
+                </a:solidFill>
+              </a:rPr>
+              <a:t>•  </a:t>
+            </a:r>
+            <a:r>
+              <a:rPr sz="1500" b="0">
+                <a:solidFill>
+                  <a:srgbClr val="0B1F3A"/>
+                </a:solidFill>
+              </a:rPr>
+              <a:t>Le barre mostrano di quanto il voto potrebbe cambiare. </a:t>
+            </a:r>
+            <a:r>
+              <a:rPr sz="1500" b="1">
+                <a:solidFill>
+                  <a:srgbClr val="0B1F3A"/>
+                </a:solidFill>
+              </a:rPr>
+              <a:t>Si sovrappongono</a:t>
+            </a:r>
+            <a:r>
+              <a:rPr sz="1500" b="0">
+                <a:solidFill>
+                  <a:srgbClr val="0B1F3A"/>
+                </a:solidFill>
+              </a:rPr>
+              <a:t>: è un campanello d'allarme, non una prova.</a:t>
             </a:r>
           </a:p>
         </p:txBody>
@@ -7090,7 +7255,7 @@
                   <a:srgbClr val="0B1F3A"/>
                 </a:solidFill>
               </a:rPr>
-              <a:t>Guardare gli incroci</a:t>
+              <a:t>Cosa ne facciamo</a:t>
             </a:r>
           </a:p>
           <a:p>
@@ -7105,7 +7270,7 @@
                   <a:srgbClr val="0B1F3A"/>
                 </a:solidFill>
               </a:rPr>
-              <a:t>Zona per zona e tipo di utenza per tipo, tutto sembra accettabile. Incrociando le due cose emerge il gruppo servito peggio: le utenze normali di Nord e Centro, dove il sistema vede circa 2 guasti su 3.</a:t>
+              <a:t>Non cambiamo il modello per un segnale incerto: mettiamo una persona in più a controllare. Incrociando zona e tipo di utenza, il gruppo più scoperto sono le utenze normali di Nord e Centro (il sistema vede circa 2 guasti su 3).</a:t>
             </a:r>
           </a:p>
         </p:txBody>
@@ -7306,8 +7471,8 @@
         </p:blipFill>
         <p:spPr>
           <a:xfrm>
-            <a:off x="550683" y="1188720"/>
-            <a:ext cx="5299433" cy="3566160"/>
+            <a:off x="365760" y="1188720"/>
+            <a:ext cx="6400800" cy="4307305"/>
           </a:xfrm>
           <a:prstGeom prst="rect">
             <a:avLst/>
@@ -7327,8 +7492,8 @@
         </p:nvSpPr>
         <p:spPr>
           <a:xfrm>
-            <a:off x="457200" y="4892040"/>
-            <a:ext cx="5577840" cy="1828800"/>
+            <a:off x="7040880" y="1280160"/>
+            <a:ext cx="4846320" cy="5303520"/>
           </a:xfrm>
           <a:prstGeom prst="rect">
             <a:avLst/>
@@ -7347,7 +7512,7 @@
               </a:spcAft>
             </a:pPr>
             <a:r>
-              <a:rPr sz="1400" b="1">
+              <a:rPr sz="1600" b="1">
                 <a:solidFill>
                   <a:srgbClr val="0F6CBD"/>
                 </a:solidFill>
@@ -7355,12 +7520,12 @@
               <a:t>•  </a:t>
             </a:r>
             <a:r>
-              <a:rPr sz="1400" b="0">
-                <a:solidFill>
-                  <a:srgbClr val="0B1F3A"/>
-                </a:solidFill>
-              </a:rPr>
-              <a:t>Ogni settimana confronta le sue previsioni con quello che succede.</a:t>
+              <a:rPr sz="1600" b="0">
+                <a:solidFill>
+                  <a:srgbClr val="0B1F3A"/>
+                </a:solidFill>
+              </a:rPr>
+              <a:t>Ogni settimana il sistema confronta le sue previsioni con quello che è successo davvero: quante ne ha azzeccate, quanti guasti ha visto, quanto era sicuro.</a:t>
             </a:r>
           </a:p>
           <a:p>
@@ -7370,7 +7535,7 @@
               </a:spcAft>
             </a:pPr>
             <a:r>
-              <a:rPr sz="1400" b="1">
+              <a:rPr sz="1600" b="1">
                 <a:solidFill>
                   <a:srgbClr val="0F6CBD"/>
                 </a:solidFill>
@@ -7378,15 +7543,15 @@
               <a:t>•  </a:t>
             </a:r>
             <a:r>
-              <a:rPr sz="1400" b="0">
-                <a:solidFill>
-                  <a:srgbClr val="0B1F3A"/>
-                </a:solidFill>
-              </a:rPr>
-              <a:t>Se peggiora </a:t>
-            </a:r>
-            <a:r>
-              <a:rPr sz="1400" b="1">
+              <a:rPr sz="1600" b="0">
+                <a:solidFill>
+                  <a:srgbClr val="0B1F3A"/>
+                </a:solidFill>
+              </a:rPr>
+              <a:t>Le tre linee: quante previsioni azzecca, quanti guasti vede, quanto è sicuro. La regola: se l'accuratezza scende di oltre 10 punti sotto il normale per </a:t>
+            </a:r>
+            <a:r>
+              <a:rPr sz="1600" b="1">
                 <a:solidFill>
                   <a:srgbClr val="0B1F3A"/>
                 </a:solidFill>
@@ -7394,12 +7559,12 @@
               <a:t>due settimane di fila</a:t>
             </a:r>
             <a:r>
-              <a:rPr sz="1400" b="0">
-                <a:solidFill>
-                  <a:srgbClr val="0B1F3A"/>
-                </a:solidFill>
-              </a:rPr>
-              <a:t>, smette di agire da solo e passa tutto alle persone.</a:t>
+              <a:rPr sz="1600" b="0">
+                <a:solidFill>
+                  <a:srgbClr val="0B1F3A"/>
+                </a:solidFill>
+              </a:rPr>
+              <a:t>, il sistema smette di agire da solo e passa tutto alle persone.</a:t>
             </a:r>
           </a:p>
           <a:p>
@@ -7409,7 +7574,7 @@
               </a:spcAft>
             </a:pPr>
             <a:r>
-              <a:rPr sz="1400" b="1">
+              <a:rPr sz="1600" b="1">
                 <a:solidFill>
                   <a:srgbClr val="0F6CBD"/>
                 </a:solidFill>
@@ -7417,15 +7582,38 @@
               <a:t>•  </a:t>
             </a:r>
             <a:r>
-              <a:rPr sz="1400" b="0">
-                <a:solidFill>
-                  <a:srgbClr val="0B1F3A"/>
-                </a:solidFill>
-              </a:rPr>
-              <a:t>Le settimane sono </a:t>
-            </a:r>
-            <a:r>
-              <a:rPr sz="1400" b="1">
+              <a:rPr sz="1600" b="0">
+                <a:solidFill>
+                  <a:srgbClr val="0B1F3A"/>
+                </a:solidFill>
+              </a:rPr>
+              <a:t>Oggi non è mai successo: il riquadro verde lo conferma.</a:t>
+            </a:r>
+          </a:p>
+          <a:p>
+            <a:pPr>
+              <a:spcAft>
+                <a:spcPts val="800"/>
+              </a:spcAft>
+            </a:pPr>
+            <a:r>
+              <a:rPr sz="1600" b="1">
+                <a:solidFill>
+                  <a:srgbClr val="0F6CBD"/>
+                </a:solidFill>
+              </a:rPr>
+              <a:t>•  </a:t>
+            </a:r>
+            <a:r>
+              <a:rPr sz="1600" b="0">
+                <a:solidFill>
+                  <a:srgbClr val="0B1F3A"/>
+                </a:solidFill>
+              </a:rPr>
+              <a:t>Limite: le settimane sono </a:t>
+            </a:r>
+            <a:r>
+              <a:rPr sz="1600" b="1">
                 <a:solidFill>
                   <a:srgbClr val="0B1F3A"/>
                 </a:solidFill>
@@ -7433,311 +7621,12 @@
               <a:t>simulate</a:t>
             </a:r>
             <a:r>
-              <a:rPr sz="1400" b="0">
-                <a:solidFill>
-                  <a:srgbClr val="0B1F3A"/>
-                </a:solidFill>
-              </a:rPr>
-              <a:t>: i dati non hanno date.</a:t>
-            </a:r>
-          </a:p>
-        </p:txBody>
-      </p:sp>
-      <p:sp>
-        <p:nvSpPr>
-          <p:cNvPr id="8" name="Rectangle 7"/>
-          <p:cNvSpPr/>
-          <p:nvPr/>
-        </p:nvSpPr>
-        <p:spPr>
-          <a:xfrm>
-            <a:off x="6309360" y="1188720"/>
-            <a:ext cx="5577840" cy="5440680"/>
-          </a:xfrm>
-          <a:prstGeom prst="rect">
-            <a:avLst/>
-          </a:prstGeom>
-          <a:solidFill>
-            <a:srgbClr val="EEF3F9"/>
-          </a:solidFill>
-          <a:ln>
-            <a:noFill/>
-          </a:ln>
-        </p:spPr>
-        <p:style>
-          <a:lnRef idx="1">
-            <a:schemeClr val="accent1"/>
-          </a:lnRef>
-          <a:fillRef idx="3">
-            <a:schemeClr val="accent1"/>
-          </a:fillRef>
-          <a:effectRef idx="2">
-            <a:schemeClr val="accent1"/>
-          </a:effectRef>
-          <a:fontRef idx="minor">
-            <a:schemeClr val="lt1"/>
-          </a:fontRef>
-        </p:style>
-        <p:txBody>
-          <a:bodyPr rtlCol="0" anchor="ctr"/>
-          <a:lstStyle/>
-          <a:p>
-            <a:pPr algn="ctr"/>
-          </a:p>
-        </p:txBody>
-      </p:sp>
-      <p:sp>
-        <p:nvSpPr>
-          <p:cNvPr id="9" name="TextBox 8"/>
-          <p:cNvSpPr txBox="1"/>
-          <p:nvPr/>
-        </p:nvSpPr>
-        <p:spPr>
-          <a:xfrm>
-            <a:off x="6492240" y="1280160"/>
-            <a:ext cx="5303520" cy="5303520"/>
-          </a:xfrm>
-          <a:prstGeom prst="rect">
-            <a:avLst/>
-          </a:prstGeom>
-          <a:noFill/>
-        </p:spPr>
-        <p:txBody>
-          <a:bodyPr wrap="square">
-            <a:spAutoFit/>
-          </a:bodyPr>
-          <a:lstStyle/>
-          <a:p>
-            <a:pPr>
-              <a:spcAft>
-                <a:spcPts val="800"/>
-              </a:spcAft>
-            </a:pPr>
-            <a:r>
-              <a:rPr sz="1500" b="1">
-                <a:solidFill>
-                  <a:srgbClr val="0B1F3A"/>
-                </a:solidFill>
-              </a:rPr>
-              <a:t>La supervisione in numeri (17 decisioni reali, 3 operatori)</a:t>
-            </a:r>
-          </a:p>
-          <a:p>
-            <a:pPr>
-              <a:spcAft>
-                <a:spcPts val="800"/>
-              </a:spcAft>
-            </a:pPr>
-            <a:r>
-              <a:rPr sz="1500" b="1">
-                <a:solidFill>
-                  <a:srgbClr val="0F6CBD"/>
-                </a:solidFill>
-              </a:rPr>
-              <a:t>•  </a:t>
-            </a:r>
-            <a:r>
-              <a:rPr sz="1500" b="1">
-                <a:solidFill>
-                  <a:srgbClr val="0B1F3A"/>
-                </a:solidFill>
-              </a:rPr>
-              <a:t>0</a:t>
-            </a:r>
-            <a:r>
-              <a:rPr sz="1500" b="0">
-                <a:solidFill>
-                  <a:srgbClr val="0B1F3A"/>
-                </a:solidFill>
-              </a:rPr>
-              <a:t> decisioni importanti partite senza una persona.</a:t>
-            </a:r>
-          </a:p>
-          <a:p>
-            <a:pPr>
-              <a:spcAft>
-                <a:spcPts val="800"/>
-              </a:spcAft>
-            </a:pPr>
-            <a:r>
-              <a:rPr sz="1500" b="1">
-                <a:solidFill>
-                  <a:srgbClr val="0F6CBD"/>
-                </a:solidFill>
-              </a:rPr>
-              <a:t>•  </a:t>
-            </a:r>
-            <a:r>
-              <a:rPr sz="1500" b="0">
-                <a:solidFill>
-                  <a:srgbClr val="0B1F3A"/>
-                </a:solidFill>
-              </a:rPr>
-              <a:t>Le persone hanno corretto il sistema </a:t>
-            </a:r>
-            <a:r>
-              <a:rPr sz="1500" b="1">
-                <a:solidFill>
-                  <a:srgbClr val="0B1F3A"/>
-                </a:solidFill>
-              </a:rPr>
-              <a:t>35 volte su 100</a:t>
-            </a:r>
-            <a:r>
-              <a:rPr sz="1500" b="0">
-                <a:solidFill>
-                  <a:srgbClr val="0B1F3A"/>
-                </a:solidFill>
-              </a:rPr>
-              <a:t>: né troppo poco (approvano senza leggere) né troppo (sistema inutile).</a:t>
-            </a:r>
-          </a:p>
-          <a:p>
-            <a:pPr>
-              <a:spcAft>
-                <a:spcPts val="800"/>
-              </a:spcAft>
-            </a:pPr>
-            <a:r>
-              <a:rPr sz="1500" b="1">
-                <a:solidFill>
-                  <a:srgbClr val="0F6CBD"/>
-                </a:solidFill>
-              </a:rPr>
-              <a:t>•  </a:t>
-            </a:r>
-            <a:r>
-              <a:rPr sz="1500" b="0">
-                <a:solidFill>
-                  <a:srgbClr val="0B1F3A"/>
-                </a:solidFill>
-              </a:rPr>
-              <a:t>Solo </a:t>
-            </a:r>
-            <a:r>
-              <a:rPr sz="1500" b="1">
-                <a:solidFill>
-                  <a:srgbClr val="0B1F3A"/>
-                </a:solidFill>
-              </a:rPr>
-              <a:t>6 motivazioni su 100</a:t>
-            </a:r>
-            <a:r>
-              <a:rPr sz="1500" b="0">
-                <a:solidFill>
-                  <a:srgbClr val="0B1F3A"/>
-                </a:solidFill>
-              </a:rPr>
-              <a:t> troppo brevi.</a:t>
-            </a:r>
-          </a:p>
-          <a:p>
-            <a:pPr>
-              <a:spcAft>
-                <a:spcPts val="800"/>
-              </a:spcAft>
-            </a:pPr>
-            <a:r>
-              <a:rPr sz="1500" b="1">
-                <a:solidFill>
-                  <a:srgbClr val="0F6CBD"/>
-                </a:solidFill>
-              </a:rPr>
-              <a:t>•  </a:t>
-            </a:r>
-            <a:r>
-              <a:rPr sz="1500" b="0">
-                <a:solidFill>
-                  <a:srgbClr val="0B1F3A"/>
-                </a:solidFill>
-              </a:rPr>
-              <a:t>Tempo tipico (mediano) dall'arrivo alla decisione: </a:t>
-            </a:r>
-            <a:r>
-              <a:rPr sz="1500" b="1">
-                <a:solidFill>
-                  <a:srgbClr val="0B1F3A"/>
-                </a:solidFill>
-              </a:rPr>
-              <a:t>8 minuti</a:t>
-            </a:r>
-            <a:r>
-              <a:rPr sz="1500" b="0">
-                <a:solidFill>
-                  <a:srgbClr val="0B1F3A"/>
-                </a:solidFill>
-              </a:rPr>
-              <a:t> (include l'attesa in coda).</a:t>
-            </a:r>
-          </a:p>
-          <a:p>
-            <a:pPr>
-              <a:spcAft>
-                <a:spcPts val="800"/>
-              </a:spcAft>
-            </a:pPr>
-            <a:r>
-              <a:rPr sz="1500" b="1">
-                <a:solidFill>
-                  <a:srgbClr val="0F6CBD"/>
-                </a:solidFill>
-              </a:rPr>
-              <a:t>•  </a:t>
-            </a:r>
-            <a:r>
-              <a:rPr sz="1500" b="1">
-                <a:solidFill>
-                  <a:srgbClr val="0B1F3A"/>
-                </a:solidFill>
-              </a:rPr>
-              <a:t>96 spiegazioni su 100</a:t>
-            </a:r>
-            <a:r>
-              <a:rPr sz="1500" b="0">
-                <a:solidFill>
-                  <a:srgbClr val="0B1F3A"/>
-                </a:solidFill>
-              </a:rPr>
-              <a:t> dall'LLM; le altre scartate dai controlli e sostituite dal testo fisso.</a:t>
-            </a:r>
-          </a:p>
-          <a:p>
-            <a:pPr>
-              <a:spcAft>
-                <a:spcPts val="800"/>
-              </a:spcAft>
-            </a:pPr>
-            <a:r>
-              <a:rPr sz="1500" b="1">
-                <a:solidFill>
-                  <a:srgbClr val="0F6CBD"/>
-                </a:solidFill>
-              </a:rPr>
-              <a:t>•  </a:t>
-            </a:r>
-            <a:r>
-              <a:rPr sz="1500" b="0">
-                <a:solidFill>
-                  <a:srgbClr val="0B1F3A"/>
-                </a:solidFill>
-              </a:rPr>
-              <a:t>Il registro è </a:t>
-            </a:r>
-            <a:r>
-              <a:rPr sz="1500" b="1">
-                <a:solidFill>
-                  <a:srgbClr val="0B1F3A"/>
-                </a:solidFill>
-              </a:rPr>
-              <a:t>integro</a:t>
-            </a:r>
-            <a:r>
-              <a:rPr sz="1500" b="0">
-                <a:solidFill>
-                  <a:srgbClr val="0B1F3A"/>
-                </a:solidFill>
-              </a:rPr>
-              <a:t>.</a:t>
+              <a:rPr sz="1600" b="0">
+                <a:solidFill>
+                  <a:srgbClr val="0B1F3A"/>
+                </a:solidFill>
+              </a:rPr>
+              <a:t> dividendo i dati di prova in 12 gruppi, perché i dati non hanno date.</a:t>
             </a:r>
           </a:p>
         </p:txBody>
@@ -7836,7 +7725,7 @@
                   <a:srgbClr val="FFFFFF"/>
                 </a:solidFill>
               </a:rPr>
-              <a:t>Chi controlla i controllori</a:t>
+              <a:t>La prova: tre operatori simulati</a:t>
             </a:r>
           </a:p>
         </p:txBody>
@@ -7874,7 +7763,7 @@
                   <a:srgbClr val="C9D8EA"/>
                 </a:solidFill>
               </a:rPr>
-              <a:t>Art. 14(4)(b) · A2-A4 · C3</a:t>
+              <a:t>Simulazione · 9 ottobre</a:t>
             </a:r>
           </a:p>
         </p:txBody>
@@ -7922,74 +7811,16 @@
           </a:p>
         </p:txBody>
       </p:sp>
-      <p:pic>
-        <p:nvPicPr>
-          <p:cNvPr id="6" name="Picture 5" descr="kpi_3.png"/>
-          <p:cNvPicPr>
-            <a:picLocks noChangeAspect="1"/>
-          </p:cNvPicPr>
-          <p:nvPr/>
-        </p:nvPicPr>
-        <p:blipFill>
-          <a:blip r:embed="rId2"/>
-          <a:stretch>
-            <a:fillRect/>
-          </a:stretch>
-        </p:blipFill>
-        <p:spPr>
-          <a:xfrm>
-            <a:off x="365760" y="1234440"/>
-            <a:ext cx="5760720" cy="2014086"/>
-          </a:xfrm>
-          <a:prstGeom prst="rect">
-            <a:avLst/>
-          </a:prstGeom>
-          <a:ln w="12700">
-            <a:solidFill>
-              <a:srgbClr val="D0D5DD"/>
-            </a:solidFill>
-          </a:ln>
-        </p:spPr>
-      </p:pic>
-      <p:pic>
-        <p:nvPicPr>
-          <p:cNvPr id="7" name="Picture 6" descr="bias_5.png"/>
-          <p:cNvPicPr>
-            <a:picLocks noChangeAspect="1"/>
-          </p:cNvPicPr>
-          <p:nvPr/>
-        </p:nvPicPr>
-        <p:blipFill>
-          <a:blip r:embed="rId3"/>
-          <a:stretch>
-            <a:fillRect/>
-          </a:stretch>
-        </p:blipFill>
-        <p:spPr>
-          <a:xfrm>
-            <a:off x="373320" y="3840480"/>
-            <a:ext cx="5745600" cy="1828800"/>
-          </a:xfrm>
-          <a:prstGeom prst="rect">
-            <a:avLst/>
-          </a:prstGeom>
-          <a:ln w="12700">
-            <a:solidFill>
-              <a:srgbClr val="D0D5DD"/>
-            </a:solidFill>
-          </a:ln>
-        </p:spPr>
-      </p:pic>
-      <p:sp>
-        <p:nvSpPr>
-          <p:cNvPr id="8" name="TextBox 7"/>
+      <p:sp>
+        <p:nvSpPr>
+          <p:cNvPr id="6" name="TextBox 5"/>
           <p:cNvSpPr txBox="1"/>
           <p:nvPr/>
         </p:nvSpPr>
         <p:spPr>
           <a:xfrm>
-            <a:off x="6400800" y="1280160"/>
-            <a:ext cx="5394960" cy="5303520"/>
+            <a:off x="457200" y="1188720"/>
+            <a:ext cx="11247120" cy="914400"/>
           </a:xfrm>
           <a:prstGeom prst="rect">
             <a:avLst/>
@@ -8008,28 +7839,560 @@
               </a:spcAft>
             </a:pPr>
             <a:r>
+              <a:rPr sz="1600" b="0">
+                <a:solidFill>
+                  <a:srgbClr val="0B1F3A"/>
+                </a:solidFill>
+              </a:rPr>
+              <a:t>Per vedere se la supervisione regge, abbiamo usato la dashboard come in una control room: </a:t>
+            </a:r>
+            <a:r>
               <a:rPr sz="1600" b="1">
                 <a:solidFill>
+                  <a:srgbClr val="0B1F3A"/>
+                </a:solidFill>
+              </a:rPr>
+              <a:t>18 decisioni vere sulla coda, firmate da 3 operatori con stili diversi</a:t>
+            </a:r>
+            <a:r>
+              <a:rPr sz="1600" b="0">
+                <a:solidFill>
+                  <a:srgbClr val="0B1F3A"/>
+                </a:solidFill>
+              </a:rPr>
+              <a:t>. Abbiamo deciso leggendo </a:t>
+            </a:r>
+            <a:r>
+              <a:rPr sz="1600" b="1">
+                <a:solidFill>
+                  <a:srgbClr val="0B1F3A"/>
+                </a:solidFill>
+              </a:rPr>
+              <a:t>solo la card</a:t>
+            </a:r>
+            <a:r>
+              <a:rPr sz="1600" b="0">
+                <a:solidFill>
+                  <a:srgbClr val="0B1F3A"/>
+                </a:solidFill>
+              </a:rPr>
+              <a:t>, senza sapere come era andata davvero.</a:t>
+            </a:r>
+          </a:p>
+        </p:txBody>
+      </p:sp>
+      <p:sp>
+        <p:nvSpPr>
+          <p:cNvPr id="7" name="Rectangle 6"/>
+          <p:cNvSpPr/>
+          <p:nvPr/>
+        </p:nvSpPr>
+        <p:spPr>
+          <a:xfrm>
+            <a:off x="365760" y="2286000"/>
+            <a:ext cx="3657600" cy="2651760"/>
+          </a:xfrm>
+          <a:prstGeom prst="rect">
+            <a:avLst/>
+          </a:prstGeom>
+          <a:solidFill>
+            <a:srgbClr val="EEF3F9"/>
+          </a:solidFill>
+          <a:ln>
+            <a:noFill/>
+          </a:ln>
+        </p:spPr>
+        <p:style>
+          <a:lnRef idx="1">
+            <a:schemeClr val="accent1"/>
+          </a:lnRef>
+          <a:fillRef idx="3">
+            <a:schemeClr val="accent1"/>
+          </a:fillRef>
+          <a:effectRef idx="2">
+            <a:schemeClr val="accent1"/>
+          </a:effectRef>
+          <a:fontRef idx="minor">
+            <a:schemeClr val="lt1"/>
+          </a:fontRef>
+        </p:style>
+        <p:txBody>
+          <a:bodyPr rtlCol="0" anchor="ctr"/>
+          <a:lstStyle/>
+          <a:p>
+            <a:pPr algn="ctr"/>
+          </a:p>
+        </p:txBody>
+      </p:sp>
+      <p:sp>
+        <p:nvSpPr>
+          <p:cNvPr id="8" name="Rectangle 7"/>
+          <p:cNvSpPr/>
+          <p:nvPr/>
+        </p:nvSpPr>
+        <p:spPr>
+          <a:xfrm>
+            <a:off x="365760" y="2286000"/>
+            <a:ext cx="3657600" cy="91440"/>
+          </a:xfrm>
+          <a:prstGeom prst="rect">
+            <a:avLst/>
+          </a:prstGeom>
+          <a:solidFill>
+            <a:srgbClr val="0F6CBD"/>
+          </a:solidFill>
+          <a:ln>
+            <a:noFill/>
+          </a:ln>
+        </p:spPr>
+        <p:style>
+          <a:lnRef idx="1">
+            <a:schemeClr val="accent1"/>
+          </a:lnRef>
+          <a:fillRef idx="3">
+            <a:schemeClr val="accent1"/>
+          </a:fillRef>
+          <a:effectRef idx="2">
+            <a:schemeClr val="accent1"/>
+          </a:effectRef>
+          <a:fontRef idx="minor">
+            <a:schemeClr val="lt1"/>
+          </a:fontRef>
+        </p:style>
+        <p:txBody>
+          <a:bodyPr rtlCol="0" anchor="ctr"/>
+          <a:lstStyle/>
+          <a:p>
+            <a:pPr algn="ctr"/>
+          </a:p>
+        </p:txBody>
+      </p:sp>
+      <p:sp>
+        <p:nvSpPr>
+          <p:cNvPr id="9" name="TextBox 8"/>
+          <p:cNvSpPr txBox="1"/>
+          <p:nvPr/>
+        </p:nvSpPr>
+        <p:spPr>
+          <a:xfrm>
+            <a:off x="502920" y="2423160"/>
+            <a:ext cx="3429000" cy="2468880"/>
+          </a:xfrm>
+          <a:prstGeom prst="rect">
+            <a:avLst/>
+          </a:prstGeom>
+          <a:noFill/>
+        </p:spPr>
+        <p:txBody>
+          <a:bodyPr wrap="square">
+            <a:spAutoFit/>
+          </a:bodyPr>
+          <a:lstStyle/>
+          <a:p>
+            <a:pPr>
+              <a:spcAft>
+                <a:spcPts val="800"/>
+              </a:spcAft>
+            </a:pPr>
+            <a:r>
+              <a:rPr sz="1400" b="1">
+                <a:solidFill>
+                  <a:srgbClr val="0B1F3A"/>
+                </a:solidFill>
+              </a:rPr>
+              <a:t>OP-014 · l'esperto di campo</a:t>
+            </a:r>
+          </a:p>
+          <a:p>
+            <a:pPr>
+              <a:spcAft>
+                <a:spcPts val="800"/>
+              </a:spcAft>
+            </a:pPr>
+            <a:r>
+              <a:rPr sz="1400" b="0">
+                <a:solidFill>
+                  <a:srgbClr val="0B1F3A"/>
+                </a:solidFill>
+              </a:rPr>
+              <a:t>Legge la card e usa quello che sa dell'impianto: approva se i segnali sono chiari, rifiuta se sa di lavori già fatti.</a:t>
+            </a:r>
+          </a:p>
+          <a:p>
+            <a:pPr>
+              <a:spcAft>
+                <a:spcPts val="800"/>
+              </a:spcAft>
+            </a:pPr>
+            <a:r>
+              <a:rPr sz="1400" b="1">
+                <a:solidFill>
+                  <a:srgbClr val="0B1F3A"/>
+                </a:solidFill>
+              </a:rPr>
+              <a:t>6 decisioni: 4 approvate, 2 rifiutate</a:t>
+            </a:r>
+          </a:p>
+        </p:txBody>
+      </p:sp>
+      <p:sp>
+        <p:nvSpPr>
+          <p:cNvPr id="10" name="Rectangle 9"/>
+          <p:cNvSpPr/>
+          <p:nvPr/>
+        </p:nvSpPr>
+        <p:spPr>
+          <a:xfrm>
+            <a:off x="4206240" y="2286000"/>
+            <a:ext cx="3657600" cy="2651760"/>
+          </a:xfrm>
+          <a:prstGeom prst="rect">
+            <a:avLst/>
+          </a:prstGeom>
+          <a:solidFill>
+            <a:srgbClr val="EEF3F9"/>
+          </a:solidFill>
+          <a:ln>
+            <a:noFill/>
+          </a:ln>
+        </p:spPr>
+        <p:style>
+          <a:lnRef idx="1">
+            <a:schemeClr val="accent1"/>
+          </a:lnRef>
+          <a:fillRef idx="3">
+            <a:schemeClr val="accent1"/>
+          </a:fillRef>
+          <a:effectRef idx="2">
+            <a:schemeClr val="accent1"/>
+          </a:effectRef>
+          <a:fontRef idx="minor">
+            <a:schemeClr val="lt1"/>
+          </a:fontRef>
+        </p:style>
+        <p:txBody>
+          <a:bodyPr rtlCol="0" anchor="ctr"/>
+          <a:lstStyle/>
+          <a:p>
+            <a:pPr algn="ctr"/>
+          </a:p>
+        </p:txBody>
+      </p:sp>
+      <p:sp>
+        <p:nvSpPr>
+          <p:cNvPr id="11" name="Rectangle 10"/>
+          <p:cNvSpPr/>
+          <p:nvPr/>
+        </p:nvSpPr>
+        <p:spPr>
+          <a:xfrm>
+            <a:off x="4206240" y="2286000"/>
+            <a:ext cx="3657600" cy="91440"/>
+          </a:xfrm>
+          <a:prstGeom prst="rect">
+            <a:avLst/>
+          </a:prstGeom>
+          <a:solidFill>
+            <a:srgbClr val="0F6CBD"/>
+          </a:solidFill>
+          <a:ln>
+            <a:noFill/>
+          </a:ln>
+        </p:spPr>
+        <p:style>
+          <a:lnRef idx="1">
+            <a:schemeClr val="accent1"/>
+          </a:lnRef>
+          <a:fillRef idx="3">
+            <a:schemeClr val="accent1"/>
+          </a:fillRef>
+          <a:effectRef idx="2">
+            <a:schemeClr val="accent1"/>
+          </a:effectRef>
+          <a:fontRef idx="minor">
+            <a:schemeClr val="lt1"/>
+          </a:fontRef>
+        </p:style>
+        <p:txBody>
+          <a:bodyPr rtlCol="0" anchor="ctr"/>
+          <a:lstStyle/>
+          <a:p>
+            <a:pPr algn="ctr"/>
+          </a:p>
+        </p:txBody>
+      </p:sp>
+      <p:sp>
+        <p:nvSpPr>
+          <p:cNvPr id="12" name="TextBox 11"/>
+          <p:cNvSpPr txBox="1"/>
+          <p:nvPr/>
+        </p:nvSpPr>
+        <p:spPr>
+          <a:xfrm>
+            <a:off x="4343400" y="2423160"/>
+            <a:ext cx="3429000" cy="2468880"/>
+          </a:xfrm>
+          <a:prstGeom prst="rect">
+            <a:avLst/>
+          </a:prstGeom>
+          <a:noFill/>
+        </p:spPr>
+        <p:txBody>
+          <a:bodyPr wrap="square">
+            <a:spAutoFit/>
+          </a:bodyPr>
+          <a:lstStyle/>
+          <a:p>
+            <a:pPr>
+              <a:spcAft>
+                <a:spcPts val="800"/>
+              </a:spcAft>
+            </a:pPr>
+            <a:r>
+              <a:rPr sz="1400" b="1">
+                <a:solidFill>
+                  <a:srgbClr val="0B1F3A"/>
+                </a:solidFill>
+              </a:rPr>
+              <a:t>OP-022 · il frettoloso</a:t>
+            </a:r>
+          </a:p>
+          <a:p>
+            <a:pPr>
+              <a:spcAft>
+                <a:spcPts val="800"/>
+              </a:spcAft>
+            </a:pPr>
+            <a:r>
+              <a:rPr sz="1400" b="0">
+                <a:solidFill>
+                  <a:srgbClr val="0B1F3A"/>
+                </a:solidFill>
+              </a:rPr>
+              <a:t>Approva quasi tutto; una volta scrive solo "Approvo, dati chiari". Serve a vedere se il sistema se ne accorge.</a:t>
+            </a:r>
+          </a:p>
+          <a:p>
+            <a:pPr>
+              <a:spcAft>
+                <a:spcPts val="800"/>
+              </a:spcAft>
+            </a:pPr>
+            <a:r>
+              <a:rPr sz="1400" b="1">
+                <a:solidFill>
+                  <a:srgbClr val="0B1F3A"/>
+                </a:solidFill>
+              </a:rPr>
+              <a:t>6 decisioni: 5 approvate, 1 corretta</a:t>
+            </a:r>
+          </a:p>
+        </p:txBody>
+      </p:sp>
+      <p:sp>
+        <p:nvSpPr>
+          <p:cNvPr id="13" name="Rectangle 12"/>
+          <p:cNvSpPr/>
+          <p:nvPr/>
+        </p:nvSpPr>
+        <p:spPr>
+          <a:xfrm>
+            <a:off x="8046720" y="2286000"/>
+            <a:ext cx="3657600" cy="2651760"/>
+          </a:xfrm>
+          <a:prstGeom prst="rect">
+            <a:avLst/>
+          </a:prstGeom>
+          <a:solidFill>
+            <a:srgbClr val="EEF3F9"/>
+          </a:solidFill>
+          <a:ln>
+            <a:noFill/>
+          </a:ln>
+        </p:spPr>
+        <p:style>
+          <a:lnRef idx="1">
+            <a:schemeClr val="accent1"/>
+          </a:lnRef>
+          <a:fillRef idx="3">
+            <a:schemeClr val="accent1"/>
+          </a:fillRef>
+          <a:effectRef idx="2">
+            <a:schemeClr val="accent1"/>
+          </a:effectRef>
+          <a:fontRef idx="minor">
+            <a:schemeClr val="lt1"/>
+          </a:fontRef>
+        </p:style>
+        <p:txBody>
+          <a:bodyPr rtlCol="0" anchor="ctr"/>
+          <a:lstStyle/>
+          <a:p>
+            <a:pPr algn="ctr"/>
+          </a:p>
+        </p:txBody>
+      </p:sp>
+      <p:sp>
+        <p:nvSpPr>
+          <p:cNvPr id="14" name="Rectangle 13"/>
+          <p:cNvSpPr/>
+          <p:nvPr/>
+        </p:nvSpPr>
+        <p:spPr>
+          <a:xfrm>
+            <a:off x="8046720" y="2286000"/>
+            <a:ext cx="3657600" cy="91440"/>
+          </a:xfrm>
+          <a:prstGeom prst="rect">
+            <a:avLst/>
+          </a:prstGeom>
+          <a:solidFill>
+            <a:srgbClr val="0F6CBD"/>
+          </a:solidFill>
+          <a:ln>
+            <a:noFill/>
+          </a:ln>
+        </p:spPr>
+        <p:style>
+          <a:lnRef idx="1">
+            <a:schemeClr val="accent1"/>
+          </a:lnRef>
+          <a:fillRef idx="3">
+            <a:schemeClr val="accent1"/>
+          </a:fillRef>
+          <a:effectRef idx="2">
+            <a:schemeClr val="accent1"/>
+          </a:effectRef>
+          <a:fontRef idx="minor">
+            <a:schemeClr val="lt1"/>
+          </a:fontRef>
+        </p:style>
+        <p:txBody>
+          <a:bodyPr rtlCol="0" anchor="ctr"/>
+          <a:lstStyle/>
+          <a:p>
+            <a:pPr algn="ctr"/>
+          </a:p>
+        </p:txBody>
+      </p:sp>
+      <p:sp>
+        <p:nvSpPr>
+          <p:cNvPr id="15" name="TextBox 14"/>
+          <p:cNvSpPr txBox="1"/>
+          <p:nvPr/>
+        </p:nvSpPr>
+        <p:spPr>
+          <a:xfrm>
+            <a:off x="8183880" y="2423160"/>
+            <a:ext cx="3429000" cy="2468880"/>
+          </a:xfrm>
+          <a:prstGeom prst="rect">
+            <a:avLst/>
+          </a:prstGeom>
+          <a:noFill/>
+        </p:spPr>
+        <p:txBody>
+          <a:bodyPr wrap="square">
+            <a:spAutoFit/>
+          </a:bodyPr>
+          <a:lstStyle/>
+          <a:p>
+            <a:pPr>
+              <a:spcAft>
+                <a:spcPts val="800"/>
+              </a:spcAft>
+            </a:pPr>
+            <a:r>
+              <a:rPr sz="1400" b="1">
+                <a:solidFill>
+                  <a:srgbClr val="0B1F3A"/>
+                </a:solidFill>
+              </a:rPr>
+              <a:t>OP-031 · il prudente</a:t>
+            </a:r>
+          </a:p>
+          <a:p>
+            <a:pPr>
+              <a:spcAft>
+                <a:spcPts val="800"/>
+              </a:spcAft>
+            </a:pPr>
+            <a:r>
+              <a:rPr sz="1400" b="0">
+                <a:solidFill>
+                  <a:srgbClr val="0B1F3A"/>
+                </a:solidFill>
+              </a:rPr>
+              <a:t>Nel dubbio chiede un controllo urgente o passa la decisione al responsabile; corregge spesso.</a:t>
+            </a:r>
+          </a:p>
+          <a:p>
+            <a:pPr>
+              <a:spcAft>
+                <a:spcPts val="800"/>
+              </a:spcAft>
+            </a:pPr>
+            <a:r>
+              <a:rPr sz="1400" b="1">
+                <a:solidFill>
+                  <a:srgbClr val="0B1F3A"/>
+                </a:solidFill>
+              </a:rPr>
+              <a:t>5 decisioni + 1 escalation: 2 approvate, 2 corrette, 1 rifiutata</a:t>
+            </a:r>
+          </a:p>
+        </p:txBody>
+      </p:sp>
+      <p:sp>
+        <p:nvSpPr>
+          <p:cNvPr id="16" name="TextBox 15"/>
+          <p:cNvSpPr txBox="1"/>
+          <p:nvPr/>
+        </p:nvSpPr>
+        <p:spPr>
+          <a:xfrm>
+            <a:off x="457200" y="5120640"/>
+            <a:ext cx="11247120" cy="1554480"/>
+          </a:xfrm>
+          <a:prstGeom prst="rect">
+            <a:avLst/>
+          </a:prstGeom>
+          <a:noFill/>
+        </p:spPr>
+        <p:txBody>
+          <a:bodyPr wrap="square">
+            <a:spAutoFit/>
+          </a:bodyPr>
+          <a:lstStyle/>
+          <a:p>
+            <a:pPr>
+              <a:spcAft>
+                <a:spcPts val="800"/>
+              </a:spcAft>
+            </a:pPr>
+            <a:r>
+              <a:rPr sz="1400" b="1">
+                <a:solidFill>
                   <a:srgbClr val="0F6CBD"/>
                 </a:solidFill>
               </a:rPr>
               <a:t>•  </a:t>
             </a:r>
             <a:r>
-              <a:rPr sz="1600" b="1">
-                <a:solidFill>
-                  <a:srgbClr val="0B1F3A"/>
-                </a:solidFill>
-              </a:rPr>
-              <a:t>Per persona</a:t>
-            </a:r>
-            <a:r>
-              <a:rPr sz="1600" b="0">
-                <a:solidFill>
-                  <a:srgbClr val="0B1F3A"/>
-                </a:solidFill>
-              </a:rPr>
-              <a:t>: OP-031 corregge il sistema spesso (approva 4 volte su 10), OP-022 quasi mai (8 su 10).</a:t>
+              <a:rPr sz="1400" b="1">
+                <a:solidFill>
+                  <a:srgbClr val="0B1F3A"/>
+                </a:solidFill>
+              </a:rPr>
+              <a:t>Come abbiamo scelto</a:t>
+            </a:r>
+            <a:r>
+              <a:rPr sz="1400" b="0">
+                <a:solidFill>
+                  <a:srgbClr val="0B1F3A"/>
+                </a:solidFill>
+              </a:rPr>
+              <a:t>: rischio, motivo principale, casi simili e avviso sul Sud dalla card; per rifiuti e correzioni abbiamo immaginato informazioni che il sistema non ha (impianto già sostituito, turbina ferma, ospedale servito).</a:t>
             </a:r>
           </a:p>
           <a:p>
@@ -8039,7 +8402,7 @@
               </a:spcAft>
             </a:pPr>
             <a:r>
-              <a:rPr sz="1600" b="1">
+              <a:rPr sz="1400" b="1">
                 <a:solidFill>
                   <a:srgbClr val="0F6CBD"/>
                 </a:solidFill>
@@ -8047,98 +8410,28 @@
               <a:t>•  </a:t>
             </a:r>
             <a:r>
-              <a:rPr sz="1600" b="0">
-                <a:solidFill>
-                  <a:srgbClr val="0B1F3A"/>
-                </a:solidFill>
-              </a:rPr>
-              <a:t>Dopo una motivazione troppo breve, l'allarme su OP-022 è </a:t>
-            </a:r>
-            <a:r>
-              <a:rPr sz="1600" b="1">
-                <a:solidFill>
-                  <a:srgbClr val="0B1F3A"/>
-                </a:solidFill>
-              </a:rPr>
-              <a:t>scattato davvero</a:t>
-            </a:r>
-            <a:r>
-              <a:rPr sz="1600" b="0">
-                <a:solidFill>
-                  <a:srgbClr val="0B1F3A"/>
-                </a:solidFill>
-              </a:rPr>
-              <a:t>; con le decisioni successive è rientrato.</a:t>
-            </a:r>
-          </a:p>
-          <a:p>
-            <a:pPr>
-              <a:spcAft>
-                <a:spcPts val="800"/>
-              </a:spcAft>
-            </a:pPr>
-            <a:r>
-              <a:rPr sz="1600" b="1">
-                <a:solidFill>
-                  <a:srgbClr val="0F6CBD"/>
-                </a:solidFill>
-              </a:rPr>
-              <a:t>•  </a:t>
-            </a:r>
-            <a:r>
-              <a:rPr sz="1600" b="1">
-                <a:solidFill>
-                  <a:srgbClr val="0B1F3A"/>
-                </a:solidFill>
-              </a:rPr>
-              <a:t>Per zona</a:t>
-            </a:r>
-            <a:r>
-              <a:rPr sz="1600" b="0">
-                <a:solidFill>
-                  <a:srgbClr val="0B1F3A"/>
-                </a:solidFill>
-              </a:rPr>
-              <a:t>: nelle Isole le persone correggono il sistema la metà delle volte, contro una media di un terzo. Non abbastanza per un allarme, da seguire.</a:t>
-            </a:r>
-          </a:p>
-          <a:p>
-            <a:pPr>
-              <a:spcAft>
-                <a:spcPts val="800"/>
-              </a:spcAft>
-            </a:pPr>
-            <a:r>
-              <a:rPr sz="1600" b="1">
-                <a:solidFill>
-                  <a:srgbClr val="0F6CBD"/>
-                </a:solidFill>
-              </a:rPr>
-              <a:t>•  </a:t>
-            </a:r>
-            <a:r>
-              <a:rPr sz="1600" b="0">
-                <a:solidFill>
-                  <a:srgbClr val="0B1F3A"/>
-                </a:solidFill>
-              </a:rPr>
-              <a:t>Queste metriche misurano </a:t>
-            </a:r>
-            <a:r>
-              <a:rPr sz="1600" b="1">
-                <a:solidFill>
-                  <a:srgbClr val="0B1F3A"/>
-                </a:solidFill>
-              </a:rPr>
-              <a:t>persone</a:t>
-            </a:r>
-            <a:r>
-              <a:rPr sz="1600" b="0">
-                <a:solidFill>
-                  <a:srgbClr val="0B1F3A"/>
-                </a:solidFill>
-              </a:rPr>
-              <a:t>: in un'azienda vera servono informativa ai lavoratori e regole chiare su come si usano.</a:t>
+              <a:rPr sz="1400" b="0">
+                <a:solidFill>
+                  <a:srgbClr val="0B1F3A"/>
+                </a:solidFill>
+              </a:rPr>
+              <a:t>Prima di tutto abbiamo provato ad approvare con "ok": </a:t>
+            </a:r>
+            <a:r>
+              <a:rPr sz="1400" b="1">
+                <a:solidFill>
+                  <a:srgbClr val="0B1F3A"/>
+                </a:solidFill>
+              </a:rPr>
+              <a:t>respinto</a:t>
+            </a:r>
+            <a:r>
+              <a:rPr sz="1400" b="0">
+                <a:solidFill>
+                  <a:srgbClr val="0B1F3A"/>
+                </a:solidFill>
+              </a:rPr>
+              <a:t>. Motivazioni inventate, ma decisioni, registro e numeri sono quelli veri della dashboard.</a:t>
             </a:r>
           </a:p>
         </p:txBody>
@@ -8237,7 +8530,7 @@
                   <a:srgbClr val="FFFFFF"/>
                 </a:solidFill>
               </a:rPr>
-              <a:t>Cosa NON abbiamo risolto</a:t>
+              <a:t>Cosa è successo: i numeri e il confronto con la realtà</a:t>
             </a:r>
           </a:p>
         </p:txBody>
@@ -8275,7 +8568,7 @@
                   <a:srgbClr val="C9D8EA"/>
                 </a:solidFill>
               </a:rPr>
-              <a:t>10% del punteggio</a:t>
+              <a:t>KPI A1-A6 · B3c</a:t>
             </a:r>
           </a:p>
         </p:txBody>
@@ -8331,8 +8624,8 @@
         </p:nvSpPr>
         <p:spPr>
           <a:xfrm>
-            <a:off x="365760" y="1234440"/>
-            <a:ext cx="5623560" cy="1645920"/>
+            <a:off x="365760" y="1188720"/>
+            <a:ext cx="5394960" cy="5440680"/>
           </a:xfrm>
           <a:prstGeom prst="rect">
             <a:avLst/>
@@ -8368,14 +8661,603 @@
       </p:sp>
       <p:sp>
         <p:nvSpPr>
-          <p:cNvPr id="7" name="Rectangle 6"/>
+          <p:cNvPr id="7" name="TextBox 6"/>
+          <p:cNvSpPr txBox="1"/>
+          <p:nvPr/>
+        </p:nvSpPr>
+        <p:spPr>
+          <a:xfrm>
+            <a:off x="548640" y="1280160"/>
+            <a:ext cx="5120640" cy="5303520"/>
+          </a:xfrm>
+          <a:prstGeom prst="rect">
+            <a:avLst/>
+          </a:prstGeom>
+          <a:noFill/>
+        </p:spPr>
+        <p:txBody>
+          <a:bodyPr wrap="square">
+            <a:spAutoFit/>
+          </a:bodyPr>
+          <a:lstStyle/>
+          <a:p>
+            <a:pPr>
+              <a:spcAft>
+                <a:spcPts val="800"/>
+              </a:spcAft>
+            </a:pPr>
+            <a:r>
+              <a:rPr sz="1400" b="1">
+                <a:solidFill>
+                  <a:srgbClr val="0B1F3A"/>
+                </a:solidFill>
+              </a:rPr>
+              <a:t>Cosa ha misurato la dashboard</a:t>
+            </a:r>
+          </a:p>
+          <a:p>
+            <a:pPr>
+              <a:spcAft>
+                <a:spcPts val="800"/>
+              </a:spcAft>
+            </a:pPr>
+            <a:r>
+              <a:rPr sz="1400" b="1">
+                <a:solidFill>
+                  <a:srgbClr val="0F6CBD"/>
+                </a:solidFill>
+              </a:rPr>
+              <a:t>•  </a:t>
+            </a:r>
+            <a:r>
+              <a:rPr sz="1400" b="1">
+                <a:solidFill>
+                  <a:srgbClr val="0B1F3A"/>
+                </a:solidFill>
+              </a:rPr>
+              <a:t>0</a:t>
+            </a:r>
+            <a:r>
+              <a:rPr sz="1400" b="0">
+                <a:solidFill>
+                  <a:srgbClr val="0B1F3A"/>
+                </a:solidFill>
+              </a:rPr>
+              <a:t> decisioni importanti partite senza una persona.</a:t>
+            </a:r>
+          </a:p>
+          <a:p>
+            <a:pPr>
+              <a:spcAft>
+                <a:spcPts val="800"/>
+              </a:spcAft>
+            </a:pPr>
+            <a:r>
+              <a:rPr sz="1400" b="1">
+                <a:solidFill>
+                  <a:srgbClr val="0F6CBD"/>
+                </a:solidFill>
+              </a:rPr>
+              <a:t>•  </a:t>
+            </a:r>
+            <a:r>
+              <a:rPr sz="1400" b="0">
+                <a:solidFill>
+                  <a:srgbClr val="0B1F3A"/>
+                </a:solidFill>
+              </a:rPr>
+              <a:t>Le persone hanno corretto il sistema </a:t>
+            </a:r>
+            <a:r>
+              <a:rPr sz="1400" b="1">
+                <a:solidFill>
+                  <a:srgbClr val="0B1F3A"/>
+                </a:solidFill>
+              </a:rPr>
+              <a:t>35 volte su 100</a:t>
+            </a:r>
+            <a:r>
+              <a:rPr sz="1400" b="0">
+                <a:solidFill>
+                  <a:srgbClr val="0B1F3A"/>
+                </a:solidFill>
+              </a:rPr>
+              <a:t>: né troppo poco (approvano senza leggere) né troppo (sistema inutile).</a:t>
+            </a:r>
+          </a:p>
+          <a:p>
+            <a:pPr>
+              <a:spcAft>
+                <a:spcPts val="800"/>
+              </a:spcAft>
+            </a:pPr>
+            <a:r>
+              <a:rPr sz="1400" b="1">
+                <a:solidFill>
+                  <a:srgbClr val="0F6CBD"/>
+                </a:solidFill>
+              </a:rPr>
+              <a:t>•  </a:t>
+            </a:r>
+            <a:r>
+              <a:rPr sz="1400" b="1">
+                <a:solidFill>
+                  <a:srgbClr val="0B1F3A"/>
+                </a:solidFill>
+              </a:rPr>
+              <a:t>6 motivazioni su 100</a:t>
+            </a:r>
+            <a:r>
+              <a:rPr sz="1400" b="0">
+                <a:solidFill>
+                  <a:srgbClr val="0B1F3A"/>
+                </a:solidFill>
+              </a:rPr>
+              <a:t> troppo brevi: quella di OP-022.</a:t>
+            </a:r>
+          </a:p>
+          <a:p>
+            <a:pPr>
+              <a:spcAft>
+                <a:spcPts val="800"/>
+              </a:spcAft>
+            </a:pPr>
+            <a:r>
+              <a:rPr sz="1400" b="1">
+                <a:solidFill>
+                  <a:srgbClr val="0F6CBD"/>
+                </a:solidFill>
+              </a:rPr>
+              <a:t>•  </a:t>
+            </a:r>
+            <a:r>
+              <a:rPr sz="1400" b="0">
+                <a:solidFill>
+                  <a:srgbClr val="0B1F3A"/>
+                </a:solidFill>
+              </a:rPr>
+              <a:t>Tempo tipico dall'arrivo in coda alla decisione: </a:t>
+            </a:r>
+            <a:r>
+              <a:rPr sz="1400" b="1">
+                <a:solidFill>
+                  <a:srgbClr val="0B1F3A"/>
+                </a:solidFill>
+              </a:rPr>
+              <a:t>8 minuti</a:t>
+            </a:r>
+            <a:r>
+              <a:rPr sz="1400" b="0">
+                <a:solidFill>
+                  <a:srgbClr val="0B1F3A"/>
+                </a:solidFill>
+              </a:rPr>
+              <a:t>.</a:t>
+            </a:r>
+          </a:p>
+          <a:p>
+            <a:pPr>
+              <a:spcAft>
+                <a:spcPts val="800"/>
+              </a:spcAft>
+            </a:pPr>
+            <a:r>
+              <a:rPr sz="1400" b="1">
+                <a:solidFill>
+                  <a:srgbClr val="0F6CBD"/>
+                </a:solidFill>
+              </a:rPr>
+              <a:t>•  </a:t>
+            </a:r>
+            <a:r>
+              <a:rPr sz="1400" b="1">
+                <a:solidFill>
+                  <a:srgbClr val="0B1F3A"/>
+                </a:solidFill>
+              </a:rPr>
+              <a:t>96 spiegazioni su 100</a:t>
+            </a:r>
+            <a:r>
+              <a:rPr sz="1400" b="0">
+                <a:solidFill>
+                  <a:srgbClr val="0B1F3A"/>
+                </a:solidFill>
+              </a:rPr>
+              <a:t> dall'LLM; 3 scartate dai controlli perché non citavano il motivo principale.</a:t>
+            </a:r>
+          </a:p>
+          <a:p>
+            <a:pPr>
+              <a:spcAft>
+                <a:spcPts val="800"/>
+              </a:spcAft>
+            </a:pPr>
+            <a:r>
+              <a:rPr sz="1400" b="1">
+                <a:solidFill>
+                  <a:srgbClr val="0F6CBD"/>
+                </a:solidFill>
+              </a:rPr>
+              <a:t>•  </a:t>
+            </a:r>
+            <a:r>
+              <a:rPr sz="1400" b="0">
+                <a:solidFill>
+                  <a:srgbClr val="0B1F3A"/>
+                </a:solidFill>
+              </a:rPr>
+              <a:t>Coda da 45 a 28 decisioni; registro </a:t>
+            </a:r>
+            <a:r>
+              <a:rPr sz="1400" b="1">
+                <a:solidFill>
+                  <a:srgbClr val="0B1F3A"/>
+                </a:solidFill>
+              </a:rPr>
+              <a:t>integro</a:t>
+            </a:r>
+            <a:r>
+              <a:rPr sz="1400" b="0">
+                <a:solidFill>
+                  <a:srgbClr val="0B1F3A"/>
+                </a:solidFill>
+              </a:rPr>
+              <a:t>.</a:t>
+            </a:r>
+          </a:p>
+        </p:txBody>
+      </p:sp>
+      <p:graphicFrame>
+        <p:nvGraphicFramePr>
+          <p:cNvPr id="8" name="Table 7"/>
+          <p:cNvGraphicFramePr>
+            <a:graphicFrameLocks noGrp="1"/>
+          </p:cNvGraphicFramePr>
+          <p:nvPr/>
+        </p:nvGraphicFramePr>
+        <p:xfrm>
+          <a:off x="6035040" y="1280160"/>
+          <a:ext cx="5852160" cy="3291840"/>
+        </p:xfrm>
+        <a:graphic>
+          <a:graphicData uri="http://schemas.openxmlformats.org/drawingml/2006/table">
+            <a:tbl>
+              <a:tblPr firstRow="1" bandRow="1">
+                <a:tableStyleId>{5C22544A-7EE6-4342-B048-85BDC9FD1C3A}</a:tableStyleId>
+              </a:tblPr>
+              <a:tblGrid>
+                <a:gridCol w="1188720"/>
+                <a:gridCol w="731520"/>
+                <a:gridCol w="1188720"/>
+                <a:gridCol w="2743200"/>
+              </a:tblGrid>
+              <a:tr h="658368">
+                <a:tc>
+                  <a:txBody>
+                    <a:bodyPr/>
+                    <a:lstStyle/>
+                    <a:p>
+                      <a:r>
+                        <a:rPr sz="1200" b="1"/>
+                        <a:t>Decisione</a:t>
+                      </a:r>
+                    </a:p>
+                  </a:txBody>
+                  <a:tcPr/>
+                </a:tc>
+                <a:tc>
+                  <a:txBody>
+                    <a:bodyPr/>
+                    <a:lstStyle/>
+                    <a:p>
+                      <a:r>
+                        <a:rPr sz="1200" b="1"/>
+                        <a:t>Quante</a:t>
+                      </a:r>
+                    </a:p>
+                  </a:txBody>
+                  <a:tcPr/>
+                </a:tc>
+                <a:tc>
+                  <a:txBody>
+                    <a:bodyPr/>
+                    <a:lstStyle/>
+                    <a:p>
+                      <a:r>
+                        <a:rPr sz="1200" b="1"/>
+                        <a:t>Guasto vero registrato</a:t>
+                      </a:r>
+                    </a:p>
+                  </a:txBody>
+                  <a:tcPr/>
+                </a:tc>
+                <a:tc>
+                  <a:txBody>
+                    <a:bodyPr/>
+                    <a:lstStyle/>
+                    <a:p>
+                      <a:r>
+                        <a:rPr sz="1200" b="1"/>
+                        <a:t>Cosa ci dice</a:t>
+                      </a:r>
+                    </a:p>
+                  </a:txBody>
+                  <a:tcPr/>
+                </a:tc>
+              </a:tr>
+              <a:tr h="658368">
+                <a:tc>
+                  <a:txBody>
+                    <a:bodyPr/>
+                    <a:lstStyle/>
+                    <a:p>
+                      <a:r>
+                        <a:rPr sz="1200" b="1"/>
+                        <a:t>Approvate</a:t>
+                      </a:r>
+                    </a:p>
+                  </a:txBody>
+                  <a:tcPr/>
+                </a:tc>
+                <a:tc>
+                  <a:txBody>
+                    <a:bodyPr/>
+                    <a:lstStyle/>
+                    <a:p>
+                      <a:r>
+                        <a:rPr sz="1200" b="0"/>
+                        <a:t>11</a:t>
+                      </a:r>
+                    </a:p>
+                  </a:txBody>
+                  <a:tcPr/>
+                </a:tc>
+                <a:tc>
+                  <a:txBody>
+                    <a:bodyPr/>
+                    <a:lstStyle/>
+                    <a:p>
+                      <a:r>
+                        <a:rPr sz="1200" b="0"/>
+                        <a:t>5</a:t>
+                      </a:r>
+                    </a:p>
+                  </a:txBody>
+                  <a:tcPr/>
+                </a:tc>
+                <a:tc>
+                  <a:txBody>
+                    <a:bodyPr/>
+                    <a:lstStyle/>
+                    <a:p>
+                      <a:r>
+                        <a:rPr sz="1200" b="0"/>
+                        <a:t>6 squadre a vuoto, ma 3 sono al Sud dove i guasti si registrano meno</a:t>
+                      </a:r>
+                    </a:p>
+                  </a:txBody>
+                  <a:tcPr/>
+                </a:tc>
+              </a:tr>
+              <a:tr h="658368">
+                <a:tc>
+                  <a:txBody>
+                    <a:bodyPr/>
+                    <a:lstStyle/>
+                    <a:p>
+                      <a:r>
+                        <a:rPr sz="1200" b="1"/>
+                        <a:t>Corrette</a:t>
+                      </a:r>
+                    </a:p>
+                  </a:txBody>
+                  <a:tcPr/>
+                </a:tc>
+                <a:tc>
+                  <a:txBody>
+                    <a:bodyPr/>
+                    <a:lstStyle/>
+                    <a:p>
+                      <a:r>
+                        <a:rPr sz="1200" b="0"/>
+                        <a:t>3</a:t>
+                      </a:r>
+                    </a:p>
+                  </a:txBody>
+                  <a:tcPr/>
+                </a:tc>
+                <a:tc>
+                  <a:txBody>
+                    <a:bodyPr/>
+                    <a:lstStyle/>
+                    <a:p>
+                      <a:r>
+                        <a:rPr sz="1200" b="0"/>
+                        <a:t>2</a:t>
+                      </a:r>
+                    </a:p>
+                  </a:txBody>
+                  <a:tcPr/>
+                </a:tc>
+                <a:tc>
+                  <a:txBody>
+                    <a:bodyPr/>
+                    <a:lstStyle/>
+                    <a:p>
+                      <a:r>
+                        <a:rPr sz="1200" b="0"/>
+                        <a:t>1 ben fatta (ospedale → controllo urgente), 1 rischiosa (guasto vero declassato)</a:t>
+                      </a:r>
+                    </a:p>
+                  </a:txBody>
+                  <a:tcPr/>
+                </a:tc>
+              </a:tr>
+              <a:tr h="658368">
+                <a:tc>
+                  <a:txBody>
+                    <a:bodyPr/>
+                    <a:lstStyle/>
+                    <a:p>
+                      <a:r>
+                        <a:rPr sz="1200" b="1"/>
+                        <a:t>Rifiutate</a:t>
+                      </a:r>
+                    </a:p>
+                  </a:txBody>
+                  <a:tcPr/>
+                </a:tc>
+                <a:tc>
+                  <a:txBody>
+                    <a:bodyPr/>
+                    <a:lstStyle/>
+                    <a:p>
+                      <a:r>
+                        <a:rPr sz="1200" b="0"/>
+                        <a:t>3</a:t>
+                      </a:r>
+                    </a:p>
+                  </a:txBody>
+                  <a:tcPr/>
+                </a:tc>
+                <a:tc>
+                  <a:txBody>
+                    <a:bodyPr/>
+                    <a:lstStyle/>
+                    <a:p>
+                      <a:r>
+                        <a:rPr sz="1200" b="0"/>
+                        <a:t>1</a:t>
+                      </a:r>
+                    </a:p>
+                  </a:txBody>
+                  <a:tcPr/>
+                </a:tc>
+                <a:tc>
+                  <a:txBody>
+                    <a:bodyPr/>
+                    <a:lstStyle/>
+                    <a:p>
+                      <a:r>
+                        <a:rPr sz="1200" b="0"/>
+                        <a:t>2 giuste, 1 sbagliata: un guasto vero nelle Isole</a:t>
+                      </a:r>
+                    </a:p>
+                  </a:txBody>
+                  <a:tcPr/>
+                </a:tc>
+              </a:tr>
+              <a:tr h="658368">
+                <a:tc>
+                  <a:txBody>
+                    <a:bodyPr/>
+                    <a:lstStyle/>
+                    <a:p>
+                      <a:r>
+                        <a:rPr sz="1200" b="1"/>
+                        <a:t>Escalation</a:t>
+                      </a:r>
+                    </a:p>
+                  </a:txBody>
+                  <a:tcPr/>
+                </a:tc>
+                <a:tc>
+                  <a:txBody>
+                    <a:bodyPr/>
+                    <a:lstStyle/>
+                    <a:p>
+                      <a:r>
+                        <a:rPr sz="1200" b="0"/>
+                        <a:t>1</a:t>
+                      </a:r>
+                    </a:p>
+                  </a:txBody>
+                  <a:tcPr/>
+                </a:tc>
+                <a:tc>
+                  <a:txBody>
+                    <a:bodyPr/>
+                    <a:lstStyle/>
+                    <a:p>
+                      <a:r>
+                        <a:rPr sz="1200" b="0"/>
+                        <a:t>0</a:t>
+                      </a:r>
+                    </a:p>
+                  </a:txBody>
+                  <a:tcPr/>
+                </a:tc>
+                <a:tc>
+                  <a:txBody>
+                    <a:bodyPr/>
+                    <a:lstStyle/>
+                    <a:p>
+                      <a:r>
+                        <a:rPr sz="1200" b="0"/>
+                        <a:t>in attesa del responsabile</a:t>
+                      </a:r>
+                    </a:p>
+                  </a:txBody>
+                  <a:tcPr/>
+                </a:tc>
+              </a:tr>
+            </a:tbl>
+          </a:graphicData>
+        </a:graphic>
+      </p:graphicFrame>
+      <p:sp>
+        <p:nvSpPr>
+          <p:cNvPr id="9" name="Rectangle 8"/>
           <p:cNvSpPr/>
           <p:nvPr/>
         </p:nvSpPr>
         <p:spPr>
           <a:xfrm>
-            <a:off x="365760" y="1234440"/>
-            <a:ext cx="91440" cy="1645920"/>
+            <a:off x="6035040" y="4846320"/>
+            <a:ext cx="5852160" cy="1783080"/>
+          </a:xfrm>
+          <a:prstGeom prst="rect">
+            <a:avLst/>
+          </a:prstGeom>
+          <a:solidFill>
+            <a:srgbClr val="EEF3F9"/>
+          </a:solidFill>
+          <a:ln>
+            <a:noFill/>
+          </a:ln>
+        </p:spPr>
+        <p:style>
+          <a:lnRef idx="1">
+            <a:schemeClr val="accent1"/>
+          </a:lnRef>
+          <a:fillRef idx="3">
+            <a:schemeClr val="accent1"/>
+          </a:fillRef>
+          <a:effectRef idx="2">
+            <a:schemeClr val="accent1"/>
+          </a:effectRef>
+          <a:fontRef idx="minor">
+            <a:schemeClr val="lt1"/>
+          </a:fontRef>
+        </p:style>
+        <p:txBody>
+          <a:bodyPr rtlCol="0" anchor="ctr"/>
+          <a:lstStyle/>
+          <a:p>
+            <a:pPr algn="ctr"/>
+          </a:p>
+        </p:txBody>
+      </p:sp>
+      <p:sp>
+        <p:nvSpPr>
+          <p:cNvPr id="10" name="Rectangle 9"/>
+          <p:cNvSpPr/>
+          <p:nvPr/>
+        </p:nvSpPr>
+        <p:spPr>
+          <a:xfrm>
+            <a:off x="6035040" y="4846320"/>
+            <a:ext cx="91440" cy="1783080"/>
           </a:xfrm>
           <a:prstGeom prst="rect">
             <a:avLst/>
@@ -8411,14 +9293,14 @@
       </p:sp>
       <p:sp>
         <p:nvSpPr>
-          <p:cNvPr id="8" name="TextBox 7"/>
+          <p:cNvPr id="11" name="TextBox 10"/>
           <p:cNvSpPr txBox="1"/>
           <p:nvPr/>
         </p:nvSpPr>
         <p:spPr>
           <a:xfrm>
-            <a:off x="594360" y="1325880"/>
-            <a:ext cx="5303520" cy="1508760"/>
+            <a:off x="6263640" y="4919472"/>
+            <a:ext cx="5532120" cy="1691640"/>
           </a:xfrm>
           <a:prstGeom prst="rect">
             <a:avLst/>
@@ -8437,12 +9319,12 @@
               </a:spcAft>
             </a:pPr>
             <a:r>
-              <a:rPr sz="1600" b="1">
-                <a:solidFill>
-                  <a:srgbClr val="0B1F3A"/>
-                </a:solidFill>
-              </a:rPr>
-              <a:t>Il Sud resta un'ipotesi</a:t>
+              <a:rPr sz="1300" b="1">
+                <a:solidFill>
+                  <a:srgbClr val="0B1F3A"/>
+                </a:solidFill>
+              </a:rPr>
+              <a:t>La lezione</a:t>
             </a:r>
           </a:p>
           <a:p>
@@ -8452,707 +9334,12 @@
               </a:spcAft>
             </a:pPr>
             <a:r>
-              <a:rPr sz="1600" b="0">
-                <a:solidFill>
-                  <a:srgbClr val="0B1F3A"/>
-                </a:solidFill>
-              </a:rPr>
-              <a:t>È la spiegazione più probabile, ma va verificata con chi registra i guasti sul territorio.</a:t>
-            </a:r>
-          </a:p>
-        </p:txBody>
-      </p:sp>
-      <p:sp>
-        <p:nvSpPr>
-          <p:cNvPr id="9" name="Rectangle 8"/>
-          <p:cNvSpPr/>
-          <p:nvPr/>
-        </p:nvSpPr>
-        <p:spPr>
-          <a:xfrm>
-            <a:off x="6172200" y="1234440"/>
-            <a:ext cx="5623560" cy="1645920"/>
-          </a:xfrm>
-          <a:prstGeom prst="rect">
-            <a:avLst/>
-          </a:prstGeom>
-          <a:solidFill>
-            <a:srgbClr val="EEF3F9"/>
-          </a:solidFill>
-          <a:ln>
-            <a:noFill/>
-          </a:ln>
-        </p:spPr>
-        <p:style>
-          <a:lnRef idx="1">
-            <a:schemeClr val="accent1"/>
-          </a:lnRef>
-          <a:fillRef idx="3">
-            <a:schemeClr val="accent1"/>
-          </a:fillRef>
-          <a:effectRef idx="2">
-            <a:schemeClr val="accent1"/>
-          </a:effectRef>
-          <a:fontRef idx="minor">
-            <a:schemeClr val="lt1"/>
-          </a:fontRef>
-        </p:style>
-        <p:txBody>
-          <a:bodyPr rtlCol="0" anchor="ctr"/>
-          <a:lstStyle/>
-          <a:p>
-            <a:pPr algn="ctr"/>
-          </a:p>
-        </p:txBody>
-      </p:sp>
-      <p:sp>
-        <p:nvSpPr>
-          <p:cNvPr id="10" name="Rectangle 9"/>
-          <p:cNvSpPr/>
-          <p:nvPr/>
-        </p:nvSpPr>
-        <p:spPr>
-          <a:xfrm>
-            <a:off x="6172200" y="1234440"/>
-            <a:ext cx="91440" cy="1645920"/>
-          </a:xfrm>
-          <a:prstGeom prst="rect">
-            <a:avLst/>
-          </a:prstGeom>
-          <a:solidFill>
-            <a:srgbClr val="C8102E"/>
-          </a:solidFill>
-          <a:ln>
-            <a:noFill/>
-          </a:ln>
-        </p:spPr>
-        <p:style>
-          <a:lnRef idx="1">
-            <a:schemeClr val="accent1"/>
-          </a:lnRef>
-          <a:fillRef idx="3">
-            <a:schemeClr val="accent1"/>
-          </a:fillRef>
-          <a:effectRef idx="2">
-            <a:schemeClr val="accent1"/>
-          </a:effectRef>
-          <a:fontRef idx="minor">
-            <a:schemeClr val="lt1"/>
-          </a:fontRef>
-        </p:style>
-        <p:txBody>
-          <a:bodyPr rtlCol="0" anchor="ctr"/>
-          <a:lstStyle/>
-          <a:p>
-            <a:pPr algn="ctr"/>
-          </a:p>
-        </p:txBody>
-      </p:sp>
-      <p:sp>
-        <p:nvSpPr>
-          <p:cNvPr id="11" name="TextBox 10"/>
-          <p:cNvSpPr txBox="1"/>
-          <p:nvPr/>
-        </p:nvSpPr>
-        <p:spPr>
-          <a:xfrm>
-            <a:off x="6400800" y="1325880"/>
-            <a:ext cx="5303520" cy="1508760"/>
-          </a:xfrm>
-          <a:prstGeom prst="rect">
-            <a:avLst/>
-          </a:prstGeom>
-          <a:noFill/>
-        </p:spPr>
-        <p:txBody>
-          <a:bodyPr wrap="square">
-            <a:spAutoFit/>
-          </a:bodyPr>
-          <a:lstStyle/>
-          <a:p>
-            <a:pPr>
-              <a:spcAft>
-                <a:spcPts val="800"/>
-              </a:spcAft>
-            </a:pPr>
-            <a:r>
-              <a:rPr sz="1600" b="1">
-                <a:solidFill>
-                  <a:srgbClr val="0B1F3A"/>
-                </a:solidFill>
-              </a:rPr>
-              <a:t>Alcuni guasti arrivano senza preavviso</a:t>
-            </a:r>
-          </a:p>
-          <a:p>
-            <a:pPr>
-              <a:spcAft>
-                <a:spcPts val="800"/>
-              </a:spcAft>
-            </a:pPr>
-            <a:r>
-              <a:rPr sz="1600" b="0">
-                <a:solidFill>
-                  <a:srgbClr val="0B1F3A"/>
-                </a:solidFill>
-              </a:rPr>
-              <a:t>Se i sensori non vedono nulla, nessuna regola li può prevedere.</a:t>
-            </a:r>
-          </a:p>
-        </p:txBody>
-      </p:sp>
-      <p:sp>
-        <p:nvSpPr>
-          <p:cNvPr id="12" name="Rectangle 11"/>
-          <p:cNvSpPr/>
-          <p:nvPr/>
-        </p:nvSpPr>
-        <p:spPr>
-          <a:xfrm>
-            <a:off x="365760" y="3017520"/>
-            <a:ext cx="5623560" cy="1645920"/>
-          </a:xfrm>
-          <a:prstGeom prst="rect">
-            <a:avLst/>
-          </a:prstGeom>
-          <a:solidFill>
-            <a:srgbClr val="EEF3F9"/>
-          </a:solidFill>
-          <a:ln>
-            <a:noFill/>
-          </a:ln>
-        </p:spPr>
-        <p:style>
-          <a:lnRef idx="1">
-            <a:schemeClr val="accent1"/>
-          </a:lnRef>
-          <a:fillRef idx="3">
-            <a:schemeClr val="accent1"/>
-          </a:fillRef>
-          <a:effectRef idx="2">
-            <a:schemeClr val="accent1"/>
-          </a:effectRef>
-          <a:fontRef idx="minor">
-            <a:schemeClr val="lt1"/>
-          </a:fontRef>
-        </p:style>
-        <p:txBody>
-          <a:bodyPr rtlCol="0" anchor="ctr"/>
-          <a:lstStyle/>
-          <a:p>
-            <a:pPr algn="ctr"/>
-          </a:p>
-        </p:txBody>
-      </p:sp>
-      <p:sp>
-        <p:nvSpPr>
-          <p:cNvPr id="13" name="Rectangle 12"/>
-          <p:cNvSpPr/>
-          <p:nvPr/>
-        </p:nvSpPr>
-        <p:spPr>
-          <a:xfrm>
-            <a:off x="365760" y="3017520"/>
-            <a:ext cx="91440" cy="1645920"/>
-          </a:xfrm>
-          <a:prstGeom prst="rect">
-            <a:avLst/>
-          </a:prstGeom>
-          <a:solidFill>
-            <a:srgbClr val="C8102E"/>
-          </a:solidFill>
-          <a:ln>
-            <a:noFill/>
-          </a:ln>
-        </p:spPr>
-        <p:style>
-          <a:lnRef idx="1">
-            <a:schemeClr val="accent1"/>
-          </a:lnRef>
-          <a:fillRef idx="3">
-            <a:schemeClr val="accent1"/>
-          </a:fillRef>
-          <a:effectRef idx="2">
-            <a:schemeClr val="accent1"/>
-          </a:effectRef>
-          <a:fontRef idx="minor">
-            <a:schemeClr val="lt1"/>
-          </a:fontRef>
-        </p:style>
-        <p:txBody>
-          <a:bodyPr rtlCol="0" anchor="ctr"/>
-          <a:lstStyle/>
-          <a:p>
-            <a:pPr algn="ctr"/>
-          </a:p>
-        </p:txBody>
-      </p:sp>
-      <p:sp>
-        <p:nvSpPr>
-          <p:cNvPr id="14" name="TextBox 13"/>
-          <p:cNvSpPr txBox="1"/>
-          <p:nvPr/>
-        </p:nvSpPr>
-        <p:spPr>
-          <a:xfrm>
-            <a:off x="594360" y="3108960"/>
-            <a:ext cx="5303520" cy="1508760"/>
-          </a:xfrm>
-          <a:prstGeom prst="rect">
-            <a:avLst/>
-          </a:prstGeom>
-          <a:noFill/>
-        </p:spPr>
-        <p:txBody>
-          <a:bodyPr wrap="square">
-            <a:spAutoFit/>
-          </a:bodyPr>
-          <a:lstStyle/>
-          <a:p>
-            <a:pPr>
-              <a:spcAft>
-                <a:spcPts val="800"/>
-              </a:spcAft>
-            </a:pPr>
-            <a:r>
-              <a:rPr sz="1600" b="1">
-                <a:solidFill>
-                  <a:srgbClr val="0B1F3A"/>
-                </a:solidFill>
-              </a:rPr>
-              <a:t>Più squadre a vuoto</a:t>
-            </a:r>
-          </a:p>
-          <a:p>
-            <a:pPr>
-              <a:spcAft>
-                <a:spcPts val="800"/>
-              </a:spcAft>
-            </a:pPr>
-            <a:r>
-              <a:rPr sz="1600" b="0">
-                <a:solidFill>
-                  <a:srgbClr val="0B1F3A"/>
-                </a:solidFill>
-              </a:rPr>
-              <a:t>183 uscite inutili su 720, per non perdere guasti. Il rapporto 10 a 1 tra i costi è una nostra stima.</a:t>
-            </a:r>
-          </a:p>
-        </p:txBody>
-      </p:sp>
-      <p:sp>
-        <p:nvSpPr>
-          <p:cNvPr id="15" name="Rectangle 14"/>
-          <p:cNvSpPr/>
-          <p:nvPr/>
-        </p:nvSpPr>
-        <p:spPr>
-          <a:xfrm>
-            <a:off x="6172200" y="3017520"/>
-            <a:ext cx="5623560" cy="1645920"/>
-          </a:xfrm>
-          <a:prstGeom prst="rect">
-            <a:avLst/>
-          </a:prstGeom>
-          <a:solidFill>
-            <a:srgbClr val="EEF3F9"/>
-          </a:solidFill>
-          <a:ln>
-            <a:noFill/>
-          </a:ln>
-        </p:spPr>
-        <p:style>
-          <a:lnRef idx="1">
-            <a:schemeClr val="accent1"/>
-          </a:lnRef>
-          <a:fillRef idx="3">
-            <a:schemeClr val="accent1"/>
-          </a:fillRef>
-          <a:effectRef idx="2">
-            <a:schemeClr val="accent1"/>
-          </a:effectRef>
-          <a:fontRef idx="minor">
-            <a:schemeClr val="lt1"/>
-          </a:fontRef>
-        </p:style>
-        <p:txBody>
-          <a:bodyPr rtlCol="0" anchor="ctr"/>
-          <a:lstStyle/>
-          <a:p>
-            <a:pPr algn="ctr"/>
-          </a:p>
-        </p:txBody>
-      </p:sp>
-      <p:sp>
-        <p:nvSpPr>
-          <p:cNvPr id="16" name="Rectangle 15"/>
-          <p:cNvSpPr/>
-          <p:nvPr/>
-        </p:nvSpPr>
-        <p:spPr>
-          <a:xfrm>
-            <a:off x="6172200" y="3017520"/>
-            <a:ext cx="91440" cy="1645920"/>
-          </a:xfrm>
-          <a:prstGeom prst="rect">
-            <a:avLst/>
-          </a:prstGeom>
-          <a:solidFill>
-            <a:srgbClr val="C8102E"/>
-          </a:solidFill>
-          <a:ln>
-            <a:noFill/>
-          </a:ln>
-        </p:spPr>
-        <p:style>
-          <a:lnRef idx="1">
-            <a:schemeClr val="accent1"/>
-          </a:lnRef>
-          <a:fillRef idx="3">
-            <a:schemeClr val="accent1"/>
-          </a:fillRef>
-          <a:effectRef idx="2">
-            <a:schemeClr val="accent1"/>
-          </a:effectRef>
-          <a:fontRef idx="minor">
-            <a:schemeClr val="lt1"/>
-          </a:fontRef>
-        </p:style>
-        <p:txBody>
-          <a:bodyPr rtlCol="0" anchor="ctr"/>
-          <a:lstStyle/>
-          <a:p>
-            <a:pPr algn="ctr"/>
-          </a:p>
-        </p:txBody>
-      </p:sp>
-      <p:sp>
-        <p:nvSpPr>
-          <p:cNvPr id="17" name="TextBox 16"/>
-          <p:cNvSpPr txBox="1"/>
-          <p:nvPr/>
-        </p:nvSpPr>
-        <p:spPr>
-          <a:xfrm>
-            <a:off x="6400800" y="3108960"/>
-            <a:ext cx="5303520" cy="1508760"/>
-          </a:xfrm>
-          <a:prstGeom prst="rect">
-            <a:avLst/>
-          </a:prstGeom>
-          <a:noFill/>
-        </p:spPr>
-        <p:txBody>
-          <a:bodyPr wrap="square">
-            <a:spAutoFit/>
-          </a:bodyPr>
-          <a:lstStyle/>
-          <a:p>
-            <a:pPr>
-              <a:spcAft>
-                <a:spcPts val="800"/>
-              </a:spcAft>
-            </a:pPr>
-            <a:r>
-              <a:rPr sz="1600" b="1">
-                <a:solidFill>
-                  <a:srgbClr val="0B1F3A"/>
-                </a:solidFill>
-              </a:rPr>
-              <a:t>Il bias lo gestiscono le persone</a:t>
-            </a:r>
-          </a:p>
-          <a:p>
-            <a:pPr>
-              <a:spcAft>
-                <a:spcPts val="800"/>
-              </a:spcAft>
-            </a:pPr>
-            <a:r>
-              <a:rPr sz="1600" b="0">
-                <a:solidFill>
-                  <a:srgbClr val="0B1F3A"/>
-                </a:solidFill>
-              </a:rPr>
-              <a:t>Se approvano tutto, la supervisione serve a poco. Per questo misuriamo chi approva cosa.</a:t>
-            </a:r>
-          </a:p>
-        </p:txBody>
-      </p:sp>
-      <p:sp>
-        <p:nvSpPr>
-          <p:cNvPr id="18" name="Rectangle 17"/>
-          <p:cNvSpPr/>
-          <p:nvPr/>
-        </p:nvSpPr>
-        <p:spPr>
-          <a:xfrm>
-            <a:off x="365760" y="4800600"/>
-            <a:ext cx="5623560" cy="1645920"/>
-          </a:xfrm>
-          <a:prstGeom prst="rect">
-            <a:avLst/>
-          </a:prstGeom>
-          <a:solidFill>
-            <a:srgbClr val="EEF3F9"/>
-          </a:solidFill>
-          <a:ln>
-            <a:noFill/>
-          </a:ln>
-        </p:spPr>
-        <p:style>
-          <a:lnRef idx="1">
-            <a:schemeClr val="accent1"/>
-          </a:lnRef>
-          <a:fillRef idx="3">
-            <a:schemeClr val="accent1"/>
-          </a:fillRef>
-          <a:effectRef idx="2">
-            <a:schemeClr val="accent1"/>
-          </a:effectRef>
-          <a:fontRef idx="minor">
-            <a:schemeClr val="lt1"/>
-          </a:fontRef>
-        </p:style>
-        <p:txBody>
-          <a:bodyPr rtlCol="0" anchor="ctr"/>
-          <a:lstStyle/>
-          <a:p>
-            <a:pPr algn="ctr"/>
-          </a:p>
-        </p:txBody>
-      </p:sp>
-      <p:sp>
-        <p:nvSpPr>
-          <p:cNvPr id="19" name="Rectangle 18"/>
-          <p:cNvSpPr/>
-          <p:nvPr/>
-        </p:nvSpPr>
-        <p:spPr>
-          <a:xfrm>
-            <a:off x="365760" y="4800600"/>
-            <a:ext cx="91440" cy="1645920"/>
-          </a:xfrm>
-          <a:prstGeom prst="rect">
-            <a:avLst/>
-          </a:prstGeom>
-          <a:solidFill>
-            <a:srgbClr val="C8102E"/>
-          </a:solidFill>
-          <a:ln>
-            <a:noFill/>
-          </a:ln>
-        </p:spPr>
-        <p:style>
-          <a:lnRef idx="1">
-            <a:schemeClr val="accent1"/>
-          </a:lnRef>
-          <a:fillRef idx="3">
-            <a:schemeClr val="accent1"/>
-          </a:fillRef>
-          <a:effectRef idx="2">
-            <a:schemeClr val="accent1"/>
-          </a:effectRef>
-          <a:fontRef idx="minor">
-            <a:schemeClr val="lt1"/>
-          </a:fontRef>
-        </p:style>
-        <p:txBody>
-          <a:bodyPr rtlCol="0" anchor="ctr"/>
-          <a:lstStyle/>
-          <a:p>
-            <a:pPr algn="ctr"/>
-          </a:p>
-        </p:txBody>
-      </p:sp>
-      <p:sp>
-        <p:nvSpPr>
-          <p:cNvPr id="20" name="TextBox 19"/>
-          <p:cNvSpPr txBox="1"/>
-          <p:nvPr/>
-        </p:nvSpPr>
-        <p:spPr>
-          <a:xfrm>
-            <a:off x="594360" y="4892040"/>
-            <a:ext cx="5303520" cy="1508760"/>
-          </a:xfrm>
-          <a:prstGeom prst="rect">
-            <a:avLst/>
-          </a:prstGeom>
-          <a:noFill/>
-        </p:spPr>
-        <p:txBody>
-          <a:bodyPr wrap="square">
-            <a:spAutoFit/>
-          </a:bodyPr>
-          <a:lstStyle/>
-          <a:p>
-            <a:pPr>
-              <a:spcAft>
-                <a:spcPts val="800"/>
-              </a:spcAft>
-            </a:pPr>
-            <a:r>
-              <a:rPr sz="1600" b="1">
-                <a:solidFill>
-                  <a:srgbClr val="0B1F3A"/>
-                </a:solidFill>
-              </a:rPr>
-              <a:t>"Quanto è sicuro" è grezzo</a:t>
-            </a:r>
-          </a:p>
-          <a:p>
-            <a:pPr>
-              <a:spcAft>
-                <a:spcPts val="800"/>
-              </a:spcAft>
-            </a:pPr>
-            <a:r>
-              <a:rPr sz="1600" b="0">
-                <a:solidFill>
-                  <a:srgbClr val="0B1F3A"/>
-                </a:solidFill>
-              </a:rPr>
-              <a:t>Oggi ripete la probabilità; servirebbe misurare quanto le parti del modello sono d'accordo tra loro.</a:t>
-            </a:r>
-          </a:p>
-        </p:txBody>
-      </p:sp>
-      <p:sp>
-        <p:nvSpPr>
-          <p:cNvPr id="21" name="Rectangle 20"/>
-          <p:cNvSpPr/>
-          <p:nvPr/>
-        </p:nvSpPr>
-        <p:spPr>
-          <a:xfrm>
-            <a:off x="6172200" y="4800600"/>
-            <a:ext cx="5623560" cy="1645920"/>
-          </a:xfrm>
-          <a:prstGeom prst="rect">
-            <a:avLst/>
-          </a:prstGeom>
-          <a:solidFill>
-            <a:srgbClr val="EEF3F9"/>
-          </a:solidFill>
-          <a:ln>
-            <a:noFill/>
-          </a:ln>
-        </p:spPr>
-        <p:style>
-          <a:lnRef idx="1">
-            <a:schemeClr val="accent1"/>
-          </a:lnRef>
-          <a:fillRef idx="3">
-            <a:schemeClr val="accent1"/>
-          </a:fillRef>
-          <a:effectRef idx="2">
-            <a:schemeClr val="accent1"/>
-          </a:effectRef>
-          <a:fontRef idx="minor">
-            <a:schemeClr val="lt1"/>
-          </a:fontRef>
-        </p:style>
-        <p:txBody>
-          <a:bodyPr rtlCol="0" anchor="ctr"/>
-          <a:lstStyle/>
-          <a:p>
-            <a:pPr algn="ctr"/>
-          </a:p>
-        </p:txBody>
-      </p:sp>
-      <p:sp>
-        <p:nvSpPr>
-          <p:cNvPr id="22" name="Rectangle 21"/>
-          <p:cNvSpPr/>
-          <p:nvPr/>
-        </p:nvSpPr>
-        <p:spPr>
-          <a:xfrm>
-            <a:off x="6172200" y="4800600"/>
-            <a:ext cx="91440" cy="1645920"/>
-          </a:xfrm>
-          <a:prstGeom prst="rect">
-            <a:avLst/>
-          </a:prstGeom>
-          <a:solidFill>
-            <a:srgbClr val="C8102E"/>
-          </a:solidFill>
-          <a:ln>
-            <a:noFill/>
-          </a:ln>
-        </p:spPr>
-        <p:style>
-          <a:lnRef idx="1">
-            <a:schemeClr val="accent1"/>
-          </a:lnRef>
-          <a:fillRef idx="3">
-            <a:schemeClr val="accent1"/>
-          </a:fillRef>
-          <a:effectRef idx="2">
-            <a:schemeClr val="accent1"/>
-          </a:effectRef>
-          <a:fontRef idx="minor">
-            <a:schemeClr val="lt1"/>
-          </a:fontRef>
-        </p:style>
-        <p:txBody>
-          <a:bodyPr rtlCol="0" anchor="ctr"/>
-          <a:lstStyle/>
-          <a:p>
-            <a:pPr algn="ctr"/>
-          </a:p>
-        </p:txBody>
-      </p:sp>
-      <p:sp>
-        <p:nvSpPr>
-          <p:cNvPr id="23" name="TextBox 22"/>
-          <p:cNvSpPr txBox="1"/>
-          <p:nvPr/>
-        </p:nvSpPr>
-        <p:spPr>
-          <a:xfrm>
-            <a:off x="6400800" y="4892040"/>
-            <a:ext cx="5303520" cy="1508760"/>
-          </a:xfrm>
-          <a:prstGeom prst="rect">
-            <a:avLst/>
-          </a:prstGeom>
-          <a:noFill/>
-        </p:spPr>
-        <p:txBody>
-          <a:bodyPr wrap="square">
-            <a:spAutoFit/>
-          </a:bodyPr>
-          <a:lstStyle/>
-          <a:p>
-            <a:pPr>
-              <a:spcAft>
-                <a:spcPts val="800"/>
-              </a:spcAft>
-            </a:pPr>
-            <a:r>
-              <a:rPr sz="1600" b="1">
-                <a:solidFill>
-                  <a:srgbClr val="0B1F3A"/>
-                </a:solidFill>
-              </a:rPr>
-              <a:t>Prototipo, non produzione</a:t>
-            </a:r>
-          </a:p>
-          <a:p>
-            <a:pPr>
-              <a:spcAft>
-                <a:spcPts val="800"/>
-              </a:spcAft>
-            </a:pPr>
-            <a:r>
-              <a:rPr sz="1600" b="0">
-                <a:solidFill>
-                  <a:srgbClr val="0B1F3A"/>
-                </a:solidFill>
-              </a:rPr>
-              <a:t>Tempo simulato, 2 decisioni nelle Isole ancora automatiche, registro riscrivibile da capo da chi ha accesso al file.</a:t>
+              <a:rPr sz="1300" b="0">
+                <a:solidFill>
+                  <a:srgbClr val="0B1F3A"/>
+                </a:solidFill>
+              </a:rPr>
+              <a:t>Anche l'umano sbaglia: delle 6 correzioni, 2 sono andate contro un guasto vero, entrambe nelle Isole. Per questo la dashboard misura le correzioni per zona: è proprio lì che il segnale è salito.</a:t>
             </a:r>
           </a:p>
         </p:txBody>
@@ -9251,7 +9438,7 @@
                   <a:srgbClr val="FFFFFF"/>
                 </a:solidFill>
               </a:rPr>
-              <a:t>AI Act: ruoli e domande aperte</a:t>
+              <a:t>Chi controlla i controllori</a:t>
             </a:r>
           </a:p>
         </p:txBody>
@@ -9289,7 +9476,7 @@
                   <a:srgbClr val="C9D8EA"/>
                 </a:solidFill>
               </a:rPr>
-              <a:t>Discussione</a:t>
+              <a:t>Art. 14(4)(b) · A2-A4 · C3</a:t>
             </a:r>
           </a:p>
         </p:txBody>
@@ -9337,15 +9524,73 @@
           </a:p>
         </p:txBody>
       </p:sp>
-      <p:sp>
-        <p:nvSpPr>
-          <p:cNvPr id="6" name="TextBox 5"/>
+      <p:pic>
+        <p:nvPicPr>
+          <p:cNvPr id="6" name="Picture 5" descr="kpi_3.png"/>
+          <p:cNvPicPr>
+            <a:picLocks noChangeAspect="1"/>
+          </p:cNvPicPr>
+          <p:nvPr/>
+        </p:nvPicPr>
+        <p:blipFill>
+          <a:blip r:embed="rId2"/>
+          <a:stretch>
+            <a:fillRect/>
+          </a:stretch>
+        </p:blipFill>
+        <p:spPr>
+          <a:xfrm>
+            <a:off x="365760" y="1234440"/>
+            <a:ext cx="5760720" cy="2014086"/>
+          </a:xfrm>
+          <a:prstGeom prst="rect">
+            <a:avLst/>
+          </a:prstGeom>
+          <a:ln w="12700">
+            <a:solidFill>
+              <a:srgbClr val="D0D5DD"/>
+            </a:solidFill>
+          </a:ln>
+        </p:spPr>
+      </p:pic>
+      <p:pic>
+        <p:nvPicPr>
+          <p:cNvPr id="7" name="Picture 6" descr="bias_5.png"/>
+          <p:cNvPicPr>
+            <a:picLocks noChangeAspect="1"/>
+          </p:cNvPicPr>
+          <p:nvPr/>
+        </p:nvPicPr>
+        <p:blipFill>
+          <a:blip r:embed="rId3"/>
+          <a:stretch>
+            <a:fillRect/>
+          </a:stretch>
+        </p:blipFill>
+        <p:spPr>
+          <a:xfrm>
+            <a:off x="373320" y="3840480"/>
+            <a:ext cx="5745600" cy="1828800"/>
+          </a:xfrm>
+          <a:prstGeom prst="rect">
+            <a:avLst/>
+          </a:prstGeom>
+          <a:ln w="12700">
+            <a:solidFill>
+              <a:srgbClr val="D0D5DD"/>
+            </a:solidFill>
+          </a:ln>
+        </p:spPr>
+      </p:pic>
+      <p:sp>
+        <p:nvSpPr>
+          <p:cNvPr id="8" name="TextBox 7"/>
           <p:cNvSpPr txBox="1"/>
           <p:nvPr/>
         </p:nvSpPr>
         <p:spPr>
           <a:xfrm>
-            <a:off x="548640" y="1280160"/>
+            <a:off x="6400800" y="1280160"/>
             <a:ext cx="5394960" cy="5303520"/>
           </a:xfrm>
           <a:prstGeom prst="rect">
@@ -9365,20 +9610,28 @@
               </a:spcAft>
             </a:pPr>
             <a:r>
-              <a:rPr sz="1700" b="1">
-                <a:solidFill>
-                  <a:srgbClr val="0B1F3A"/>
-                </a:solidFill>
-              </a:rPr>
-              <a:t>Chi costruisce il sistema</a:t>
-            </a:r>
-            <a:r>
-              <a:rPr sz="1700" b="0">
-                <a:solidFill>
-                  <a:srgbClr val="0B1F3A"/>
-                </a:solidFill>
-              </a:rPr>
-              <a:t> (provider): risponde di dati, documentazione, registro, supervisione già prevista nel progetto, controlli dopo il rilascio, segnalazione degli incidenti gravi.</a:t>
+              <a:rPr sz="1500" b="1">
+                <a:solidFill>
+                  <a:srgbClr val="0F6CBD"/>
+                </a:solidFill>
+              </a:rPr>
+              <a:t>•  </a:t>
+            </a:r>
+            <a:r>
+              <a:rPr sz="1500" b="1">
+                <a:solidFill>
+                  <a:srgbClr val="0B1F3A"/>
+                </a:solidFill>
+              </a:rPr>
+              <a:t>Per persona</a:t>
+            </a:r>
+            <a:r>
+              <a:rPr sz="1500" b="0">
+                <a:solidFill>
+                  <a:srgbClr val="0B1F3A"/>
+                </a:solidFill>
+              </a:rPr>
+              <a:t> (tabella in alto): il prudente OP-031 approva 4 volte su 10, il frettoloso OP-022 8 su 10. La dashboard distingue i due stili.</a:t>
             </a:r>
           </a:p>
           <a:p>
@@ -9388,20 +9641,36 @@
               </a:spcAft>
             </a:pPr>
             <a:r>
-              <a:rPr sz="1700" b="1">
-                <a:solidFill>
-                  <a:srgbClr val="0B1F3A"/>
-                </a:solidFill>
-              </a:rPr>
-              <a:t>Chi lo usa</a:t>
-            </a:r>
-            <a:r>
-              <a:rPr sz="1700" b="0">
-                <a:solidFill>
-                  <a:srgbClr val="0B1F3A"/>
-                </a:solidFill>
-              </a:rPr>
-              <a:t> (deployer): l'operatore di rete. Persone formate, uso come da istruzioni, registro conservato almeno 6 mesi, lavoratori informati.</a:t>
+              <a:rPr sz="1500" b="1">
+                <a:solidFill>
+                  <a:srgbClr val="0F6CBD"/>
+                </a:solidFill>
+              </a:rPr>
+              <a:t>•  </a:t>
+            </a:r>
+            <a:r>
+              <a:rPr sz="1500" b="0">
+                <a:solidFill>
+                  <a:srgbClr val="0B1F3A"/>
+                </a:solidFill>
+              </a:rPr>
+              <a:t>Dopo la motivazione troppo breve di OP-022 l'allarme "possibile approvazione a occhi chiusi" è </a:t>
+            </a:r>
+            <a:r>
+              <a:rPr sz="1500" b="1">
+                <a:solidFill>
+                  <a:srgbClr val="0B1F3A"/>
+                </a:solidFill>
+              </a:rPr>
+              <a:t>scattato davvero</a:t>
+            </a:r>
+            <a:r>
+              <a:rPr sz="1500" b="0">
+                <a:solidFill>
+                  <a:srgbClr val="0B1F3A"/>
+                </a:solidFill>
+              </a:rPr>
+              <a:t>; con le decisioni successive, ben motivate, è rientrato.</a:t>
             </a:r>
           </a:p>
           <a:p>
@@ -9411,96 +9680,30 @@
               </a:spcAft>
             </a:pPr>
             <a:r>
-              <a:rPr sz="1700" b="0">
-                <a:solidFill>
-                  <a:srgbClr val="0B1F3A"/>
-                </a:solidFill>
-              </a:rPr>
-              <a:t>Se l'azienda lo sviluppa in casa e lo usa, è </a:t>
-            </a:r>
-            <a:r>
-              <a:rPr sz="1700" b="1">
-                <a:solidFill>
-                  <a:srgbClr val="0B1F3A"/>
-                </a:solidFill>
-              </a:rPr>
-              <a:t>tutte e due le cose</a:t>
-            </a:r>
-            <a:r>
-              <a:rPr sz="1700" b="0">
-                <a:solidFill>
-                  <a:srgbClr val="0B1F3A"/>
-                </a:solidFill>
-              </a:rPr>
-              <a:t>.</a:t>
-            </a:r>
-          </a:p>
-        </p:txBody>
-      </p:sp>
-      <p:sp>
-        <p:nvSpPr>
-          <p:cNvPr id="7" name="Rectangle 6"/>
-          <p:cNvSpPr/>
-          <p:nvPr/>
-        </p:nvSpPr>
-        <p:spPr>
-          <a:xfrm>
-            <a:off x="6309360" y="1280160"/>
-            <a:ext cx="5486400" cy="5120640"/>
-          </a:xfrm>
-          <a:prstGeom prst="rect">
-            <a:avLst/>
-          </a:prstGeom>
-          <a:solidFill>
-            <a:srgbClr val="EEF3F9"/>
-          </a:solidFill>
-          <a:ln>
-            <a:noFill/>
-          </a:ln>
-        </p:spPr>
-        <p:style>
-          <a:lnRef idx="1">
-            <a:schemeClr val="accent1"/>
-          </a:lnRef>
-          <a:fillRef idx="3">
-            <a:schemeClr val="accent1"/>
-          </a:fillRef>
-          <a:effectRef idx="2">
-            <a:schemeClr val="accent1"/>
-          </a:effectRef>
-          <a:fontRef idx="minor">
-            <a:schemeClr val="lt1"/>
-          </a:fontRef>
-        </p:style>
-        <p:txBody>
-          <a:bodyPr rtlCol="0" anchor="ctr"/>
-          <a:lstStyle/>
-          <a:p>
-            <a:pPr algn="ctr"/>
-          </a:p>
-        </p:txBody>
-      </p:sp>
-      <p:sp>
-        <p:nvSpPr>
-          <p:cNvPr id="8" name="TextBox 7"/>
-          <p:cNvSpPr txBox="1"/>
-          <p:nvPr/>
-        </p:nvSpPr>
-        <p:spPr>
-          <a:xfrm>
-            <a:off x="6492240" y="1371600"/>
-            <a:ext cx="5212080" cy="4937760"/>
-          </a:xfrm>
-          <a:prstGeom prst="rect">
-            <a:avLst/>
-          </a:prstGeom>
-          <a:noFill/>
-        </p:spPr>
-        <p:txBody>
-          <a:bodyPr wrap="square">
-            <a:spAutoFit/>
-          </a:bodyPr>
-          <a:lstStyle/>
+              <a:rPr sz="1500" b="1">
+                <a:solidFill>
+                  <a:srgbClr val="0F6CBD"/>
+                </a:solidFill>
+              </a:rPr>
+              <a:t>•  </a:t>
+            </a:r>
+            <a:r>
+              <a:rPr sz="1500" b="1">
+                <a:solidFill>
+                  <a:srgbClr val="0B1F3A"/>
+                </a:solidFill>
+              </a:rPr>
+              <a:t>Per zona</a:t>
+            </a:r>
+            <a:r>
+              <a:rPr sz="1500" b="0">
+                <a:solidFill>
+                  <a:srgbClr val="0B1F3A"/>
+                </a:solidFill>
+              </a:rPr>
+              <a:t> (tabella in basso): nelle Isole le persone correggono il sistema 1 volta su 2, contro 1 su 3 in media. Sotto la soglia d'allarme (il doppio), ma è il segnale giusto: lì 2 correzioni su 3 erano sbagliate.</a:t>
+            </a:r>
+          </a:p>
           <a:p>
             <a:pPr>
               <a:spcAft>
@@ -9508,22 +9711,7 @@
               </a:spcAft>
             </a:pPr>
             <a:r>
-              <a:rPr sz="1600" b="1">
-                <a:solidFill>
-                  <a:srgbClr val="0B1F3A"/>
-                </a:solidFill>
-              </a:rPr>
-              <a:t>Spunti per la discussione</a:t>
-            </a:r>
-          </a:p>
-          <a:p>
-            <a:pPr>
-              <a:spcAft>
-                <a:spcPts val="800"/>
-              </a:spcAft>
-            </a:pPr>
-            <a:r>
-              <a:rPr sz="1600" b="1">
+              <a:rPr sz="1500" b="1">
                 <a:solidFill>
                   <a:srgbClr val="0F6CBD"/>
                 </a:solidFill>
@@ -9531,129 +9719,28 @@
               <a:t>•  </a:t>
             </a:r>
             <a:r>
-              <a:rPr sz="1600" b="0">
-                <a:solidFill>
-                  <a:srgbClr val="0B1F3A"/>
-                </a:solidFill>
-              </a:rPr>
-              <a:t>Un sistema che </a:t>
-            </a:r>
-            <a:r>
-              <a:rPr sz="1600" b="1">
-                <a:solidFill>
-                  <a:srgbClr val="0B1F3A"/>
-                </a:solidFill>
-              </a:rPr>
-              <a:t>suggerisce</a:t>
-            </a:r>
-            <a:r>
-              <a:rPr sz="1600" b="0">
-                <a:solidFill>
-                  <a:srgbClr val="0B1F3A"/>
-                </a:solidFill>
-              </a:rPr>
-              <a:t> e lascia decidere le persone è davvero ad alto rischio? (Art. 6(3))</a:t>
-            </a:r>
-          </a:p>
-          <a:p>
-            <a:pPr>
-              <a:spcAft>
-                <a:spcPts val="800"/>
-              </a:spcAft>
-            </a:pPr>
-            <a:r>
-              <a:rPr sz="1600" b="1">
-                <a:solidFill>
-                  <a:srgbClr val="0F6CBD"/>
-                </a:solidFill>
-              </a:rPr>
-              <a:t>•  </a:t>
-            </a:r>
-            <a:r>
-              <a:rPr sz="1600" b="0">
-                <a:solidFill>
-                  <a:srgbClr val="0B1F3A"/>
-                </a:solidFill>
-              </a:rPr>
-              <a:t>Misurare quanto ogni persona approva senza leggere è </a:t>
-            </a:r>
-            <a:r>
-              <a:rPr sz="1600" b="1">
-                <a:solidFill>
-                  <a:srgbClr val="0B1F3A"/>
-                </a:solidFill>
-              </a:rPr>
-              <a:t>controllo dei lavoratori</a:t>
-            </a:r>
-            <a:r>
-              <a:rPr sz="1600" b="0">
-                <a:solidFill>
-                  <a:srgbClr val="0B1F3A"/>
-                </a:solidFill>
-              </a:rPr>
-              <a:t>? (Art. 26(7), Statuto art. 4)</a:t>
-            </a:r>
-          </a:p>
-          <a:p>
-            <a:pPr>
-              <a:spcAft>
-                <a:spcPts val="800"/>
-              </a:spcAft>
-            </a:pPr>
-            <a:r>
-              <a:rPr sz="1600" b="1">
-                <a:solidFill>
-                  <a:srgbClr val="0F6CBD"/>
-                </a:solidFill>
-              </a:rPr>
-              <a:t>•  </a:t>
-            </a:r>
-            <a:r>
-              <a:rPr sz="1600" b="0">
-                <a:solidFill>
-                  <a:srgbClr val="0B1F3A"/>
-                </a:solidFill>
-              </a:rPr>
-              <a:t>Un servizio peggiore al Sud tocca i diritti dei cittadini, ma la valutazione d'impatto sui diritti non è richiesta (Art. 27).</a:t>
-            </a:r>
-          </a:p>
-          <a:p>
-            <a:pPr>
-              <a:spcAft>
-                <a:spcPts val="800"/>
-              </a:spcAft>
-            </a:pPr>
-            <a:r>
-              <a:rPr sz="1600" b="1">
-                <a:solidFill>
-                  <a:srgbClr val="0F6CBD"/>
-                </a:solidFill>
-              </a:rPr>
-              <a:t>•  </a:t>
-            </a:r>
-            <a:r>
-              <a:rPr sz="1600" b="0">
-                <a:solidFill>
-                  <a:srgbClr val="0B1F3A"/>
-                </a:solidFill>
-              </a:rPr>
-              <a:t>Dati di un'infrastruttura critica mandati a un </a:t>
-            </a:r>
-            <a:r>
-              <a:rPr sz="1600" b="1">
-                <a:solidFill>
-                  <a:srgbClr val="0B1F3A"/>
-                </a:solidFill>
-              </a:rPr>
-              <a:t>LLM nel cloud</a:t>
-            </a:r>
-            <a:r>
-              <a:rPr sz="1600" b="0">
-                <a:solidFill>
-                  <a:srgbClr val="0B1F3A"/>
-                </a:solidFill>
-              </a:rPr>
-              <a:t>: riservatezza e dipendenza da un fornitore.</a:t>
+              <a:rPr sz="1500" b="0">
+                <a:solidFill>
+                  <a:srgbClr val="0B1F3A"/>
+                </a:solidFill>
+              </a:rPr>
+              <a:t>Queste metriche misurano </a:t>
+            </a:r>
+            <a:r>
+              <a:rPr sz="1500" b="1">
+                <a:solidFill>
+                  <a:srgbClr val="0B1F3A"/>
+                </a:solidFill>
+              </a:rPr>
+              <a:t>persone</a:t>
+            </a:r>
+            <a:r>
+              <a:rPr sz="1500" b="0">
+                <a:solidFill>
+                  <a:srgbClr val="0B1F3A"/>
+                </a:solidFill>
+              </a:rPr>
+              <a:t>: in un'azienda vera servono informativa ai lavoratori e regole chiare su come si usano.</a:t>
             </a:r>
           </a:p>
         </p:txBody>
@@ -9685,7 +9772,7 @@
         <p:spPr>
           <a:xfrm>
             <a:off x="0" y="0"/>
-            <a:ext cx="12191695" cy="6858000"/>
+            <a:ext cx="12191695" cy="914400"/>
           </a:xfrm>
           <a:prstGeom prst="rect">
             <a:avLst/>
@@ -9727,8 +9814,8 @@
         </p:nvSpPr>
         <p:spPr>
           <a:xfrm>
-            <a:off x="731520" y="2011680"/>
-            <a:ext cx="10698480" cy="1828800"/>
+            <a:off x="457200" y="164592"/>
+            <a:ext cx="9418320" cy="640080"/>
           </a:xfrm>
           <a:prstGeom prst="rect">
             <a:avLst/>
@@ -9747,12 +9834,12 @@
               </a:spcAft>
             </a:pPr>
             <a:r>
-              <a:rPr sz="3200" b="1">
+              <a:rPr sz="2800" b="1">
                 <a:solidFill>
                   <a:srgbClr val="FFFFFF"/>
                 </a:solidFill>
               </a:rPr>
-              <a:t>In un'infrastruttura critica un sistema accurato ma non supervisionabile è pericoloso.</a:t>
+              <a:t>Cosa NON abbiamo risolto</a:t>
             </a:r>
           </a:p>
         </p:txBody>
@@ -9765,8 +9852,8 @@
         </p:nvSpPr>
         <p:spPr>
           <a:xfrm>
-            <a:off x="731520" y="3657600"/>
-            <a:ext cx="10698480" cy="1371600"/>
+            <a:off x="9144000" y="274320"/>
+            <a:ext cx="2834640" cy="457200"/>
           </a:xfrm>
           <a:prstGeom prst="rect">
             <a:avLst/>
@@ -9779,20 +9866,1100 @@
           </a:bodyPr>
           <a:lstStyle/>
           <a:p>
+            <a:pPr algn="r">
+              <a:spcAft>
+                <a:spcPts val="800"/>
+              </a:spcAft>
+            </a:pPr>
+            <a:r>
+              <a:rPr sz="1300" b="0">
+                <a:solidFill>
+                  <a:srgbClr val="C9D8EA"/>
+                </a:solidFill>
+              </a:rPr>
+              <a:t>10% del punteggio</a:t>
+            </a:r>
+          </a:p>
+        </p:txBody>
+      </p:sp>
+      <p:sp>
+        <p:nvSpPr>
+          <p:cNvPr id="5" name="Rectangle 4"/>
+          <p:cNvSpPr/>
+          <p:nvPr/>
+        </p:nvSpPr>
+        <p:spPr>
+          <a:xfrm>
+            <a:off x="0" y="914400"/>
+            <a:ext cx="12191695" cy="54864"/>
+          </a:xfrm>
+          <a:prstGeom prst="rect">
+            <a:avLst/>
+          </a:prstGeom>
+          <a:solidFill>
+            <a:srgbClr val="0F6CBD"/>
+          </a:solidFill>
+          <a:ln>
+            <a:noFill/>
+          </a:ln>
+        </p:spPr>
+        <p:style>
+          <a:lnRef idx="1">
+            <a:schemeClr val="accent1"/>
+          </a:lnRef>
+          <a:fillRef idx="3">
+            <a:schemeClr val="accent1"/>
+          </a:fillRef>
+          <a:effectRef idx="2">
+            <a:schemeClr val="accent1"/>
+          </a:effectRef>
+          <a:fontRef idx="minor">
+            <a:schemeClr val="lt1"/>
+          </a:fontRef>
+        </p:style>
+        <p:txBody>
+          <a:bodyPr rtlCol="0" anchor="ctr"/>
+          <a:lstStyle/>
+          <a:p>
+            <a:pPr algn="ctr"/>
+          </a:p>
+        </p:txBody>
+      </p:sp>
+      <p:sp>
+        <p:nvSpPr>
+          <p:cNvPr id="6" name="Rectangle 5"/>
+          <p:cNvSpPr/>
+          <p:nvPr/>
+        </p:nvSpPr>
+        <p:spPr>
+          <a:xfrm>
+            <a:off x="365760" y="1234440"/>
+            <a:ext cx="5623560" cy="1645920"/>
+          </a:xfrm>
+          <a:prstGeom prst="rect">
+            <a:avLst/>
+          </a:prstGeom>
+          <a:solidFill>
+            <a:srgbClr val="EEF3F9"/>
+          </a:solidFill>
+          <a:ln>
+            <a:noFill/>
+          </a:ln>
+        </p:spPr>
+        <p:style>
+          <a:lnRef idx="1">
+            <a:schemeClr val="accent1"/>
+          </a:lnRef>
+          <a:fillRef idx="3">
+            <a:schemeClr val="accent1"/>
+          </a:fillRef>
+          <a:effectRef idx="2">
+            <a:schemeClr val="accent1"/>
+          </a:effectRef>
+          <a:fontRef idx="minor">
+            <a:schemeClr val="lt1"/>
+          </a:fontRef>
+        </p:style>
+        <p:txBody>
+          <a:bodyPr rtlCol="0" anchor="ctr"/>
+          <a:lstStyle/>
+          <a:p>
+            <a:pPr algn="ctr"/>
+          </a:p>
+        </p:txBody>
+      </p:sp>
+      <p:sp>
+        <p:nvSpPr>
+          <p:cNvPr id="7" name="Rectangle 6"/>
+          <p:cNvSpPr/>
+          <p:nvPr/>
+        </p:nvSpPr>
+        <p:spPr>
+          <a:xfrm>
+            <a:off x="365760" y="1234440"/>
+            <a:ext cx="91440" cy="1645920"/>
+          </a:xfrm>
+          <a:prstGeom prst="rect">
+            <a:avLst/>
+          </a:prstGeom>
+          <a:solidFill>
+            <a:srgbClr val="C8102E"/>
+          </a:solidFill>
+          <a:ln>
+            <a:noFill/>
+          </a:ln>
+        </p:spPr>
+        <p:style>
+          <a:lnRef idx="1">
+            <a:schemeClr val="accent1"/>
+          </a:lnRef>
+          <a:fillRef idx="3">
+            <a:schemeClr val="accent1"/>
+          </a:fillRef>
+          <a:effectRef idx="2">
+            <a:schemeClr val="accent1"/>
+          </a:effectRef>
+          <a:fontRef idx="minor">
+            <a:schemeClr val="lt1"/>
+          </a:fontRef>
+        </p:style>
+        <p:txBody>
+          <a:bodyPr rtlCol="0" anchor="ctr"/>
+          <a:lstStyle/>
+          <a:p>
+            <a:pPr algn="ctr"/>
+          </a:p>
+        </p:txBody>
+      </p:sp>
+      <p:sp>
+        <p:nvSpPr>
+          <p:cNvPr id="8" name="TextBox 7"/>
+          <p:cNvSpPr txBox="1"/>
+          <p:nvPr/>
+        </p:nvSpPr>
+        <p:spPr>
+          <a:xfrm>
+            <a:off x="594360" y="1325880"/>
+            <a:ext cx="5303520" cy="1508760"/>
+          </a:xfrm>
+          <a:prstGeom prst="rect">
+            <a:avLst/>
+          </a:prstGeom>
+          <a:noFill/>
+        </p:spPr>
+        <p:txBody>
+          <a:bodyPr wrap="square">
+            <a:spAutoFit/>
+          </a:bodyPr>
+          <a:lstStyle/>
+          <a:p>
             <a:pPr>
               <a:spcAft>
                 <a:spcPts val="800"/>
               </a:spcAft>
             </a:pPr>
             <a:r>
-              <a:rPr sz="2200" b="0">
+              <a:rPr sz="1600" b="1">
+                <a:solidFill>
+                  <a:srgbClr val="0B1F3A"/>
+                </a:solidFill>
+              </a:rPr>
+              <a:t>Il Sud resta un'ipotesi</a:t>
+            </a:r>
+          </a:p>
+          <a:p>
+            <a:pPr>
+              <a:spcAft>
+                <a:spcPts val="800"/>
+              </a:spcAft>
+            </a:pPr>
+            <a:r>
+              <a:rPr sz="1600" b="0">
+                <a:solidFill>
+                  <a:srgbClr val="0B1F3A"/>
+                </a:solidFill>
+              </a:rPr>
+              <a:t>È la spiegazione più probabile, ma va verificata con chi registra i guasti sul territorio.</a:t>
+            </a:r>
+          </a:p>
+        </p:txBody>
+      </p:sp>
+      <p:sp>
+        <p:nvSpPr>
+          <p:cNvPr id="9" name="Rectangle 8"/>
+          <p:cNvSpPr/>
+          <p:nvPr/>
+        </p:nvSpPr>
+        <p:spPr>
+          <a:xfrm>
+            <a:off x="6172200" y="1234440"/>
+            <a:ext cx="5623560" cy="1645920"/>
+          </a:xfrm>
+          <a:prstGeom prst="rect">
+            <a:avLst/>
+          </a:prstGeom>
+          <a:solidFill>
+            <a:srgbClr val="EEF3F9"/>
+          </a:solidFill>
+          <a:ln>
+            <a:noFill/>
+          </a:ln>
+        </p:spPr>
+        <p:style>
+          <a:lnRef idx="1">
+            <a:schemeClr val="accent1"/>
+          </a:lnRef>
+          <a:fillRef idx="3">
+            <a:schemeClr val="accent1"/>
+          </a:fillRef>
+          <a:effectRef idx="2">
+            <a:schemeClr val="accent1"/>
+          </a:effectRef>
+          <a:fontRef idx="minor">
+            <a:schemeClr val="lt1"/>
+          </a:fontRef>
+        </p:style>
+        <p:txBody>
+          <a:bodyPr rtlCol="0" anchor="ctr"/>
+          <a:lstStyle/>
+          <a:p>
+            <a:pPr algn="ctr"/>
+          </a:p>
+        </p:txBody>
+      </p:sp>
+      <p:sp>
+        <p:nvSpPr>
+          <p:cNvPr id="10" name="Rectangle 9"/>
+          <p:cNvSpPr/>
+          <p:nvPr/>
+        </p:nvSpPr>
+        <p:spPr>
+          <a:xfrm>
+            <a:off x="6172200" y="1234440"/>
+            <a:ext cx="91440" cy="1645920"/>
+          </a:xfrm>
+          <a:prstGeom prst="rect">
+            <a:avLst/>
+          </a:prstGeom>
+          <a:solidFill>
+            <a:srgbClr val="C8102E"/>
+          </a:solidFill>
+          <a:ln>
+            <a:noFill/>
+          </a:ln>
+        </p:spPr>
+        <p:style>
+          <a:lnRef idx="1">
+            <a:schemeClr val="accent1"/>
+          </a:lnRef>
+          <a:fillRef idx="3">
+            <a:schemeClr val="accent1"/>
+          </a:fillRef>
+          <a:effectRef idx="2">
+            <a:schemeClr val="accent1"/>
+          </a:effectRef>
+          <a:fontRef idx="minor">
+            <a:schemeClr val="lt1"/>
+          </a:fontRef>
+        </p:style>
+        <p:txBody>
+          <a:bodyPr rtlCol="0" anchor="ctr"/>
+          <a:lstStyle/>
+          <a:p>
+            <a:pPr algn="ctr"/>
+          </a:p>
+        </p:txBody>
+      </p:sp>
+      <p:sp>
+        <p:nvSpPr>
+          <p:cNvPr id="11" name="TextBox 10"/>
+          <p:cNvSpPr txBox="1"/>
+          <p:nvPr/>
+        </p:nvSpPr>
+        <p:spPr>
+          <a:xfrm>
+            <a:off x="6400800" y="1325880"/>
+            <a:ext cx="5303520" cy="1508760"/>
+          </a:xfrm>
+          <a:prstGeom prst="rect">
+            <a:avLst/>
+          </a:prstGeom>
+          <a:noFill/>
+        </p:spPr>
+        <p:txBody>
+          <a:bodyPr wrap="square">
+            <a:spAutoFit/>
+          </a:bodyPr>
+          <a:lstStyle/>
+          <a:p>
+            <a:pPr>
+              <a:spcAft>
+                <a:spcPts val="800"/>
+              </a:spcAft>
+            </a:pPr>
+            <a:r>
+              <a:rPr sz="1600" b="1">
+                <a:solidFill>
+                  <a:srgbClr val="0B1F3A"/>
+                </a:solidFill>
+              </a:rPr>
+              <a:t>Alcuni guasti arrivano senza preavviso</a:t>
+            </a:r>
+          </a:p>
+          <a:p>
+            <a:pPr>
+              <a:spcAft>
+                <a:spcPts val="800"/>
+              </a:spcAft>
+            </a:pPr>
+            <a:r>
+              <a:rPr sz="1600" b="0">
+                <a:solidFill>
+                  <a:srgbClr val="0B1F3A"/>
+                </a:solidFill>
+              </a:rPr>
+              <a:t>Se i sensori non vedono nulla, nessuna regola li può prevedere.</a:t>
+            </a:r>
+          </a:p>
+        </p:txBody>
+      </p:sp>
+      <p:sp>
+        <p:nvSpPr>
+          <p:cNvPr id="12" name="Rectangle 11"/>
+          <p:cNvSpPr/>
+          <p:nvPr/>
+        </p:nvSpPr>
+        <p:spPr>
+          <a:xfrm>
+            <a:off x="365760" y="3017520"/>
+            <a:ext cx="5623560" cy="1645920"/>
+          </a:xfrm>
+          <a:prstGeom prst="rect">
+            <a:avLst/>
+          </a:prstGeom>
+          <a:solidFill>
+            <a:srgbClr val="EEF3F9"/>
+          </a:solidFill>
+          <a:ln>
+            <a:noFill/>
+          </a:ln>
+        </p:spPr>
+        <p:style>
+          <a:lnRef idx="1">
+            <a:schemeClr val="accent1"/>
+          </a:lnRef>
+          <a:fillRef idx="3">
+            <a:schemeClr val="accent1"/>
+          </a:fillRef>
+          <a:effectRef idx="2">
+            <a:schemeClr val="accent1"/>
+          </a:effectRef>
+          <a:fontRef idx="minor">
+            <a:schemeClr val="lt1"/>
+          </a:fontRef>
+        </p:style>
+        <p:txBody>
+          <a:bodyPr rtlCol="0" anchor="ctr"/>
+          <a:lstStyle/>
+          <a:p>
+            <a:pPr algn="ctr"/>
+          </a:p>
+        </p:txBody>
+      </p:sp>
+      <p:sp>
+        <p:nvSpPr>
+          <p:cNvPr id="13" name="Rectangle 12"/>
+          <p:cNvSpPr/>
+          <p:nvPr/>
+        </p:nvSpPr>
+        <p:spPr>
+          <a:xfrm>
+            <a:off x="365760" y="3017520"/>
+            <a:ext cx="91440" cy="1645920"/>
+          </a:xfrm>
+          <a:prstGeom prst="rect">
+            <a:avLst/>
+          </a:prstGeom>
+          <a:solidFill>
+            <a:srgbClr val="C8102E"/>
+          </a:solidFill>
+          <a:ln>
+            <a:noFill/>
+          </a:ln>
+        </p:spPr>
+        <p:style>
+          <a:lnRef idx="1">
+            <a:schemeClr val="accent1"/>
+          </a:lnRef>
+          <a:fillRef idx="3">
+            <a:schemeClr val="accent1"/>
+          </a:fillRef>
+          <a:effectRef idx="2">
+            <a:schemeClr val="accent1"/>
+          </a:effectRef>
+          <a:fontRef idx="minor">
+            <a:schemeClr val="lt1"/>
+          </a:fontRef>
+        </p:style>
+        <p:txBody>
+          <a:bodyPr rtlCol="0" anchor="ctr"/>
+          <a:lstStyle/>
+          <a:p>
+            <a:pPr algn="ctr"/>
+          </a:p>
+        </p:txBody>
+      </p:sp>
+      <p:sp>
+        <p:nvSpPr>
+          <p:cNvPr id="14" name="TextBox 13"/>
+          <p:cNvSpPr txBox="1"/>
+          <p:nvPr/>
+        </p:nvSpPr>
+        <p:spPr>
+          <a:xfrm>
+            <a:off x="594360" y="3108960"/>
+            <a:ext cx="5303520" cy="1508760"/>
+          </a:xfrm>
+          <a:prstGeom prst="rect">
+            <a:avLst/>
+          </a:prstGeom>
+          <a:noFill/>
+        </p:spPr>
+        <p:txBody>
+          <a:bodyPr wrap="square">
+            <a:spAutoFit/>
+          </a:bodyPr>
+          <a:lstStyle/>
+          <a:p>
+            <a:pPr>
+              <a:spcAft>
+                <a:spcPts val="800"/>
+              </a:spcAft>
+            </a:pPr>
+            <a:r>
+              <a:rPr sz="1600" b="1">
+                <a:solidFill>
+                  <a:srgbClr val="0B1F3A"/>
+                </a:solidFill>
+              </a:rPr>
+              <a:t>Più squadre a vuoto</a:t>
+            </a:r>
+          </a:p>
+          <a:p>
+            <a:pPr>
+              <a:spcAft>
+                <a:spcPts val="800"/>
+              </a:spcAft>
+            </a:pPr>
+            <a:r>
+              <a:rPr sz="1600" b="0">
+                <a:solidFill>
+                  <a:srgbClr val="0B1F3A"/>
+                </a:solidFill>
+              </a:rPr>
+              <a:t>183 uscite inutili su 720, per non perdere guasti. Il rapporto 10 a 1 tra i costi è una nostra stima.</a:t>
+            </a:r>
+          </a:p>
+        </p:txBody>
+      </p:sp>
+      <p:sp>
+        <p:nvSpPr>
+          <p:cNvPr id="15" name="Rectangle 14"/>
+          <p:cNvSpPr/>
+          <p:nvPr/>
+        </p:nvSpPr>
+        <p:spPr>
+          <a:xfrm>
+            <a:off x="6172200" y="3017520"/>
+            <a:ext cx="5623560" cy="1645920"/>
+          </a:xfrm>
+          <a:prstGeom prst="rect">
+            <a:avLst/>
+          </a:prstGeom>
+          <a:solidFill>
+            <a:srgbClr val="EEF3F9"/>
+          </a:solidFill>
+          <a:ln>
+            <a:noFill/>
+          </a:ln>
+        </p:spPr>
+        <p:style>
+          <a:lnRef idx="1">
+            <a:schemeClr val="accent1"/>
+          </a:lnRef>
+          <a:fillRef idx="3">
+            <a:schemeClr val="accent1"/>
+          </a:fillRef>
+          <a:effectRef idx="2">
+            <a:schemeClr val="accent1"/>
+          </a:effectRef>
+          <a:fontRef idx="minor">
+            <a:schemeClr val="lt1"/>
+          </a:fontRef>
+        </p:style>
+        <p:txBody>
+          <a:bodyPr rtlCol="0" anchor="ctr"/>
+          <a:lstStyle/>
+          <a:p>
+            <a:pPr algn="ctr"/>
+          </a:p>
+        </p:txBody>
+      </p:sp>
+      <p:sp>
+        <p:nvSpPr>
+          <p:cNvPr id="16" name="Rectangle 15"/>
+          <p:cNvSpPr/>
+          <p:nvPr/>
+        </p:nvSpPr>
+        <p:spPr>
+          <a:xfrm>
+            <a:off x="6172200" y="3017520"/>
+            <a:ext cx="91440" cy="1645920"/>
+          </a:xfrm>
+          <a:prstGeom prst="rect">
+            <a:avLst/>
+          </a:prstGeom>
+          <a:solidFill>
+            <a:srgbClr val="C8102E"/>
+          </a:solidFill>
+          <a:ln>
+            <a:noFill/>
+          </a:ln>
+        </p:spPr>
+        <p:style>
+          <a:lnRef idx="1">
+            <a:schemeClr val="accent1"/>
+          </a:lnRef>
+          <a:fillRef idx="3">
+            <a:schemeClr val="accent1"/>
+          </a:fillRef>
+          <a:effectRef idx="2">
+            <a:schemeClr val="accent1"/>
+          </a:effectRef>
+          <a:fontRef idx="minor">
+            <a:schemeClr val="lt1"/>
+          </a:fontRef>
+        </p:style>
+        <p:txBody>
+          <a:bodyPr rtlCol="0" anchor="ctr"/>
+          <a:lstStyle/>
+          <a:p>
+            <a:pPr algn="ctr"/>
+          </a:p>
+        </p:txBody>
+      </p:sp>
+      <p:sp>
+        <p:nvSpPr>
+          <p:cNvPr id="17" name="TextBox 16"/>
+          <p:cNvSpPr txBox="1"/>
+          <p:nvPr/>
+        </p:nvSpPr>
+        <p:spPr>
+          <a:xfrm>
+            <a:off x="6400800" y="3108960"/>
+            <a:ext cx="5303520" cy="1508760"/>
+          </a:xfrm>
+          <a:prstGeom prst="rect">
+            <a:avLst/>
+          </a:prstGeom>
+          <a:noFill/>
+        </p:spPr>
+        <p:txBody>
+          <a:bodyPr wrap="square">
+            <a:spAutoFit/>
+          </a:bodyPr>
+          <a:lstStyle/>
+          <a:p>
+            <a:pPr>
+              <a:spcAft>
+                <a:spcPts val="800"/>
+              </a:spcAft>
+            </a:pPr>
+            <a:r>
+              <a:rPr sz="1600" b="1">
+                <a:solidFill>
+                  <a:srgbClr val="0B1F3A"/>
+                </a:solidFill>
+              </a:rPr>
+              <a:t>Il bias lo gestiscono le persone</a:t>
+            </a:r>
+          </a:p>
+          <a:p>
+            <a:pPr>
+              <a:spcAft>
+                <a:spcPts val="800"/>
+              </a:spcAft>
+            </a:pPr>
+            <a:r>
+              <a:rPr sz="1600" b="0">
+                <a:solidFill>
+                  <a:srgbClr val="0B1F3A"/>
+                </a:solidFill>
+              </a:rPr>
+              <a:t>Se approvano tutto, la supervisione serve a poco. Per questo misuriamo chi approva cosa.</a:t>
+            </a:r>
+          </a:p>
+        </p:txBody>
+      </p:sp>
+      <p:sp>
+        <p:nvSpPr>
+          <p:cNvPr id="18" name="Rectangle 17"/>
+          <p:cNvSpPr/>
+          <p:nvPr/>
+        </p:nvSpPr>
+        <p:spPr>
+          <a:xfrm>
+            <a:off x="365760" y="4800600"/>
+            <a:ext cx="5623560" cy="1645920"/>
+          </a:xfrm>
+          <a:prstGeom prst="rect">
+            <a:avLst/>
+          </a:prstGeom>
+          <a:solidFill>
+            <a:srgbClr val="EEF3F9"/>
+          </a:solidFill>
+          <a:ln>
+            <a:noFill/>
+          </a:ln>
+        </p:spPr>
+        <p:style>
+          <a:lnRef idx="1">
+            <a:schemeClr val="accent1"/>
+          </a:lnRef>
+          <a:fillRef idx="3">
+            <a:schemeClr val="accent1"/>
+          </a:fillRef>
+          <a:effectRef idx="2">
+            <a:schemeClr val="accent1"/>
+          </a:effectRef>
+          <a:fontRef idx="minor">
+            <a:schemeClr val="lt1"/>
+          </a:fontRef>
+        </p:style>
+        <p:txBody>
+          <a:bodyPr rtlCol="0" anchor="ctr"/>
+          <a:lstStyle/>
+          <a:p>
+            <a:pPr algn="ctr"/>
+          </a:p>
+        </p:txBody>
+      </p:sp>
+      <p:sp>
+        <p:nvSpPr>
+          <p:cNvPr id="19" name="Rectangle 18"/>
+          <p:cNvSpPr/>
+          <p:nvPr/>
+        </p:nvSpPr>
+        <p:spPr>
+          <a:xfrm>
+            <a:off x="365760" y="4800600"/>
+            <a:ext cx="91440" cy="1645920"/>
+          </a:xfrm>
+          <a:prstGeom prst="rect">
+            <a:avLst/>
+          </a:prstGeom>
+          <a:solidFill>
+            <a:srgbClr val="C8102E"/>
+          </a:solidFill>
+          <a:ln>
+            <a:noFill/>
+          </a:ln>
+        </p:spPr>
+        <p:style>
+          <a:lnRef idx="1">
+            <a:schemeClr val="accent1"/>
+          </a:lnRef>
+          <a:fillRef idx="3">
+            <a:schemeClr val="accent1"/>
+          </a:fillRef>
+          <a:effectRef idx="2">
+            <a:schemeClr val="accent1"/>
+          </a:effectRef>
+          <a:fontRef idx="minor">
+            <a:schemeClr val="lt1"/>
+          </a:fontRef>
+        </p:style>
+        <p:txBody>
+          <a:bodyPr rtlCol="0" anchor="ctr"/>
+          <a:lstStyle/>
+          <a:p>
+            <a:pPr algn="ctr"/>
+          </a:p>
+        </p:txBody>
+      </p:sp>
+      <p:sp>
+        <p:nvSpPr>
+          <p:cNvPr id="20" name="TextBox 19"/>
+          <p:cNvSpPr txBox="1"/>
+          <p:nvPr/>
+        </p:nvSpPr>
+        <p:spPr>
+          <a:xfrm>
+            <a:off x="594360" y="4892040"/>
+            <a:ext cx="5303520" cy="1508760"/>
+          </a:xfrm>
+          <a:prstGeom prst="rect">
+            <a:avLst/>
+          </a:prstGeom>
+          <a:noFill/>
+        </p:spPr>
+        <p:txBody>
+          <a:bodyPr wrap="square">
+            <a:spAutoFit/>
+          </a:bodyPr>
+          <a:lstStyle/>
+          <a:p>
+            <a:pPr>
+              <a:spcAft>
+                <a:spcPts val="800"/>
+              </a:spcAft>
+            </a:pPr>
+            <a:r>
+              <a:rPr sz="1600" b="1">
+                <a:solidFill>
+                  <a:srgbClr val="0B1F3A"/>
+                </a:solidFill>
+              </a:rPr>
+              <a:t>"Quanto è sicuro" è grezzo</a:t>
+            </a:r>
+          </a:p>
+          <a:p>
+            <a:pPr>
+              <a:spcAft>
+                <a:spcPts val="800"/>
+              </a:spcAft>
+            </a:pPr>
+            <a:r>
+              <a:rPr sz="1600" b="0">
+                <a:solidFill>
+                  <a:srgbClr val="0B1F3A"/>
+                </a:solidFill>
+              </a:rPr>
+              <a:t>Oggi ripete la probabilità; servirebbe misurare quanto le parti del modello sono d'accordo tra loro.</a:t>
+            </a:r>
+          </a:p>
+        </p:txBody>
+      </p:sp>
+      <p:sp>
+        <p:nvSpPr>
+          <p:cNvPr id="21" name="Rectangle 20"/>
+          <p:cNvSpPr/>
+          <p:nvPr/>
+        </p:nvSpPr>
+        <p:spPr>
+          <a:xfrm>
+            <a:off x="6172200" y="4800600"/>
+            <a:ext cx="5623560" cy="1645920"/>
+          </a:xfrm>
+          <a:prstGeom prst="rect">
+            <a:avLst/>
+          </a:prstGeom>
+          <a:solidFill>
+            <a:srgbClr val="EEF3F9"/>
+          </a:solidFill>
+          <a:ln>
+            <a:noFill/>
+          </a:ln>
+        </p:spPr>
+        <p:style>
+          <a:lnRef idx="1">
+            <a:schemeClr val="accent1"/>
+          </a:lnRef>
+          <a:fillRef idx="3">
+            <a:schemeClr val="accent1"/>
+          </a:fillRef>
+          <a:effectRef idx="2">
+            <a:schemeClr val="accent1"/>
+          </a:effectRef>
+          <a:fontRef idx="minor">
+            <a:schemeClr val="lt1"/>
+          </a:fontRef>
+        </p:style>
+        <p:txBody>
+          <a:bodyPr rtlCol="0" anchor="ctr"/>
+          <a:lstStyle/>
+          <a:p>
+            <a:pPr algn="ctr"/>
+          </a:p>
+        </p:txBody>
+      </p:sp>
+      <p:sp>
+        <p:nvSpPr>
+          <p:cNvPr id="22" name="Rectangle 21"/>
+          <p:cNvSpPr/>
+          <p:nvPr/>
+        </p:nvSpPr>
+        <p:spPr>
+          <a:xfrm>
+            <a:off x="6172200" y="4800600"/>
+            <a:ext cx="91440" cy="1645920"/>
+          </a:xfrm>
+          <a:prstGeom prst="rect">
+            <a:avLst/>
+          </a:prstGeom>
+          <a:solidFill>
+            <a:srgbClr val="C8102E"/>
+          </a:solidFill>
+          <a:ln>
+            <a:noFill/>
+          </a:ln>
+        </p:spPr>
+        <p:style>
+          <a:lnRef idx="1">
+            <a:schemeClr val="accent1"/>
+          </a:lnRef>
+          <a:fillRef idx="3">
+            <a:schemeClr val="accent1"/>
+          </a:fillRef>
+          <a:effectRef idx="2">
+            <a:schemeClr val="accent1"/>
+          </a:effectRef>
+          <a:fontRef idx="minor">
+            <a:schemeClr val="lt1"/>
+          </a:fontRef>
+        </p:style>
+        <p:txBody>
+          <a:bodyPr rtlCol="0" anchor="ctr"/>
+          <a:lstStyle/>
+          <a:p>
+            <a:pPr algn="ctr"/>
+          </a:p>
+        </p:txBody>
+      </p:sp>
+      <p:sp>
+        <p:nvSpPr>
+          <p:cNvPr id="23" name="TextBox 22"/>
+          <p:cNvSpPr txBox="1"/>
+          <p:nvPr/>
+        </p:nvSpPr>
+        <p:spPr>
+          <a:xfrm>
+            <a:off x="6400800" y="4892040"/>
+            <a:ext cx="5303520" cy="1508760"/>
+          </a:xfrm>
+          <a:prstGeom prst="rect">
+            <a:avLst/>
+          </a:prstGeom>
+          <a:noFill/>
+        </p:spPr>
+        <p:txBody>
+          <a:bodyPr wrap="square">
+            <a:spAutoFit/>
+          </a:bodyPr>
+          <a:lstStyle/>
+          <a:p>
+            <a:pPr>
+              <a:spcAft>
+                <a:spcPts val="800"/>
+              </a:spcAft>
+            </a:pPr>
+            <a:r>
+              <a:rPr sz="1600" b="1">
+                <a:solidFill>
+                  <a:srgbClr val="0B1F3A"/>
+                </a:solidFill>
+              </a:rPr>
+              <a:t>Prototipo, non produzione</a:t>
+            </a:r>
+          </a:p>
+          <a:p>
+            <a:pPr>
+              <a:spcAft>
+                <a:spcPts val="800"/>
+              </a:spcAft>
+            </a:pPr>
+            <a:r>
+              <a:rPr sz="1600" b="0">
+                <a:solidFill>
+                  <a:srgbClr val="0B1F3A"/>
+                </a:solidFill>
+              </a:rPr>
+              <a:t>Tempo simulato, 2 decisioni nelle Isole ancora automatiche, registro riscrivibile da capo da chi ha accesso al file.</a:t>
+            </a:r>
+          </a:p>
+        </p:txBody>
+      </p:sp>
+    </p:spTree>
+  </p:cSld>
+  <p:clrMapOvr>
+    <a:masterClrMapping/>
+  </p:clrMapOvr>
+</p:sld>
+</file>
+
+<file path=ppt/slides/slide19.xml><?xml version="1.0" encoding="utf-8"?>
+<p:sld xmlns:a="http://schemas.openxmlformats.org/drawingml/2006/main" xmlns:p="http://schemas.openxmlformats.org/presentationml/2006/main" xmlns:r="http://schemas.openxmlformats.org/officeDocument/2006/relationships">
+  <p:cSld>
+    <p:spTree>
+      <p:nvGrpSpPr>
+        <p:cNvPr id="1" name=""/>
+        <p:cNvGrpSpPr/>
+        <p:nvPr/>
+      </p:nvGrpSpPr>
+      <p:grpSpPr/>
+      <p:sp>
+        <p:nvSpPr>
+          <p:cNvPr id="2" name="Rectangle 1"/>
+          <p:cNvSpPr/>
+          <p:nvPr/>
+        </p:nvSpPr>
+        <p:spPr>
+          <a:xfrm>
+            <a:off x="0" y="0"/>
+            <a:ext cx="12191695" cy="914400"/>
+          </a:xfrm>
+          <a:prstGeom prst="rect">
+            <a:avLst/>
+          </a:prstGeom>
+          <a:solidFill>
+            <a:srgbClr val="0B1F3A"/>
+          </a:solidFill>
+          <a:ln>
+            <a:noFill/>
+          </a:ln>
+        </p:spPr>
+        <p:style>
+          <a:lnRef idx="1">
+            <a:schemeClr val="accent1"/>
+          </a:lnRef>
+          <a:fillRef idx="3">
+            <a:schemeClr val="accent1"/>
+          </a:fillRef>
+          <a:effectRef idx="2">
+            <a:schemeClr val="accent1"/>
+          </a:effectRef>
+          <a:fontRef idx="minor">
+            <a:schemeClr val="lt1"/>
+          </a:fontRef>
+        </p:style>
+        <p:txBody>
+          <a:bodyPr rtlCol="0" anchor="ctr"/>
+          <a:lstStyle/>
+          <a:p>
+            <a:pPr algn="ctr"/>
+          </a:p>
+        </p:txBody>
+      </p:sp>
+      <p:sp>
+        <p:nvSpPr>
+          <p:cNvPr id="3" name="TextBox 2"/>
+          <p:cNvSpPr txBox="1"/>
+          <p:nvPr/>
+        </p:nvSpPr>
+        <p:spPr>
+          <a:xfrm>
+            <a:off x="457200" y="164592"/>
+            <a:ext cx="9418320" cy="640080"/>
+          </a:xfrm>
+          <a:prstGeom prst="rect">
+            <a:avLst/>
+          </a:prstGeom>
+          <a:noFill/>
+        </p:spPr>
+        <p:txBody>
+          <a:bodyPr wrap="square">
+            <a:spAutoFit/>
+          </a:bodyPr>
+          <a:lstStyle/>
+          <a:p>
+            <a:pPr>
+              <a:spcAft>
+                <a:spcPts val="800"/>
+              </a:spcAft>
+            </a:pPr>
+            <a:r>
+              <a:rPr sz="2800" b="1">
+                <a:solidFill>
+                  <a:srgbClr val="FFFFFF"/>
+                </a:solidFill>
+              </a:rPr>
+              <a:t>AI Act: ruoli e domande aperte</a:t>
+            </a:r>
+          </a:p>
+        </p:txBody>
+      </p:sp>
+      <p:sp>
+        <p:nvSpPr>
+          <p:cNvPr id="4" name="TextBox 3"/>
+          <p:cNvSpPr txBox="1"/>
+          <p:nvPr/>
+        </p:nvSpPr>
+        <p:spPr>
+          <a:xfrm>
+            <a:off x="9144000" y="274320"/>
+            <a:ext cx="2834640" cy="457200"/>
+          </a:xfrm>
+          <a:prstGeom prst="rect">
+            <a:avLst/>
+          </a:prstGeom>
+          <a:noFill/>
+        </p:spPr>
+        <p:txBody>
+          <a:bodyPr wrap="square">
+            <a:spAutoFit/>
+          </a:bodyPr>
+          <a:lstStyle/>
+          <a:p>
+            <a:pPr algn="r">
+              <a:spcAft>
+                <a:spcPts val="800"/>
+              </a:spcAft>
+            </a:pPr>
+            <a:r>
+              <a:rPr sz="1300" b="0">
                 <a:solidFill>
                   <a:srgbClr val="C9D8EA"/>
                 </a:solidFill>
               </a:rPr>
-              <a:t>EnerGuard lascia all'umano le decisioni che contano, e lo rende misurabile.</a:t>
-            </a:r>
-          </a:p>
+              <a:t>Discussione</a:t>
+            </a:r>
+          </a:p>
+        </p:txBody>
+      </p:sp>
+      <p:sp>
+        <p:nvSpPr>
+          <p:cNvPr id="5" name="Rectangle 4"/>
+          <p:cNvSpPr/>
+          <p:nvPr/>
+        </p:nvSpPr>
+        <p:spPr>
+          <a:xfrm>
+            <a:off x="0" y="914400"/>
+            <a:ext cx="12191695" cy="54864"/>
+          </a:xfrm>
+          <a:prstGeom prst="rect">
+            <a:avLst/>
+          </a:prstGeom>
+          <a:solidFill>
+            <a:srgbClr val="0F6CBD"/>
+          </a:solidFill>
+          <a:ln>
+            <a:noFill/>
+          </a:ln>
+        </p:spPr>
+        <p:style>
+          <a:lnRef idx="1">
+            <a:schemeClr val="accent1"/>
+          </a:lnRef>
+          <a:fillRef idx="3">
+            <a:schemeClr val="accent1"/>
+          </a:fillRef>
+          <a:effectRef idx="2">
+            <a:schemeClr val="accent1"/>
+          </a:effectRef>
+          <a:fontRef idx="minor">
+            <a:schemeClr val="lt1"/>
+          </a:fontRef>
+        </p:style>
+        <p:txBody>
+          <a:bodyPr rtlCol="0" anchor="ctr"/>
+          <a:lstStyle/>
+          <a:p>
+            <a:pPr algn="ctr"/>
+          </a:p>
+        </p:txBody>
+      </p:sp>
+      <p:sp>
+        <p:nvSpPr>
+          <p:cNvPr id="6" name="TextBox 5"/>
+          <p:cNvSpPr txBox="1"/>
+          <p:nvPr/>
+        </p:nvSpPr>
+        <p:spPr>
+          <a:xfrm>
+            <a:off x="548640" y="1280160"/>
+            <a:ext cx="5394960" cy="5303520"/>
+          </a:xfrm>
+          <a:prstGeom prst="rect">
+            <a:avLst/>
+          </a:prstGeom>
+          <a:noFill/>
+        </p:spPr>
+        <p:txBody>
+          <a:bodyPr wrap="square">
+            <a:spAutoFit/>
+          </a:bodyPr>
+          <a:lstStyle/>
           <a:p>
             <a:pPr>
               <a:spcAft>
@@ -9800,12 +10967,295 @@
               </a:spcAft>
             </a:pPr>
             <a:r>
-              <a:rPr sz="2200" b="0">
-                <a:solidFill>
-                  <a:srgbClr val="C9D8EA"/>
-                </a:solidFill>
-              </a:rPr>
-              <a:t>Domande?</a:t>
+              <a:rPr sz="1700" b="1">
+                <a:solidFill>
+                  <a:srgbClr val="0B1F3A"/>
+                </a:solidFill>
+              </a:rPr>
+              <a:t>Chi costruisce il sistema</a:t>
+            </a:r>
+            <a:r>
+              <a:rPr sz="1700" b="0">
+                <a:solidFill>
+                  <a:srgbClr val="0B1F3A"/>
+                </a:solidFill>
+              </a:rPr>
+              <a:t> (provider): risponde di dati, documentazione, registro, supervisione già prevista nel progetto, controlli dopo il rilascio, segnalazione degli incidenti gravi.</a:t>
+            </a:r>
+          </a:p>
+          <a:p>
+            <a:pPr>
+              <a:spcAft>
+                <a:spcPts val="800"/>
+              </a:spcAft>
+            </a:pPr>
+            <a:r>
+              <a:rPr sz="1700" b="1">
+                <a:solidFill>
+                  <a:srgbClr val="0B1F3A"/>
+                </a:solidFill>
+              </a:rPr>
+              <a:t>Chi lo usa</a:t>
+            </a:r>
+            <a:r>
+              <a:rPr sz="1700" b="0">
+                <a:solidFill>
+                  <a:srgbClr val="0B1F3A"/>
+                </a:solidFill>
+              </a:rPr>
+              <a:t> (deployer): l'operatore di rete. Persone formate, uso come da istruzioni, registro conservato almeno 6 mesi, lavoratori informati.</a:t>
+            </a:r>
+          </a:p>
+          <a:p>
+            <a:pPr>
+              <a:spcAft>
+                <a:spcPts val="800"/>
+              </a:spcAft>
+            </a:pPr>
+            <a:r>
+              <a:rPr sz="1700" b="0">
+                <a:solidFill>
+                  <a:srgbClr val="0B1F3A"/>
+                </a:solidFill>
+              </a:rPr>
+              <a:t>Se l'azienda lo sviluppa in casa e lo usa, è </a:t>
+            </a:r>
+            <a:r>
+              <a:rPr sz="1700" b="1">
+                <a:solidFill>
+                  <a:srgbClr val="0B1F3A"/>
+                </a:solidFill>
+              </a:rPr>
+              <a:t>tutte e due le cose</a:t>
+            </a:r>
+            <a:r>
+              <a:rPr sz="1700" b="0">
+                <a:solidFill>
+                  <a:srgbClr val="0B1F3A"/>
+                </a:solidFill>
+              </a:rPr>
+              <a:t>.</a:t>
+            </a:r>
+          </a:p>
+        </p:txBody>
+      </p:sp>
+      <p:sp>
+        <p:nvSpPr>
+          <p:cNvPr id="7" name="Rectangle 6"/>
+          <p:cNvSpPr/>
+          <p:nvPr/>
+        </p:nvSpPr>
+        <p:spPr>
+          <a:xfrm>
+            <a:off x="6309360" y="1280160"/>
+            <a:ext cx="5486400" cy="5120640"/>
+          </a:xfrm>
+          <a:prstGeom prst="rect">
+            <a:avLst/>
+          </a:prstGeom>
+          <a:solidFill>
+            <a:srgbClr val="EEF3F9"/>
+          </a:solidFill>
+          <a:ln>
+            <a:noFill/>
+          </a:ln>
+        </p:spPr>
+        <p:style>
+          <a:lnRef idx="1">
+            <a:schemeClr val="accent1"/>
+          </a:lnRef>
+          <a:fillRef idx="3">
+            <a:schemeClr val="accent1"/>
+          </a:fillRef>
+          <a:effectRef idx="2">
+            <a:schemeClr val="accent1"/>
+          </a:effectRef>
+          <a:fontRef idx="minor">
+            <a:schemeClr val="lt1"/>
+          </a:fontRef>
+        </p:style>
+        <p:txBody>
+          <a:bodyPr rtlCol="0" anchor="ctr"/>
+          <a:lstStyle/>
+          <a:p>
+            <a:pPr algn="ctr"/>
+          </a:p>
+        </p:txBody>
+      </p:sp>
+      <p:sp>
+        <p:nvSpPr>
+          <p:cNvPr id="8" name="TextBox 7"/>
+          <p:cNvSpPr txBox="1"/>
+          <p:nvPr/>
+        </p:nvSpPr>
+        <p:spPr>
+          <a:xfrm>
+            <a:off x="6492240" y="1371600"/>
+            <a:ext cx="5212080" cy="4937760"/>
+          </a:xfrm>
+          <a:prstGeom prst="rect">
+            <a:avLst/>
+          </a:prstGeom>
+          <a:noFill/>
+        </p:spPr>
+        <p:txBody>
+          <a:bodyPr wrap="square">
+            <a:spAutoFit/>
+          </a:bodyPr>
+          <a:lstStyle/>
+          <a:p>
+            <a:pPr>
+              <a:spcAft>
+                <a:spcPts val="800"/>
+              </a:spcAft>
+            </a:pPr>
+            <a:r>
+              <a:rPr sz="1600" b="1">
+                <a:solidFill>
+                  <a:srgbClr val="0B1F3A"/>
+                </a:solidFill>
+              </a:rPr>
+              <a:t>Spunti per la discussione</a:t>
+            </a:r>
+          </a:p>
+          <a:p>
+            <a:pPr>
+              <a:spcAft>
+                <a:spcPts val="800"/>
+              </a:spcAft>
+            </a:pPr>
+            <a:r>
+              <a:rPr sz="1600" b="1">
+                <a:solidFill>
+                  <a:srgbClr val="0F6CBD"/>
+                </a:solidFill>
+              </a:rPr>
+              <a:t>•  </a:t>
+            </a:r>
+            <a:r>
+              <a:rPr sz="1600" b="0">
+                <a:solidFill>
+                  <a:srgbClr val="0B1F3A"/>
+                </a:solidFill>
+              </a:rPr>
+              <a:t>Un sistema che </a:t>
+            </a:r>
+            <a:r>
+              <a:rPr sz="1600" b="1">
+                <a:solidFill>
+                  <a:srgbClr val="0B1F3A"/>
+                </a:solidFill>
+              </a:rPr>
+              <a:t>suggerisce</a:t>
+            </a:r>
+            <a:r>
+              <a:rPr sz="1600" b="0">
+                <a:solidFill>
+                  <a:srgbClr val="0B1F3A"/>
+                </a:solidFill>
+              </a:rPr>
+              <a:t> e lascia decidere le persone è davvero ad alto rischio? (Art. 6(3))</a:t>
+            </a:r>
+          </a:p>
+          <a:p>
+            <a:pPr>
+              <a:spcAft>
+                <a:spcPts val="800"/>
+              </a:spcAft>
+            </a:pPr>
+            <a:r>
+              <a:rPr sz="1600" b="1">
+                <a:solidFill>
+                  <a:srgbClr val="0F6CBD"/>
+                </a:solidFill>
+              </a:rPr>
+              <a:t>•  </a:t>
+            </a:r>
+            <a:r>
+              <a:rPr sz="1600" b="0">
+                <a:solidFill>
+                  <a:srgbClr val="0B1F3A"/>
+                </a:solidFill>
+              </a:rPr>
+              <a:t>Misurare quanto ogni persona approva senza leggere è </a:t>
+            </a:r>
+            <a:r>
+              <a:rPr sz="1600" b="1">
+                <a:solidFill>
+                  <a:srgbClr val="0B1F3A"/>
+                </a:solidFill>
+              </a:rPr>
+              <a:t>controllo dei lavoratori</a:t>
+            </a:r>
+            <a:r>
+              <a:rPr sz="1600" b="0">
+                <a:solidFill>
+                  <a:srgbClr val="0B1F3A"/>
+                </a:solidFill>
+              </a:rPr>
+              <a:t>? (Art. 26(7), Statuto art. 4)</a:t>
+            </a:r>
+          </a:p>
+          <a:p>
+            <a:pPr>
+              <a:spcAft>
+                <a:spcPts val="800"/>
+              </a:spcAft>
+            </a:pPr>
+            <a:r>
+              <a:rPr sz="1600" b="1">
+                <a:solidFill>
+                  <a:srgbClr val="0F6CBD"/>
+                </a:solidFill>
+              </a:rPr>
+              <a:t>•  </a:t>
+            </a:r>
+            <a:r>
+              <a:rPr sz="1600" b="0">
+                <a:solidFill>
+                  <a:srgbClr val="0B1F3A"/>
+                </a:solidFill>
+              </a:rPr>
+              <a:t>Un servizio peggiore al Sud tocca i diritti dei cittadini, ma la valutazione d'impatto sui diritti non è richiesta (Art. 27).</a:t>
+            </a:r>
+          </a:p>
+          <a:p>
+            <a:pPr>
+              <a:spcAft>
+                <a:spcPts val="800"/>
+              </a:spcAft>
+            </a:pPr>
+            <a:r>
+              <a:rPr sz="1600" b="1">
+                <a:solidFill>
+                  <a:srgbClr val="0F6CBD"/>
+                </a:solidFill>
+              </a:rPr>
+              <a:t>•  </a:t>
+            </a:r>
+            <a:r>
+              <a:rPr sz="1600" b="0">
+                <a:solidFill>
+                  <a:srgbClr val="0B1F3A"/>
+                </a:solidFill>
+              </a:rPr>
+              <a:t>Dati di un'infrastruttura critica mandati a un </a:t>
+            </a:r>
+            <a:r>
+              <a:rPr sz="1600" b="1">
+                <a:solidFill>
+                  <a:srgbClr val="0B1F3A"/>
+                </a:solidFill>
+              </a:rPr>
+              <a:t>LLM nel cloud</a:t>
+            </a:r>
+            <a:r>
+              <a:rPr sz="1600" b="0">
+                <a:solidFill>
+                  <a:srgbClr val="0B1F3A"/>
+                </a:solidFill>
+              </a:rPr>
+              <a:t>: riservatezza e dipendenza da un fornitore.</a:t>
             </a:r>
           </a:p>
         </p:txBody>
@@ -10733,6 +12183,158 @@
 </p:sld>
 </file>
 
+<file path=ppt/slides/slide20.xml><?xml version="1.0" encoding="utf-8"?>
+<p:sld xmlns:a="http://schemas.openxmlformats.org/drawingml/2006/main" xmlns:p="http://schemas.openxmlformats.org/presentationml/2006/main" xmlns:r="http://schemas.openxmlformats.org/officeDocument/2006/relationships">
+  <p:cSld>
+    <p:spTree>
+      <p:nvGrpSpPr>
+        <p:cNvPr id="1" name=""/>
+        <p:cNvGrpSpPr/>
+        <p:nvPr/>
+      </p:nvGrpSpPr>
+      <p:grpSpPr/>
+      <p:sp>
+        <p:nvSpPr>
+          <p:cNvPr id="2" name="Rectangle 1"/>
+          <p:cNvSpPr/>
+          <p:nvPr/>
+        </p:nvSpPr>
+        <p:spPr>
+          <a:xfrm>
+            <a:off x="0" y="0"/>
+            <a:ext cx="12191695" cy="6858000"/>
+          </a:xfrm>
+          <a:prstGeom prst="rect">
+            <a:avLst/>
+          </a:prstGeom>
+          <a:solidFill>
+            <a:srgbClr val="0B1F3A"/>
+          </a:solidFill>
+          <a:ln>
+            <a:noFill/>
+          </a:ln>
+        </p:spPr>
+        <p:style>
+          <a:lnRef idx="1">
+            <a:schemeClr val="accent1"/>
+          </a:lnRef>
+          <a:fillRef idx="3">
+            <a:schemeClr val="accent1"/>
+          </a:fillRef>
+          <a:effectRef idx="2">
+            <a:schemeClr val="accent1"/>
+          </a:effectRef>
+          <a:fontRef idx="minor">
+            <a:schemeClr val="lt1"/>
+          </a:fontRef>
+        </p:style>
+        <p:txBody>
+          <a:bodyPr rtlCol="0" anchor="ctr"/>
+          <a:lstStyle/>
+          <a:p>
+            <a:pPr algn="ctr"/>
+          </a:p>
+        </p:txBody>
+      </p:sp>
+      <p:sp>
+        <p:nvSpPr>
+          <p:cNvPr id="3" name="TextBox 2"/>
+          <p:cNvSpPr txBox="1"/>
+          <p:nvPr/>
+        </p:nvSpPr>
+        <p:spPr>
+          <a:xfrm>
+            <a:off x="731520" y="2011680"/>
+            <a:ext cx="10698480" cy="1828800"/>
+          </a:xfrm>
+          <a:prstGeom prst="rect">
+            <a:avLst/>
+          </a:prstGeom>
+          <a:noFill/>
+        </p:spPr>
+        <p:txBody>
+          <a:bodyPr wrap="square">
+            <a:spAutoFit/>
+          </a:bodyPr>
+          <a:lstStyle/>
+          <a:p>
+            <a:pPr>
+              <a:spcAft>
+                <a:spcPts val="800"/>
+              </a:spcAft>
+            </a:pPr>
+            <a:r>
+              <a:rPr sz="3200" b="1">
+                <a:solidFill>
+                  <a:srgbClr val="FFFFFF"/>
+                </a:solidFill>
+              </a:rPr>
+              <a:t>In un'infrastruttura critica un sistema accurato ma non supervisionabile è pericoloso.</a:t>
+            </a:r>
+          </a:p>
+        </p:txBody>
+      </p:sp>
+      <p:sp>
+        <p:nvSpPr>
+          <p:cNvPr id="4" name="TextBox 3"/>
+          <p:cNvSpPr txBox="1"/>
+          <p:nvPr/>
+        </p:nvSpPr>
+        <p:spPr>
+          <a:xfrm>
+            <a:off x="731520" y="3657600"/>
+            <a:ext cx="10698480" cy="1371600"/>
+          </a:xfrm>
+          <a:prstGeom prst="rect">
+            <a:avLst/>
+          </a:prstGeom>
+          <a:noFill/>
+        </p:spPr>
+        <p:txBody>
+          <a:bodyPr wrap="square">
+            <a:spAutoFit/>
+          </a:bodyPr>
+          <a:lstStyle/>
+          <a:p>
+            <a:pPr>
+              <a:spcAft>
+                <a:spcPts val="800"/>
+              </a:spcAft>
+            </a:pPr>
+            <a:r>
+              <a:rPr sz="2200" b="0">
+                <a:solidFill>
+                  <a:srgbClr val="C9D8EA"/>
+                </a:solidFill>
+              </a:rPr>
+              <a:t>EnerGuard lascia all'umano le decisioni che contano, e lo rende misurabile.</a:t>
+            </a:r>
+          </a:p>
+          <a:p>
+            <a:pPr>
+              <a:spcAft>
+                <a:spcPts val="800"/>
+              </a:spcAft>
+            </a:pPr>
+            <a:r>
+              <a:rPr sz="2200" b="0">
+                <a:solidFill>
+                  <a:srgbClr val="C9D8EA"/>
+                </a:solidFill>
+              </a:rPr>
+              <a:t>Domande?</a:t>
+            </a:r>
+          </a:p>
+        </p:txBody>
+      </p:sp>
+    </p:spTree>
+  </p:cSld>
+  <p:clrMapOvr>
+    <a:masterClrMapping/>
+  </p:clrMapOvr>
+</p:sld>
+</file>
+
 <file path=ppt/slides/slide3.xml><?xml version="1.0" encoding="utf-8"?>
 <p:sld xmlns:a="http://schemas.openxmlformats.org/drawingml/2006/main" xmlns:p="http://schemas.openxmlformats.org/presentationml/2006/main" xmlns:r="http://schemas.openxmlformats.org/officeDocument/2006/relationships">
   <p:cSld>
@@ -13769,9 +15371,9 @@
                 <a:tableStyleId>{5C22544A-7EE6-4342-B048-85BDC9FD1C3A}</a:tableStyleId>
               </a:tblPr>
               <a:tblGrid>
-                <a:gridCol w="3017520"/>
+                <a:gridCol w="2743200"/>
+                <a:gridCol w="2103120"/>
                 <a:gridCol w="1737360"/>
-                <a:gridCol w="1828800"/>
               </a:tblGrid>
               <a:tr h="525780">
                 <a:tc>
@@ -13835,7 +15437,7 @@
                     <a:p>
                       <a:r>
                         <a:rPr sz="1200" b="1"/>
-                        <a:t>Solo la persona</a:t>
+                        <a:t>Solo la persona (HIC)</a:t>
                       </a:r>
                     </a:p>
                   </a:txBody>
@@ -13876,7 +15478,7 @@
                     <a:p>
                       <a:r>
                         <a:rPr sz="1200" b="1"/>
-                        <a:t>Solo la persona</a:t>
+                        <a:t>Solo la persona (HIC)</a:t>
                       </a:r>
                     </a:p>
                   </a:txBody>
@@ -13917,7 +15519,7 @@
                     <a:p>
                       <a:r>
                         <a:rPr sz="1200" b="1"/>
-                        <a:t>La persona approva prima</a:t>
+                        <a:t>La persona approva prima (HITL)</a:t>
                       </a:r>
                     </a:p>
                   </a:txBody>
@@ -13958,7 +15560,7 @@
                     <a:p>
                       <a:r>
                         <a:rPr sz="1200" b="1"/>
-                        <a:t>La persona approva prima</a:t>
+                        <a:t>La persona approva prima (HITL)</a:t>
                       </a:r>
                     </a:p>
                   </a:txBody>
@@ -13999,7 +15601,7 @@
                     <a:p>
                       <a:r>
                         <a:rPr sz="1200" b="1"/>
-                        <a:t>La persona approva prima</a:t>
+                        <a:t>La persona approva prima (HITL)</a:t>
                       </a:r>
                     </a:p>
                   </a:txBody>
@@ -14040,7 +15642,7 @@
                     <a:p>
                       <a:r>
                         <a:rPr sz="1200" b="1"/>
-                        <a:t>Il sistema agisce, la persona sorveglia</a:t>
+                        <a:t>Il sistema agisce, la persona sorveglia (HOTL)</a:t>
                       </a:r>
                     </a:p>
                   </a:txBody>
@@ -14081,7 +15683,7 @@
                     <a:p>
                       <a:r>
                         <a:rPr sz="1200" b="1"/>
-                        <a:t>La persona approva prima</a:t>
+                        <a:t>La persona approva prima (HITL)</a:t>
                       </a:r>
                     </a:p>
                   </a:txBody>

--- a/consegna/EnerGuard_Presentazione.pptx
+++ b/consegna/EnerGuard_Presentazione.pptx
@@ -6727,28 +6727,28 @@
               </a:spcAft>
             </a:pPr>
             <a:r>
-              <a:rPr sz="1400" b="0">
+              <a:rPr sz="1200" b="0">
                 <a:solidFill>
                   <a:srgbClr val="555F6D"/>
                 </a:solidFill>
               </a:rPr>
-              <a:t>Grigio: guasti che il sistema si aspetta guardando i sensori. Colore: guasti registrati. </a:t>
-            </a:r>
-            <a:r>
-              <a:rPr sz="1400" b="1">
+              <a:t>Il sistema è tarato per non perdere guasti, quindi </a:t>
+            </a:r>
+            <a:r>
+              <a:rPr sz="1200" b="1">
                 <a:solidFill>
                   <a:srgbClr val="555F6D"/>
                 </a:solidFill>
               </a:rPr>
-              <a:t>Solo al Sud</a:t>
-            </a:r>
-            <a:r>
-              <a:rPr sz="1400" b="0">
+              <a:t>ne aspetta un po' di più ovunque</a:t>
+            </a:r>
+            <a:r>
+              <a:rPr sz="1200" b="0">
                 <a:solidFill>
                   <a:srgbClr val="555F6D"/>
                 </a:solidFill>
               </a:rPr>
-              <a:t> la differenza è grande (42 contro 24): è il segnale che fa scattare l'allarme.</a:t>
+              <a:t> (media 71 registrati ogni 100 attesi). Il Sud è il più basso (57) ed è la zona con la differenza più grande in numero di guasti (42 attesi, 24 registrati): è questo che fa scattare l'allarme. Il Nord però non è lontano (60): lo dichiariamo tra i limiti.</a:t>
             </a:r>
           </a:p>
         </p:txBody>
@@ -10059,7 +10059,7 @@
                   <a:srgbClr val="0B1F3A"/>
                 </a:solidFill>
               </a:rPr>
-              <a:t>È la spiegazione più probabile, ma va verificata con chi registra i guasti sul territorio.</a:t>
+              <a:t>Va verificata sul territorio. E l'allarme guarda la differenza in numero di guasti: in proporzione anche il Nord registra meno del previsto.</a:t>
             </a:r>
           </a:p>
         </p:txBody>
@@ -14664,7 +14664,7 @@
                   <a:srgbClr val="0B1F3A"/>
                 </a:solidFill>
               </a:rPr>
-              <a:t>Qui i dati sono </a:t>
+              <a:t>Qui il problema principale non sembra nei dati: il sistema, semmai, dà </a:t>
             </a:r>
             <a:r>
               <a:rPr sz="1600" b="1">
@@ -14672,7 +14672,7 @@
                   <a:srgbClr val="0B1F3A"/>
                 </a:solidFill>
               </a:rPr>
-              <a:t>coerenti</a:t>
+              <a:t>allarmi in più</a:t>
             </a:r>
             <a:r>
               <a:rPr sz="1600" b="0">
@@ -14680,7 +14680,7 @@
                   <a:srgbClr val="0B1F3A"/>
                 </a:solidFill>
               </a:rPr>
-              <a:t>: il sistema si aspetta più o meno i guasti che vengono registrati.</a:t>
+              <a:t> (40 su 272 impianti sani), come fa un po' ovunque per non perdere guasti.</a:t>
             </a:r>
           </a:p>
           <a:p>
@@ -14703,7 +14703,7 @@
                   <a:srgbClr val="0B1F3A"/>
                 </a:solidFill>
               </a:rPr>
-              <a:t>Il problema è un altro: circa </a:t>
+              <a:t>Ma su </a:t>
             </a:r>
             <a:r>
               <a:rPr sz="1600" b="1">
@@ -14711,7 +14711,7 @@
                   <a:srgbClr val="0B1F3A"/>
                 </a:solidFill>
               </a:rPr>
-              <a:t>1 guasto su 4 arriva senza preavviso</a:t>
+              <a:t>28 guasti veri ne perde 8</a:t>
             </a:r>
             <a:r>
               <a:rPr sz="1600" b="0">
@@ -14719,7 +14719,7 @@
                   <a:srgbClr val="0B1F3A"/>
                 </a:solidFill>
               </a:rPr>
-              <a:t>. I sensori non mostrano niente di strano: la vibrazione dei guasti persi è più vicina a quella di un impianto sano che a quella dei guasti visti.</a:t>
+              <a:t>: arrivano senza preavviso. I sensori non mostrano niente di strano: la vibrazione dei guasti persi è più vicina a quella di un impianto sano che a quella dei guasti visti.</a:t>
             </a:r>
           </a:p>
           <a:p>
@@ -14742,7 +14742,23 @@
                   <a:srgbClr val="0B1F3A"/>
                 </a:solidFill>
               </a:rPr>
-              <a:t>Nessun sistema può vedere quello che i sensori non misurano.</a:t>
+              <a:t>Quindi sbaglia </a:t>
+            </a:r>
+            <a:r>
+              <a:rPr sz="1600" b="1">
+                <a:solidFill>
+                  <a:srgbClr val="0B1F3A"/>
+                </a:solidFill>
+              </a:rPr>
+              <a:t>in tutte e due le direzioni</a:t>
+            </a:r>
+            <a:r>
+              <a:rPr sz="1600" b="0">
+                <a:solidFill>
+                  <a:srgbClr val="0B1F3A"/>
+                </a:solidFill>
+              </a:rPr>
+              <a:t>: troppi allarmi sugli impianti sani, silenzio sui guasti "muti". Nessun sistema può vedere quello che i sensori non misurano.</a:t>
             </a:r>
           </a:p>
           <a:p>

--- a/consegna/EnerGuard_Presentazione.pptx
+++ b/consegna/EnerGuard_Presentazione.pptx
@@ -25,6 +25,7 @@
     <p:sldId id="273" r:id="rId25"/>
     <p:sldId id="274" r:id="rId26"/>
     <p:sldId id="275" r:id="rId27"/>
+    <p:sldId id="276" r:id="rId28"/>
   </p:sldIdLst>
   <p:sldSz cx="12191695" cy="6858000" type="screen4x3"/>
   <p:notesSz cx="6858000" cy="9144000"/>
@@ -731,7 +732,7 @@
           <a:lstStyle/>
           <a:p>
             <a:r>
-              <a:t>Quattro mosse, ognuna con un effetto misurato. Il punto chiave: non abbiamo corretto il modello, abbiamo messo le persone dove il modello è meno affidabile.</a:t>
+              <a:t>Prima di raccontare cosa abbiamo fatto, chiariamo l'unico conto che usiamo: guasti attesi dal sistema contro guasti registrati, ogni 100 impianti. Il sistema è pessimista ovunque per scelta; l'anomalia è una zona che si allontana molto più delle altre.</a:t>
             </a:r>
           </a:p>
         </p:txBody>
@@ -801,7 +802,7 @@
           <a:lstStyle/>
           <a:p>
             <a:r>
-              <a:t>Con 24-43 guasti per area le differenze sono segnali da monitorare, non prove. Per questo li usiamo per aumentare la supervisione, non per cambiare il modello.</a:t>
+              <a:t>Quattro mosse, ognuna con un effetto misurato. Il punto chiave: non abbiamo corretto il modello, abbiamo messo le persone dove il modello è meno affidabile.</a:t>
             </a:r>
           </a:p>
         </p:txBody>
@@ -871,7 +872,7 @@
           <a:lstStyle/>
           <a:p>
             <a:r>
-              <a:t>Una dashboard senza asse temporale è una fotografia, non un monitoraggio.</a:t>
+              <a:t>Con 24-43 guasti per area le differenze sono segnali da monitorare, non prove. Per questo li usiamo per aumentare la supervisione, non per cambiare il modello.</a:t>
             </a:r>
           </a:p>
         </p:txBody>
@@ -941,7 +942,7 @@
           <a:lstStyle/>
           <a:p>
             <a:r>
-              <a:t>Non volevamo mostrare una dashboard vuota: abbiamo simulato una mezz'ora di control room con tre profili diversi, per vedere se il sistema si accorge dei comportamenti a rischio.</a:t>
+              <a:t>Una dashboard senza asse temporale è una fotografia, non un monitoraggio.</a:t>
             </a:r>
           </a:p>
         </p:txBody>
@@ -1011,7 +1012,7 @@
           <a:lstStyle/>
           <a:p>
             <a:r>
-              <a:t>Dopo la simulazione abbiamo confrontato ogni decisione con l'esito registrato nei dati. Non lo sapevamo mentre decidevamo.</a:t>
+              <a:t>Non volevamo mostrare una dashboard vuota: abbiamo simulato una mezz'ora di control room con tre profili diversi, per vedere se il sistema si accorge dei comportamenti a rischio.</a:t>
             </a:r>
           </a:p>
         </p:txBody>
@@ -1081,7 +1082,7 @@
           <a:lstStyle/>
           <a:p>
             <a:r>
-              <a:t>Un sistema di oversight che non misura la propria supervisione non è supervisionabile. Ma misurare i revisori è anche controllo dei lavoratori.</a:t>
+              <a:t>Dopo la simulazione abbiamo confrontato ogni decisione con l'esito registrato nei dati. Non lo sapevamo mentre decidevamo.</a:t>
             </a:r>
           </a:p>
         </p:txBody>
@@ -1151,7 +1152,7 @@
           <a:lstStyle/>
           <a:p>
             <a:r>
-              <a:t>Un limite dichiarato vale più di uno scoperto. Elenco completo nell'allegato della relazione d'impatto.</a:t>
+              <a:t>Un sistema di oversight che non misura la propria supervisione non è supervisionabile. Ma misurare i revisori è anche controllo dei lavoratori.</a:t>
             </a:r>
           </a:p>
         </p:txBody>
@@ -1221,7 +1222,7 @@
           <a:lstStyle/>
           <a:p>
             <a:r>
-              <a:t>Domanda finale della guida: chi è provider e chi deployer. Poi alcuni spunti che non hanno una risposta unica.</a:t>
+              <a:t>Un limite dichiarato vale più di uno scoperto. Elenco completo nell'allegato della relazione d'impatto.</a:t>
             </a:r>
           </a:p>
         </p:txBody>
@@ -1361,6 +1362,76 @@
           <a:lstStyle/>
           <a:p>
             <a:r>
+              <a:t>Domanda finale della guida: chi è provider e chi deployer. Poi alcuni spunti che non hanno una risposta unica.</a:t>
+            </a:r>
+          </a:p>
+        </p:txBody>
+      </p:sp>
+      <p:sp>
+        <p:nvSpPr>
+          <p:cNvPr id="4" name="Slide Number Placeholder 3"/>
+          <p:cNvSpPr>
+            <a:spLocks noGrp="1"/>
+          </p:cNvSpPr>
+          <p:nvPr>
+            <p:ph type="sldNum" idx="5" sz="quarter"/>
+          </p:nvPr>
+        </p:nvSpPr>
+        <p:spPr/>
+      </p:sp>
+    </p:spTree>
+  </p:cSld>
+  <p:clrMapOvr>
+    <a:masterClrMapping/>
+  </p:clrMapOvr>
+</p:notes>
+</file>
+
+<file path=ppt/notesSlides/notesSlide21.xml><?xml version="1.0" encoding="utf-8"?>
+<p:notes xmlns:a="http://schemas.openxmlformats.org/drawingml/2006/main" xmlns:p="http://schemas.openxmlformats.org/presentationml/2006/main" xmlns:r="http://schemas.openxmlformats.org/officeDocument/2006/relationships">
+  <p:cSld>
+    <p:spTree>
+      <p:nvGrpSpPr>
+        <p:cNvPr id="1" name=""/>
+        <p:cNvGrpSpPr/>
+        <p:nvPr/>
+      </p:nvGrpSpPr>
+      <p:grpSpPr>
+        <a:xfrm>
+          <a:off x="0" y="0"/>
+          <a:ext cx="0" cy="0"/>
+          <a:chOff x="0" y="0"/>
+          <a:chExt cx="0" cy="0"/>
+        </a:xfrm>
+      </p:grpSpPr>
+      <p:sp>
+        <p:nvSpPr>
+          <p:cNvPr id="2" name="Slide Image Placeholder 1"/>
+          <p:cNvSpPr>
+            <a:spLocks noGrp="1"/>
+          </p:cNvSpPr>
+          <p:nvPr>
+            <p:ph type="sldImg" idx="2"/>
+          </p:nvPr>
+        </p:nvSpPr>
+        <p:spPr/>
+      </p:sp>
+      <p:sp>
+        <p:nvSpPr>
+          <p:cNvPr id="3" name="Notes Placeholder 2"/>
+          <p:cNvSpPr>
+            <a:spLocks noGrp="1"/>
+          </p:cNvSpPr>
+          <p:nvPr>
+            <p:ph type="body" idx="3" sz="quarter"/>
+          </p:nvPr>
+        </p:nvSpPr>
+        <p:spPr/>
+        <p:txBody>
+          <a:bodyPr/>
+          <a:lstStyle/>
+          <a:p>
+            <a:r>
               <a:t>Abbiamo già provato i sei test della giuria, dieci verifiche su dieci. Siamo pronti per le vostre domande.</a:t>
             </a:r>
           </a:p>
@@ -1571,7 +1642,7 @@
           <a:lstStyle/>
           <a:p>
             <a:r>
-              <a:t>Il secondo problema non è un bias delle etichette: la calibrazione è corretta. Il modello manca guasti che arrivano senza segnali.</a:t>
+              <a:t>Il secondo problema non è soprattutto nelle etichette: la differenza tra guasti attesi e registrati resta sotto la soglia. Il modello manca guasti che arrivano senza segnali.</a:t>
             </a:r>
           </a:p>
         </p:txBody>
@@ -5973,7 +6044,7 @@
                   <a:srgbClr val="FFFFFF"/>
                 </a:solidFill>
               </a:rPr>
-              <a:t>Cosa abbiamo fatto contro il bias, e quanto ha funzionato</a:t>
+              <a:t>Come ci accorgiamo che i conti non tornano</a:t>
             </a:r>
           </a:p>
         </p:txBody>
@@ -6011,7 +6082,7 @@
                   <a:srgbClr val="C9D8EA"/>
                 </a:solidFill>
               </a:rPr>
-              <a:t>Tier 3B-3C</a:t>
+              <a:t>Calibrazione · C2</a:t>
             </a:r>
           </a:p>
         </p:txBody>
@@ -6076,7 +6147,7 @@
         <p:spPr>
           <a:xfrm>
             <a:off x="274320" y="1143000"/>
-            <a:ext cx="5120640" cy="3364992"/>
+            <a:ext cx="5852160" cy="4012909"/>
           </a:xfrm>
           <a:prstGeom prst="rect">
             <a:avLst/>
@@ -6091,8 +6162,8 @@
         </p:nvSpPr>
         <p:spPr>
           <a:xfrm>
-            <a:off x="5577840" y="1143000"/>
-            <a:ext cx="6400800" cy="1261872"/>
+            <a:off x="6309360" y="1143000"/>
+            <a:ext cx="5577840" cy="1234440"/>
           </a:xfrm>
           <a:prstGeom prst="rect">
             <a:avLst/>
@@ -6134,8 +6205,8 @@
         </p:nvSpPr>
         <p:spPr>
           <a:xfrm>
-            <a:off x="5577840" y="1143000"/>
-            <a:ext cx="91440" cy="1261872"/>
+            <a:off x="6309360" y="1143000"/>
+            <a:ext cx="91440" cy="1234440"/>
           </a:xfrm>
           <a:prstGeom prst="rect">
             <a:avLst/>
@@ -6177,8 +6248,8 @@
         </p:nvSpPr>
         <p:spPr>
           <a:xfrm>
-            <a:off x="5806440" y="1188720"/>
-            <a:ext cx="6126480" cy="1188720"/>
+            <a:off x="6537960" y="1188720"/>
+            <a:ext cx="5303520" cy="1188720"/>
           </a:xfrm>
           <a:prstGeom prst="rect">
             <a:avLst/>
@@ -6202,7 +6273,7 @@
                   <a:srgbClr val="0B1F3A"/>
                 </a:solidFill>
               </a:rPr>
-              <a:t>Abbiamo tolto la zona dal modello</a:t>
+              <a:t>Guasti attesi (barre grigie)</a:t>
             </a:r>
           </a:p>
           <a:p>
@@ -6217,22 +6288,7 @@
                   <a:srgbClr val="0B1F3A"/>
                 </a:solidFill>
               </a:rPr>
-              <a:t>Giudica un impianto dai suoi sensori, non da dove si trova.</a:t>
-            </a:r>
-          </a:p>
-          <a:p>
-            <a:pPr>
-              <a:spcAft>
-                <a:spcPts val="800"/>
-              </a:spcAft>
-            </a:pPr>
-            <a:r>
-              <a:rPr sz="1300" b="0">
-                <a:solidFill>
-                  <a:srgbClr val="0B1F3A"/>
-                </a:solidFill>
-              </a:rPr>
-              <a:t>→ La differenza tra zone nel trovare guasti si è dimezzata.</a:t>
+              <a:t>Il sistema dà a ogni impianto una probabilità di guasto. Sommandole sappiamo quanti guasti si aspetta: 100 impianti a "3 su 10" fanno 30 guasti attesi.</a:t>
             </a:r>
           </a:p>
         </p:txBody>
@@ -6245,8 +6301,8 @@
         </p:nvSpPr>
         <p:spPr>
           <a:xfrm>
-            <a:off x="5577840" y="2514600"/>
-            <a:ext cx="6400800" cy="1261872"/>
+            <a:off x="6309360" y="2487168"/>
+            <a:ext cx="5577840" cy="1234440"/>
           </a:xfrm>
           <a:prstGeom prst="rect">
             <a:avLst/>
@@ -6288,8 +6344,8 @@
         </p:nvSpPr>
         <p:spPr>
           <a:xfrm>
-            <a:off x="5577840" y="2514600"/>
-            <a:ext cx="91440" cy="1261872"/>
+            <a:off x="6309360" y="2487168"/>
+            <a:ext cx="91440" cy="1234440"/>
           </a:xfrm>
           <a:prstGeom prst="rect">
             <a:avLst/>
@@ -6331,8 +6387,8 @@
         </p:nvSpPr>
         <p:spPr>
           <a:xfrm>
-            <a:off x="5806440" y="2560320"/>
-            <a:ext cx="6126480" cy="1188720"/>
+            <a:off x="6537960" y="2532888"/>
+            <a:ext cx="5303520" cy="1188720"/>
           </a:xfrm>
           <a:prstGeom prst="rect">
             <a:avLst/>
@@ -6356,7 +6412,7 @@
                   <a:srgbClr val="0B1F3A"/>
                 </a:solidFill>
               </a:rPr>
-              <a:t>Non abbiamo reso il sistema "più tranquillo" al Sud</a:t>
+              <a:t>Guasti registrati (barre colorate)</a:t>
             </a:r>
           </a:p>
           <a:p>
@@ -6371,22 +6427,7 @@
                   <a:srgbClr val="0B1F3A"/>
                 </a:solidFill>
               </a:rPr>
-              <a:t>I suoi falsi allarmi al Sud potrebbero essere guasti veri mai registrati.</a:t>
-            </a:r>
-          </a:p>
-          <a:p>
-            <a:pPr>
-              <a:spcAft>
-                <a:spcPts val="800"/>
-              </a:spcAft>
-            </a:pPr>
-            <a:r>
-              <a:rPr sz="1300" b="0">
-                <a:solidFill>
-                  <a:srgbClr val="0B1F3A"/>
-                </a:solidFill>
-              </a:rPr>
-              <a:t>→ Altrimenti avrebbe visto 65 guasti su 100 invece di 88.</a:t>
+              <a:t>Quelli che risultano davvero negli archivi. Se un guasto non viene scritto, qui non compare.</a:t>
             </a:r>
           </a:p>
         </p:txBody>
@@ -6399,8 +6440,8 @@
         </p:nvSpPr>
         <p:spPr>
           <a:xfrm>
-            <a:off x="5577840" y="3886200"/>
-            <a:ext cx="6400800" cy="1261872"/>
+            <a:off x="6309360" y="3831335"/>
+            <a:ext cx="5577840" cy="1234440"/>
           </a:xfrm>
           <a:prstGeom prst="rect">
             <a:avLst/>
@@ -6442,14 +6483,14 @@
         </p:nvSpPr>
         <p:spPr>
           <a:xfrm>
-            <a:off x="5577840" y="3886200"/>
-            <a:ext cx="91440" cy="1261872"/>
+            <a:off x="6309360" y="3831335"/>
+            <a:ext cx="91440" cy="1234440"/>
           </a:xfrm>
           <a:prstGeom prst="rect">
             <a:avLst/>
           </a:prstGeom>
           <a:solidFill>
-            <a:srgbClr val="0F6CBD"/>
+            <a:srgbClr val="C8102E"/>
           </a:solidFill>
           <a:ln>
             <a:noFill/>
@@ -6485,8 +6526,8 @@
         </p:nvSpPr>
         <p:spPr>
           <a:xfrm>
-            <a:off x="5806440" y="3931920"/>
-            <a:ext cx="6126480" cy="1188720"/>
+            <a:off x="6537960" y="3877055"/>
+            <a:ext cx="5303520" cy="1188720"/>
           </a:xfrm>
           <a:prstGeom prst="rect">
             <a:avLst/>
@@ -6510,7 +6551,7 @@
                   <a:srgbClr val="0B1F3A"/>
                 </a:solidFill>
               </a:rPr>
-              <a:t>Allarme che agisce da solo</a:t>
+              <a:t>La differenza (numeri in alto)</a:t>
             </a:r>
           </a:p>
           <a:p>
@@ -6525,22 +6566,7 @@
                   <a:srgbClr val="0B1F3A"/>
                 </a:solidFill>
               </a:rPr>
-              <a:t>Quando in una zona attesi e registrati non tornano, decide una persona.</a:t>
-            </a:r>
-          </a:p>
-          <a:p>
-            <a:pPr>
-              <a:spcAft>
-                <a:spcPts val="800"/>
-              </a:spcAft>
-            </a:pPr>
-            <a:r>
-              <a:rPr sz="1300" b="0">
-                <a:solidFill>
-                  <a:srgbClr val="0B1F3A"/>
-                </a:solidFill>
-              </a:rPr>
-              <a:t>→ Al Sud il sistema non agisce mai da solo.</a:t>
+              <a:t>Se attesi e registrati si allontanano di oltre 10 guasti ogni 100 impianti, scatta l'allarme. Succede solo al Sud: 42 attesi, 24 registrati, 18 di differenza.</a:t>
             </a:r>
           </a:p>
         </p:txBody>
@@ -6553,8 +6579,8 @@
         </p:nvSpPr>
         <p:spPr>
           <a:xfrm>
-            <a:off x="5577840" y="5257800"/>
-            <a:ext cx="6400800" cy="1261872"/>
+            <a:off x="365760" y="5257800"/>
+            <a:ext cx="11521440" cy="1371600"/>
           </a:xfrm>
           <a:prstGeom prst="rect">
             <a:avLst/>
@@ -6596,14 +6622,14 @@
         </p:nvSpPr>
         <p:spPr>
           <a:xfrm>
-            <a:off x="5577840" y="5257800"/>
-            <a:ext cx="91440" cy="1261872"/>
+            <a:off x="365760" y="5257800"/>
+            <a:ext cx="91440" cy="1371600"/>
           </a:xfrm>
           <a:prstGeom prst="rect">
             <a:avLst/>
           </a:prstGeom>
           <a:solidFill>
-            <a:srgbClr val="0F6CBD"/>
+            <a:srgbClr val="555F6D"/>
           </a:solidFill>
           <a:ln>
             <a:noFill/>
@@ -6639,8 +6665,8 @@
         </p:nvSpPr>
         <p:spPr>
           <a:xfrm>
-            <a:off x="5806440" y="5303520"/>
-            <a:ext cx="6126480" cy="1188720"/>
+            <a:off x="594360" y="5330952"/>
+            <a:ext cx="11201400" cy="1280160"/>
           </a:xfrm>
           <a:prstGeom prst="rect">
             <a:avLst/>
@@ -6664,7 +6690,7 @@
                   <a:srgbClr val="0B1F3A"/>
                 </a:solidFill>
               </a:rPr>
-              <a:t>Più controllo dove vede meno</a:t>
+              <a:t>Perché il sistema si aspetta più guasti quasi ovunque</a:t>
             </a:r>
           </a:p>
           <a:p>
@@ -6679,76 +6705,7 @@
                   <a:srgbClr val="0B1F3A"/>
                 </a:solidFill>
               </a:rPr>
-              <a:t>A Nord e Centro anche i controlli leggeri li approva una persona.</a:t>
-            </a:r>
-          </a:p>
-          <a:p>
-            <a:pPr>
-              <a:spcAft>
-                <a:spcPts val="800"/>
-              </a:spcAft>
-            </a:pPr>
-            <a:r>
-              <a:rPr sz="1300" b="0">
-                <a:solidFill>
-                  <a:srgbClr val="0B1F3A"/>
-                </a:solidFill>
-              </a:rPr>
-              <a:t>→ Guasti veri che sarebbero passati senza controllo: da 6 a 2. Costo: 83 decisioni umane in più su 720.</a:t>
-            </a:r>
-          </a:p>
-        </p:txBody>
-      </p:sp>
-      <p:sp>
-        <p:nvSpPr>
-          <p:cNvPr id="19" name="TextBox 18"/>
-          <p:cNvSpPr txBox="1"/>
-          <p:nvPr/>
-        </p:nvSpPr>
-        <p:spPr>
-          <a:xfrm>
-            <a:off x="365760" y="4663440"/>
-            <a:ext cx="5120640" cy="2011680"/>
-          </a:xfrm>
-          <a:prstGeom prst="rect">
-            <a:avLst/>
-          </a:prstGeom>
-          <a:noFill/>
-        </p:spPr>
-        <p:txBody>
-          <a:bodyPr wrap="square">
-            <a:spAutoFit/>
-          </a:bodyPr>
-          <a:lstStyle/>
-          <a:p>
-            <a:pPr>
-              <a:spcAft>
-                <a:spcPts val="800"/>
-              </a:spcAft>
-            </a:pPr>
-            <a:r>
-              <a:rPr sz="1200" b="0">
-                <a:solidFill>
-                  <a:srgbClr val="555F6D"/>
-                </a:solidFill>
-              </a:rPr>
-              <a:t>Il sistema è tarato per non perdere guasti, quindi </a:t>
-            </a:r>
-            <a:r>
-              <a:rPr sz="1200" b="1">
-                <a:solidFill>
-                  <a:srgbClr val="555F6D"/>
-                </a:solidFill>
-              </a:rPr>
-              <a:t>ne aspetta un po' di più ovunque</a:t>
-            </a:r>
-            <a:r>
-              <a:rPr sz="1200" b="0">
-                <a:solidFill>
-                  <a:srgbClr val="555F6D"/>
-                </a:solidFill>
-              </a:rPr>
-              <a:t> (media 71 registrati ogni 100 attesi). Il Sud è il più basso (57) ed è la zona con la differenza più grande in numero di guasti (42 attesi, 24 registrati): è questo che fa scattare l'allarme. Il Nord però non è lontano (60): lo dichiariamo tra i limiti.</a:t>
+              <a:t>È tarato apposta per essere un po' pessimista: perdere un guasto costa più di un controllo in più. In tutta Italia si aspetta 25 guasti ogni 100 impianti e ne risultano 18. Quindi conta quanto ogni zona si allontana, non il fatto che gli attesi siano più alti. Limite dichiarato: anche il Nord registra poco (15 attesi, 9 registrati), ma con pochi guasti la differenza resta sotto 10 e l'allarme non scatta.</a:t>
             </a:r>
           </a:p>
         </p:txBody>
@@ -6847,7 +6804,7 @@
                   <a:srgbClr val="FFFFFF"/>
                 </a:solidFill>
               </a:rPr>
-              <a:t>Quanto fidarci dei numeri per zona</a:t>
+              <a:t>Cosa abbiamo fatto contro il bias, e quanto ha funzionato</a:t>
             </a:r>
           </a:p>
         </p:txBody>
@@ -6885,7 +6842,7 @@
                   <a:srgbClr val="C9D8EA"/>
                 </a:solidFill>
               </a:rPr>
-              <a:t>D-44 · D-45</a:t>
+              <a:t>Tier 3B-3C</a:t>
             </a:r>
           </a:p>
         </p:txBody>
@@ -6933,219 +6890,16 @@
           </a:p>
         </p:txBody>
       </p:sp>
-      <p:pic>
-        <p:nvPicPr>
-          <p:cNvPr id="6" name="Picture 5" descr="g_recall_ic.png"/>
-          <p:cNvPicPr>
-            <a:picLocks noChangeAspect="1"/>
-          </p:cNvPicPr>
-          <p:nvPr/>
-        </p:nvPicPr>
-        <p:blipFill>
-          <a:blip r:embed="rId2"/>
-          <a:stretch>
-            <a:fillRect/>
-          </a:stretch>
-        </p:blipFill>
-        <p:spPr>
-          <a:xfrm>
-            <a:off x="274320" y="1188720"/>
-            <a:ext cx="6035040" cy="3965883"/>
-          </a:xfrm>
-          <a:prstGeom prst="rect">
-            <a:avLst/>
-          </a:prstGeom>
-        </p:spPr>
-      </p:pic>
-      <p:sp>
-        <p:nvSpPr>
-          <p:cNvPr id="7" name="TextBox 6"/>
-          <p:cNvSpPr txBox="1"/>
-          <p:nvPr/>
-        </p:nvSpPr>
-        <p:spPr>
-          <a:xfrm>
-            <a:off x="6492240" y="1234440"/>
-            <a:ext cx="5394960" cy="4114800"/>
-          </a:xfrm>
-          <a:prstGeom prst="rect">
-            <a:avLst/>
-          </a:prstGeom>
-          <a:noFill/>
-        </p:spPr>
-        <p:txBody>
-          <a:bodyPr wrap="square">
-            <a:spAutoFit/>
-          </a:bodyPr>
-          <a:lstStyle/>
-          <a:p>
-            <a:pPr>
-              <a:spcAft>
-                <a:spcPts val="800"/>
-              </a:spcAft>
-            </a:pPr>
-            <a:r>
-              <a:rPr sz="1500" b="1">
-                <a:solidFill>
-                  <a:srgbClr val="0F6CBD"/>
-                </a:solidFill>
-              </a:rPr>
-              <a:t>•  </a:t>
-            </a:r>
-            <a:r>
-              <a:rPr sz="1500" b="0">
-                <a:solidFill>
-                  <a:srgbClr val="0B1F3A"/>
-                </a:solidFill>
-              </a:rPr>
-              <a:t>Contiamo i guasti veri di ogni zona e quanti il sistema ne aveva segnalati: </a:t>
-            </a:r>
-            <a:r>
-              <a:rPr sz="1500" b="1">
-                <a:solidFill>
-                  <a:srgbClr val="0B1F3A"/>
-                </a:solidFill>
-              </a:rPr>
-              <a:t>Nord 20 su 28</a:t>
-            </a:r>
-            <a:r>
-              <a:rPr sz="1500" b="0">
-                <a:solidFill>
-                  <a:srgbClr val="0B1F3A"/>
-                </a:solidFill>
-              </a:rPr>
-              <a:t>, Centro 18 su 24, Sud 30 su 34, </a:t>
-            </a:r>
-            <a:r>
-              <a:rPr sz="1500" b="1">
-                <a:solidFill>
-                  <a:srgbClr val="0B1F3A"/>
-                </a:solidFill>
-              </a:rPr>
-              <a:t>Isole 40 su 43</a:t>
-            </a:r>
-            <a:r>
-              <a:rPr sz="1500" b="0">
-                <a:solidFill>
-                  <a:srgbClr val="0B1F3A"/>
-                </a:solidFill>
-              </a:rPr>
-              <a:t>.</a:t>
-            </a:r>
-          </a:p>
-          <a:p>
-            <a:pPr>
-              <a:spcAft>
-                <a:spcPts val="800"/>
-              </a:spcAft>
-            </a:pPr>
-            <a:r>
-              <a:rPr sz="1500" b="1">
-                <a:solidFill>
-                  <a:srgbClr val="0F6CBD"/>
-                </a:solidFill>
-              </a:rPr>
-              <a:t>•  </a:t>
-            </a:r>
-            <a:r>
-              <a:rPr sz="1500" b="0">
-                <a:solidFill>
-                  <a:srgbClr val="0B1F3A"/>
-                </a:solidFill>
-              </a:rPr>
-              <a:t>Sembra che il Nord sia servito molto peggio. Ma sono </a:t>
-            </a:r>
-            <a:r>
-              <a:rPr sz="1500" b="1">
-                <a:solidFill>
-                  <a:srgbClr val="0B1F3A"/>
-                </a:solidFill>
-              </a:rPr>
-              <a:t>pochi casi</a:t>
-            </a:r>
-            <a:r>
-              <a:rPr sz="1500" b="0">
-                <a:solidFill>
-                  <a:srgbClr val="0B1F3A"/>
-                </a:solidFill>
-              </a:rPr>
-              <a:t>: bastano 3-4 guasti in più o in meno per cambiare il voto di un punto intero.</a:t>
-            </a:r>
-          </a:p>
-          <a:p>
-            <a:pPr>
-              <a:spcAft>
-                <a:spcPts val="800"/>
-              </a:spcAft>
-            </a:pPr>
-            <a:r>
-              <a:rPr sz="1500" b="1">
-                <a:solidFill>
-                  <a:srgbClr val="0F6CBD"/>
-                </a:solidFill>
-              </a:rPr>
-              <a:t>•  </a:t>
-            </a:r>
-            <a:r>
-              <a:rPr sz="1500" b="0">
-                <a:solidFill>
-                  <a:srgbClr val="0B1F3A"/>
-                </a:solidFill>
-              </a:rPr>
-              <a:t>È come lanciare una moneta 10 volte e ottenere 7 teste: non basta per dire che è truccata.</a:t>
-            </a:r>
-          </a:p>
-          <a:p>
-            <a:pPr>
-              <a:spcAft>
-                <a:spcPts val="800"/>
-              </a:spcAft>
-            </a:pPr>
-            <a:r>
-              <a:rPr sz="1500" b="1">
-                <a:solidFill>
-                  <a:srgbClr val="0F6CBD"/>
-                </a:solidFill>
-              </a:rPr>
-              <a:t>•  </a:t>
-            </a:r>
-            <a:r>
-              <a:rPr sz="1500" b="0">
-                <a:solidFill>
-                  <a:srgbClr val="0B1F3A"/>
-                </a:solidFill>
-              </a:rPr>
-              <a:t>Le barre mostrano di quanto il voto potrebbe cambiare. </a:t>
-            </a:r>
-            <a:r>
-              <a:rPr sz="1500" b="1">
-                <a:solidFill>
-                  <a:srgbClr val="0B1F3A"/>
-                </a:solidFill>
-              </a:rPr>
-              <a:t>Si sovrappongono</a:t>
-            </a:r>
-            <a:r>
-              <a:rPr sz="1500" b="0">
-                <a:solidFill>
-                  <a:srgbClr val="0B1F3A"/>
-                </a:solidFill>
-              </a:rPr>
-              <a:t>: è un campanello d'allarme, non una prova.</a:t>
-            </a:r>
-          </a:p>
-        </p:txBody>
-      </p:sp>
-      <p:sp>
-        <p:nvSpPr>
-          <p:cNvPr id="8" name="Rectangle 7"/>
+      <p:sp>
+        <p:nvSpPr>
+          <p:cNvPr id="6" name="Rectangle 5"/>
           <p:cNvSpPr/>
           <p:nvPr/>
         </p:nvSpPr>
         <p:spPr>
           <a:xfrm>
-            <a:off x="365760" y="5349240"/>
-            <a:ext cx="11430000" cy="1234440"/>
+            <a:off x="365760" y="1143000"/>
+            <a:ext cx="5623560" cy="2651760"/>
           </a:xfrm>
           <a:prstGeom prst="rect">
             <a:avLst/>
@@ -7181,20 +6935,20 @@
       </p:sp>
       <p:sp>
         <p:nvSpPr>
-          <p:cNvPr id="9" name="Rectangle 8"/>
+          <p:cNvPr id="7" name="Rectangle 6"/>
           <p:cNvSpPr/>
           <p:nvPr/>
         </p:nvSpPr>
         <p:spPr>
           <a:xfrm>
-            <a:off x="365760" y="5349240"/>
-            <a:ext cx="91440" cy="1234440"/>
+            <a:off x="365760" y="1143000"/>
+            <a:ext cx="5623560" cy="73152"/>
           </a:xfrm>
           <a:prstGeom prst="rect">
             <a:avLst/>
           </a:prstGeom>
           <a:solidFill>
-            <a:srgbClr val="E07B00"/>
+            <a:srgbClr val="0F6CBD"/>
           </a:solidFill>
           <a:ln>
             <a:noFill/>
@@ -7224,14 +6978,14 @@
       </p:sp>
       <p:sp>
         <p:nvSpPr>
-          <p:cNvPr id="10" name="TextBox 9"/>
+          <p:cNvPr id="8" name="TextBox 7"/>
           <p:cNvSpPr txBox="1"/>
           <p:nvPr/>
         </p:nvSpPr>
         <p:spPr>
           <a:xfrm>
-            <a:off x="594360" y="5422392"/>
-            <a:ext cx="11109960" cy="1143000"/>
+            <a:off x="502920" y="1252728"/>
+            <a:ext cx="5394960" cy="2514600"/>
           </a:xfrm>
           <a:prstGeom prst="rect">
             <a:avLst/>
@@ -7250,12 +7004,12 @@
               </a:spcAft>
             </a:pPr>
             <a:r>
-              <a:rPr sz="1500" b="1">
-                <a:solidFill>
-                  <a:srgbClr val="0B1F3A"/>
-                </a:solidFill>
-              </a:rPr>
-              <a:t>Cosa ne facciamo</a:t>
+              <a:rPr sz="1400" b="1">
+                <a:solidFill>
+                  <a:srgbClr val="0B1F3A"/>
+                </a:solidFill>
+              </a:rPr>
+              <a:t>1 · Abbiamo tolto la zona dal modello</a:t>
             </a:r>
           </a:p>
           <a:p>
@@ -7265,12 +7019,645 @@
               </a:spcAft>
             </a:pPr>
             <a:r>
-              <a:rPr sz="1500" b="0">
-                <a:solidFill>
-                  <a:srgbClr val="0B1F3A"/>
-                </a:solidFill>
-              </a:rPr>
-              <a:t>Non cambiamo il modello per un segnale incerto: mettiamo una persona in più a controllare. Incrociando zona e tipo di utenza, il gruppo più scoperto sono le utenze normali di Nord e Centro (il sistema vede circa 2 guasti su 3).</a:t>
+              <a:rPr sz="1400" b="1">
+                <a:solidFill>
+                  <a:srgbClr val="0B1F3A"/>
+                </a:solidFill>
+              </a:rPr>
+              <a:t>Il problema.</a:t>
+            </a:r>
+            <a:r>
+              <a:rPr sz="1400" b="0">
+                <a:solidFill>
+                  <a:srgbClr val="0B1F3A"/>
+                </a:solidFill>
+              </a:rPr>
+              <a:t> Il sistema usava la zona come scorciatoia: "al Sud si guasta poco", perché così dice l'archivio.</a:t>
+            </a:r>
+          </a:p>
+          <a:p>
+            <a:pPr>
+              <a:spcAft>
+                <a:spcPts val="800"/>
+              </a:spcAft>
+            </a:pPr>
+            <a:r>
+              <a:rPr sz="1400" b="1">
+                <a:solidFill>
+                  <a:srgbClr val="0B1F3A"/>
+                </a:solidFill>
+              </a:rPr>
+              <a:t>Cosa abbiamo fatto.</a:t>
+            </a:r>
+            <a:r>
+              <a:rPr sz="1400" b="0">
+                <a:solidFill>
+                  <a:srgbClr val="0B1F3A"/>
+                </a:solidFill>
+              </a:rPr>
+              <a:t> Ora giudica ogni impianto solo da età, sensori e manutenzioni, non da dove si trova.</a:t>
+            </a:r>
+          </a:p>
+          <a:p>
+            <a:pPr>
+              <a:spcAft>
+                <a:spcPts val="800"/>
+              </a:spcAft>
+            </a:pPr>
+            <a:r>
+              <a:rPr sz="1400" b="1">
+                <a:solidFill>
+                  <a:srgbClr val="0B1F3A"/>
+                </a:solidFill>
+              </a:rPr>
+              <a:t>Risultato.</a:t>
+            </a:r>
+            <a:r>
+              <a:rPr sz="1400" b="0">
+                <a:solidFill>
+                  <a:srgbClr val="0B1F3A"/>
+                </a:solidFill>
+              </a:rPr>
+              <a:t> Prima, tra la zona dove vedeva più guasti e quella dove ne vedeva meno, c'erano 4 guasti su 10 di differenza; ora 2.</a:t>
+            </a:r>
+          </a:p>
+        </p:txBody>
+      </p:sp>
+      <p:sp>
+        <p:nvSpPr>
+          <p:cNvPr id="9" name="Rectangle 8"/>
+          <p:cNvSpPr/>
+          <p:nvPr/>
+        </p:nvSpPr>
+        <p:spPr>
+          <a:xfrm>
+            <a:off x="6172200" y="1143000"/>
+            <a:ext cx="5623560" cy="2651760"/>
+          </a:xfrm>
+          <a:prstGeom prst="rect">
+            <a:avLst/>
+          </a:prstGeom>
+          <a:solidFill>
+            <a:srgbClr val="EEF3F9"/>
+          </a:solidFill>
+          <a:ln>
+            <a:noFill/>
+          </a:ln>
+        </p:spPr>
+        <p:style>
+          <a:lnRef idx="1">
+            <a:schemeClr val="accent1"/>
+          </a:lnRef>
+          <a:fillRef idx="3">
+            <a:schemeClr val="accent1"/>
+          </a:fillRef>
+          <a:effectRef idx="2">
+            <a:schemeClr val="accent1"/>
+          </a:effectRef>
+          <a:fontRef idx="minor">
+            <a:schemeClr val="lt1"/>
+          </a:fontRef>
+        </p:style>
+        <p:txBody>
+          <a:bodyPr rtlCol="0" anchor="ctr"/>
+          <a:lstStyle/>
+          <a:p>
+            <a:pPr algn="ctr"/>
+          </a:p>
+        </p:txBody>
+      </p:sp>
+      <p:sp>
+        <p:nvSpPr>
+          <p:cNvPr id="10" name="Rectangle 9"/>
+          <p:cNvSpPr/>
+          <p:nvPr/>
+        </p:nvSpPr>
+        <p:spPr>
+          <a:xfrm>
+            <a:off x="6172200" y="1143000"/>
+            <a:ext cx="5623560" cy="73152"/>
+          </a:xfrm>
+          <a:prstGeom prst="rect">
+            <a:avLst/>
+          </a:prstGeom>
+          <a:solidFill>
+            <a:srgbClr val="0F6CBD"/>
+          </a:solidFill>
+          <a:ln>
+            <a:noFill/>
+          </a:ln>
+        </p:spPr>
+        <p:style>
+          <a:lnRef idx="1">
+            <a:schemeClr val="accent1"/>
+          </a:lnRef>
+          <a:fillRef idx="3">
+            <a:schemeClr val="accent1"/>
+          </a:fillRef>
+          <a:effectRef idx="2">
+            <a:schemeClr val="accent1"/>
+          </a:effectRef>
+          <a:fontRef idx="minor">
+            <a:schemeClr val="lt1"/>
+          </a:fontRef>
+        </p:style>
+        <p:txBody>
+          <a:bodyPr rtlCol="0" anchor="ctr"/>
+          <a:lstStyle/>
+          <a:p>
+            <a:pPr algn="ctr"/>
+          </a:p>
+        </p:txBody>
+      </p:sp>
+      <p:sp>
+        <p:nvSpPr>
+          <p:cNvPr id="11" name="TextBox 10"/>
+          <p:cNvSpPr txBox="1"/>
+          <p:nvPr/>
+        </p:nvSpPr>
+        <p:spPr>
+          <a:xfrm>
+            <a:off x="6309360" y="1252728"/>
+            <a:ext cx="5394960" cy="2514600"/>
+          </a:xfrm>
+          <a:prstGeom prst="rect">
+            <a:avLst/>
+          </a:prstGeom>
+          <a:noFill/>
+        </p:spPr>
+        <p:txBody>
+          <a:bodyPr wrap="square">
+            <a:spAutoFit/>
+          </a:bodyPr>
+          <a:lstStyle/>
+          <a:p>
+            <a:pPr>
+              <a:spcAft>
+                <a:spcPts val="800"/>
+              </a:spcAft>
+            </a:pPr>
+            <a:r>
+              <a:rPr sz="1400" b="1">
+                <a:solidFill>
+                  <a:srgbClr val="0B1F3A"/>
+                </a:solidFill>
+              </a:rPr>
+              <a:t>2 · Non abbiamo "calmato" il sistema al Sud</a:t>
+            </a:r>
+          </a:p>
+          <a:p>
+            <a:pPr>
+              <a:spcAft>
+                <a:spcPts val="800"/>
+              </a:spcAft>
+            </a:pPr>
+            <a:r>
+              <a:rPr sz="1400" b="1">
+                <a:solidFill>
+                  <a:srgbClr val="0B1F3A"/>
+                </a:solidFill>
+              </a:rPr>
+              <a:t>Il problema.</a:t>
+            </a:r>
+            <a:r>
+              <a:rPr sz="1400" b="0">
+                <a:solidFill>
+                  <a:srgbClr val="0B1F3A"/>
+                </a:solidFill>
+              </a:rPr>
+              <a:t> Al Sud dà molti allarmi che per l'archivio sono a vuoto: 69 impianti su 100 senza guasto registrato ricevono un allarme.</a:t>
+            </a:r>
+          </a:p>
+          <a:p>
+            <a:pPr>
+              <a:spcAft>
+                <a:spcPts val="800"/>
+              </a:spcAft>
+            </a:pPr>
+            <a:r>
+              <a:rPr sz="1400" b="1">
+                <a:solidFill>
+                  <a:srgbClr val="0B1F3A"/>
+                </a:solidFill>
+              </a:rPr>
+              <a:t>Cosa abbiamo fatto.</a:t>
+            </a:r>
+            <a:r>
+              <a:rPr sz="1400" b="0">
+                <a:solidFill>
+                  <a:srgbClr val="0B1F3A"/>
+                </a:solidFill>
+              </a:rPr>
+              <a:t> Potevamo alzare la soglia solo al Sud. Non l'abbiamo fatto: se l'archivio dimentica guasti, quegli allarmi possono essere guasti veri mai scritti.</a:t>
+            </a:r>
+          </a:p>
+          <a:p>
+            <a:pPr>
+              <a:spcAft>
+                <a:spcPts val="800"/>
+              </a:spcAft>
+            </a:pPr>
+            <a:r>
+              <a:rPr sz="1400" b="1">
+                <a:solidFill>
+                  <a:srgbClr val="0B1F3A"/>
+                </a:solidFill>
+              </a:rPr>
+              <a:t>Risultato.</a:t>
+            </a:r>
+            <a:r>
+              <a:rPr sz="1400" b="0">
+                <a:solidFill>
+                  <a:srgbClr val="0B1F3A"/>
+                </a:solidFill>
+              </a:rPr>
+              <a:t> Al Sud il sistema continua a vedere 88 guasti veri su 100. Con la soglia alzata ne avrebbe visti 65: il Sud sarebbe stato penalizzato due volte.</a:t>
+            </a:r>
+          </a:p>
+        </p:txBody>
+      </p:sp>
+      <p:sp>
+        <p:nvSpPr>
+          <p:cNvPr id="12" name="Rectangle 11"/>
+          <p:cNvSpPr/>
+          <p:nvPr/>
+        </p:nvSpPr>
+        <p:spPr>
+          <a:xfrm>
+            <a:off x="365760" y="3931920"/>
+            <a:ext cx="5623560" cy="2651760"/>
+          </a:xfrm>
+          <a:prstGeom prst="rect">
+            <a:avLst/>
+          </a:prstGeom>
+          <a:solidFill>
+            <a:srgbClr val="EEF3F9"/>
+          </a:solidFill>
+          <a:ln>
+            <a:noFill/>
+          </a:ln>
+        </p:spPr>
+        <p:style>
+          <a:lnRef idx="1">
+            <a:schemeClr val="accent1"/>
+          </a:lnRef>
+          <a:fillRef idx="3">
+            <a:schemeClr val="accent1"/>
+          </a:fillRef>
+          <a:effectRef idx="2">
+            <a:schemeClr val="accent1"/>
+          </a:effectRef>
+          <a:fontRef idx="minor">
+            <a:schemeClr val="lt1"/>
+          </a:fontRef>
+        </p:style>
+        <p:txBody>
+          <a:bodyPr rtlCol="0" anchor="ctr"/>
+          <a:lstStyle/>
+          <a:p>
+            <a:pPr algn="ctr"/>
+          </a:p>
+        </p:txBody>
+      </p:sp>
+      <p:sp>
+        <p:nvSpPr>
+          <p:cNvPr id="13" name="Rectangle 12"/>
+          <p:cNvSpPr/>
+          <p:nvPr/>
+        </p:nvSpPr>
+        <p:spPr>
+          <a:xfrm>
+            <a:off x="365760" y="3931920"/>
+            <a:ext cx="5623560" cy="73152"/>
+          </a:xfrm>
+          <a:prstGeom prst="rect">
+            <a:avLst/>
+          </a:prstGeom>
+          <a:solidFill>
+            <a:srgbClr val="0F6CBD"/>
+          </a:solidFill>
+          <a:ln>
+            <a:noFill/>
+          </a:ln>
+        </p:spPr>
+        <p:style>
+          <a:lnRef idx="1">
+            <a:schemeClr val="accent1"/>
+          </a:lnRef>
+          <a:fillRef idx="3">
+            <a:schemeClr val="accent1"/>
+          </a:fillRef>
+          <a:effectRef idx="2">
+            <a:schemeClr val="accent1"/>
+          </a:effectRef>
+          <a:fontRef idx="minor">
+            <a:schemeClr val="lt1"/>
+          </a:fontRef>
+        </p:style>
+        <p:txBody>
+          <a:bodyPr rtlCol="0" anchor="ctr"/>
+          <a:lstStyle/>
+          <a:p>
+            <a:pPr algn="ctr"/>
+          </a:p>
+        </p:txBody>
+      </p:sp>
+      <p:sp>
+        <p:nvSpPr>
+          <p:cNvPr id="14" name="TextBox 13"/>
+          <p:cNvSpPr txBox="1"/>
+          <p:nvPr/>
+        </p:nvSpPr>
+        <p:spPr>
+          <a:xfrm>
+            <a:off x="502920" y="4041648"/>
+            <a:ext cx="5394960" cy="2514600"/>
+          </a:xfrm>
+          <a:prstGeom prst="rect">
+            <a:avLst/>
+          </a:prstGeom>
+          <a:noFill/>
+        </p:spPr>
+        <p:txBody>
+          <a:bodyPr wrap="square">
+            <a:spAutoFit/>
+          </a:bodyPr>
+          <a:lstStyle/>
+          <a:p>
+            <a:pPr>
+              <a:spcAft>
+                <a:spcPts val="800"/>
+              </a:spcAft>
+            </a:pPr>
+            <a:r>
+              <a:rPr sz="1400" b="1">
+                <a:solidFill>
+                  <a:srgbClr val="0B1F3A"/>
+                </a:solidFill>
+              </a:rPr>
+              <a:t>3 · Un allarme che toglie autonomia</a:t>
+            </a:r>
+          </a:p>
+          <a:p>
+            <a:pPr>
+              <a:spcAft>
+                <a:spcPts val="800"/>
+              </a:spcAft>
+            </a:pPr>
+            <a:r>
+              <a:rPr sz="1400" b="1">
+                <a:solidFill>
+                  <a:srgbClr val="0B1F3A"/>
+                </a:solidFill>
+              </a:rPr>
+              <a:t>Il problema.</a:t>
+            </a:r>
+            <a:r>
+              <a:rPr sz="1400" b="0">
+                <a:solidFill>
+                  <a:srgbClr val="0B1F3A"/>
+                </a:solidFill>
+              </a:rPr>
+              <a:t> Un allarme che si colora di rosso ma non cambia nulla è solo decorazione.</a:t>
+            </a:r>
+          </a:p>
+          <a:p>
+            <a:pPr>
+              <a:spcAft>
+                <a:spcPts val="800"/>
+              </a:spcAft>
+            </a:pPr>
+            <a:r>
+              <a:rPr sz="1400" b="1">
+                <a:solidFill>
+                  <a:srgbClr val="0B1F3A"/>
+                </a:solidFill>
+              </a:rPr>
+              <a:t>Cosa abbiamo fatto.</a:t>
+            </a:r>
+            <a:r>
+              <a:rPr sz="1400" b="0">
+                <a:solidFill>
+                  <a:srgbClr val="0B1F3A"/>
+                </a:solidFill>
+              </a:rPr>
+              <a:t> Quando in una zona attesi e registrati si allontanano oltre la soglia, il sistema perde il permesso di agire da solo lì, finché i conti non tornano.</a:t>
+            </a:r>
+          </a:p>
+          <a:p>
+            <a:pPr>
+              <a:spcAft>
+                <a:spcPts val="800"/>
+              </a:spcAft>
+            </a:pPr>
+            <a:r>
+              <a:rPr sz="1400" b="1">
+                <a:solidFill>
+                  <a:srgbClr val="0B1F3A"/>
+                </a:solidFill>
+              </a:rPr>
+              <a:t>Risultato.</a:t>
+            </a:r>
+            <a:r>
+              <a:rPr sz="1400" b="0">
+                <a:solidFill>
+                  <a:srgbClr val="0B1F3A"/>
+                </a:solidFill>
+              </a:rPr>
+              <a:t> Oggi scatta al Sud: nessuna decisione del Sud parte senza che una persona l'abbia approvata.</a:t>
+            </a:r>
+          </a:p>
+        </p:txBody>
+      </p:sp>
+      <p:sp>
+        <p:nvSpPr>
+          <p:cNvPr id="15" name="Rectangle 14"/>
+          <p:cNvSpPr/>
+          <p:nvPr/>
+        </p:nvSpPr>
+        <p:spPr>
+          <a:xfrm>
+            <a:off x="6172200" y="3931920"/>
+            <a:ext cx="5623560" cy="2651760"/>
+          </a:xfrm>
+          <a:prstGeom prst="rect">
+            <a:avLst/>
+          </a:prstGeom>
+          <a:solidFill>
+            <a:srgbClr val="EEF3F9"/>
+          </a:solidFill>
+          <a:ln>
+            <a:noFill/>
+          </a:ln>
+        </p:spPr>
+        <p:style>
+          <a:lnRef idx="1">
+            <a:schemeClr val="accent1"/>
+          </a:lnRef>
+          <a:fillRef idx="3">
+            <a:schemeClr val="accent1"/>
+          </a:fillRef>
+          <a:effectRef idx="2">
+            <a:schemeClr val="accent1"/>
+          </a:effectRef>
+          <a:fontRef idx="minor">
+            <a:schemeClr val="lt1"/>
+          </a:fontRef>
+        </p:style>
+        <p:txBody>
+          <a:bodyPr rtlCol="0" anchor="ctr"/>
+          <a:lstStyle/>
+          <a:p>
+            <a:pPr algn="ctr"/>
+          </a:p>
+        </p:txBody>
+      </p:sp>
+      <p:sp>
+        <p:nvSpPr>
+          <p:cNvPr id="16" name="Rectangle 15"/>
+          <p:cNvSpPr/>
+          <p:nvPr/>
+        </p:nvSpPr>
+        <p:spPr>
+          <a:xfrm>
+            <a:off x="6172200" y="3931920"/>
+            <a:ext cx="5623560" cy="73152"/>
+          </a:xfrm>
+          <a:prstGeom prst="rect">
+            <a:avLst/>
+          </a:prstGeom>
+          <a:solidFill>
+            <a:srgbClr val="0F6CBD"/>
+          </a:solidFill>
+          <a:ln>
+            <a:noFill/>
+          </a:ln>
+        </p:spPr>
+        <p:style>
+          <a:lnRef idx="1">
+            <a:schemeClr val="accent1"/>
+          </a:lnRef>
+          <a:fillRef idx="3">
+            <a:schemeClr val="accent1"/>
+          </a:fillRef>
+          <a:effectRef idx="2">
+            <a:schemeClr val="accent1"/>
+          </a:effectRef>
+          <a:fontRef idx="minor">
+            <a:schemeClr val="lt1"/>
+          </a:fontRef>
+        </p:style>
+        <p:txBody>
+          <a:bodyPr rtlCol="0" anchor="ctr"/>
+          <a:lstStyle/>
+          <a:p>
+            <a:pPr algn="ctr"/>
+          </a:p>
+        </p:txBody>
+      </p:sp>
+      <p:sp>
+        <p:nvSpPr>
+          <p:cNvPr id="17" name="TextBox 16"/>
+          <p:cNvSpPr txBox="1"/>
+          <p:nvPr/>
+        </p:nvSpPr>
+        <p:spPr>
+          <a:xfrm>
+            <a:off x="6309360" y="4041648"/>
+            <a:ext cx="5394960" cy="2514600"/>
+          </a:xfrm>
+          <a:prstGeom prst="rect">
+            <a:avLst/>
+          </a:prstGeom>
+          <a:noFill/>
+        </p:spPr>
+        <p:txBody>
+          <a:bodyPr wrap="square">
+            <a:spAutoFit/>
+          </a:bodyPr>
+          <a:lstStyle/>
+          <a:p>
+            <a:pPr>
+              <a:spcAft>
+                <a:spcPts val="800"/>
+              </a:spcAft>
+            </a:pPr>
+            <a:r>
+              <a:rPr sz="1400" b="1">
+                <a:solidFill>
+                  <a:srgbClr val="0B1F3A"/>
+                </a:solidFill>
+              </a:rPr>
+              <a:t>4 · Più occhi dove il sistema vede meno</a:t>
+            </a:r>
+          </a:p>
+          <a:p>
+            <a:pPr>
+              <a:spcAft>
+                <a:spcPts val="800"/>
+              </a:spcAft>
+            </a:pPr>
+            <a:r>
+              <a:rPr sz="1400" b="1">
+                <a:solidFill>
+                  <a:srgbClr val="0B1F3A"/>
+                </a:solidFill>
+              </a:rPr>
+              <a:t>Il problema.</a:t>
+            </a:r>
+            <a:r>
+              <a:rPr sz="1400" b="0">
+                <a:solidFill>
+                  <a:srgbClr val="0B1F3A"/>
+                </a:solidFill>
+              </a:rPr>
+              <a:t> A Nord e Centro il sistema perde più guasti, ed è proprio lì che agiva da solo più spesso (7 decisioni su 10 al Nord).</a:t>
+            </a:r>
+          </a:p>
+          <a:p>
+            <a:pPr>
+              <a:spcAft>
+                <a:spcPts val="800"/>
+              </a:spcAft>
+            </a:pPr>
+            <a:r>
+              <a:rPr sz="1400" b="1">
+                <a:solidFill>
+                  <a:srgbClr val="0B1F3A"/>
+                </a:solidFill>
+              </a:rPr>
+              <a:t>Cosa abbiamo fatto.</a:t>
+            </a:r>
+            <a:r>
+              <a:rPr sz="1400" b="0">
+                <a:solidFill>
+                  <a:srgbClr val="0B1F3A"/>
+                </a:solidFill>
+              </a:rPr>
+              <a:t> In quelle zone anche i controlli leggeri, da un rischio di 1 su 10 in su, li approva una persona.</a:t>
+            </a:r>
+          </a:p>
+          <a:p>
+            <a:pPr>
+              <a:spcAft>
+                <a:spcPts val="800"/>
+              </a:spcAft>
+            </a:pPr>
+            <a:r>
+              <a:rPr sz="1400" b="1">
+                <a:solidFill>
+                  <a:srgbClr val="0B1F3A"/>
+                </a:solidFill>
+              </a:rPr>
+              <a:t>Risultato.</a:t>
+            </a:r>
+            <a:r>
+              <a:rPr sz="1400" b="0">
+                <a:solidFill>
+                  <a:srgbClr val="0B1F3A"/>
+                </a:solidFill>
+              </a:rPr>
+              <a:t> Guasti veri che sarebbero passati senza controllo umano: da 6 a 2. Costo: 83 decisioni in più per le persone, su 720.</a:t>
             </a:r>
           </a:p>
         </p:txBody>
@@ -7369,7 +7756,7 @@
                   <a:srgbClr val="FFFFFF"/>
                 </a:solidFill>
               </a:rPr>
-              <a:t>Il sistema si controlla nel tempo</a:t>
+              <a:t>Quanto fidarci dei numeri per zona</a:t>
             </a:r>
           </a:p>
         </p:txBody>
@@ -7407,7 +7794,7 @@
                   <a:srgbClr val="C9D8EA"/>
                 </a:solidFill>
               </a:rPr>
-              <a:t>Art. 14(1)-(2)</a:t>
+              <a:t>D-44 · D-45</a:t>
             </a:r>
           </a:p>
         </p:txBody>
@@ -7457,7 +7844,7 @@
       </p:sp>
       <p:pic>
         <p:nvPicPr>
-          <p:cNvPr id="6" name="Picture 5" descr="bias_4.png"/>
+          <p:cNvPr id="6" name="Picture 5" descr="g_recall_ic.png"/>
           <p:cNvPicPr>
             <a:picLocks noChangeAspect="1"/>
           </p:cNvPicPr>
@@ -7471,17 +7858,12 @@
         </p:blipFill>
         <p:spPr>
           <a:xfrm>
-            <a:off x="365760" y="1188720"/>
-            <a:ext cx="6400800" cy="4307305"/>
-          </a:xfrm>
-          <a:prstGeom prst="rect">
-            <a:avLst/>
-          </a:prstGeom>
-          <a:ln w="12700">
-            <a:solidFill>
-              <a:srgbClr val="D0D5DD"/>
-            </a:solidFill>
-          </a:ln>
+            <a:off x="274320" y="1188720"/>
+            <a:ext cx="6035040" cy="3965883"/>
+          </a:xfrm>
+          <a:prstGeom prst="rect">
+            <a:avLst/>
+          </a:prstGeom>
         </p:spPr>
       </p:pic>
       <p:sp>
@@ -7492,8 +7874,8 @@
         </p:nvSpPr>
         <p:spPr>
           <a:xfrm>
-            <a:off x="7040880" y="1280160"/>
-            <a:ext cx="4846320" cy="5303520"/>
+            <a:off x="6492240" y="1234440"/>
+            <a:ext cx="5394960" cy="4114800"/>
           </a:xfrm>
           <a:prstGeom prst="rect">
             <a:avLst/>
@@ -7512,7 +7894,7 @@
               </a:spcAft>
             </a:pPr>
             <a:r>
-              <a:rPr sz="1600" b="1">
+              <a:rPr sz="1500" b="1">
                 <a:solidFill>
                   <a:srgbClr val="0F6CBD"/>
                 </a:solidFill>
@@ -7520,12 +7902,44 @@
               <a:t>•  </a:t>
             </a:r>
             <a:r>
-              <a:rPr sz="1600" b="0">
-                <a:solidFill>
-                  <a:srgbClr val="0B1F3A"/>
-                </a:solidFill>
-              </a:rPr>
-              <a:t>Ogni settimana il sistema confronta le sue previsioni con quello che è successo davvero: quante ne ha azzeccate, quanti guasti ha visto, quanto era sicuro.</a:t>
+              <a:rPr sz="1500" b="0">
+                <a:solidFill>
+                  <a:srgbClr val="0B1F3A"/>
+                </a:solidFill>
+              </a:rPr>
+              <a:t>Contiamo i guasti veri di ogni zona e quanti il sistema ne aveva segnalati: </a:t>
+            </a:r>
+            <a:r>
+              <a:rPr sz="1500" b="1">
+                <a:solidFill>
+                  <a:srgbClr val="0B1F3A"/>
+                </a:solidFill>
+              </a:rPr>
+              <a:t>Nord 20 su 28</a:t>
+            </a:r>
+            <a:r>
+              <a:rPr sz="1500" b="0">
+                <a:solidFill>
+                  <a:srgbClr val="0B1F3A"/>
+                </a:solidFill>
+              </a:rPr>
+              <a:t>, Centro 18 su 24, Sud 30 su 34, </a:t>
+            </a:r>
+            <a:r>
+              <a:rPr sz="1500" b="1">
+                <a:solidFill>
+                  <a:srgbClr val="0B1F3A"/>
+                </a:solidFill>
+              </a:rPr>
+              <a:t>Isole 40 su 43</a:t>
+            </a:r>
+            <a:r>
+              <a:rPr sz="1500" b="0">
+                <a:solidFill>
+                  <a:srgbClr val="0B1F3A"/>
+                </a:solidFill>
+              </a:rPr>
+              <a:t>.</a:t>
             </a:r>
           </a:p>
           <a:p>
@@ -7535,7 +7949,7 @@
               </a:spcAft>
             </a:pPr>
             <a:r>
-              <a:rPr sz="1600" b="1">
+              <a:rPr sz="1500" b="1">
                 <a:solidFill>
                   <a:srgbClr val="0F6CBD"/>
                 </a:solidFill>
@@ -7543,28 +7957,28 @@
               <a:t>•  </a:t>
             </a:r>
             <a:r>
-              <a:rPr sz="1600" b="0">
-                <a:solidFill>
-                  <a:srgbClr val="0B1F3A"/>
-                </a:solidFill>
-              </a:rPr>
-              <a:t>Le tre linee: quante previsioni azzecca, quanti guasti vede, quanto è sicuro. La regola: se l'accuratezza scende di oltre 10 punti sotto il normale per </a:t>
-            </a:r>
-            <a:r>
-              <a:rPr sz="1600" b="1">
-                <a:solidFill>
-                  <a:srgbClr val="0B1F3A"/>
-                </a:solidFill>
-              </a:rPr>
-              <a:t>due settimane di fila</a:t>
-            </a:r>
-            <a:r>
-              <a:rPr sz="1600" b="0">
-                <a:solidFill>
-                  <a:srgbClr val="0B1F3A"/>
-                </a:solidFill>
-              </a:rPr>
-              <a:t>, il sistema smette di agire da solo e passa tutto alle persone.</a:t>
+              <a:rPr sz="1500" b="0">
+                <a:solidFill>
+                  <a:srgbClr val="0B1F3A"/>
+                </a:solidFill>
+              </a:rPr>
+              <a:t>Sembra che il Nord sia servito molto peggio. Ma sono </a:t>
+            </a:r>
+            <a:r>
+              <a:rPr sz="1500" b="1">
+                <a:solidFill>
+                  <a:srgbClr val="0B1F3A"/>
+                </a:solidFill>
+              </a:rPr>
+              <a:t>pochi casi</a:t>
+            </a:r>
+            <a:r>
+              <a:rPr sz="1500" b="0">
+                <a:solidFill>
+                  <a:srgbClr val="0B1F3A"/>
+                </a:solidFill>
+              </a:rPr>
+              <a:t>: bastano 3-4 guasti in più o in meno per cambiare il voto di un punto intero.</a:t>
             </a:r>
           </a:p>
           <a:p>
@@ -7574,7 +7988,7 @@
               </a:spcAft>
             </a:pPr>
             <a:r>
-              <a:rPr sz="1600" b="1">
+              <a:rPr sz="1500" b="1">
                 <a:solidFill>
                   <a:srgbClr val="0F6CBD"/>
                 </a:solidFill>
@@ -7582,12 +7996,12 @@
               <a:t>•  </a:t>
             </a:r>
             <a:r>
-              <a:rPr sz="1600" b="0">
-                <a:solidFill>
-                  <a:srgbClr val="0B1F3A"/>
-                </a:solidFill>
-              </a:rPr>
-              <a:t>Oggi non è mai successo: il riquadro verde lo conferma.</a:t>
+              <a:rPr sz="1500" b="0">
+                <a:solidFill>
+                  <a:srgbClr val="0B1F3A"/>
+                </a:solidFill>
+              </a:rPr>
+              <a:t>È come lanciare una moneta 10 volte e ottenere 7 teste: non basta per dire che è truccata.</a:t>
             </a:r>
           </a:p>
           <a:p>
@@ -7597,7 +8011,7 @@
               </a:spcAft>
             </a:pPr>
             <a:r>
-              <a:rPr sz="1600" b="1">
+              <a:rPr sz="1500" b="1">
                 <a:solidFill>
                   <a:srgbClr val="0F6CBD"/>
                 </a:solidFill>
@@ -7605,28 +8019,167 @@
               <a:t>•  </a:t>
             </a:r>
             <a:r>
-              <a:rPr sz="1600" b="0">
-                <a:solidFill>
-                  <a:srgbClr val="0B1F3A"/>
-                </a:solidFill>
-              </a:rPr>
-              <a:t>Limite: le settimane sono </a:t>
-            </a:r>
-            <a:r>
-              <a:rPr sz="1600" b="1">
-                <a:solidFill>
-                  <a:srgbClr val="0B1F3A"/>
-                </a:solidFill>
-              </a:rPr>
-              <a:t>simulate</a:t>
-            </a:r>
-            <a:r>
-              <a:rPr sz="1600" b="0">
-                <a:solidFill>
-                  <a:srgbClr val="0B1F3A"/>
-                </a:solidFill>
-              </a:rPr>
-              <a:t> dividendo i dati di prova in 12 gruppi, perché i dati non hanno date.</a:t>
+              <a:rPr sz="1500" b="0">
+                <a:solidFill>
+                  <a:srgbClr val="0B1F3A"/>
+                </a:solidFill>
+              </a:rPr>
+              <a:t>Le barre mostrano di quanto il voto potrebbe cambiare. </a:t>
+            </a:r>
+            <a:r>
+              <a:rPr sz="1500" b="1">
+                <a:solidFill>
+                  <a:srgbClr val="0B1F3A"/>
+                </a:solidFill>
+              </a:rPr>
+              <a:t>Si sovrappongono</a:t>
+            </a:r>
+            <a:r>
+              <a:rPr sz="1500" b="0">
+                <a:solidFill>
+                  <a:srgbClr val="0B1F3A"/>
+                </a:solidFill>
+              </a:rPr>
+              <a:t>: è un campanello d'allarme, non una prova.</a:t>
+            </a:r>
+          </a:p>
+        </p:txBody>
+      </p:sp>
+      <p:sp>
+        <p:nvSpPr>
+          <p:cNvPr id="8" name="Rectangle 7"/>
+          <p:cNvSpPr/>
+          <p:nvPr/>
+        </p:nvSpPr>
+        <p:spPr>
+          <a:xfrm>
+            <a:off x="365760" y="5349240"/>
+            <a:ext cx="11430000" cy="1234440"/>
+          </a:xfrm>
+          <a:prstGeom prst="rect">
+            <a:avLst/>
+          </a:prstGeom>
+          <a:solidFill>
+            <a:srgbClr val="EEF3F9"/>
+          </a:solidFill>
+          <a:ln>
+            <a:noFill/>
+          </a:ln>
+        </p:spPr>
+        <p:style>
+          <a:lnRef idx="1">
+            <a:schemeClr val="accent1"/>
+          </a:lnRef>
+          <a:fillRef idx="3">
+            <a:schemeClr val="accent1"/>
+          </a:fillRef>
+          <a:effectRef idx="2">
+            <a:schemeClr val="accent1"/>
+          </a:effectRef>
+          <a:fontRef idx="minor">
+            <a:schemeClr val="lt1"/>
+          </a:fontRef>
+        </p:style>
+        <p:txBody>
+          <a:bodyPr rtlCol="0" anchor="ctr"/>
+          <a:lstStyle/>
+          <a:p>
+            <a:pPr algn="ctr"/>
+          </a:p>
+        </p:txBody>
+      </p:sp>
+      <p:sp>
+        <p:nvSpPr>
+          <p:cNvPr id="9" name="Rectangle 8"/>
+          <p:cNvSpPr/>
+          <p:nvPr/>
+        </p:nvSpPr>
+        <p:spPr>
+          <a:xfrm>
+            <a:off x="365760" y="5349240"/>
+            <a:ext cx="91440" cy="1234440"/>
+          </a:xfrm>
+          <a:prstGeom prst="rect">
+            <a:avLst/>
+          </a:prstGeom>
+          <a:solidFill>
+            <a:srgbClr val="E07B00"/>
+          </a:solidFill>
+          <a:ln>
+            <a:noFill/>
+          </a:ln>
+        </p:spPr>
+        <p:style>
+          <a:lnRef idx="1">
+            <a:schemeClr val="accent1"/>
+          </a:lnRef>
+          <a:fillRef idx="3">
+            <a:schemeClr val="accent1"/>
+          </a:fillRef>
+          <a:effectRef idx="2">
+            <a:schemeClr val="accent1"/>
+          </a:effectRef>
+          <a:fontRef idx="minor">
+            <a:schemeClr val="lt1"/>
+          </a:fontRef>
+        </p:style>
+        <p:txBody>
+          <a:bodyPr rtlCol="0" anchor="ctr"/>
+          <a:lstStyle/>
+          <a:p>
+            <a:pPr algn="ctr"/>
+          </a:p>
+        </p:txBody>
+      </p:sp>
+      <p:sp>
+        <p:nvSpPr>
+          <p:cNvPr id="10" name="TextBox 9"/>
+          <p:cNvSpPr txBox="1"/>
+          <p:nvPr/>
+        </p:nvSpPr>
+        <p:spPr>
+          <a:xfrm>
+            <a:off x="594360" y="5422392"/>
+            <a:ext cx="11109960" cy="1143000"/>
+          </a:xfrm>
+          <a:prstGeom prst="rect">
+            <a:avLst/>
+          </a:prstGeom>
+          <a:noFill/>
+        </p:spPr>
+        <p:txBody>
+          <a:bodyPr wrap="square">
+            <a:spAutoFit/>
+          </a:bodyPr>
+          <a:lstStyle/>
+          <a:p>
+            <a:pPr>
+              <a:spcAft>
+                <a:spcPts val="800"/>
+              </a:spcAft>
+            </a:pPr>
+            <a:r>
+              <a:rPr sz="1500" b="1">
+                <a:solidFill>
+                  <a:srgbClr val="0B1F3A"/>
+                </a:solidFill>
+              </a:rPr>
+              <a:t>Cosa ne facciamo</a:t>
+            </a:r>
+          </a:p>
+          <a:p>
+            <a:pPr>
+              <a:spcAft>
+                <a:spcPts val="800"/>
+              </a:spcAft>
+            </a:pPr>
+            <a:r>
+              <a:rPr sz="1500" b="0">
+                <a:solidFill>
+                  <a:srgbClr val="0B1F3A"/>
+                </a:solidFill>
+              </a:rPr>
+              <a:t>Non cambiamo il modello per un segnale incerto: mettiamo una persona in più a controllare. Incrociando zona e tipo di utenza, il gruppo più scoperto sono le utenze normali di Nord e Centro (il sistema vede circa 2 guasti su 3).</a:t>
             </a:r>
           </a:p>
         </p:txBody>
@@ -7725,7 +8278,7 @@
                   <a:srgbClr val="FFFFFF"/>
                 </a:solidFill>
               </a:rPr>
-              <a:t>La prova: tre operatori simulati</a:t>
+              <a:t>Il sistema si controlla nel tempo</a:t>
             </a:r>
           </a:p>
         </p:txBody>
@@ -7763,7 +8316,7 @@
                   <a:srgbClr val="C9D8EA"/>
                 </a:solidFill>
               </a:rPr>
-              <a:t>Simulazione · 9 ottobre</a:t>
+              <a:t>Art. 14(1)-(2)</a:t>
             </a:r>
           </a:p>
         </p:txBody>
@@ -7811,16 +8364,45 @@
           </a:p>
         </p:txBody>
       </p:sp>
-      <p:sp>
-        <p:nvSpPr>
-          <p:cNvPr id="6" name="TextBox 5"/>
+      <p:pic>
+        <p:nvPicPr>
+          <p:cNvPr id="6" name="Picture 5" descr="bias_4.png"/>
+          <p:cNvPicPr>
+            <a:picLocks noChangeAspect="1"/>
+          </p:cNvPicPr>
+          <p:nvPr/>
+        </p:nvPicPr>
+        <p:blipFill>
+          <a:blip r:embed="rId2"/>
+          <a:stretch>
+            <a:fillRect/>
+          </a:stretch>
+        </p:blipFill>
+        <p:spPr>
+          <a:xfrm>
+            <a:off x="365760" y="1188720"/>
+            <a:ext cx="6400800" cy="4307305"/>
+          </a:xfrm>
+          <a:prstGeom prst="rect">
+            <a:avLst/>
+          </a:prstGeom>
+          <a:ln w="12700">
+            <a:solidFill>
+              <a:srgbClr val="D0D5DD"/>
+            </a:solidFill>
+          </a:ln>
+        </p:spPr>
+      </p:pic>
+      <p:sp>
+        <p:nvSpPr>
+          <p:cNvPr id="7" name="TextBox 6"/>
           <p:cNvSpPr txBox="1"/>
           <p:nvPr/>
         </p:nvSpPr>
         <p:spPr>
           <a:xfrm>
-            <a:off x="457200" y="1188720"/>
-            <a:ext cx="11247120" cy="914400"/>
+            <a:off x="7040880" y="1280160"/>
+            <a:ext cx="4846320" cy="5303520"/>
           </a:xfrm>
           <a:prstGeom prst="rect">
             <a:avLst/>
@@ -7839,20 +8421,35 @@
               </a:spcAft>
             </a:pPr>
             <a:r>
+              <a:rPr sz="1600" b="1">
+                <a:solidFill>
+                  <a:srgbClr val="0F6CBD"/>
+                </a:solidFill>
+              </a:rPr>
+              <a:t>•  </a:t>
+            </a:r>
+            <a:r>
               <a:rPr sz="1600" b="0">
                 <a:solidFill>
                   <a:srgbClr val="0B1F3A"/>
                 </a:solidFill>
               </a:rPr>
-              <a:t>Per vedere se la supervisione regge, abbiamo usato la dashboard come in una control room: </a:t>
-            </a:r>
+              <a:t>Ogni settimana il sistema confronta le sue previsioni con quello che è successo davvero: quante ne ha azzeccate, quanti guasti ha visto, quanto era sicuro.</a:t>
+            </a:r>
+          </a:p>
+          <a:p>
+            <a:pPr>
+              <a:spcAft>
+                <a:spcPts val="800"/>
+              </a:spcAft>
+            </a:pPr>
             <a:r>
               <a:rPr sz="1600" b="1">
                 <a:solidFill>
-                  <a:srgbClr val="0B1F3A"/>
-                </a:solidFill>
-              </a:rPr>
-              <a:t>18 decisioni vere sulla coda, firmate da 3 operatori con stili diversi</a:t>
+                  <a:srgbClr val="0F6CBD"/>
+                </a:solidFill>
+              </a:rPr>
+              <a:t>•  </a:t>
             </a:r>
             <a:r>
               <a:rPr sz="1600" b="0">
@@ -7860,7 +8457,7 @@
                   <a:srgbClr val="0B1F3A"/>
                 </a:solidFill>
               </a:rPr>
-              <a:t>. Abbiamo deciso leggendo </a:t>
+              <a:t>Le tre linee: quante previsioni azzecca, quanti guasti vede, quanto è sicuro. La regola: se l'accuratezza scende di oltre 10 punti sotto il normale per </a:t>
             </a:r>
             <a:r>
               <a:rPr sz="1600" b="1">
@@ -7868,7 +8465,7 @@
                   <a:srgbClr val="0B1F3A"/>
                 </a:solidFill>
               </a:rPr>
-              <a:t>solo la card</a:t>
+              <a:t>due settimane di fila</a:t>
             </a:r>
             <a:r>
               <a:rPr sz="1600" b="0">
@@ -7876,118 +8473,9 @@
                   <a:srgbClr val="0B1F3A"/>
                 </a:solidFill>
               </a:rPr>
-              <a:t>, senza sapere come era andata davvero.</a:t>
-            </a:r>
-          </a:p>
-        </p:txBody>
-      </p:sp>
-      <p:sp>
-        <p:nvSpPr>
-          <p:cNvPr id="7" name="Rectangle 6"/>
-          <p:cNvSpPr/>
-          <p:nvPr/>
-        </p:nvSpPr>
-        <p:spPr>
-          <a:xfrm>
-            <a:off x="365760" y="2286000"/>
-            <a:ext cx="3657600" cy="2651760"/>
-          </a:xfrm>
-          <a:prstGeom prst="rect">
-            <a:avLst/>
-          </a:prstGeom>
-          <a:solidFill>
-            <a:srgbClr val="EEF3F9"/>
-          </a:solidFill>
-          <a:ln>
-            <a:noFill/>
-          </a:ln>
-        </p:spPr>
-        <p:style>
-          <a:lnRef idx="1">
-            <a:schemeClr val="accent1"/>
-          </a:lnRef>
-          <a:fillRef idx="3">
-            <a:schemeClr val="accent1"/>
-          </a:fillRef>
-          <a:effectRef idx="2">
-            <a:schemeClr val="accent1"/>
-          </a:effectRef>
-          <a:fontRef idx="minor">
-            <a:schemeClr val="lt1"/>
-          </a:fontRef>
-        </p:style>
-        <p:txBody>
-          <a:bodyPr rtlCol="0" anchor="ctr"/>
-          <a:lstStyle/>
-          <a:p>
-            <a:pPr algn="ctr"/>
-          </a:p>
-        </p:txBody>
-      </p:sp>
-      <p:sp>
-        <p:nvSpPr>
-          <p:cNvPr id="8" name="Rectangle 7"/>
-          <p:cNvSpPr/>
-          <p:nvPr/>
-        </p:nvSpPr>
-        <p:spPr>
-          <a:xfrm>
-            <a:off x="365760" y="2286000"/>
-            <a:ext cx="3657600" cy="91440"/>
-          </a:xfrm>
-          <a:prstGeom prst="rect">
-            <a:avLst/>
-          </a:prstGeom>
-          <a:solidFill>
-            <a:srgbClr val="0F6CBD"/>
-          </a:solidFill>
-          <a:ln>
-            <a:noFill/>
-          </a:ln>
-        </p:spPr>
-        <p:style>
-          <a:lnRef idx="1">
-            <a:schemeClr val="accent1"/>
-          </a:lnRef>
-          <a:fillRef idx="3">
-            <a:schemeClr val="accent1"/>
-          </a:fillRef>
-          <a:effectRef idx="2">
-            <a:schemeClr val="accent1"/>
-          </a:effectRef>
-          <a:fontRef idx="minor">
-            <a:schemeClr val="lt1"/>
-          </a:fontRef>
-        </p:style>
-        <p:txBody>
-          <a:bodyPr rtlCol="0" anchor="ctr"/>
-          <a:lstStyle/>
-          <a:p>
-            <a:pPr algn="ctr"/>
-          </a:p>
-        </p:txBody>
-      </p:sp>
-      <p:sp>
-        <p:nvSpPr>
-          <p:cNvPr id="9" name="TextBox 8"/>
-          <p:cNvSpPr txBox="1"/>
-          <p:nvPr/>
-        </p:nvSpPr>
-        <p:spPr>
-          <a:xfrm>
-            <a:off x="502920" y="2423160"/>
-            <a:ext cx="3429000" cy="2468880"/>
-          </a:xfrm>
-          <a:prstGeom prst="rect">
-            <a:avLst/>
-          </a:prstGeom>
-          <a:noFill/>
-        </p:spPr>
-        <p:txBody>
-          <a:bodyPr wrap="square">
-            <a:spAutoFit/>
-          </a:bodyPr>
-          <a:lstStyle/>
+              <a:t>, il sistema smette di agire da solo e passa tutto alle persone.</a:t>
+            </a:r>
+          </a:p>
           <a:p>
             <a:pPr>
               <a:spcAft>
@@ -7995,12 +8483,20 @@
               </a:spcAft>
             </a:pPr>
             <a:r>
-              <a:rPr sz="1400" b="1">
-                <a:solidFill>
-                  <a:srgbClr val="0B1F3A"/>
-                </a:solidFill>
-              </a:rPr>
-              <a:t>OP-014 · l'esperto di campo</a:t>
+              <a:rPr sz="1600" b="1">
+                <a:solidFill>
+                  <a:srgbClr val="0F6CBD"/>
+                </a:solidFill>
+              </a:rPr>
+              <a:t>•  </a:t>
+            </a:r>
+            <a:r>
+              <a:rPr sz="1600" b="0">
+                <a:solidFill>
+                  <a:srgbClr val="0B1F3A"/>
+                </a:solidFill>
+              </a:rPr>
+              <a:t>Oggi non è mai successo: il riquadro verde lo conferma.</a:t>
             </a:r>
           </a:p>
           <a:p>
@@ -8010,368 +8506,7 @@
               </a:spcAft>
             </a:pPr>
             <a:r>
-              <a:rPr sz="1400" b="0">
-                <a:solidFill>
-                  <a:srgbClr val="0B1F3A"/>
-                </a:solidFill>
-              </a:rPr>
-              <a:t>Legge la card e usa quello che sa dell'impianto: approva se i segnali sono chiari, rifiuta se sa di lavori già fatti.</a:t>
-            </a:r>
-          </a:p>
-          <a:p>
-            <a:pPr>
-              <a:spcAft>
-                <a:spcPts val="800"/>
-              </a:spcAft>
-            </a:pPr>
-            <a:r>
-              <a:rPr sz="1400" b="1">
-                <a:solidFill>
-                  <a:srgbClr val="0B1F3A"/>
-                </a:solidFill>
-              </a:rPr>
-              <a:t>6 decisioni: 4 approvate, 2 rifiutate</a:t>
-            </a:r>
-          </a:p>
-        </p:txBody>
-      </p:sp>
-      <p:sp>
-        <p:nvSpPr>
-          <p:cNvPr id="10" name="Rectangle 9"/>
-          <p:cNvSpPr/>
-          <p:nvPr/>
-        </p:nvSpPr>
-        <p:spPr>
-          <a:xfrm>
-            <a:off x="4206240" y="2286000"/>
-            <a:ext cx="3657600" cy="2651760"/>
-          </a:xfrm>
-          <a:prstGeom prst="rect">
-            <a:avLst/>
-          </a:prstGeom>
-          <a:solidFill>
-            <a:srgbClr val="EEF3F9"/>
-          </a:solidFill>
-          <a:ln>
-            <a:noFill/>
-          </a:ln>
-        </p:spPr>
-        <p:style>
-          <a:lnRef idx="1">
-            <a:schemeClr val="accent1"/>
-          </a:lnRef>
-          <a:fillRef idx="3">
-            <a:schemeClr val="accent1"/>
-          </a:fillRef>
-          <a:effectRef idx="2">
-            <a:schemeClr val="accent1"/>
-          </a:effectRef>
-          <a:fontRef idx="minor">
-            <a:schemeClr val="lt1"/>
-          </a:fontRef>
-        </p:style>
-        <p:txBody>
-          <a:bodyPr rtlCol="0" anchor="ctr"/>
-          <a:lstStyle/>
-          <a:p>
-            <a:pPr algn="ctr"/>
-          </a:p>
-        </p:txBody>
-      </p:sp>
-      <p:sp>
-        <p:nvSpPr>
-          <p:cNvPr id="11" name="Rectangle 10"/>
-          <p:cNvSpPr/>
-          <p:nvPr/>
-        </p:nvSpPr>
-        <p:spPr>
-          <a:xfrm>
-            <a:off x="4206240" y="2286000"/>
-            <a:ext cx="3657600" cy="91440"/>
-          </a:xfrm>
-          <a:prstGeom prst="rect">
-            <a:avLst/>
-          </a:prstGeom>
-          <a:solidFill>
-            <a:srgbClr val="0F6CBD"/>
-          </a:solidFill>
-          <a:ln>
-            <a:noFill/>
-          </a:ln>
-        </p:spPr>
-        <p:style>
-          <a:lnRef idx="1">
-            <a:schemeClr val="accent1"/>
-          </a:lnRef>
-          <a:fillRef idx="3">
-            <a:schemeClr val="accent1"/>
-          </a:fillRef>
-          <a:effectRef idx="2">
-            <a:schemeClr val="accent1"/>
-          </a:effectRef>
-          <a:fontRef idx="minor">
-            <a:schemeClr val="lt1"/>
-          </a:fontRef>
-        </p:style>
-        <p:txBody>
-          <a:bodyPr rtlCol="0" anchor="ctr"/>
-          <a:lstStyle/>
-          <a:p>
-            <a:pPr algn="ctr"/>
-          </a:p>
-        </p:txBody>
-      </p:sp>
-      <p:sp>
-        <p:nvSpPr>
-          <p:cNvPr id="12" name="TextBox 11"/>
-          <p:cNvSpPr txBox="1"/>
-          <p:nvPr/>
-        </p:nvSpPr>
-        <p:spPr>
-          <a:xfrm>
-            <a:off x="4343400" y="2423160"/>
-            <a:ext cx="3429000" cy="2468880"/>
-          </a:xfrm>
-          <a:prstGeom prst="rect">
-            <a:avLst/>
-          </a:prstGeom>
-          <a:noFill/>
-        </p:spPr>
-        <p:txBody>
-          <a:bodyPr wrap="square">
-            <a:spAutoFit/>
-          </a:bodyPr>
-          <a:lstStyle/>
-          <a:p>
-            <a:pPr>
-              <a:spcAft>
-                <a:spcPts val="800"/>
-              </a:spcAft>
-            </a:pPr>
-            <a:r>
-              <a:rPr sz="1400" b="1">
-                <a:solidFill>
-                  <a:srgbClr val="0B1F3A"/>
-                </a:solidFill>
-              </a:rPr>
-              <a:t>OP-022 · il frettoloso</a:t>
-            </a:r>
-          </a:p>
-          <a:p>
-            <a:pPr>
-              <a:spcAft>
-                <a:spcPts val="800"/>
-              </a:spcAft>
-            </a:pPr>
-            <a:r>
-              <a:rPr sz="1400" b="0">
-                <a:solidFill>
-                  <a:srgbClr val="0B1F3A"/>
-                </a:solidFill>
-              </a:rPr>
-              <a:t>Approva quasi tutto; una volta scrive solo "Approvo, dati chiari". Serve a vedere se il sistema se ne accorge.</a:t>
-            </a:r>
-          </a:p>
-          <a:p>
-            <a:pPr>
-              <a:spcAft>
-                <a:spcPts val="800"/>
-              </a:spcAft>
-            </a:pPr>
-            <a:r>
-              <a:rPr sz="1400" b="1">
-                <a:solidFill>
-                  <a:srgbClr val="0B1F3A"/>
-                </a:solidFill>
-              </a:rPr>
-              <a:t>6 decisioni: 5 approvate, 1 corretta</a:t>
-            </a:r>
-          </a:p>
-        </p:txBody>
-      </p:sp>
-      <p:sp>
-        <p:nvSpPr>
-          <p:cNvPr id="13" name="Rectangle 12"/>
-          <p:cNvSpPr/>
-          <p:nvPr/>
-        </p:nvSpPr>
-        <p:spPr>
-          <a:xfrm>
-            <a:off x="8046720" y="2286000"/>
-            <a:ext cx="3657600" cy="2651760"/>
-          </a:xfrm>
-          <a:prstGeom prst="rect">
-            <a:avLst/>
-          </a:prstGeom>
-          <a:solidFill>
-            <a:srgbClr val="EEF3F9"/>
-          </a:solidFill>
-          <a:ln>
-            <a:noFill/>
-          </a:ln>
-        </p:spPr>
-        <p:style>
-          <a:lnRef idx="1">
-            <a:schemeClr val="accent1"/>
-          </a:lnRef>
-          <a:fillRef idx="3">
-            <a:schemeClr val="accent1"/>
-          </a:fillRef>
-          <a:effectRef idx="2">
-            <a:schemeClr val="accent1"/>
-          </a:effectRef>
-          <a:fontRef idx="minor">
-            <a:schemeClr val="lt1"/>
-          </a:fontRef>
-        </p:style>
-        <p:txBody>
-          <a:bodyPr rtlCol="0" anchor="ctr"/>
-          <a:lstStyle/>
-          <a:p>
-            <a:pPr algn="ctr"/>
-          </a:p>
-        </p:txBody>
-      </p:sp>
-      <p:sp>
-        <p:nvSpPr>
-          <p:cNvPr id="14" name="Rectangle 13"/>
-          <p:cNvSpPr/>
-          <p:nvPr/>
-        </p:nvSpPr>
-        <p:spPr>
-          <a:xfrm>
-            <a:off x="8046720" y="2286000"/>
-            <a:ext cx="3657600" cy="91440"/>
-          </a:xfrm>
-          <a:prstGeom prst="rect">
-            <a:avLst/>
-          </a:prstGeom>
-          <a:solidFill>
-            <a:srgbClr val="0F6CBD"/>
-          </a:solidFill>
-          <a:ln>
-            <a:noFill/>
-          </a:ln>
-        </p:spPr>
-        <p:style>
-          <a:lnRef idx="1">
-            <a:schemeClr val="accent1"/>
-          </a:lnRef>
-          <a:fillRef idx="3">
-            <a:schemeClr val="accent1"/>
-          </a:fillRef>
-          <a:effectRef idx="2">
-            <a:schemeClr val="accent1"/>
-          </a:effectRef>
-          <a:fontRef idx="minor">
-            <a:schemeClr val="lt1"/>
-          </a:fontRef>
-        </p:style>
-        <p:txBody>
-          <a:bodyPr rtlCol="0" anchor="ctr"/>
-          <a:lstStyle/>
-          <a:p>
-            <a:pPr algn="ctr"/>
-          </a:p>
-        </p:txBody>
-      </p:sp>
-      <p:sp>
-        <p:nvSpPr>
-          <p:cNvPr id="15" name="TextBox 14"/>
-          <p:cNvSpPr txBox="1"/>
-          <p:nvPr/>
-        </p:nvSpPr>
-        <p:spPr>
-          <a:xfrm>
-            <a:off x="8183880" y="2423160"/>
-            <a:ext cx="3429000" cy="2468880"/>
-          </a:xfrm>
-          <a:prstGeom prst="rect">
-            <a:avLst/>
-          </a:prstGeom>
-          <a:noFill/>
-        </p:spPr>
-        <p:txBody>
-          <a:bodyPr wrap="square">
-            <a:spAutoFit/>
-          </a:bodyPr>
-          <a:lstStyle/>
-          <a:p>
-            <a:pPr>
-              <a:spcAft>
-                <a:spcPts val="800"/>
-              </a:spcAft>
-            </a:pPr>
-            <a:r>
-              <a:rPr sz="1400" b="1">
-                <a:solidFill>
-                  <a:srgbClr val="0B1F3A"/>
-                </a:solidFill>
-              </a:rPr>
-              <a:t>OP-031 · il prudente</a:t>
-            </a:r>
-          </a:p>
-          <a:p>
-            <a:pPr>
-              <a:spcAft>
-                <a:spcPts val="800"/>
-              </a:spcAft>
-            </a:pPr>
-            <a:r>
-              <a:rPr sz="1400" b="0">
-                <a:solidFill>
-                  <a:srgbClr val="0B1F3A"/>
-                </a:solidFill>
-              </a:rPr>
-              <a:t>Nel dubbio chiede un controllo urgente o passa la decisione al responsabile; corregge spesso.</a:t>
-            </a:r>
-          </a:p>
-          <a:p>
-            <a:pPr>
-              <a:spcAft>
-                <a:spcPts val="800"/>
-              </a:spcAft>
-            </a:pPr>
-            <a:r>
-              <a:rPr sz="1400" b="1">
-                <a:solidFill>
-                  <a:srgbClr val="0B1F3A"/>
-                </a:solidFill>
-              </a:rPr>
-              <a:t>5 decisioni + 1 escalation: 2 approvate, 2 corrette, 1 rifiutata</a:t>
-            </a:r>
-          </a:p>
-        </p:txBody>
-      </p:sp>
-      <p:sp>
-        <p:nvSpPr>
-          <p:cNvPr id="16" name="TextBox 15"/>
-          <p:cNvSpPr txBox="1"/>
-          <p:nvPr/>
-        </p:nvSpPr>
-        <p:spPr>
-          <a:xfrm>
-            <a:off x="457200" y="5120640"/>
-            <a:ext cx="11247120" cy="1554480"/>
-          </a:xfrm>
-          <a:prstGeom prst="rect">
-            <a:avLst/>
-          </a:prstGeom>
-          <a:noFill/>
-        </p:spPr>
-        <p:txBody>
-          <a:bodyPr wrap="square">
-            <a:spAutoFit/>
-          </a:bodyPr>
-          <a:lstStyle/>
-          <a:p>
-            <a:pPr>
-              <a:spcAft>
-                <a:spcPts val="800"/>
-              </a:spcAft>
-            </a:pPr>
-            <a:r>
-              <a:rPr sz="1400" b="1">
+              <a:rPr sz="1600" b="1">
                 <a:solidFill>
                   <a:srgbClr val="0F6CBD"/>
                 </a:solidFill>
@@ -8379,59 +8514,28 @@
               <a:t>•  </a:t>
             </a:r>
             <a:r>
-              <a:rPr sz="1400" b="1">
-                <a:solidFill>
-                  <a:srgbClr val="0B1F3A"/>
-                </a:solidFill>
-              </a:rPr>
-              <a:t>Come abbiamo scelto</a:t>
-            </a:r>
-            <a:r>
-              <a:rPr sz="1400" b="0">
-                <a:solidFill>
-                  <a:srgbClr val="0B1F3A"/>
-                </a:solidFill>
-              </a:rPr>
-              <a:t>: rischio, motivo principale, casi simili e avviso sul Sud dalla card; per rifiuti e correzioni abbiamo immaginato informazioni che il sistema non ha (impianto già sostituito, turbina ferma, ospedale servito).</a:t>
-            </a:r>
-          </a:p>
-          <a:p>
-            <a:pPr>
-              <a:spcAft>
-                <a:spcPts val="800"/>
-              </a:spcAft>
-            </a:pPr>
-            <a:r>
-              <a:rPr sz="1400" b="1">
-                <a:solidFill>
-                  <a:srgbClr val="0F6CBD"/>
-                </a:solidFill>
-              </a:rPr>
-              <a:t>•  </a:t>
-            </a:r>
-            <a:r>
-              <a:rPr sz="1400" b="0">
-                <a:solidFill>
-                  <a:srgbClr val="0B1F3A"/>
-                </a:solidFill>
-              </a:rPr>
-              <a:t>Prima di tutto abbiamo provato ad approvare con "ok": </a:t>
-            </a:r>
-            <a:r>
-              <a:rPr sz="1400" b="1">
-                <a:solidFill>
-                  <a:srgbClr val="0B1F3A"/>
-                </a:solidFill>
-              </a:rPr>
-              <a:t>respinto</a:t>
-            </a:r>
-            <a:r>
-              <a:rPr sz="1400" b="0">
-                <a:solidFill>
-                  <a:srgbClr val="0B1F3A"/>
-                </a:solidFill>
-              </a:rPr>
-              <a:t>. Motivazioni inventate, ma decisioni, registro e numeri sono quelli veri della dashboard.</a:t>
+              <a:rPr sz="1600" b="0">
+                <a:solidFill>
+                  <a:srgbClr val="0B1F3A"/>
+                </a:solidFill>
+              </a:rPr>
+              <a:t>Limite: le settimane sono </a:t>
+            </a:r>
+            <a:r>
+              <a:rPr sz="1600" b="1">
+                <a:solidFill>
+                  <a:srgbClr val="0B1F3A"/>
+                </a:solidFill>
+              </a:rPr>
+              <a:t>simulate</a:t>
+            </a:r>
+            <a:r>
+              <a:rPr sz="1600" b="0">
+                <a:solidFill>
+                  <a:srgbClr val="0B1F3A"/>
+                </a:solidFill>
+              </a:rPr>
+              <a:t> dividendo i dati di prova in 12 gruppi, perché i dati non hanno date.</a:t>
             </a:r>
           </a:p>
         </p:txBody>
@@ -8445,6 +8549,811 @@
 </file>
 
 <file path=ppt/slides/slide16.xml><?xml version="1.0" encoding="utf-8"?>
+<p:sld xmlns:a="http://schemas.openxmlformats.org/drawingml/2006/main" xmlns:p="http://schemas.openxmlformats.org/presentationml/2006/main" xmlns:r="http://schemas.openxmlformats.org/officeDocument/2006/relationships">
+  <p:cSld>
+    <p:spTree>
+      <p:nvGrpSpPr>
+        <p:cNvPr id="1" name=""/>
+        <p:cNvGrpSpPr/>
+        <p:nvPr/>
+      </p:nvGrpSpPr>
+      <p:grpSpPr/>
+      <p:sp>
+        <p:nvSpPr>
+          <p:cNvPr id="2" name="Rectangle 1"/>
+          <p:cNvSpPr/>
+          <p:nvPr/>
+        </p:nvSpPr>
+        <p:spPr>
+          <a:xfrm>
+            <a:off x="0" y="0"/>
+            <a:ext cx="12191695" cy="914400"/>
+          </a:xfrm>
+          <a:prstGeom prst="rect">
+            <a:avLst/>
+          </a:prstGeom>
+          <a:solidFill>
+            <a:srgbClr val="0B1F3A"/>
+          </a:solidFill>
+          <a:ln>
+            <a:noFill/>
+          </a:ln>
+        </p:spPr>
+        <p:style>
+          <a:lnRef idx="1">
+            <a:schemeClr val="accent1"/>
+          </a:lnRef>
+          <a:fillRef idx="3">
+            <a:schemeClr val="accent1"/>
+          </a:fillRef>
+          <a:effectRef idx="2">
+            <a:schemeClr val="accent1"/>
+          </a:effectRef>
+          <a:fontRef idx="minor">
+            <a:schemeClr val="lt1"/>
+          </a:fontRef>
+        </p:style>
+        <p:txBody>
+          <a:bodyPr rtlCol="0" anchor="ctr"/>
+          <a:lstStyle/>
+          <a:p>
+            <a:pPr algn="ctr"/>
+          </a:p>
+        </p:txBody>
+      </p:sp>
+      <p:sp>
+        <p:nvSpPr>
+          <p:cNvPr id="3" name="TextBox 2"/>
+          <p:cNvSpPr txBox="1"/>
+          <p:nvPr/>
+        </p:nvSpPr>
+        <p:spPr>
+          <a:xfrm>
+            <a:off x="457200" y="164592"/>
+            <a:ext cx="9418320" cy="640080"/>
+          </a:xfrm>
+          <a:prstGeom prst="rect">
+            <a:avLst/>
+          </a:prstGeom>
+          <a:noFill/>
+        </p:spPr>
+        <p:txBody>
+          <a:bodyPr wrap="square">
+            <a:spAutoFit/>
+          </a:bodyPr>
+          <a:lstStyle/>
+          <a:p>
+            <a:pPr>
+              <a:spcAft>
+                <a:spcPts val="800"/>
+              </a:spcAft>
+            </a:pPr>
+            <a:r>
+              <a:rPr sz="2800" b="1">
+                <a:solidFill>
+                  <a:srgbClr val="FFFFFF"/>
+                </a:solidFill>
+              </a:rPr>
+              <a:t>La prova: tre operatori simulati</a:t>
+            </a:r>
+          </a:p>
+        </p:txBody>
+      </p:sp>
+      <p:sp>
+        <p:nvSpPr>
+          <p:cNvPr id="4" name="TextBox 3"/>
+          <p:cNvSpPr txBox="1"/>
+          <p:nvPr/>
+        </p:nvSpPr>
+        <p:spPr>
+          <a:xfrm>
+            <a:off x="9144000" y="274320"/>
+            <a:ext cx="2834640" cy="457200"/>
+          </a:xfrm>
+          <a:prstGeom prst="rect">
+            <a:avLst/>
+          </a:prstGeom>
+          <a:noFill/>
+        </p:spPr>
+        <p:txBody>
+          <a:bodyPr wrap="square">
+            <a:spAutoFit/>
+          </a:bodyPr>
+          <a:lstStyle/>
+          <a:p>
+            <a:pPr algn="r">
+              <a:spcAft>
+                <a:spcPts val="800"/>
+              </a:spcAft>
+            </a:pPr>
+            <a:r>
+              <a:rPr sz="1300" b="0">
+                <a:solidFill>
+                  <a:srgbClr val="C9D8EA"/>
+                </a:solidFill>
+              </a:rPr>
+              <a:t>Simulazione · 9 ottobre</a:t>
+            </a:r>
+          </a:p>
+        </p:txBody>
+      </p:sp>
+      <p:sp>
+        <p:nvSpPr>
+          <p:cNvPr id="5" name="Rectangle 4"/>
+          <p:cNvSpPr/>
+          <p:nvPr/>
+        </p:nvSpPr>
+        <p:spPr>
+          <a:xfrm>
+            <a:off x="0" y="914400"/>
+            <a:ext cx="12191695" cy="54864"/>
+          </a:xfrm>
+          <a:prstGeom prst="rect">
+            <a:avLst/>
+          </a:prstGeom>
+          <a:solidFill>
+            <a:srgbClr val="0F6CBD"/>
+          </a:solidFill>
+          <a:ln>
+            <a:noFill/>
+          </a:ln>
+        </p:spPr>
+        <p:style>
+          <a:lnRef idx="1">
+            <a:schemeClr val="accent1"/>
+          </a:lnRef>
+          <a:fillRef idx="3">
+            <a:schemeClr val="accent1"/>
+          </a:fillRef>
+          <a:effectRef idx="2">
+            <a:schemeClr val="accent1"/>
+          </a:effectRef>
+          <a:fontRef idx="minor">
+            <a:schemeClr val="lt1"/>
+          </a:fontRef>
+        </p:style>
+        <p:txBody>
+          <a:bodyPr rtlCol="0" anchor="ctr"/>
+          <a:lstStyle/>
+          <a:p>
+            <a:pPr algn="ctr"/>
+          </a:p>
+        </p:txBody>
+      </p:sp>
+      <p:sp>
+        <p:nvSpPr>
+          <p:cNvPr id="6" name="TextBox 5"/>
+          <p:cNvSpPr txBox="1"/>
+          <p:nvPr/>
+        </p:nvSpPr>
+        <p:spPr>
+          <a:xfrm>
+            <a:off x="457200" y="1188720"/>
+            <a:ext cx="11247120" cy="914400"/>
+          </a:xfrm>
+          <a:prstGeom prst="rect">
+            <a:avLst/>
+          </a:prstGeom>
+          <a:noFill/>
+        </p:spPr>
+        <p:txBody>
+          <a:bodyPr wrap="square">
+            <a:spAutoFit/>
+          </a:bodyPr>
+          <a:lstStyle/>
+          <a:p>
+            <a:pPr>
+              <a:spcAft>
+                <a:spcPts val="800"/>
+              </a:spcAft>
+            </a:pPr>
+            <a:r>
+              <a:rPr sz="1600" b="0">
+                <a:solidFill>
+                  <a:srgbClr val="0B1F3A"/>
+                </a:solidFill>
+              </a:rPr>
+              <a:t>Per vedere se la supervisione regge, abbiamo usato la dashboard come in una control room: </a:t>
+            </a:r>
+            <a:r>
+              <a:rPr sz="1600" b="1">
+                <a:solidFill>
+                  <a:srgbClr val="0B1F3A"/>
+                </a:solidFill>
+              </a:rPr>
+              <a:t>18 decisioni vere sulla coda, firmate da 3 operatori con stili diversi</a:t>
+            </a:r>
+            <a:r>
+              <a:rPr sz="1600" b="0">
+                <a:solidFill>
+                  <a:srgbClr val="0B1F3A"/>
+                </a:solidFill>
+              </a:rPr>
+              <a:t>. Abbiamo deciso leggendo </a:t>
+            </a:r>
+            <a:r>
+              <a:rPr sz="1600" b="1">
+                <a:solidFill>
+                  <a:srgbClr val="0B1F3A"/>
+                </a:solidFill>
+              </a:rPr>
+              <a:t>solo la card</a:t>
+            </a:r>
+            <a:r>
+              <a:rPr sz="1600" b="0">
+                <a:solidFill>
+                  <a:srgbClr val="0B1F3A"/>
+                </a:solidFill>
+              </a:rPr>
+              <a:t>, senza sapere come era andata davvero.</a:t>
+            </a:r>
+          </a:p>
+        </p:txBody>
+      </p:sp>
+      <p:sp>
+        <p:nvSpPr>
+          <p:cNvPr id="7" name="Rectangle 6"/>
+          <p:cNvSpPr/>
+          <p:nvPr/>
+        </p:nvSpPr>
+        <p:spPr>
+          <a:xfrm>
+            <a:off x="365760" y="2286000"/>
+            <a:ext cx="3657600" cy="2651760"/>
+          </a:xfrm>
+          <a:prstGeom prst="rect">
+            <a:avLst/>
+          </a:prstGeom>
+          <a:solidFill>
+            <a:srgbClr val="EEF3F9"/>
+          </a:solidFill>
+          <a:ln>
+            <a:noFill/>
+          </a:ln>
+        </p:spPr>
+        <p:style>
+          <a:lnRef idx="1">
+            <a:schemeClr val="accent1"/>
+          </a:lnRef>
+          <a:fillRef idx="3">
+            <a:schemeClr val="accent1"/>
+          </a:fillRef>
+          <a:effectRef idx="2">
+            <a:schemeClr val="accent1"/>
+          </a:effectRef>
+          <a:fontRef idx="minor">
+            <a:schemeClr val="lt1"/>
+          </a:fontRef>
+        </p:style>
+        <p:txBody>
+          <a:bodyPr rtlCol="0" anchor="ctr"/>
+          <a:lstStyle/>
+          <a:p>
+            <a:pPr algn="ctr"/>
+          </a:p>
+        </p:txBody>
+      </p:sp>
+      <p:sp>
+        <p:nvSpPr>
+          <p:cNvPr id="8" name="Rectangle 7"/>
+          <p:cNvSpPr/>
+          <p:nvPr/>
+        </p:nvSpPr>
+        <p:spPr>
+          <a:xfrm>
+            <a:off x="365760" y="2286000"/>
+            <a:ext cx="3657600" cy="91440"/>
+          </a:xfrm>
+          <a:prstGeom prst="rect">
+            <a:avLst/>
+          </a:prstGeom>
+          <a:solidFill>
+            <a:srgbClr val="0F6CBD"/>
+          </a:solidFill>
+          <a:ln>
+            <a:noFill/>
+          </a:ln>
+        </p:spPr>
+        <p:style>
+          <a:lnRef idx="1">
+            <a:schemeClr val="accent1"/>
+          </a:lnRef>
+          <a:fillRef idx="3">
+            <a:schemeClr val="accent1"/>
+          </a:fillRef>
+          <a:effectRef idx="2">
+            <a:schemeClr val="accent1"/>
+          </a:effectRef>
+          <a:fontRef idx="minor">
+            <a:schemeClr val="lt1"/>
+          </a:fontRef>
+        </p:style>
+        <p:txBody>
+          <a:bodyPr rtlCol="0" anchor="ctr"/>
+          <a:lstStyle/>
+          <a:p>
+            <a:pPr algn="ctr"/>
+          </a:p>
+        </p:txBody>
+      </p:sp>
+      <p:sp>
+        <p:nvSpPr>
+          <p:cNvPr id="9" name="TextBox 8"/>
+          <p:cNvSpPr txBox="1"/>
+          <p:nvPr/>
+        </p:nvSpPr>
+        <p:spPr>
+          <a:xfrm>
+            <a:off x="502920" y="2423160"/>
+            <a:ext cx="3429000" cy="2468880"/>
+          </a:xfrm>
+          <a:prstGeom prst="rect">
+            <a:avLst/>
+          </a:prstGeom>
+          <a:noFill/>
+        </p:spPr>
+        <p:txBody>
+          <a:bodyPr wrap="square">
+            <a:spAutoFit/>
+          </a:bodyPr>
+          <a:lstStyle/>
+          <a:p>
+            <a:pPr>
+              <a:spcAft>
+                <a:spcPts val="800"/>
+              </a:spcAft>
+            </a:pPr>
+            <a:r>
+              <a:rPr sz="1400" b="1">
+                <a:solidFill>
+                  <a:srgbClr val="0B1F3A"/>
+                </a:solidFill>
+              </a:rPr>
+              <a:t>OP-014 · l'esperto di campo</a:t>
+            </a:r>
+          </a:p>
+          <a:p>
+            <a:pPr>
+              <a:spcAft>
+                <a:spcPts val="800"/>
+              </a:spcAft>
+            </a:pPr>
+            <a:r>
+              <a:rPr sz="1400" b="0">
+                <a:solidFill>
+                  <a:srgbClr val="0B1F3A"/>
+                </a:solidFill>
+              </a:rPr>
+              <a:t>Legge la card e usa quello che sa dell'impianto: approva se i segnali sono chiari, rifiuta se sa di lavori già fatti.</a:t>
+            </a:r>
+          </a:p>
+          <a:p>
+            <a:pPr>
+              <a:spcAft>
+                <a:spcPts val="800"/>
+              </a:spcAft>
+            </a:pPr>
+            <a:r>
+              <a:rPr sz="1400" b="1">
+                <a:solidFill>
+                  <a:srgbClr val="0B1F3A"/>
+                </a:solidFill>
+              </a:rPr>
+              <a:t>6 decisioni: 4 approvate, 2 rifiutate</a:t>
+            </a:r>
+          </a:p>
+        </p:txBody>
+      </p:sp>
+      <p:sp>
+        <p:nvSpPr>
+          <p:cNvPr id="10" name="Rectangle 9"/>
+          <p:cNvSpPr/>
+          <p:nvPr/>
+        </p:nvSpPr>
+        <p:spPr>
+          <a:xfrm>
+            <a:off x="4206240" y="2286000"/>
+            <a:ext cx="3657600" cy="2651760"/>
+          </a:xfrm>
+          <a:prstGeom prst="rect">
+            <a:avLst/>
+          </a:prstGeom>
+          <a:solidFill>
+            <a:srgbClr val="EEF3F9"/>
+          </a:solidFill>
+          <a:ln>
+            <a:noFill/>
+          </a:ln>
+        </p:spPr>
+        <p:style>
+          <a:lnRef idx="1">
+            <a:schemeClr val="accent1"/>
+          </a:lnRef>
+          <a:fillRef idx="3">
+            <a:schemeClr val="accent1"/>
+          </a:fillRef>
+          <a:effectRef idx="2">
+            <a:schemeClr val="accent1"/>
+          </a:effectRef>
+          <a:fontRef idx="minor">
+            <a:schemeClr val="lt1"/>
+          </a:fontRef>
+        </p:style>
+        <p:txBody>
+          <a:bodyPr rtlCol="0" anchor="ctr"/>
+          <a:lstStyle/>
+          <a:p>
+            <a:pPr algn="ctr"/>
+          </a:p>
+        </p:txBody>
+      </p:sp>
+      <p:sp>
+        <p:nvSpPr>
+          <p:cNvPr id="11" name="Rectangle 10"/>
+          <p:cNvSpPr/>
+          <p:nvPr/>
+        </p:nvSpPr>
+        <p:spPr>
+          <a:xfrm>
+            <a:off x="4206240" y="2286000"/>
+            <a:ext cx="3657600" cy="91440"/>
+          </a:xfrm>
+          <a:prstGeom prst="rect">
+            <a:avLst/>
+          </a:prstGeom>
+          <a:solidFill>
+            <a:srgbClr val="0F6CBD"/>
+          </a:solidFill>
+          <a:ln>
+            <a:noFill/>
+          </a:ln>
+        </p:spPr>
+        <p:style>
+          <a:lnRef idx="1">
+            <a:schemeClr val="accent1"/>
+          </a:lnRef>
+          <a:fillRef idx="3">
+            <a:schemeClr val="accent1"/>
+          </a:fillRef>
+          <a:effectRef idx="2">
+            <a:schemeClr val="accent1"/>
+          </a:effectRef>
+          <a:fontRef idx="minor">
+            <a:schemeClr val="lt1"/>
+          </a:fontRef>
+        </p:style>
+        <p:txBody>
+          <a:bodyPr rtlCol="0" anchor="ctr"/>
+          <a:lstStyle/>
+          <a:p>
+            <a:pPr algn="ctr"/>
+          </a:p>
+        </p:txBody>
+      </p:sp>
+      <p:sp>
+        <p:nvSpPr>
+          <p:cNvPr id="12" name="TextBox 11"/>
+          <p:cNvSpPr txBox="1"/>
+          <p:nvPr/>
+        </p:nvSpPr>
+        <p:spPr>
+          <a:xfrm>
+            <a:off x="4343400" y="2423160"/>
+            <a:ext cx="3429000" cy="2468880"/>
+          </a:xfrm>
+          <a:prstGeom prst="rect">
+            <a:avLst/>
+          </a:prstGeom>
+          <a:noFill/>
+        </p:spPr>
+        <p:txBody>
+          <a:bodyPr wrap="square">
+            <a:spAutoFit/>
+          </a:bodyPr>
+          <a:lstStyle/>
+          <a:p>
+            <a:pPr>
+              <a:spcAft>
+                <a:spcPts val="800"/>
+              </a:spcAft>
+            </a:pPr>
+            <a:r>
+              <a:rPr sz="1400" b="1">
+                <a:solidFill>
+                  <a:srgbClr val="0B1F3A"/>
+                </a:solidFill>
+              </a:rPr>
+              <a:t>OP-022 · il frettoloso</a:t>
+            </a:r>
+          </a:p>
+          <a:p>
+            <a:pPr>
+              <a:spcAft>
+                <a:spcPts val="800"/>
+              </a:spcAft>
+            </a:pPr>
+            <a:r>
+              <a:rPr sz="1400" b="0">
+                <a:solidFill>
+                  <a:srgbClr val="0B1F3A"/>
+                </a:solidFill>
+              </a:rPr>
+              <a:t>Approva quasi tutto; una volta scrive solo "Approvo, dati chiari". Serve a vedere se il sistema se ne accorge.</a:t>
+            </a:r>
+          </a:p>
+          <a:p>
+            <a:pPr>
+              <a:spcAft>
+                <a:spcPts val="800"/>
+              </a:spcAft>
+            </a:pPr>
+            <a:r>
+              <a:rPr sz="1400" b="1">
+                <a:solidFill>
+                  <a:srgbClr val="0B1F3A"/>
+                </a:solidFill>
+              </a:rPr>
+              <a:t>6 decisioni: 5 approvate, 1 corretta</a:t>
+            </a:r>
+          </a:p>
+        </p:txBody>
+      </p:sp>
+      <p:sp>
+        <p:nvSpPr>
+          <p:cNvPr id="13" name="Rectangle 12"/>
+          <p:cNvSpPr/>
+          <p:nvPr/>
+        </p:nvSpPr>
+        <p:spPr>
+          <a:xfrm>
+            <a:off x="8046720" y="2286000"/>
+            <a:ext cx="3657600" cy="2651760"/>
+          </a:xfrm>
+          <a:prstGeom prst="rect">
+            <a:avLst/>
+          </a:prstGeom>
+          <a:solidFill>
+            <a:srgbClr val="EEF3F9"/>
+          </a:solidFill>
+          <a:ln>
+            <a:noFill/>
+          </a:ln>
+        </p:spPr>
+        <p:style>
+          <a:lnRef idx="1">
+            <a:schemeClr val="accent1"/>
+          </a:lnRef>
+          <a:fillRef idx="3">
+            <a:schemeClr val="accent1"/>
+          </a:fillRef>
+          <a:effectRef idx="2">
+            <a:schemeClr val="accent1"/>
+          </a:effectRef>
+          <a:fontRef idx="minor">
+            <a:schemeClr val="lt1"/>
+          </a:fontRef>
+        </p:style>
+        <p:txBody>
+          <a:bodyPr rtlCol="0" anchor="ctr"/>
+          <a:lstStyle/>
+          <a:p>
+            <a:pPr algn="ctr"/>
+          </a:p>
+        </p:txBody>
+      </p:sp>
+      <p:sp>
+        <p:nvSpPr>
+          <p:cNvPr id="14" name="Rectangle 13"/>
+          <p:cNvSpPr/>
+          <p:nvPr/>
+        </p:nvSpPr>
+        <p:spPr>
+          <a:xfrm>
+            <a:off x="8046720" y="2286000"/>
+            <a:ext cx="3657600" cy="91440"/>
+          </a:xfrm>
+          <a:prstGeom prst="rect">
+            <a:avLst/>
+          </a:prstGeom>
+          <a:solidFill>
+            <a:srgbClr val="0F6CBD"/>
+          </a:solidFill>
+          <a:ln>
+            <a:noFill/>
+          </a:ln>
+        </p:spPr>
+        <p:style>
+          <a:lnRef idx="1">
+            <a:schemeClr val="accent1"/>
+          </a:lnRef>
+          <a:fillRef idx="3">
+            <a:schemeClr val="accent1"/>
+          </a:fillRef>
+          <a:effectRef idx="2">
+            <a:schemeClr val="accent1"/>
+          </a:effectRef>
+          <a:fontRef idx="minor">
+            <a:schemeClr val="lt1"/>
+          </a:fontRef>
+        </p:style>
+        <p:txBody>
+          <a:bodyPr rtlCol="0" anchor="ctr"/>
+          <a:lstStyle/>
+          <a:p>
+            <a:pPr algn="ctr"/>
+          </a:p>
+        </p:txBody>
+      </p:sp>
+      <p:sp>
+        <p:nvSpPr>
+          <p:cNvPr id="15" name="TextBox 14"/>
+          <p:cNvSpPr txBox="1"/>
+          <p:nvPr/>
+        </p:nvSpPr>
+        <p:spPr>
+          <a:xfrm>
+            <a:off x="8183880" y="2423160"/>
+            <a:ext cx="3429000" cy="2468880"/>
+          </a:xfrm>
+          <a:prstGeom prst="rect">
+            <a:avLst/>
+          </a:prstGeom>
+          <a:noFill/>
+        </p:spPr>
+        <p:txBody>
+          <a:bodyPr wrap="square">
+            <a:spAutoFit/>
+          </a:bodyPr>
+          <a:lstStyle/>
+          <a:p>
+            <a:pPr>
+              <a:spcAft>
+                <a:spcPts val="800"/>
+              </a:spcAft>
+            </a:pPr>
+            <a:r>
+              <a:rPr sz="1400" b="1">
+                <a:solidFill>
+                  <a:srgbClr val="0B1F3A"/>
+                </a:solidFill>
+              </a:rPr>
+              <a:t>OP-031 · il prudente</a:t>
+            </a:r>
+          </a:p>
+          <a:p>
+            <a:pPr>
+              <a:spcAft>
+                <a:spcPts val="800"/>
+              </a:spcAft>
+            </a:pPr>
+            <a:r>
+              <a:rPr sz="1400" b="0">
+                <a:solidFill>
+                  <a:srgbClr val="0B1F3A"/>
+                </a:solidFill>
+              </a:rPr>
+              <a:t>Nel dubbio chiede un controllo urgente o passa la decisione al responsabile; corregge spesso.</a:t>
+            </a:r>
+          </a:p>
+          <a:p>
+            <a:pPr>
+              <a:spcAft>
+                <a:spcPts val="800"/>
+              </a:spcAft>
+            </a:pPr>
+            <a:r>
+              <a:rPr sz="1400" b="1">
+                <a:solidFill>
+                  <a:srgbClr val="0B1F3A"/>
+                </a:solidFill>
+              </a:rPr>
+              <a:t>5 decisioni + 1 escalation: 2 approvate, 2 corrette, 1 rifiutata</a:t>
+            </a:r>
+          </a:p>
+        </p:txBody>
+      </p:sp>
+      <p:sp>
+        <p:nvSpPr>
+          <p:cNvPr id="16" name="TextBox 15"/>
+          <p:cNvSpPr txBox="1"/>
+          <p:nvPr/>
+        </p:nvSpPr>
+        <p:spPr>
+          <a:xfrm>
+            <a:off x="457200" y="5120640"/>
+            <a:ext cx="11247120" cy="1554480"/>
+          </a:xfrm>
+          <a:prstGeom prst="rect">
+            <a:avLst/>
+          </a:prstGeom>
+          <a:noFill/>
+        </p:spPr>
+        <p:txBody>
+          <a:bodyPr wrap="square">
+            <a:spAutoFit/>
+          </a:bodyPr>
+          <a:lstStyle/>
+          <a:p>
+            <a:pPr>
+              <a:spcAft>
+                <a:spcPts val="800"/>
+              </a:spcAft>
+            </a:pPr>
+            <a:r>
+              <a:rPr sz="1400" b="1">
+                <a:solidFill>
+                  <a:srgbClr val="0F6CBD"/>
+                </a:solidFill>
+              </a:rPr>
+              <a:t>•  </a:t>
+            </a:r>
+            <a:r>
+              <a:rPr sz="1400" b="1">
+                <a:solidFill>
+                  <a:srgbClr val="0B1F3A"/>
+                </a:solidFill>
+              </a:rPr>
+              <a:t>Come abbiamo scelto</a:t>
+            </a:r>
+            <a:r>
+              <a:rPr sz="1400" b="0">
+                <a:solidFill>
+                  <a:srgbClr val="0B1F3A"/>
+                </a:solidFill>
+              </a:rPr>
+              <a:t>: rischio, motivo principale, casi simili e avviso sul Sud dalla card; per rifiuti e correzioni abbiamo immaginato informazioni che il sistema non ha (impianto già sostituito, turbina ferma, ospedale servito).</a:t>
+            </a:r>
+          </a:p>
+          <a:p>
+            <a:pPr>
+              <a:spcAft>
+                <a:spcPts val="800"/>
+              </a:spcAft>
+            </a:pPr>
+            <a:r>
+              <a:rPr sz="1400" b="1">
+                <a:solidFill>
+                  <a:srgbClr val="0F6CBD"/>
+                </a:solidFill>
+              </a:rPr>
+              <a:t>•  </a:t>
+            </a:r>
+            <a:r>
+              <a:rPr sz="1400" b="0">
+                <a:solidFill>
+                  <a:srgbClr val="0B1F3A"/>
+                </a:solidFill>
+              </a:rPr>
+              <a:t>Prima di tutto abbiamo provato ad approvare con "ok": </a:t>
+            </a:r>
+            <a:r>
+              <a:rPr sz="1400" b="1">
+                <a:solidFill>
+                  <a:srgbClr val="0B1F3A"/>
+                </a:solidFill>
+              </a:rPr>
+              <a:t>respinto</a:t>
+            </a:r>
+            <a:r>
+              <a:rPr sz="1400" b="0">
+                <a:solidFill>
+                  <a:srgbClr val="0B1F3A"/>
+                </a:solidFill>
+              </a:rPr>
+              <a:t>. Motivazioni inventate, ma decisioni, registro e numeri sono quelli veri della dashboard.</a:t>
+            </a:r>
+          </a:p>
+        </p:txBody>
+      </p:sp>
+    </p:spTree>
+  </p:cSld>
+  <p:clrMapOvr>
+    <a:masterClrMapping/>
+  </p:clrMapOvr>
+</p:sld>
+</file>
+
+<file path=ppt/slides/slide17.xml><?xml version="1.0" encoding="utf-8"?>
 <p:sld xmlns:a="http://schemas.openxmlformats.org/drawingml/2006/main" xmlns:p="http://schemas.openxmlformats.org/presentationml/2006/main" xmlns:r="http://schemas.openxmlformats.org/officeDocument/2006/relationships">
   <p:cSld>
     <p:spTree>
@@ -9352,407 +10261,6 @@
 </p:sld>
 </file>
 
-<file path=ppt/slides/slide17.xml><?xml version="1.0" encoding="utf-8"?>
-<p:sld xmlns:a="http://schemas.openxmlformats.org/drawingml/2006/main" xmlns:p="http://schemas.openxmlformats.org/presentationml/2006/main" xmlns:r="http://schemas.openxmlformats.org/officeDocument/2006/relationships">
-  <p:cSld>
-    <p:spTree>
-      <p:nvGrpSpPr>
-        <p:cNvPr id="1" name=""/>
-        <p:cNvGrpSpPr/>
-        <p:nvPr/>
-      </p:nvGrpSpPr>
-      <p:grpSpPr/>
-      <p:sp>
-        <p:nvSpPr>
-          <p:cNvPr id="2" name="Rectangle 1"/>
-          <p:cNvSpPr/>
-          <p:nvPr/>
-        </p:nvSpPr>
-        <p:spPr>
-          <a:xfrm>
-            <a:off x="0" y="0"/>
-            <a:ext cx="12191695" cy="914400"/>
-          </a:xfrm>
-          <a:prstGeom prst="rect">
-            <a:avLst/>
-          </a:prstGeom>
-          <a:solidFill>
-            <a:srgbClr val="0B1F3A"/>
-          </a:solidFill>
-          <a:ln>
-            <a:noFill/>
-          </a:ln>
-        </p:spPr>
-        <p:style>
-          <a:lnRef idx="1">
-            <a:schemeClr val="accent1"/>
-          </a:lnRef>
-          <a:fillRef idx="3">
-            <a:schemeClr val="accent1"/>
-          </a:fillRef>
-          <a:effectRef idx="2">
-            <a:schemeClr val="accent1"/>
-          </a:effectRef>
-          <a:fontRef idx="minor">
-            <a:schemeClr val="lt1"/>
-          </a:fontRef>
-        </p:style>
-        <p:txBody>
-          <a:bodyPr rtlCol="0" anchor="ctr"/>
-          <a:lstStyle/>
-          <a:p>
-            <a:pPr algn="ctr"/>
-          </a:p>
-        </p:txBody>
-      </p:sp>
-      <p:sp>
-        <p:nvSpPr>
-          <p:cNvPr id="3" name="TextBox 2"/>
-          <p:cNvSpPr txBox="1"/>
-          <p:nvPr/>
-        </p:nvSpPr>
-        <p:spPr>
-          <a:xfrm>
-            <a:off x="457200" y="164592"/>
-            <a:ext cx="9418320" cy="640080"/>
-          </a:xfrm>
-          <a:prstGeom prst="rect">
-            <a:avLst/>
-          </a:prstGeom>
-          <a:noFill/>
-        </p:spPr>
-        <p:txBody>
-          <a:bodyPr wrap="square">
-            <a:spAutoFit/>
-          </a:bodyPr>
-          <a:lstStyle/>
-          <a:p>
-            <a:pPr>
-              <a:spcAft>
-                <a:spcPts val="800"/>
-              </a:spcAft>
-            </a:pPr>
-            <a:r>
-              <a:rPr sz="2800" b="1">
-                <a:solidFill>
-                  <a:srgbClr val="FFFFFF"/>
-                </a:solidFill>
-              </a:rPr>
-              <a:t>Chi controlla i controllori</a:t>
-            </a:r>
-          </a:p>
-        </p:txBody>
-      </p:sp>
-      <p:sp>
-        <p:nvSpPr>
-          <p:cNvPr id="4" name="TextBox 3"/>
-          <p:cNvSpPr txBox="1"/>
-          <p:nvPr/>
-        </p:nvSpPr>
-        <p:spPr>
-          <a:xfrm>
-            <a:off x="9144000" y="274320"/>
-            <a:ext cx="2834640" cy="457200"/>
-          </a:xfrm>
-          <a:prstGeom prst="rect">
-            <a:avLst/>
-          </a:prstGeom>
-          <a:noFill/>
-        </p:spPr>
-        <p:txBody>
-          <a:bodyPr wrap="square">
-            <a:spAutoFit/>
-          </a:bodyPr>
-          <a:lstStyle/>
-          <a:p>
-            <a:pPr algn="r">
-              <a:spcAft>
-                <a:spcPts val="800"/>
-              </a:spcAft>
-            </a:pPr>
-            <a:r>
-              <a:rPr sz="1300" b="0">
-                <a:solidFill>
-                  <a:srgbClr val="C9D8EA"/>
-                </a:solidFill>
-              </a:rPr>
-              <a:t>Art. 14(4)(b) · A2-A4 · C3</a:t>
-            </a:r>
-          </a:p>
-        </p:txBody>
-      </p:sp>
-      <p:sp>
-        <p:nvSpPr>
-          <p:cNvPr id="5" name="Rectangle 4"/>
-          <p:cNvSpPr/>
-          <p:nvPr/>
-        </p:nvSpPr>
-        <p:spPr>
-          <a:xfrm>
-            <a:off x="0" y="914400"/>
-            <a:ext cx="12191695" cy="54864"/>
-          </a:xfrm>
-          <a:prstGeom prst="rect">
-            <a:avLst/>
-          </a:prstGeom>
-          <a:solidFill>
-            <a:srgbClr val="0F6CBD"/>
-          </a:solidFill>
-          <a:ln>
-            <a:noFill/>
-          </a:ln>
-        </p:spPr>
-        <p:style>
-          <a:lnRef idx="1">
-            <a:schemeClr val="accent1"/>
-          </a:lnRef>
-          <a:fillRef idx="3">
-            <a:schemeClr val="accent1"/>
-          </a:fillRef>
-          <a:effectRef idx="2">
-            <a:schemeClr val="accent1"/>
-          </a:effectRef>
-          <a:fontRef idx="minor">
-            <a:schemeClr val="lt1"/>
-          </a:fontRef>
-        </p:style>
-        <p:txBody>
-          <a:bodyPr rtlCol="0" anchor="ctr"/>
-          <a:lstStyle/>
-          <a:p>
-            <a:pPr algn="ctr"/>
-          </a:p>
-        </p:txBody>
-      </p:sp>
-      <p:pic>
-        <p:nvPicPr>
-          <p:cNvPr id="6" name="Picture 5" descr="kpi_3.png"/>
-          <p:cNvPicPr>
-            <a:picLocks noChangeAspect="1"/>
-          </p:cNvPicPr>
-          <p:nvPr/>
-        </p:nvPicPr>
-        <p:blipFill>
-          <a:blip r:embed="rId2"/>
-          <a:stretch>
-            <a:fillRect/>
-          </a:stretch>
-        </p:blipFill>
-        <p:spPr>
-          <a:xfrm>
-            <a:off x="365760" y="1234440"/>
-            <a:ext cx="5760720" cy="2014086"/>
-          </a:xfrm>
-          <a:prstGeom prst="rect">
-            <a:avLst/>
-          </a:prstGeom>
-          <a:ln w="12700">
-            <a:solidFill>
-              <a:srgbClr val="D0D5DD"/>
-            </a:solidFill>
-          </a:ln>
-        </p:spPr>
-      </p:pic>
-      <p:pic>
-        <p:nvPicPr>
-          <p:cNvPr id="7" name="Picture 6" descr="bias_5.png"/>
-          <p:cNvPicPr>
-            <a:picLocks noChangeAspect="1"/>
-          </p:cNvPicPr>
-          <p:nvPr/>
-        </p:nvPicPr>
-        <p:blipFill>
-          <a:blip r:embed="rId3"/>
-          <a:stretch>
-            <a:fillRect/>
-          </a:stretch>
-        </p:blipFill>
-        <p:spPr>
-          <a:xfrm>
-            <a:off x="373320" y="3840480"/>
-            <a:ext cx="5745600" cy="1828800"/>
-          </a:xfrm>
-          <a:prstGeom prst="rect">
-            <a:avLst/>
-          </a:prstGeom>
-          <a:ln w="12700">
-            <a:solidFill>
-              <a:srgbClr val="D0D5DD"/>
-            </a:solidFill>
-          </a:ln>
-        </p:spPr>
-      </p:pic>
-      <p:sp>
-        <p:nvSpPr>
-          <p:cNvPr id="8" name="TextBox 7"/>
-          <p:cNvSpPr txBox="1"/>
-          <p:nvPr/>
-        </p:nvSpPr>
-        <p:spPr>
-          <a:xfrm>
-            <a:off x="6400800" y="1280160"/>
-            <a:ext cx="5394960" cy="5303520"/>
-          </a:xfrm>
-          <a:prstGeom prst="rect">
-            <a:avLst/>
-          </a:prstGeom>
-          <a:noFill/>
-        </p:spPr>
-        <p:txBody>
-          <a:bodyPr wrap="square">
-            <a:spAutoFit/>
-          </a:bodyPr>
-          <a:lstStyle/>
-          <a:p>
-            <a:pPr>
-              <a:spcAft>
-                <a:spcPts val="800"/>
-              </a:spcAft>
-            </a:pPr>
-            <a:r>
-              <a:rPr sz="1500" b="1">
-                <a:solidFill>
-                  <a:srgbClr val="0F6CBD"/>
-                </a:solidFill>
-              </a:rPr>
-              <a:t>•  </a:t>
-            </a:r>
-            <a:r>
-              <a:rPr sz="1500" b="1">
-                <a:solidFill>
-                  <a:srgbClr val="0B1F3A"/>
-                </a:solidFill>
-              </a:rPr>
-              <a:t>Per persona</a:t>
-            </a:r>
-            <a:r>
-              <a:rPr sz="1500" b="0">
-                <a:solidFill>
-                  <a:srgbClr val="0B1F3A"/>
-                </a:solidFill>
-              </a:rPr>
-              <a:t> (tabella in alto): il prudente OP-031 approva 4 volte su 10, il frettoloso OP-022 8 su 10. La dashboard distingue i due stili.</a:t>
-            </a:r>
-          </a:p>
-          <a:p>
-            <a:pPr>
-              <a:spcAft>
-                <a:spcPts val="800"/>
-              </a:spcAft>
-            </a:pPr>
-            <a:r>
-              <a:rPr sz="1500" b="1">
-                <a:solidFill>
-                  <a:srgbClr val="0F6CBD"/>
-                </a:solidFill>
-              </a:rPr>
-              <a:t>•  </a:t>
-            </a:r>
-            <a:r>
-              <a:rPr sz="1500" b="0">
-                <a:solidFill>
-                  <a:srgbClr val="0B1F3A"/>
-                </a:solidFill>
-              </a:rPr>
-              <a:t>Dopo la motivazione troppo breve di OP-022 l'allarme "possibile approvazione a occhi chiusi" è </a:t>
-            </a:r>
-            <a:r>
-              <a:rPr sz="1500" b="1">
-                <a:solidFill>
-                  <a:srgbClr val="0B1F3A"/>
-                </a:solidFill>
-              </a:rPr>
-              <a:t>scattato davvero</a:t>
-            </a:r>
-            <a:r>
-              <a:rPr sz="1500" b="0">
-                <a:solidFill>
-                  <a:srgbClr val="0B1F3A"/>
-                </a:solidFill>
-              </a:rPr>
-              <a:t>; con le decisioni successive, ben motivate, è rientrato.</a:t>
-            </a:r>
-          </a:p>
-          <a:p>
-            <a:pPr>
-              <a:spcAft>
-                <a:spcPts val="800"/>
-              </a:spcAft>
-            </a:pPr>
-            <a:r>
-              <a:rPr sz="1500" b="1">
-                <a:solidFill>
-                  <a:srgbClr val="0F6CBD"/>
-                </a:solidFill>
-              </a:rPr>
-              <a:t>•  </a:t>
-            </a:r>
-            <a:r>
-              <a:rPr sz="1500" b="1">
-                <a:solidFill>
-                  <a:srgbClr val="0B1F3A"/>
-                </a:solidFill>
-              </a:rPr>
-              <a:t>Per zona</a:t>
-            </a:r>
-            <a:r>
-              <a:rPr sz="1500" b="0">
-                <a:solidFill>
-                  <a:srgbClr val="0B1F3A"/>
-                </a:solidFill>
-              </a:rPr>
-              <a:t> (tabella in basso): nelle Isole le persone correggono il sistema 1 volta su 2, contro 1 su 3 in media. Sotto la soglia d'allarme (il doppio), ma è il segnale giusto: lì 2 correzioni su 3 erano sbagliate.</a:t>
-            </a:r>
-          </a:p>
-          <a:p>
-            <a:pPr>
-              <a:spcAft>
-                <a:spcPts val="800"/>
-              </a:spcAft>
-            </a:pPr>
-            <a:r>
-              <a:rPr sz="1500" b="1">
-                <a:solidFill>
-                  <a:srgbClr val="0F6CBD"/>
-                </a:solidFill>
-              </a:rPr>
-              <a:t>•  </a:t>
-            </a:r>
-            <a:r>
-              <a:rPr sz="1500" b="0">
-                <a:solidFill>
-                  <a:srgbClr val="0B1F3A"/>
-                </a:solidFill>
-              </a:rPr>
-              <a:t>Queste metriche misurano </a:t>
-            </a:r>
-            <a:r>
-              <a:rPr sz="1500" b="1">
-                <a:solidFill>
-                  <a:srgbClr val="0B1F3A"/>
-                </a:solidFill>
-              </a:rPr>
-              <a:t>persone</a:t>
-            </a:r>
-            <a:r>
-              <a:rPr sz="1500" b="0">
-                <a:solidFill>
-                  <a:srgbClr val="0B1F3A"/>
-                </a:solidFill>
-              </a:rPr>
-              <a:t>: in un'azienda vera servono informativa ai lavoratori e regole chiare su come si usano.</a:t>
-            </a:r>
-          </a:p>
-        </p:txBody>
-      </p:sp>
-    </p:spTree>
-  </p:cSld>
-  <p:clrMapOvr>
-    <a:masterClrMapping/>
-  </p:clrMapOvr>
-</p:sld>
-</file>
-
 <file path=ppt/slides/slide18.xml><?xml version="1.0" encoding="utf-8"?>
 <p:sld xmlns:a="http://schemas.openxmlformats.org/drawingml/2006/main" xmlns:p="http://schemas.openxmlformats.org/presentationml/2006/main" xmlns:r="http://schemas.openxmlformats.org/officeDocument/2006/relationships">
   <p:cSld>
@@ -9839,7 +10347,7 @@
                   <a:srgbClr val="FFFFFF"/>
                 </a:solidFill>
               </a:rPr>
-              <a:t>Cosa NON abbiamo risolto</a:t>
+              <a:t>Chi controlla i controllori</a:t>
             </a:r>
           </a:p>
         </p:txBody>
@@ -9877,7 +10385,7 @@
                   <a:srgbClr val="C9D8EA"/>
                 </a:solidFill>
               </a:rPr>
-              <a:t>10% del punteggio</a:t>
+              <a:t>Art. 14(4)(b) · A2-A4 · C3</a:t>
             </a:r>
           </a:p>
         </p:txBody>
@@ -9925,92 +10433,64 @@
           </a:p>
         </p:txBody>
       </p:sp>
-      <p:sp>
-        <p:nvSpPr>
-          <p:cNvPr id="6" name="Rectangle 5"/>
-          <p:cNvSpPr/>
-          <p:nvPr/>
-        </p:nvSpPr>
+      <p:pic>
+        <p:nvPicPr>
+          <p:cNvPr id="6" name="Picture 5" descr="kpi_3.png"/>
+          <p:cNvPicPr>
+            <a:picLocks noChangeAspect="1"/>
+          </p:cNvPicPr>
+          <p:nvPr/>
+        </p:nvPicPr>
+        <p:blipFill>
+          <a:blip r:embed="rId2"/>
+          <a:stretch>
+            <a:fillRect/>
+          </a:stretch>
+        </p:blipFill>
         <p:spPr>
           <a:xfrm>
             <a:off x="365760" y="1234440"/>
-            <a:ext cx="5623560" cy="1645920"/>
-          </a:xfrm>
-          <a:prstGeom prst="rect">
-            <a:avLst/>
-          </a:prstGeom>
-          <a:solidFill>
-            <a:srgbClr val="EEF3F9"/>
-          </a:solidFill>
-          <a:ln>
-            <a:noFill/>
+            <a:ext cx="5760720" cy="2014086"/>
+          </a:xfrm>
+          <a:prstGeom prst="rect">
+            <a:avLst/>
+          </a:prstGeom>
+          <a:ln w="12700">
+            <a:solidFill>
+              <a:srgbClr val="D0D5DD"/>
+            </a:solidFill>
           </a:ln>
         </p:spPr>
-        <p:style>
-          <a:lnRef idx="1">
-            <a:schemeClr val="accent1"/>
-          </a:lnRef>
-          <a:fillRef idx="3">
-            <a:schemeClr val="accent1"/>
-          </a:fillRef>
-          <a:effectRef idx="2">
-            <a:schemeClr val="accent1"/>
-          </a:effectRef>
-          <a:fontRef idx="minor">
-            <a:schemeClr val="lt1"/>
-          </a:fontRef>
-        </p:style>
-        <p:txBody>
-          <a:bodyPr rtlCol="0" anchor="ctr"/>
-          <a:lstStyle/>
-          <a:p>
-            <a:pPr algn="ctr"/>
-          </a:p>
-        </p:txBody>
-      </p:sp>
-      <p:sp>
-        <p:nvSpPr>
-          <p:cNvPr id="7" name="Rectangle 6"/>
-          <p:cNvSpPr/>
-          <p:nvPr/>
-        </p:nvSpPr>
-        <p:spPr>
-          <a:xfrm>
-            <a:off x="365760" y="1234440"/>
-            <a:ext cx="91440" cy="1645920"/>
-          </a:xfrm>
-          <a:prstGeom prst="rect">
-            <a:avLst/>
-          </a:prstGeom>
-          <a:solidFill>
-            <a:srgbClr val="C8102E"/>
-          </a:solidFill>
-          <a:ln>
-            <a:noFill/>
+      </p:pic>
+      <p:pic>
+        <p:nvPicPr>
+          <p:cNvPr id="7" name="Picture 6" descr="bias_5.png"/>
+          <p:cNvPicPr>
+            <a:picLocks noChangeAspect="1"/>
+          </p:cNvPicPr>
+          <p:nvPr/>
+        </p:nvPicPr>
+        <p:blipFill>
+          <a:blip r:embed="rId3"/>
+          <a:stretch>
+            <a:fillRect/>
+          </a:stretch>
+        </p:blipFill>
+        <p:spPr>
+          <a:xfrm>
+            <a:off x="373320" y="3840480"/>
+            <a:ext cx="5745600" cy="1828800"/>
+          </a:xfrm>
+          <a:prstGeom prst="rect">
+            <a:avLst/>
+          </a:prstGeom>
+          <a:ln w="12700">
+            <a:solidFill>
+              <a:srgbClr val="D0D5DD"/>
+            </a:solidFill>
           </a:ln>
         </p:spPr>
-        <p:style>
-          <a:lnRef idx="1">
-            <a:schemeClr val="accent1"/>
-          </a:lnRef>
-          <a:fillRef idx="3">
-            <a:schemeClr val="accent1"/>
-          </a:fillRef>
-          <a:effectRef idx="2">
-            <a:schemeClr val="accent1"/>
-          </a:effectRef>
-          <a:fontRef idx="minor">
-            <a:schemeClr val="lt1"/>
-          </a:fontRef>
-        </p:style>
-        <p:txBody>
-          <a:bodyPr rtlCol="0" anchor="ctr"/>
-          <a:lstStyle/>
-          <a:p>
-            <a:pPr algn="ctr"/>
-          </a:p>
-        </p:txBody>
-      </p:sp>
+      </p:pic>
       <p:sp>
         <p:nvSpPr>
           <p:cNvPr id="8" name="TextBox 7"/>
@@ -10019,8 +10499,8 @@
         </p:nvSpPr>
         <p:spPr>
           <a:xfrm>
-            <a:off x="594360" y="1325880"/>
-            <a:ext cx="5303520" cy="1508760"/>
+            <a:off x="6400800" y="1280160"/>
+            <a:ext cx="5394960" cy="5303520"/>
           </a:xfrm>
           <a:prstGeom prst="rect">
             <a:avLst/>
@@ -10039,12 +10519,28 @@
               </a:spcAft>
             </a:pPr>
             <a:r>
-              <a:rPr sz="1600" b="1">
-                <a:solidFill>
-                  <a:srgbClr val="0B1F3A"/>
-                </a:solidFill>
-              </a:rPr>
-              <a:t>Il Sud resta un'ipotesi</a:t>
+              <a:rPr sz="1500" b="1">
+                <a:solidFill>
+                  <a:srgbClr val="0F6CBD"/>
+                </a:solidFill>
+              </a:rPr>
+              <a:t>•  </a:t>
+            </a:r>
+            <a:r>
+              <a:rPr sz="1500" b="1">
+                <a:solidFill>
+                  <a:srgbClr val="0B1F3A"/>
+                </a:solidFill>
+              </a:rPr>
+              <a:t>Per persona</a:t>
+            </a:r>
+            <a:r>
+              <a:rPr sz="1500" b="0">
+                <a:solidFill>
+                  <a:srgbClr val="0B1F3A"/>
+                </a:solidFill>
+              </a:rPr>
+              <a:t> (tabella in alto): il prudente OP-031 approva 4 volte su 10, il frettoloso OP-022 8 su 10. La dashboard distingue i due stili.</a:t>
             </a:r>
           </a:p>
           <a:p>
@@ -10054,123 +10550,38 @@
               </a:spcAft>
             </a:pPr>
             <a:r>
-              <a:rPr sz="1600" b="0">
-                <a:solidFill>
-                  <a:srgbClr val="0B1F3A"/>
-                </a:solidFill>
-              </a:rPr>
-              <a:t>Va verificata sul territorio. E l'allarme guarda la differenza in numero di guasti: in proporzione anche il Nord registra meno del previsto.</a:t>
-            </a:r>
-          </a:p>
-        </p:txBody>
-      </p:sp>
-      <p:sp>
-        <p:nvSpPr>
-          <p:cNvPr id="9" name="Rectangle 8"/>
-          <p:cNvSpPr/>
-          <p:nvPr/>
-        </p:nvSpPr>
-        <p:spPr>
-          <a:xfrm>
-            <a:off x="6172200" y="1234440"/>
-            <a:ext cx="5623560" cy="1645920"/>
-          </a:xfrm>
-          <a:prstGeom prst="rect">
-            <a:avLst/>
-          </a:prstGeom>
-          <a:solidFill>
-            <a:srgbClr val="EEF3F9"/>
-          </a:solidFill>
-          <a:ln>
-            <a:noFill/>
-          </a:ln>
-        </p:spPr>
-        <p:style>
-          <a:lnRef idx="1">
-            <a:schemeClr val="accent1"/>
-          </a:lnRef>
-          <a:fillRef idx="3">
-            <a:schemeClr val="accent1"/>
-          </a:fillRef>
-          <a:effectRef idx="2">
-            <a:schemeClr val="accent1"/>
-          </a:effectRef>
-          <a:fontRef idx="minor">
-            <a:schemeClr val="lt1"/>
-          </a:fontRef>
-        </p:style>
-        <p:txBody>
-          <a:bodyPr rtlCol="0" anchor="ctr"/>
-          <a:lstStyle/>
-          <a:p>
-            <a:pPr algn="ctr"/>
-          </a:p>
-        </p:txBody>
-      </p:sp>
-      <p:sp>
-        <p:nvSpPr>
-          <p:cNvPr id="10" name="Rectangle 9"/>
-          <p:cNvSpPr/>
-          <p:nvPr/>
-        </p:nvSpPr>
-        <p:spPr>
-          <a:xfrm>
-            <a:off x="6172200" y="1234440"/>
-            <a:ext cx="91440" cy="1645920"/>
-          </a:xfrm>
-          <a:prstGeom prst="rect">
-            <a:avLst/>
-          </a:prstGeom>
-          <a:solidFill>
-            <a:srgbClr val="C8102E"/>
-          </a:solidFill>
-          <a:ln>
-            <a:noFill/>
-          </a:ln>
-        </p:spPr>
-        <p:style>
-          <a:lnRef idx="1">
-            <a:schemeClr val="accent1"/>
-          </a:lnRef>
-          <a:fillRef idx="3">
-            <a:schemeClr val="accent1"/>
-          </a:fillRef>
-          <a:effectRef idx="2">
-            <a:schemeClr val="accent1"/>
-          </a:effectRef>
-          <a:fontRef idx="minor">
-            <a:schemeClr val="lt1"/>
-          </a:fontRef>
-        </p:style>
-        <p:txBody>
-          <a:bodyPr rtlCol="0" anchor="ctr"/>
-          <a:lstStyle/>
-          <a:p>
-            <a:pPr algn="ctr"/>
-          </a:p>
-        </p:txBody>
-      </p:sp>
-      <p:sp>
-        <p:nvSpPr>
-          <p:cNvPr id="11" name="TextBox 10"/>
-          <p:cNvSpPr txBox="1"/>
-          <p:nvPr/>
-        </p:nvSpPr>
-        <p:spPr>
-          <a:xfrm>
-            <a:off x="6400800" y="1325880"/>
-            <a:ext cx="5303520" cy="1508760"/>
-          </a:xfrm>
-          <a:prstGeom prst="rect">
-            <a:avLst/>
-          </a:prstGeom>
-          <a:noFill/>
-        </p:spPr>
-        <p:txBody>
-          <a:bodyPr wrap="square">
-            <a:spAutoFit/>
-          </a:bodyPr>
-          <a:lstStyle/>
+              <a:rPr sz="1500" b="1">
+                <a:solidFill>
+                  <a:srgbClr val="0F6CBD"/>
+                </a:solidFill>
+              </a:rPr>
+              <a:t>•  </a:t>
+            </a:r>
+            <a:r>
+              <a:rPr sz="1500" b="0">
+                <a:solidFill>
+                  <a:srgbClr val="0B1F3A"/>
+                </a:solidFill>
+              </a:rPr>
+              <a:t>Dopo la motivazione troppo breve di OP-022 l'allarme "possibile approvazione a occhi chiusi" è </a:t>
+            </a:r>
+            <a:r>
+              <a:rPr sz="1500" b="1">
+                <a:solidFill>
+                  <a:srgbClr val="0B1F3A"/>
+                </a:solidFill>
+              </a:rPr>
+              <a:t>scattato davvero</a:t>
+            </a:r>
+            <a:r>
+              <a:rPr sz="1500" b="0">
+                <a:solidFill>
+                  <a:srgbClr val="0B1F3A"/>
+                </a:solidFill>
+              </a:rPr>
+              <a:t>; con le decisioni successive, ben motivate, è rientrato.</a:t>
+            </a:r>
+          </a:p>
           <a:p>
             <a:pPr>
               <a:spcAft>
@@ -10178,12 +10589,28 @@
               </a:spcAft>
             </a:pPr>
             <a:r>
-              <a:rPr sz="1600" b="1">
-                <a:solidFill>
-                  <a:srgbClr val="0B1F3A"/>
-                </a:solidFill>
-              </a:rPr>
-              <a:t>Alcuni guasti arrivano senza preavviso</a:t>
+              <a:rPr sz="1500" b="1">
+                <a:solidFill>
+                  <a:srgbClr val="0F6CBD"/>
+                </a:solidFill>
+              </a:rPr>
+              <a:t>•  </a:t>
+            </a:r>
+            <a:r>
+              <a:rPr sz="1500" b="1">
+                <a:solidFill>
+                  <a:srgbClr val="0B1F3A"/>
+                </a:solidFill>
+              </a:rPr>
+              <a:t>Per zona</a:t>
+            </a:r>
+            <a:r>
+              <a:rPr sz="1500" b="0">
+                <a:solidFill>
+                  <a:srgbClr val="0B1F3A"/>
+                </a:solidFill>
+              </a:rPr>
+              <a:t> (tabella in basso): nelle Isole le persone correggono il sistema 1 volta su 2, contro 1 su 3 in media. Sotto la soglia d'allarme (il doppio), ma è il segnale giusto: lì 2 correzioni su 3 erano sbagliate.</a:t>
             </a:r>
           </a:p>
           <a:p>
@@ -10193,568 +10620,36 @@
               </a:spcAft>
             </a:pPr>
             <a:r>
-              <a:rPr sz="1600" b="0">
-                <a:solidFill>
-                  <a:srgbClr val="0B1F3A"/>
-                </a:solidFill>
-              </a:rPr>
-              <a:t>Se i sensori non vedono nulla, nessuna regola li può prevedere.</a:t>
-            </a:r>
-          </a:p>
-        </p:txBody>
-      </p:sp>
-      <p:sp>
-        <p:nvSpPr>
-          <p:cNvPr id="12" name="Rectangle 11"/>
-          <p:cNvSpPr/>
-          <p:nvPr/>
-        </p:nvSpPr>
-        <p:spPr>
-          <a:xfrm>
-            <a:off x="365760" y="3017520"/>
-            <a:ext cx="5623560" cy="1645920"/>
-          </a:xfrm>
-          <a:prstGeom prst="rect">
-            <a:avLst/>
-          </a:prstGeom>
-          <a:solidFill>
-            <a:srgbClr val="EEF3F9"/>
-          </a:solidFill>
-          <a:ln>
-            <a:noFill/>
-          </a:ln>
-        </p:spPr>
-        <p:style>
-          <a:lnRef idx="1">
-            <a:schemeClr val="accent1"/>
-          </a:lnRef>
-          <a:fillRef idx="3">
-            <a:schemeClr val="accent1"/>
-          </a:fillRef>
-          <a:effectRef idx="2">
-            <a:schemeClr val="accent1"/>
-          </a:effectRef>
-          <a:fontRef idx="minor">
-            <a:schemeClr val="lt1"/>
-          </a:fontRef>
-        </p:style>
-        <p:txBody>
-          <a:bodyPr rtlCol="0" anchor="ctr"/>
-          <a:lstStyle/>
-          <a:p>
-            <a:pPr algn="ctr"/>
-          </a:p>
-        </p:txBody>
-      </p:sp>
-      <p:sp>
-        <p:nvSpPr>
-          <p:cNvPr id="13" name="Rectangle 12"/>
-          <p:cNvSpPr/>
-          <p:nvPr/>
-        </p:nvSpPr>
-        <p:spPr>
-          <a:xfrm>
-            <a:off x="365760" y="3017520"/>
-            <a:ext cx="91440" cy="1645920"/>
-          </a:xfrm>
-          <a:prstGeom prst="rect">
-            <a:avLst/>
-          </a:prstGeom>
-          <a:solidFill>
-            <a:srgbClr val="C8102E"/>
-          </a:solidFill>
-          <a:ln>
-            <a:noFill/>
-          </a:ln>
-        </p:spPr>
-        <p:style>
-          <a:lnRef idx="1">
-            <a:schemeClr val="accent1"/>
-          </a:lnRef>
-          <a:fillRef idx="3">
-            <a:schemeClr val="accent1"/>
-          </a:fillRef>
-          <a:effectRef idx="2">
-            <a:schemeClr val="accent1"/>
-          </a:effectRef>
-          <a:fontRef idx="minor">
-            <a:schemeClr val="lt1"/>
-          </a:fontRef>
-        </p:style>
-        <p:txBody>
-          <a:bodyPr rtlCol="0" anchor="ctr"/>
-          <a:lstStyle/>
-          <a:p>
-            <a:pPr algn="ctr"/>
-          </a:p>
-        </p:txBody>
-      </p:sp>
-      <p:sp>
-        <p:nvSpPr>
-          <p:cNvPr id="14" name="TextBox 13"/>
-          <p:cNvSpPr txBox="1"/>
-          <p:nvPr/>
-        </p:nvSpPr>
-        <p:spPr>
-          <a:xfrm>
-            <a:off x="594360" y="3108960"/>
-            <a:ext cx="5303520" cy="1508760"/>
-          </a:xfrm>
-          <a:prstGeom prst="rect">
-            <a:avLst/>
-          </a:prstGeom>
-          <a:noFill/>
-        </p:spPr>
-        <p:txBody>
-          <a:bodyPr wrap="square">
-            <a:spAutoFit/>
-          </a:bodyPr>
-          <a:lstStyle/>
-          <a:p>
-            <a:pPr>
-              <a:spcAft>
-                <a:spcPts val="800"/>
-              </a:spcAft>
-            </a:pPr>
-            <a:r>
-              <a:rPr sz="1600" b="1">
-                <a:solidFill>
-                  <a:srgbClr val="0B1F3A"/>
-                </a:solidFill>
-              </a:rPr>
-              <a:t>Più squadre a vuoto</a:t>
-            </a:r>
-          </a:p>
-          <a:p>
-            <a:pPr>
-              <a:spcAft>
-                <a:spcPts val="800"/>
-              </a:spcAft>
-            </a:pPr>
-            <a:r>
-              <a:rPr sz="1600" b="0">
-                <a:solidFill>
-                  <a:srgbClr val="0B1F3A"/>
-                </a:solidFill>
-              </a:rPr>
-              <a:t>183 uscite inutili su 720, per non perdere guasti. Il rapporto 10 a 1 tra i costi è una nostra stima.</a:t>
-            </a:r>
-          </a:p>
-        </p:txBody>
-      </p:sp>
-      <p:sp>
-        <p:nvSpPr>
-          <p:cNvPr id="15" name="Rectangle 14"/>
-          <p:cNvSpPr/>
-          <p:nvPr/>
-        </p:nvSpPr>
-        <p:spPr>
-          <a:xfrm>
-            <a:off x="6172200" y="3017520"/>
-            <a:ext cx="5623560" cy="1645920"/>
-          </a:xfrm>
-          <a:prstGeom prst="rect">
-            <a:avLst/>
-          </a:prstGeom>
-          <a:solidFill>
-            <a:srgbClr val="EEF3F9"/>
-          </a:solidFill>
-          <a:ln>
-            <a:noFill/>
-          </a:ln>
-        </p:spPr>
-        <p:style>
-          <a:lnRef idx="1">
-            <a:schemeClr val="accent1"/>
-          </a:lnRef>
-          <a:fillRef idx="3">
-            <a:schemeClr val="accent1"/>
-          </a:fillRef>
-          <a:effectRef idx="2">
-            <a:schemeClr val="accent1"/>
-          </a:effectRef>
-          <a:fontRef idx="minor">
-            <a:schemeClr val="lt1"/>
-          </a:fontRef>
-        </p:style>
-        <p:txBody>
-          <a:bodyPr rtlCol="0" anchor="ctr"/>
-          <a:lstStyle/>
-          <a:p>
-            <a:pPr algn="ctr"/>
-          </a:p>
-        </p:txBody>
-      </p:sp>
-      <p:sp>
-        <p:nvSpPr>
-          <p:cNvPr id="16" name="Rectangle 15"/>
-          <p:cNvSpPr/>
-          <p:nvPr/>
-        </p:nvSpPr>
-        <p:spPr>
-          <a:xfrm>
-            <a:off x="6172200" y="3017520"/>
-            <a:ext cx="91440" cy="1645920"/>
-          </a:xfrm>
-          <a:prstGeom prst="rect">
-            <a:avLst/>
-          </a:prstGeom>
-          <a:solidFill>
-            <a:srgbClr val="C8102E"/>
-          </a:solidFill>
-          <a:ln>
-            <a:noFill/>
-          </a:ln>
-        </p:spPr>
-        <p:style>
-          <a:lnRef idx="1">
-            <a:schemeClr val="accent1"/>
-          </a:lnRef>
-          <a:fillRef idx="3">
-            <a:schemeClr val="accent1"/>
-          </a:fillRef>
-          <a:effectRef idx="2">
-            <a:schemeClr val="accent1"/>
-          </a:effectRef>
-          <a:fontRef idx="minor">
-            <a:schemeClr val="lt1"/>
-          </a:fontRef>
-        </p:style>
-        <p:txBody>
-          <a:bodyPr rtlCol="0" anchor="ctr"/>
-          <a:lstStyle/>
-          <a:p>
-            <a:pPr algn="ctr"/>
-          </a:p>
-        </p:txBody>
-      </p:sp>
-      <p:sp>
-        <p:nvSpPr>
-          <p:cNvPr id="17" name="TextBox 16"/>
-          <p:cNvSpPr txBox="1"/>
-          <p:nvPr/>
-        </p:nvSpPr>
-        <p:spPr>
-          <a:xfrm>
-            <a:off x="6400800" y="3108960"/>
-            <a:ext cx="5303520" cy="1508760"/>
-          </a:xfrm>
-          <a:prstGeom prst="rect">
-            <a:avLst/>
-          </a:prstGeom>
-          <a:noFill/>
-        </p:spPr>
-        <p:txBody>
-          <a:bodyPr wrap="square">
-            <a:spAutoFit/>
-          </a:bodyPr>
-          <a:lstStyle/>
-          <a:p>
-            <a:pPr>
-              <a:spcAft>
-                <a:spcPts val="800"/>
-              </a:spcAft>
-            </a:pPr>
-            <a:r>
-              <a:rPr sz="1600" b="1">
-                <a:solidFill>
-                  <a:srgbClr val="0B1F3A"/>
-                </a:solidFill>
-              </a:rPr>
-              <a:t>Il bias lo gestiscono le persone</a:t>
-            </a:r>
-          </a:p>
-          <a:p>
-            <a:pPr>
-              <a:spcAft>
-                <a:spcPts val="800"/>
-              </a:spcAft>
-            </a:pPr>
-            <a:r>
-              <a:rPr sz="1600" b="0">
-                <a:solidFill>
-                  <a:srgbClr val="0B1F3A"/>
-                </a:solidFill>
-              </a:rPr>
-              <a:t>Se approvano tutto, la supervisione serve a poco. Per questo misuriamo chi approva cosa.</a:t>
-            </a:r>
-          </a:p>
-        </p:txBody>
-      </p:sp>
-      <p:sp>
-        <p:nvSpPr>
-          <p:cNvPr id="18" name="Rectangle 17"/>
-          <p:cNvSpPr/>
-          <p:nvPr/>
-        </p:nvSpPr>
-        <p:spPr>
-          <a:xfrm>
-            <a:off x="365760" y="4800600"/>
-            <a:ext cx="5623560" cy="1645920"/>
-          </a:xfrm>
-          <a:prstGeom prst="rect">
-            <a:avLst/>
-          </a:prstGeom>
-          <a:solidFill>
-            <a:srgbClr val="EEF3F9"/>
-          </a:solidFill>
-          <a:ln>
-            <a:noFill/>
-          </a:ln>
-        </p:spPr>
-        <p:style>
-          <a:lnRef idx="1">
-            <a:schemeClr val="accent1"/>
-          </a:lnRef>
-          <a:fillRef idx="3">
-            <a:schemeClr val="accent1"/>
-          </a:fillRef>
-          <a:effectRef idx="2">
-            <a:schemeClr val="accent1"/>
-          </a:effectRef>
-          <a:fontRef idx="minor">
-            <a:schemeClr val="lt1"/>
-          </a:fontRef>
-        </p:style>
-        <p:txBody>
-          <a:bodyPr rtlCol="0" anchor="ctr"/>
-          <a:lstStyle/>
-          <a:p>
-            <a:pPr algn="ctr"/>
-          </a:p>
-        </p:txBody>
-      </p:sp>
-      <p:sp>
-        <p:nvSpPr>
-          <p:cNvPr id="19" name="Rectangle 18"/>
-          <p:cNvSpPr/>
-          <p:nvPr/>
-        </p:nvSpPr>
-        <p:spPr>
-          <a:xfrm>
-            <a:off x="365760" y="4800600"/>
-            <a:ext cx="91440" cy="1645920"/>
-          </a:xfrm>
-          <a:prstGeom prst="rect">
-            <a:avLst/>
-          </a:prstGeom>
-          <a:solidFill>
-            <a:srgbClr val="C8102E"/>
-          </a:solidFill>
-          <a:ln>
-            <a:noFill/>
-          </a:ln>
-        </p:spPr>
-        <p:style>
-          <a:lnRef idx="1">
-            <a:schemeClr val="accent1"/>
-          </a:lnRef>
-          <a:fillRef idx="3">
-            <a:schemeClr val="accent1"/>
-          </a:fillRef>
-          <a:effectRef idx="2">
-            <a:schemeClr val="accent1"/>
-          </a:effectRef>
-          <a:fontRef idx="minor">
-            <a:schemeClr val="lt1"/>
-          </a:fontRef>
-        </p:style>
-        <p:txBody>
-          <a:bodyPr rtlCol="0" anchor="ctr"/>
-          <a:lstStyle/>
-          <a:p>
-            <a:pPr algn="ctr"/>
-          </a:p>
-        </p:txBody>
-      </p:sp>
-      <p:sp>
-        <p:nvSpPr>
-          <p:cNvPr id="20" name="TextBox 19"/>
-          <p:cNvSpPr txBox="1"/>
-          <p:nvPr/>
-        </p:nvSpPr>
-        <p:spPr>
-          <a:xfrm>
-            <a:off x="594360" y="4892040"/>
-            <a:ext cx="5303520" cy="1508760"/>
-          </a:xfrm>
-          <a:prstGeom prst="rect">
-            <a:avLst/>
-          </a:prstGeom>
-          <a:noFill/>
-        </p:spPr>
-        <p:txBody>
-          <a:bodyPr wrap="square">
-            <a:spAutoFit/>
-          </a:bodyPr>
-          <a:lstStyle/>
-          <a:p>
-            <a:pPr>
-              <a:spcAft>
-                <a:spcPts val="800"/>
-              </a:spcAft>
-            </a:pPr>
-            <a:r>
-              <a:rPr sz="1600" b="1">
-                <a:solidFill>
-                  <a:srgbClr val="0B1F3A"/>
-                </a:solidFill>
-              </a:rPr>
-              <a:t>"Quanto è sicuro" è grezzo</a:t>
-            </a:r>
-          </a:p>
-          <a:p>
-            <a:pPr>
-              <a:spcAft>
-                <a:spcPts val="800"/>
-              </a:spcAft>
-            </a:pPr>
-            <a:r>
-              <a:rPr sz="1600" b="0">
-                <a:solidFill>
-                  <a:srgbClr val="0B1F3A"/>
-                </a:solidFill>
-              </a:rPr>
-              <a:t>Oggi ripete la probabilità; servirebbe misurare quanto le parti del modello sono d'accordo tra loro.</a:t>
-            </a:r>
-          </a:p>
-        </p:txBody>
-      </p:sp>
-      <p:sp>
-        <p:nvSpPr>
-          <p:cNvPr id="21" name="Rectangle 20"/>
-          <p:cNvSpPr/>
-          <p:nvPr/>
-        </p:nvSpPr>
-        <p:spPr>
-          <a:xfrm>
-            <a:off x="6172200" y="4800600"/>
-            <a:ext cx="5623560" cy="1645920"/>
-          </a:xfrm>
-          <a:prstGeom prst="rect">
-            <a:avLst/>
-          </a:prstGeom>
-          <a:solidFill>
-            <a:srgbClr val="EEF3F9"/>
-          </a:solidFill>
-          <a:ln>
-            <a:noFill/>
-          </a:ln>
-        </p:spPr>
-        <p:style>
-          <a:lnRef idx="1">
-            <a:schemeClr val="accent1"/>
-          </a:lnRef>
-          <a:fillRef idx="3">
-            <a:schemeClr val="accent1"/>
-          </a:fillRef>
-          <a:effectRef idx="2">
-            <a:schemeClr val="accent1"/>
-          </a:effectRef>
-          <a:fontRef idx="minor">
-            <a:schemeClr val="lt1"/>
-          </a:fontRef>
-        </p:style>
-        <p:txBody>
-          <a:bodyPr rtlCol="0" anchor="ctr"/>
-          <a:lstStyle/>
-          <a:p>
-            <a:pPr algn="ctr"/>
-          </a:p>
-        </p:txBody>
-      </p:sp>
-      <p:sp>
-        <p:nvSpPr>
-          <p:cNvPr id="22" name="Rectangle 21"/>
-          <p:cNvSpPr/>
-          <p:nvPr/>
-        </p:nvSpPr>
-        <p:spPr>
-          <a:xfrm>
-            <a:off x="6172200" y="4800600"/>
-            <a:ext cx="91440" cy="1645920"/>
-          </a:xfrm>
-          <a:prstGeom prst="rect">
-            <a:avLst/>
-          </a:prstGeom>
-          <a:solidFill>
-            <a:srgbClr val="C8102E"/>
-          </a:solidFill>
-          <a:ln>
-            <a:noFill/>
-          </a:ln>
-        </p:spPr>
-        <p:style>
-          <a:lnRef idx="1">
-            <a:schemeClr val="accent1"/>
-          </a:lnRef>
-          <a:fillRef idx="3">
-            <a:schemeClr val="accent1"/>
-          </a:fillRef>
-          <a:effectRef idx="2">
-            <a:schemeClr val="accent1"/>
-          </a:effectRef>
-          <a:fontRef idx="minor">
-            <a:schemeClr val="lt1"/>
-          </a:fontRef>
-        </p:style>
-        <p:txBody>
-          <a:bodyPr rtlCol="0" anchor="ctr"/>
-          <a:lstStyle/>
-          <a:p>
-            <a:pPr algn="ctr"/>
-          </a:p>
-        </p:txBody>
-      </p:sp>
-      <p:sp>
-        <p:nvSpPr>
-          <p:cNvPr id="23" name="TextBox 22"/>
-          <p:cNvSpPr txBox="1"/>
-          <p:nvPr/>
-        </p:nvSpPr>
-        <p:spPr>
-          <a:xfrm>
-            <a:off x="6400800" y="4892040"/>
-            <a:ext cx="5303520" cy="1508760"/>
-          </a:xfrm>
-          <a:prstGeom prst="rect">
-            <a:avLst/>
-          </a:prstGeom>
-          <a:noFill/>
-        </p:spPr>
-        <p:txBody>
-          <a:bodyPr wrap="square">
-            <a:spAutoFit/>
-          </a:bodyPr>
-          <a:lstStyle/>
-          <a:p>
-            <a:pPr>
-              <a:spcAft>
-                <a:spcPts val="800"/>
-              </a:spcAft>
-            </a:pPr>
-            <a:r>
-              <a:rPr sz="1600" b="1">
-                <a:solidFill>
-                  <a:srgbClr val="0B1F3A"/>
-                </a:solidFill>
-              </a:rPr>
-              <a:t>Prototipo, non produzione</a:t>
-            </a:r>
-          </a:p>
-          <a:p>
-            <a:pPr>
-              <a:spcAft>
-                <a:spcPts val="800"/>
-              </a:spcAft>
-            </a:pPr>
-            <a:r>
-              <a:rPr sz="1600" b="0">
-                <a:solidFill>
-                  <a:srgbClr val="0B1F3A"/>
-                </a:solidFill>
-              </a:rPr>
-              <a:t>Tempo simulato, 2 decisioni nelle Isole ancora automatiche, registro riscrivibile da capo da chi ha accesso al file.</a:t>
+              <a:rPr sz="1500" b="1">
+                <a:solidFill>
+                  <a:srgbClr val="0F6CBD"/>
+                </a:solidFill>
+              </a:rPr>
+              <a:t>•  </a:t>
+            </a:r>
+            <a:r>
+              <a:rPr sz="1500" b="0">
+                <a:solidFill>
+                  <a:srgbClr val="0B1F3A"/>
+                </a:solidFill>
+              </a:rPr>
+              <a:t>Queste metriche misurano </a:t>
+            </a:r>
+            <a:r>
+              <a:rPr sz="1500" b="1">
+                <a:solidFill>
+                  <a:srgbClr val="0B1F3A"/>
+                </a:solidFill>
+              </a:rPr>
+              <a:t>persone</a:t>
+            </a:r>
+            <a:r>
+              <a:rPr sz="1500" b="0">
+                <a:solidFill>
+                  <a:srgbClr val="0B1F3A"/>
+                </a:solidFill>
+              </a:rPr>
+              <a:t>: in un'azienda vera servono informativa ai lavoratori e regole chiare su come si usano.</a:t>
             </a:r>
           </a:p>
         </p:txBody>
@@ -10853,7 +10748,7 @@
                   <a:srgbClr val="FFFFFF"/>
                 </a:solidFill>
               </a:rPr>
-              <a:t>AI Act: ruoli e domande aperte</a:t>
+              <a:t>Cosa NON abbiamo risolto</a:t>
             </a:r>
           </a:p>
         </p:txBody>
@@ -10891,7 +10786,7 @@
                   <a:srgbClr val="C9D8EA"/>
                 </a:solidFill>
               </a:rPr>
-              <a:t>Discussione</a:t>
+              <a:t>10% del punteggio</a:t>
             </a:r>
           </a:p>
         </p:txBody>
@@ -10941,114 +10836,14 @@
       </p:sp>
       <p:sp>
         <p:nvSpPr>
-          <p:cNvPr id="6" name="TextBox 5"/>
-          <p:cNvSpPr txBox="1"/>
-          <p:nvPr/>
-        </p:nvSpPr>
-        <p:spPr>
-          <a:xfrm>
-            <a:off x="548640" y="1280160"/>
-            <a:ext cx="5394960" cy="5303520"/>
-          </a:xfrm>
-          <a:prstGeom prst="rect">
-            <a:avLst/>
-          </a:prstGeom>
-          <a:noFill/>
-        </p:spPr>
-        <p:txBody>
-          <a:bodyPr wrap="square">
-            <a:spAutoFit/>
-          </a:bodyPr>
-          <a:lstStyle/>
-          <a:p>
-            <a:pPr>
-              <a:spcAft>
-                <a:spcPts val="800"/>
-              </a:spcAft>
-            </a:pPr>
-            <a:r>
-              <a:rPr sz="1700" b="1">
-                <a:solidFill>
-                  <a:srgbClr val="0B1F3A"/>
-                </a:solidFill>
-              </a:rPr>
-              <a:t>Chi costruisce il sistema</a:t>
-            </a:r>
-            <a:r>
-              <a:rPr sz="1700" b="0">
-                <a:solidFill>
-                  <a:srgbClr val="0B1F3A"/>
-                </a:solidFill>
-              </a:rPr>
-              <a:t> (provider): risponde di dati, documentazione, registro, supervisione già prevista nel progetto, controlli dopo il rilascio, segnalazione degli incidenti gravi.</a:t>
-            </a:r>
-          </a:p>
-          <a:p>
-            <a:pPr>
-              <a:spcAft>
-                <a:spcPts val="800"/>
-              </a:spcAft>
-            </a:pPr>
-            <a:r>
-              <a:rPr sz="1700" b="1">
-                <a:solidFill>
-                  <a:srgbClr val="0B1F3A"/>
-                </a:solidFill>
-              </a:rPr>
-              <a:t>Chi lo usa</a:t>
-            </a:r>
-            <a:r>
-              <a:rPr sz="1700" b="0">
-                <a:solidFill>
-                  <a:srgbClr val="0B1F3A"/>
-                </a:solidFill>
-              </a:rPr>
-              <a:t> (deployer): l'operatore di rete. Persone formate, uso come da istruzioni, registro conservato almeno 6 mesi, lavoratori informati.</a:t>
-            </a:r>
-          </a:p>
-          <a:p>
-            <a:pPr>
-              <a:spcAft>
-                <a:spcPts val="800"/>
-              </a:spcAft>
-            </a:pPr>
-            <a:r>
-              <a:rPr sz="1700" b="0">
-                <a:solidFill>
-                  <a:srgbClr val="0B1F3A"/>
-                </a:solidFill>
-              </a:rPr>
-              <a:t>Se l'azienda lo sviluppa in casa e lo usa, è </a:t>
-            </a:r>
-            <a:r>
-              <a:rPr sz="1700" b="1">
-                <a:solidFill>
-                  <a:srgbClr val="0B1F3A"/>
-                </a:solidFill>
-              </a:rPr>
-              <a:t>tutte e due le cose</a:t>
-            </a:r>
-            <a:r>
-              <a:rPr sz="1700" b="0">
-                <a:solidFill>
-                  <a:srgbClr val="0B1F3A"/>
-                </a:solidFill>
-              </a:rPr>
-              <a:t>.</a:t>
-            </a:r>
-          </a:p>
-        </p:txBody>
-      </p:sp>
-      <p:sp>
-        <p:nvSpPr>
-          <p:cNvPr id="7" name="Rectangle 6"/>
+          <p:cNvPr id="6" name="Rectangle 5"/>
           <p:cNvSpPr/>
           <p:nvPr/>
         </p:nvSpPr>
         <p:spPr>
           <a:xfrm>
-            <a:off x="6309360" y="1280160"/>
-            <a:ext cx="5486400" cy="5120640"/>
+            <a:off x="365760" y="1234440"/>
+            <a:ext cx="5623560" cy="1645920"/>
           </a:xfrm>
           <a:prstGeom prst="rect">
             <a:avLst/>
@@ -11084,14 +10879,57 @@
       </p:sp>
       <p:sp>
         <p:nvSpPr>
+          <p:cNvPr id="7" name="Rectangle 6"/>
+          <p:cNvSpPr/>
+          <p:nvPr/>
+        </p:nvSpPr>
+        <p:spPr>
+          <a:xfrm>
+            <a:off x="365760" y="1234440"/>
+            <a:ext cx="91440" cy="1645920"/>
+          </a:xfrm>
+          <a:prstGeom prst="rect">
+            <a:avLst/>
+          </a:prstGeom>
+          <a:solidFill>
+            <a:srgbClr val="C8102E"/>
+          </a:solidFill>
+          <a:ln>
+            <a:noFill/>
+          </a:ln>
+        </p:spPr>
+        <p:style>
+          <a:lnRef idx="1">
+            <a:schemeClr val="accent1"/>
+          </a:lnRef>
+          <a:fillRef idx="3">
+            <a:schemeClr val="accent1"/>
+          </a:fillRef>
+          <a:effectRef idx="2">
+            <a:schemeClr val="accent1"/>
+          </a:effectRef>
+          <a:fontRef idx="minor">
+            <a:schemeClr val="lt1"/>
+          </a:fontRef>
+        </p:style>
+        <p:txBody>
+          <a:bodyPr rtlCol="0" anchor="ctr"/>
+          <a:lstStyle/>
+          <a:p>
+            <a:pPr algn="ctr"/>
+          </a:p>
+        </p:txBody>
+      </p:sp>
+      <p:sp>
+        <p:nvSpPr>
           <p:cNvPr id="8" name="TextBox 7"/>
           <p:cNvSpPr txBox="1"/>
           <p:nvPr/>
         </p:nvSpPr>
         <p:spPr>
           <a:xfrm>
-            <a:off x="6492240" y="1371600"/>
-            <a:ext cx="5212080" cy="4937760"/>
+            <a:off x="594360" y="1325880"/>
+            <a:ext cx="5303520" cy="1508760"/>
           </a:xfrm>
           <a:prstGeom prst="rect">
             <a:avLst/>
@@ -11115,7 +10953,7 @@
                   <a:srgbClr val="0B1F3A"/>
                 </a:solidFill>
               </a:rPr>
-              <a:t>Spunti per la discussione</a:t>
+              <a:t>Il Sud resta un'ipotesi</a:t>
             </a:r>
           </a:p>
           <a:p>
@@ -11125,38 +10963,401 @@
               </a:spcAft>
             </a:pPr>
             <a:r>
+              <a:rPr sz="1600" b="0">
+                <a:solidFill>
+                  <a:srgbClr val="0B1F3A"/>
+                </a:solidFill>
+              </a:rPr>
+              <a:t>Va verificata sul territorio. E l'allarme guarda la differenza in numero di guasti: in proporzione anche il Nord registra meno del previsto.</a:t>
+            </a:r>
+          </a:p>
+        </p:txBody>
+      </p:sp>
+      <p:sp>
+        <p:nvSpPr>
+          <p:cNvPr id="9" name="Rectangle 8"/>
+          <p:cNvSpPr/>
+          <p:nvPr/>
+        </p:nvSpPr>
+        <p:spPr>
+          <a:xfrm>
+            <a:off x="6172200" y="1234440"/>
+            <a:ext cx="5623560" cy="1645920"/>
+          </a:xfrm>
+          <a:prstGeom prst="rect">
+            <a:avLst/>
+          </a:prstGeom>
+          <a:solidFill>
+            <a:srgbClr val="EEF3F9"/>
+          </a:solidFill>
+          <a:ln>
+            <a:noFill/>
+          </a:ln>
+        </p:spPr>
+        <p:style>
+          <a:lnRef idx="1">
+            <a:schemeClr val="accent1"/>
+          </a:lnRef>
+          <a:fillRef idx="3">
+            <a:schemeClr val="accent1"/>
+          </a:fillRef>
+          <a:effectRef idx="2">
+            <a:schemeClr val="accent1"/>
+          </a:effectRef>
+          <a:fontRef idx="minor">
+            <a:schemeClr val="lt1"/>
+          </a:fontRef>
+        </p:style>
+        <p:txBody>
+          <a:bodyPr rtlCol="0" anchor="ctr"/>
+          <a:lstStyle/>
+          <a:p>
+            <a:pPr algn="ctr"/>
+          </a:p>
+        </p:txBody>
+      </p:sp>
+      <p:sp>
+        <p:nvSpPr>
+          <p:cNvPr id="10" name="Rectangle 9"/>
+          <p:cNvSpPr/>
+          <p:nvPr/>
+        </p:nvSpPr>
+        <p:spPr>
+          <a:xfrm>
+            <a:off x="6172200" y="1234440"/>
+            <a:ext cx="91440" cy="1645920"/>
+          </a:xfrm>
+          <a:prstGeom prst="rect">
+            <a:avLst/>
+          </a:prstGeom>
+          <a:solidFill>
+            <a:srgbClr val="C8102E"/>
+          </a:solidFill>
+          <a:ln>
+            <a:noFill/>
+          </a:ln>
+        </p:spPr>
+        <p:style>
+          <a:lnRef idx="1">
+            <a:schemeClr val="accent1"/>
+          </a:lnRef>
+          <a:fillRef idx="3">
+            <a:schemeClr val="accent1"/>
+          </a:fillRef>
+          <a:effectRef idx="2">
+            <a:schemeClr val="accent1"/>
+          </a:effectRef>
+          <a:fontRef idx="minor">
+            <a:schemeClr val="lt1"/>
+          </a:fontRef>
+        </p:style>
+        <p:txBody>
+          <a:bodyPr rtlCol="0" anchor="ctr"/>
+          <a:lstStyle/>
+          <a:p>
+            <a:pPr algn="ctr"/>
+          </a:p>
+        </p:txBody>
+      </p:sp>
+      <p:sp>
+        <p:nvSpPr>
+          <p:cNvPr id="11" name="TextBox 10"/>
+          <p:cNvSpPr txBox="1"/>
+          <p:nvPr/>
+        </p:nvSpPr>
+        <p:spPr>
+          <a:xfrm>
+            <a:off x="6400800" y="1325880"/>
+            <a:ext cx="5303520" cy="1508760"/>
+          </a:xfrm>
+          <a:prstGeom prst="rect">
+            <a:avLst/>
+          </a:prstGeom>
+          <a:noFill/>
+        </p:spPr>
+        <p:txBody>
+          <a:bodyPr wrap="square">
+            <a:spAutoFit/>
+          </a:bodyPr>
+          <a:lstStyle/>
+          <a:p>
+            <a:pPr>
+              <a:spcAft>
+                <a:spcPts val="800"/>
+              </a:spcAft>
+            </a:pPr>
+            <a:r>
               <a:rPr sz="1600" b="1">
                 <a:solidFill>
-                  <a:srgbClr val="0F6CBD"/>
-                </a:solidFill>
-              </a:rPr>
-              <a:t>•  </a:t>
-            </a:r>
+                  <a:srgbClr val="0B1F3A"/>
+                </a:solidFill>
+              </a:rPr>
+              <a:t>Alcuni guasti arrivano senza preavviso</a:t>
+            </a:r>
+          </a:p>
+          <a:p>
+            <a:pPr>
+              <a:spcAft>
+                <a:spcPts val="800"/>
+              </a:spcAft>
+            </a:pPr>
             <a:r>
               <a:rPr sz="1600" b="0">
                 <a:solidFill>
                   <a:srgbClr val="0B1F3A"/>
                 </a:solidFill>
               </a:rPr>
-              <a:t>Un sistema che </a:t>
-            </a:r>
+              <a:t>Se i sensori non vedono nulla, nessuna regola li può prevedere.</a:t>
+            </a:r>
+          </a:p>
+        </p:txBody>
+      </p:sp>
+      <p:sp>
+        <p:nvSpPr>
+          <p:cNvPr id="12" name="Rectangle 11"/>
+          <p:cNvSpPr/>
+          <p:nvPr/>
+        </p:nvSpPr>
+        <p:spPr>
+          <a:xfrm>
+            <a:off x="365760" y="3017520"/>
+            <a:ext cx="5623560" cy="1645920"/>
+          </a:xfrm>
+          <a:prstGeom prst="rect">
+            <a:avLst/>
+          </a:prstGeom>
+          <a:solidFill>
+            <a:srgbClr val="EEF3F9"/>
+          </a:solidFill>
+          <a:ln>
+            <a:noFill/>
+          </a:ln>
+        </p:spPr>
+        <p:style>
+          <a:lnRef idx="1">
+            <a:schemeClr val="accent1"/>
+          </a:lnRef>
+          <a:fillRef idx="3">
+            <a:schemeClr val="accent1"/>
+          </a:fillRef>
+          <a:effectRef idx="2">
+            <a:schemeClr val="accent1"/>
+          </a:effectRef>
+          <a:fontRef idx="minor">
+            <a:schemeClr val="lt1"/>
+          </a:fontRef>
+        </p:style>
+        <p:txBody>
+          <a:bodyPr rtlCol="0" anchor="ctr"/>
+          <a:lstStyle/>
+          <a:p>
+            <a:pPr algn="ctr"/>
+          </a:p>
+        </p:txBody>
+      </p:sp>
+      <p:sp>
+        <p:nvSpPr>
+          <p:cNvPr id="13" name="Rectangle 12"/>
+          <p:cNvSpPr/>
+          <p:nvPr/>
+        </p:nvSpPr>
+        <p:spPr>
+          <a:xfrm>
+            <a:off x="365760" y="3017520"/>
+            <a:ext cx="91440" cy="1645920"/>
+          </a:xfrm>
+          <a:prstGeom prst="rect">
+            <a:avLst/>
+          </a:prstGeom>
+          <a:solidFill>
+            <a:srgbClr val="C8102E"/>
+          </a:solidFill>
+          <a:ln>
+            <a:noFill/>
+          </a:ln>
+        </p:spPr>
+        <p:style>
+          <a:lnRef idx="1">
+            <a:schemeClr val="accent1"/>
+          </a:lnRef>
+          <a:fillRef idx="3">
+            <a:schemeClr val="accent1"/>
+          </a:fillRef>
+          <a:effectRef idx="2">
+            <a:schemeClr val="accent1"/>
+          </a:effectRef>
+          <a:fontRef idx="minor">
+            <a:schemeClr val="lt1"/>
+          </a:fontRef>
+        </p:style>
+        <p:txBody>
+          <a:bodyPr rtlCol="0" anchor="ctr"/>
+          <a:lstStyle/>
+          <a:p>
+            <a:pPr algn="ctr"/>
+          </a:p>
+        </p:txBody>
+      </p:sp>
+      <p:sp>
+        <p:nvSpPr>
+          <p:cNvPr id="14" name="TextBox 13"/>
+          <p:cNvSpPr txBox="1"/>
+          <p:nvPr/>
+        </p:nvSpPr>
+        <p:spPr>
+          <a:xfrm>
+            <a:off x="594360" y="3108960"/>
+            <a:ext cx="5303520" cy="1508760"/>
+          </a:xfrm>
+          <a:prstGeom prst="rect">
+            <a:avLst/>
+          </a:prstGeom>
+          <a:noFill/>
+        </p:spPr>
+        <p:txBody>
+          <a:bodyPr wrap="square">
+            <a:spAutoFit/>
+          </a:bodyPr>
+          <a:lstStyle/>
+          <a:p>
+            <a:pPr>
+              <a:spcAft>
+                <a:spcPts val="800"/>
+              </a:spcAft>
+            </a:pPr>
             <a:r>
               <a:rPr sz="1600" b="1">
                 <a:solidFill>
                   <a:srgbClr val="0B1F3A"/>
                 </a:solidFill>
               </a:rPr>
-              <a:t>suggerisce</a:t>
-            </a:r>
+              <a:t>Più squadre a vuoto</a:t>
+            </a:r>
+          </a:p>
+          <a:p>
+            <a:pPr>
+              <a:spcAft>
+                <a:spcPts val="800"/>
+              </a:spcAft>
+            </a:pPr>
             <a:r>
               <a:rPr sz="1600" b="0">
                 <a:solidFill>
                   <a:srgbClr val="0B1F3A"/>
                 </a:solidFill>
               </a:rPr>
-              <a:t> e lascia decidere le persone è davvero ad alto rischio? (Art. 6(3))</a:t>
-            </a:r>
-          </a:p>
+              <a:t>183 uscite inutili su 720, per non perdere guasti. Il rapporto 10 a 1 tra i costi è una nostra stima.</a:t>
+            </a:r>
+          </a:p>
+        </p:txBody>
+      </p:sp>
+      <p:sp>
+        <p:nvSpPr>
+          <p:cNvPr id="15" name="Rectangle 14"/>
+          <p:cNvSpPr/>
+          <p:nvPr/>
+        </p:nvSpPr>
+        <p:spPr>
+          <a:xfrm>
+            <a:off x="6172200" y="3017520"/>
+            <a:ext cx="5623560" cy="1645920"/>
+          </a:xfrm>
+          <a:prstGeom prst="rect">
+            <a:avLst/>
+          </a:prstGeom>
+          <a:solidFill>
+            <a:srgbClr val="EEF3F9"/>
+          </a:solidFill>
+          <a:ln>
+            <a:noFill/>
+          </a:ln>
+        </p:spPr>
+        <p:style>
+          <a:lnRef idx="1">
+            <a:schemeClr val="accent1"/>
+          </a:lnRef>
+          <a:fillRef idx="3">
+            <a:schemeClr val="accent1"/>
+          </a:fillRef>
+          <a:effectRef idx="2">
+            <a:schemeClr val="accent1"/>
+          </a:effectRef>
+          <a:fontRef idx="minor">
+            <a:schemeClr val="lt1"/>
+          </a:fontRef>
+        </p:style>
+        <p:txBody>
+          <a:bodyPr rtlCol="0" anchor="ctr"/>
+          <a:lstStyle/>
+          <a:p>
+            <a:pPr algn="ctr"/>
+          </a:p>
+        </p:txBody>
+      </p:sp>
+      <p:sp>
+        <p:nvSpPr>
+          <p:cNvPr id="16" name="Rectangle 15"/>
+          <p:cNvSpPr/>
+          <p:nvPr/>
+        </p:nvSpPr>
+        <p:spPr>
+          <a:xfrm>
+            <a:off x="6172200" y="3017520"/>
+            <a:ext cx="91440" cy="1645920"/>
+          </a:xfrm>
+          <a:prstGeom prst="rect">
+            <a:avLst/>
+          </a:prstGeom>
+          <a:solidFill>
+            <a:srgbClr val="C8102E"/>
+          </a:solidFill>
+          <a:ln>
+            <a:noFill/>
+          </a:ln>
+        </p:spPr>
+        <p:style>
+          <a:lnRef idx="1">
+            <a:schemeClr val="accent1"/>
+          </a:lnRef>
+          <a:fillRef idx="3">
+            <a:schemeClr val="accent1"/>
+          </a:fillRef>
+          <a:effectRef idx="2">
+            <a:schemeClr val="accent1"/>
+          </a:effectRef>
+          <a:fontRef idx="minor">
+            <a:schemeClr val="lt1"/>
+          </a:fontRef>
+        </p:style>
+        <p:txBody>
+          <a:bodyPr rtlCol="0" anchor="ctr"/>
+          <a:lstStyle/>
+          <a:p>
+            <a:pPr algn="ctr"/>
+          </a:p>
+        </p:txBody>
+      </p:sp>
+      <p:sp>
+        <p:nvSpPr>
+          <p:cNvPr id="17" name="TextBox 16"/>
+          <p:cNvSpPr txBox="1"/>
+          <p:nvPr/>
+        </p:nvSpPr>
+        <p:spPr>
+          <a:xfrm>
+            <a:off x="6400800" y="3108960"/>
+            <a:ext cx="5303520" cy="1508760"/>
+          </a:xfrm>
+          <a:prstGeom prst="rect">
+            <a:avLst/>
+          </a:prstGeom>
+          <a:noFill/>
+        </p:spPr>
+        <p:txBody>
+          <a:bodyPr wrap="square">
+            <a:spAutoFit/>
+          </a:bodyPr>
+          <a:lstStyle/>
           <a:p>
             <a:pPr>
               <a:spcAft>
@@ -11166,36 +11367,275 @@
             <a:r>
               <a:rPr sz="1600" b="1">
                 <a:solidFill>
-                  <a:srgbClr val="0F6CBD"/>
-                </a:solidFill>
-              </a:rPr>
-              <a:t>•  </a:t>
-            </a:r>
+                  <a:srgbClr val="0B1F3A"/>
+                </a:solidFill>
+              </a:rPr>
+              <a:t>Il bias lo gestiscono le persone</a:t>
+            </a:r>
+          </a:p>
+          <a:p>
+            <a:pPr>
+              <a:spcAft>
+                <a:spcPts val="800"/>
+              </a:spcAft>
+            </a:pPr>
             <a:r>
               <a:rPr sz="1600" b="0">
                 <a:solidFill>
                   <a:srgbClr val="0B1F3A"/>
                 </a:solidFill>
               </a:rPr>
-              <a:t>Misurare quanto ogni persona approva senza leggere è </a:t>
-            </a:r>
+              <a:t>Se approvano tutto, la supervisione serve a poco. Per questo misuriamo chi approva cosa.</a:t>
+            </a:r>
+          </a:p>
+        </p:txBody>
+      </p:sp>
+      <p:sp>
+        <p:nvSpPr>
+          <p:cNvPr id="18" name="Rectangle 17"/>
+          <p:cNvSpPr/>
+          <p:nvPr/>
+        </p:nvSpPr>
+        <p:spPr>
+          <a:xfrm>
+            <a:off x="365760" y="4800600"/>
+            <a:ext cx="5623560" cy="1645920"/>
+          </a:xfrm>
+          <a:prstGeom prst="rect">
+            <a:avLst/>
+          </a:prstGeom>
+          <a:solidFill>
+            <a:srgbClr val="EEF3F9"/>
+          </a:solidFill>
+          <a:ln>
+            <a:noFill/>
+          </a:ln>
+        </p:spPr>
+        <p:style>
+          <a:lnRef idx="1">
+            <a:schemeClr val="accent1"/>
+          </a:lnRef>
+          <a:fillRef idx="3">
+            <a:schemeClr val="accent1"/>
+          </a:fillRef>
+          <a:effectRef idx="2">
+            <a:schemeClr val="accent1"/>
+          </a:effectRef>
+          <a:fontRef idx="minor">
+            <a:schemeClr val="lt1"/>
+          </a:fontRef>
+        </p:style>
+        <p:txBody>
+          <a:bodyPr rtlCol="0" anchor="ctr"/>
+          <a:lstStyle/>
+          <a:p>
+            <a:pPr algn="ctr"/>
+          </a:p>
+        </p:txBody>
+      </p:sp>
+      <p:sp>
+        <p:nvSpPr>
+          <p:cNvPr id="19" name="Rectangle 18"/>
+          <p:cNvSpPr/>
+          <p:nvPr/>
+        </p:nvSpPr>
+        <p:spPr>
+          <a:xfrm>
+            <a:off x="365760" y="4800600"/>
+            <a:ext cx="91440" cy="1645920"/>
+          </a:xfrm>
+          <a:prstGeom prst="rect">
+            <a:avLst/>
+          </a:prstGeom>
+          <a:solidFill>
+            <a:srgbClr val="C8102E"/>
+          </a:solidFill>
+          <a:ln>
+            <a:noFill/>
+          </a:ln>
+        </p:spPr>
+        <p:style>
+          <a:lnRef idx="1">
+            <a:schemeClr val="accent1"/>
+          </a:lnRef>
+          <a:fillRef idx="3">
+            <a:schemeClr val="accent1"/>
+          </a:fillRef>
+          <a:effectRef idx="2">
+            <a:schemeClr val="accent1"/>
+          </a:effectRef>
+          <a:fontRef idx="minor">
+            <a:schemeClr val="lt1"/>
+          </a:fontRef>
+        </p:style>
+        <p:txBody>
+          <a:bodyPr rtlCol="0" anchor="ctr"/>
+          <a:lstStyle/>
+          <a:p>
+            <a:pPr algn="ctr"/>
+          </a:p>
+        </p:txBody>
+      </p:sp>
+      <p:sp>
+        <p:nvSpPr>
+          <p:cNvPr id="20" name="TextBox 19"/>
+          <p:cNvSpPr txBox="1"/>
+          <p:nvPr/>
+        </p:nvSpPr>
+        <p:spPr>
+          <a:xfrm>
+            <a:off x="594360" y="4892040"/>
+            <a:ext cx="5303520" cy="1508760"/>
+          </a:xfrm>
+          <a:prstGeom prst="rect">
+            <a:avLst/>
+          </a:prstGeom>
+          <a:noFill/>
+        </p:spPr>
+        <p:txBody>
+          <a:bodyPr wrap="square">
+            <a:spAutoFit/>
+          </a:bodyPr>
+          <a:lstStyle/>
+          <a:p>
+            <a:pPr>
+              <a:spcAft>
+                <a:spcPts val="800"/>
+              </a:spcAft>
+            </a:pPr>
             <a:r>
               <a:rPr sz="1600" b="1">
                 <a:solidFill>
                   <a:srgbClr val="0B1F3A"/>
                 </a:solidFill>
               </a:rPr>
-              <a:t>controllo dei lavoratori</a:t>
-            </a:r>
+              <a:t>"Quanto è sicuro" è grezzo</a:t>
+            </a:r>
+          </a:p>
+          <a:p>
+            <a:pPr>
+              <a:spcAft>
+                <a:spcPts val="800"/>
+              </a:spcAft>
+            </a:pPr>
             <a:r>
               <a:rPr sz="1600" b="0">
                 <a:solidFill>
                   <a:srgbClr val="0B1F3A"/>
                 </a:solidFill>
               </a:rPr>
-              <a:t>? (Art. 26(7), Statuto art. 4)</a:t>
-            </a:r>
-          </a:p>
+              <a:t>Oggi ripete la probabilità; servirebbe misurare quanto le parti del modello sono d'accordo tra loro.</a:t>
+            </a:r>
+          </a:p>
+        </p:txBody>
+      </p:sp>
+      <p:sp>
+        <p:nvSpPr>
+          <p:cNvPr id="21" name="Rectangle 20"/>
+          <p:cNvSpPr/>
+          <p:nvPr/>
+        </p:nvSpPr>
+        <p:spPr>
+          <a:xfrm>
+            <a:off x="6172200" y="4800600"/>
+            <a:ext cx="5623560" cy="1645920"/>
+          </a:xfrm>
+          <a:prstGeom prst="rect">
+            <a:avLst/>
+          </a:prstGeom>
+          <a:solidFill>
+            <a:srgbClr val="EEF3F9"/>
+          </a:solidFill>
+          <a:ln>
+            <a:noFill/>
+          </a:ln>
+        </p:spPr>
+        <p:style>
+          <a:lnRef idx="1">
+            <a:schemeClr val="accent1"/>
+          </a:lnRef>
+          <a:fillRef idx="3">
+            <a:schemeClr val="accent1"/>
+          </a:fillRef>
+          <a:effectRef idx="2">
+            <a:schemeClr val="accent1"/>
+          </a:effectRef>
+          <a:fontRef idx="minor">
+            <a:schemeClr val="lt1"/>
+          </a:fontRef>
+        </p:style>
+        <p:txBody>
+          <a:bodyPr rtlCol="0" anchor="ctr"/>
+          <a:lstStyle/>
+          <a:p>
+            <a:pPr algn="ctr"/>
+          </a:p>
+        </p:txBody>
+      </p:sp>
+      <p:sp>
+        <p:nvSpPr>
+          <p:cNvPr id="22" name="Rectangle 21"/>
+          <p:cNvSpPr/>
+          <p:nvPr/>
+        </p:nvSpPr>
+        <p:spPr>
+          <a:xfrm>
+            <a:off x="6172200" y="4800600"/>
+            <a:ext cx="91440" cy="1645920"/>
+          </a:xfrm>
+          <a:prstGeom prst="rect">
+            <a:avLst/>
+          </a:prstGeom>
+          <a:solidFill>
+            <a:srgbClr val="C8102E"/>
+          </a:solidFill>
+          <a:ln>
+            <a:noFill/>
+          </a:ln>
+        </p:spPr>
+        <p:style>
+          <a:lnRef idx="1">
+            <a:schemeClr val="accent1"/>
+          </a:lnRef>
+          <a:fillRef idx="3">
+            <a:schemeClr val="accent1"/>
+          </a:fillRef>
+          <a:effectRef idx="2">
+            <a:schemeClr val="accent1"/>
+          </a:effectRef>
+          <a:fontRef idx="minor">
+            <a:schemeClr val="lt1"/>
+          </a:fontRef>
+        </p:style>
+        <p:txBody>
+          <a:bodyPr rtlCol="0" anchor="ctr"/>
+          <a:lstStyle/>
+          <a:p>
+            <a:pPr algn="ctr"/>
+          </a:p>
+        </p:txBody>
+      </p:sp>
+      <p:sp>
+        <p:nvSpPr>
+          <p:cNvPr id="23" name="TextBox 22"/>
+          <p:cNvSpPr txBox="1"/>
+          <p:nvPr/>
+        </p:nvSpPr>
+        <p:spPr>
+          <a:xfrm>
+            <a:off x="6400800" y="4892040"/>
+            <a:ext cx="5303520" cy="1508760"/>
+          </a:xfrm>
+          <a:prstGeom prst="rect">
+            <a:avLst/>
+          </a:prstGeom>
+          <a:noFill/>
+        </p:spPr>
+        <p:txBody>
+          <a:bodyPr wrap="square">
+            <a:spAutoFit/>
+          </a:bodyPr>
+          <a:lstStyle/>
           <a:p>
             <a:pPr>
               <a:spcAft>
@@ -11205,57 +11645,25 @@
             <a:r>
               <a:rPr sz="1600" b="1">
                 <a:solidFill>
-                  <a:srgbClr val="0F6CBD"/>
-                </a:solidFill>
-              </a:rPr>
-              <a:t>•  </a:t>
-            </a:r>
+                  <a:srgbClr val="0B1F3A"/>
+                </a:solidFill>
+              </a:rPr>
+              <a:t>Prototipo, non produzione</a:t>
+            </a:r>
+          </a:p>
+          <a:p>
+            <a:pPr>
+              <a:spcAft>
+                <a:spcPts val="800"/>
+              </a:spcAft>
+            </a:pPr>
             <a:r>
               <a:rPr sz="1600" b="0">
                 <a:solidFill>
                   <a:srgbClr val="0B1F3A"/>
                 </a:solidFill>
               </a:rPr>
-              <a:t>Un servizio peggiore al Sud tocca i diritti dei cittadini, ma la valutazione d'impatto sui diritti non è richiesta (Art. 27).</a:t>
-            </a:r>
-          </a:p>
-          <a:p>
-            <a:pPr>
-              <a:spcAft>
-                <a:spcPts val="800"/>
-              </a:spcAft>
-            </a:pPr>
-            <a:r>
-              <a:rPr sz="1600" b="1">
-                <a:solidFill>
-                  <a:srgbClr val="0F6CBD"/>
-                </a:solidFill>
-              </a:rPr>
-              <a:t>•  </a:t>
-            </a:r>
-            <a:r>
-              <a:rPr sz="1600" b="0">
-                <a:solidFill>
-                  <a:srgbClr val="0B1F3A"/>
-                </a:solidFill>
-              </a:rPr>
-              <a:t>Dati di un'infrastruttura critica mandati a un </a:t>
-            </a:r>
-            <a:r>
-              <a:rPr sz="1600" b="1">
-                <a:solidFill>
-                  <a:srgbClr val="0B1F3A"/>
-                </a:solidFill>
-              </a:rPr>
-              <a:t>LLM nel cloud</a:t>
-            </a:r>
-            <a:r>
-              <a:rPr sz="1600" b="0">
-                <a:solidFill>
-                  <a:srgbClr val="0B1F3A"/>
-                </a:solidFill>
-              </a:rPr>
-              <a:t>: riservatezza e dipendenza da un fornitore.</a:t>
+              <a:t>Tempo simulato, 2 decisioni nelle Isole ancora automatiche, registro riscrivibile da capo da chi ha accesso al file.</a:t>
             </a:r>
           </a:p>
         </p:txBody>
@@ -12184,6 +12592,507 @@
 </file>
 
 <file path=ppt/slides/slide20.xml><?xml version="1.0" encoding="utf-8"?>
+<p:sld xmlns:a="http://schemas.openxmlformats.org/drawingml/2006/main" xmlns:p="http://schemas.openxmlformats.org/presentationml/2006/main" xmlns:r="http://schemas.openxmlformats.org/officeDocument/2006/relationships">
+  <p:cSld>
+    <p:spTree>
+      <p:nvGrpSpPr>
+        <p:cNvPr id="1" name=""/>
+        <p:cNvGrpSpPr/>
+        <p:nvPr/>
+      </p:nvGrpSpPr>
+      <p:grpSpPr/>
+      <p:sp>
+        <p:nvSpPr>
+          <p:cNvPr id="2" name="Rectangle 1"/>
+          <p:cNvSpPr/>
+          <p:nvPr/>
+        </p:nvSpPr>
+        <p:spPr>
+          <a:xfrm>
+            <a:off x="0" y="0"/>
+            <a:ext cx="12191695" cy="914400"/>
+          </a:xfrm>
+          <a:prstGeom prst="rect">
+            <a:avLst/>
+          </a:prstGeom>
+          <a:solidFill>
+            <a:srgbClr val="0B1F3A"/>
+          </a:solidFill>
+          <a:ln>
+            <a:noFill/>
+          </a:ln>
+        </p:spPr>
+        <p:style>
+          <a:lnRef idx="1">
+            <a:schemeClr val="accent1"/>
+          </a:lnRef>
+          <a:fillRef idx="3">
+            <a:schemeClr val="accent1"/>
+          </a:fillRef>
+          <a:effectRef idx="2">
+            <a:schemeClr val="accent1"/>
+          </a:effectRef>
+          <a:fontRef idx="minor">
+            <a:schemeClr val="lt1"/>
+          </a:fontRef>
+        </p:style>
+        <p:txBody>
+          <a:bodyPr rtlCol="0" anchor="ctr"/>
+          <a:lstStyle/>
+          <a:p>
+            <a:pPr algn="ctr"/>
+          </a:p>
+        </p:txBody>
+      </p:sp>
+      <p:sp>
+        <p:nvSpPr>
+          <p:cNvPr id="3" name="TextBox 2"/>
+          <p:cNvSpPr txBox="1"/>
+          <p:nvPr/>
+        </p:nvSpPr>
+        <p:spPr>
+          <a:xfrm>
+            <a:off x="457200" y="164592"/>
+            <a:ext cx="9418320" cy="640080"/>
+          </a:xfrm>
+          <a:prstGeom prst="rect">
+            <a:avLst/>
+          </a:prstGeom>
+          <a:noFill/>
+        </p:spPr>
+        <p:txBody>
+          <a:bodyPr wrap="square">
+            <a:spAutoFit/>
+          </a:bodyPr>
+          <a:lstStyle/>
+          <a:p>
+            <a:pPr>
+              <a:spcAft>
+                <a:spcPts val="800"/>
+              </a:spcAft>
+            </a:pPr>
+            <a:r>
+              <a:rPr sz="2800" b="1">
+                <a:solidFill>
+                  <a:srgbClr val="FFFFFF"/>
+                </a:solidFill>
+              </a:rPr>
+              <a:t>AI Act: ruoli e domande aperte</a:t>
+            </a:r>
+          </a:p>
+        </p:txBody>
+      </p:sp>
+      <p:sp>
+        <p:nvSpPr>
+          <p:cNvPr id="4" name="TextBox 3"/>
+          <p:cNvSpPr txBox="1"/>
+          <p:nvPr/>
+        </p:nvSpPr>
+        <p:spPr>
+          <a:xfrm>
+            <a:off x="9144000" y="274320"/>
+            <a:ext cx="2834640" cy="457200"/>
+          </a:xfrm>
+          <a:prstGeom prst="rect">
+            <a:avLst/>
+          </a:prstGeom>
+          <a:noFill/>
+        </p:spPr>
+        <p:txBody>
+          <a:bodyPr wrap="square">
+            <a:spAutoFit/>
+          </a:bodyPr>
+          <a:lstStyle/>
+          <a:p>
+            <a:pPr algn="r">
+              <a:spcAft>
+                <a:spcPts val="800"/>
+              </a:spcAft>
+            </a:pPr>
+            <a:r>
+              <a:rPr sz="1300" b="0">
+                <a:solidFill>
+                  <a:srgbClr val="C9D8EA"/>
+                </a:solidFill>
+              </a:rPr>
+              <a:t>Discussione</a:t>
+            </a:r>
+          </a:p>
+        </p:txBody>
+      </p:sp>
+      <p:sp>
+        <p:nvSpPr>
+          <p:cNvPr id="5" name="Rectangle 4"/>
+          <p:cNvSpPr/>
+          <p:nvPr/>
+        </p:nvSpPr>
+        <p:spPr>
+          <a:xfrm>
+            <a:off x="0" y="914400"/>
+            <a:ext cx="12191695" cy="54864"/>
+          </a:xfrm>
+          <a:prstGeom prst="rect">
+            <a:avLst/>
+          </a:prstGeom>
+          <a:solidFill>
+            <a:srgbClr val="0F6CBD"/>
+          </a:solidFill>
+          <a:ln>
+            <a:noFill/>
+          </a:ln>
+        </p:spPr>
+        <p:style>
+          <a:lnRef idx="1">
+            <a:schemeClr val="accent1"/>
+          </a:lnRef>
+          <a:fillRef idx="3">
+            <a:schemeClr val="accent1"/>
+          </a:fillRef>
+          <a:effectRef idx="2">
+            <a:schemeClr val="accent1"/>
+          </a:effectRef>
+          <a:fontRef idx="minor">
+            <a:schemeClr val="lt1"/>
+          </a:fontRef>
+        </p:style>
+        <p:txBody>
+          <a:bodyPr rtlCol="0" anchor="ctr"/>
+          <a:lstStyle/>
+          <a:p>
+            <a:pPr algn="ctr"/>
+          </a:p>
+        </p:txBody>
+      </p:sp>
+      <p:sp>
+        <p:nvSpPr>
+          <p:cNvPr id="6" name="TextBox 5"/>
+          <p:cNvSpPr txBox="1"/>
+          <p:nvPr/>
+        </p:nvSpPr>
+        <p:spPr>
+          <a:xfrm>
+            <a:off x="548640" y="1280160"/>
+            <a:ext cx="5394960" cy="5303520"/>
+          </a:xfrm>
+          <a:prstGeom prst="rect">
+            <a:avLst/>
+          </a:prstGeom>
+          <a:noFill/>
+        </p:spPr>
+        <p:txBody>
+          <a:bodyPr wrap="square">
+            <a:spAutoFit/>
+          </a:bodyPr>
+          <a:lstStyle/>
+          <a:p>
+            <a:pPr>
+              <a:spcAft>
+                <a:spcPts val="800"/>
+              </a:spcAft>
+            </a:pPr>
+            <a:r>
+              <a:rPr sz="1700" b="1">
+                <a:solidFill>
+                  <a:srgbClr val="0B1F3A"/>
+                </a:solidFill>
+              </a:rPr>
+              <a:t>Chi costruisce il sistema</a:t>
+            </a:r>
+            <a:r>
+              <a:rPr sz="1700" b="0">
+                <a:solidFill>
+                  <a:srgbClr val="0B1F3A"/>
+                </a:solidFill>
+              </a:rPr>
+              <a:t> (provider): risponde di dati, documentazione, registro, supervisione già prevista nel progetto, controlli dopo il rilascio, segnalazione degli incidenti gravi.</a:t>
+            </a:r>
+          </a:p>
+          <a:p>
+            <a:pPr>
+              <a:spcAft>
+                <a:spcPts val="800"/>
+              </a:spcAft>
+            </a:pPr>
+            <a:r>
+              <a:rPr sz="1700" b="1">
+                <a:solidFill>
+                  <a:srgbClr val="0B1F3A"/>
+                </a:solidFill>
+              </a:rPr>
+              <a:t>Chi lo usa</a:t>
+            </a:r>
+            <a:r>
+              <a:rPr sz="1700" b="0">
+                <a:solidFill>
+                  <a:srgbClr val="0B1F3A"/>
+                </a:solidFill>
+              </a:rPr>
+              <a:t> (deployer): l'operatore di rete. Persone formate, uso come da istruzioni, registro conservato almeno 6 mesi, lavoratori informati.</a:t>
+            </a:r>
+          </a:p>
+          <a:p>
+            <a:pPr>
+              <a:spcAft>
+                <a:spcPts val="800"/>
+              </a:spcAft>
+            </a:pPr>
+            <a:r>
+              <a:rPr sz="1700" b="0">
+                <a:solidFill>
+                  <a:srgbClr val="0B1F3A"/>
+                </a:solidFill>
+              </a:rPr>
+              <a:t>Se l'azienda lo sviluppa in casa e lo usa, è </a:t>
+            </a:r>
+            <a:r>
+              <a:rPr sz="1700" b="1">
+                <a:solidFill>
+                  <a:srgbClr val="0B1F3A"/>
+                </a:solidFill>
+              </a:rPr>
+              <a:t>tutte e due le cose</a:t>
+            </a:r>
+            <a:r>
+              <a:rPr sz="1700" b="0">
+                <a:solidFill>
+                  <a:srgbClr val="0B1F3A"/>
+                </a:solidFill>
+              </a:rPr>
+              <a:t>.</a:t>
+            </a:r>
+          </a:p>
+        </p:txBody>
+      </p:sp>
+      <p:sp>
+        <p:nvSpPr>
+          <p:cNvPr id="7" name="Rectangle 6"/>
+          <p:cNvSpPr/>
+          <p:nvPr/>
+        </p:nvSpPr>
+        <p:spPr>
+          <a:xfrm>
+            <a:off x="6309360" y="1280160"/>
+            <a:ext cx="5486400" cy="5120640"/>
+          </a:xfrm>
+          <a:prstGeom prst="rect">
+            <a:avLst/>
+          </a:prstGeom>
+          <a:solidFill>
+            <a:srgbClr val="EEF3F9"/>
+          </a:solidFill>
+          <a:ln>
+            <a:noFill/>
+          </a:ln>
+        </p:spPr>
+        <p:style>
+          <a:lnRef idx="1">
+            <a:schemeClr val="accent1"/>
+          </a:lnRef>
+          <a:fillRef idx="3">
+            <a:schemeClr val="accent1"/>
+          </a:fillRef>
+          <a:effectRef idx="2">
+            <a:schemeClr val="accent1"/>
+          </a:effectRef>
+          <a:fontRef idx="minor">
+            <a:schemeClr val="lt1"/>
+          </a:fontRef>
+        </p:style>
+        <p:txBody>
+          <a:bodyPr rtlCol="0" anchor="ctr"/>
+          <a:lstStyle/>
+          <a:p>
+            <a:pPr algn="ctr"/>
+          </a:p>
+        </p:txBody>
+      </p:sp>
+      <p:sp>
+        <p:nvSpPr>
+          <p:cNvPr id="8" name="TextBox 7"/>
+          <p:cNvSpPr txBox="1"/>
+          <p:nvPr/>
+        </p:nvSpPr>
+        <p:spPr>
+          <a:xfrm>
+            <a:off x="6492240" y="1371600"/>
+            <a:ext cx="5212080" cy="4937760"/>
+          </a:xfrm>
+          <a:prstGeom prst="rect">
+            <a:avLst/>
+          </a:prstGeom>
+          <a:noFill/>
+        </p:spPr>
+        <p:txBody>
+          <a:bodyPr wrap="square">
+            <a:spAutoFit/>
+          </a:bodyPr>
+          <a:lstStyle/>
+          <a:p>
+            <a:pPr>
+              <a:spcAft>
+                <a:spcPts val="800"/>
+              </a:spcAft>
+            </a:pPr>
+            <a:r>
+              <a:rPr sz="1600" b="1">
+                <a:solidFill>
+                  <a:srgbClr val="0B1F3A"/>
+                </a:solidFill>
+              </a:rPr>
+              <a:t>Spunti per la discussione</a:t>
+            </a:r>
+          </a:p>
+          <a:p>
+            <a:pPr>
+              <a:spcAft>
+                <a:spcPts val="800"/>
+              </a:spcAft>
+            </a:pPr>
+            <a:r>
+              <a:rPr sz="1600" b="1">
+                <a:solidFill>
+                  <a:srgbClr val="0F6CBD"/>
+                </a:solidFill>
+              </a:rPr>
+              <a:t>•  </a:t>
+            </a:r>
+            <a:r>
+              <a:rPr sz="1600" b="0">
+                <a:solidFill>
+                  <a:srgbClr val="0B1F3A"/>
+                </a:solidFill>
+              </a:rPr>
+              <a:t>Un sistema che </a:t>
+            </a:r>
+            <a:r>
+              <a:rPr sz="1600" b="1">
+                <a:solidFill>
+                  <a:srgbClr val="0B1F3A"/>
+                </a:solidFill>
+              </a:rPr>
+              <a:t>suggerisce</a:t>
+            </a:r>
+            <a:r>
+              <a:rPr sz="1600" b="0">
+                <a:solidFill>
+                  <a:srgbClr val="0B1F3A"/>
+                </a:solidFill>
+              </a:rPr>
+              <a:t> e lascia decidere le persone è davvero ad alto rischio? (Art. 6(3))</a:t>
+            </a:r>
+          </a:p>
+          <a:p>
+            <a:pPr>
+              <a:spcAft>
+                <a:spcPts val="800"/>
+              </a:spcAft>
+            </a:pPr>
+            <a:r>
+              <a:rPr sz="1600" b="1">
+                <a:solidFill>
+                  <a:srgbClr val="0F6CBD"/>
+                </a:solidFill>
+              </a:rPr>
+              <a:t>•  </a:t>
+            </a:r>
+            <a:r>
+              <a:rPr sz="1600" b="0">
+                <a:solidFill>
+                  <a:srgbClr val="0B1F3A"/>
+                </a:solidFill>
+              </a:rPr>
+              <a:t>Misurare quanto ogni persona approva senza leggere è </a:t>
+            </a:r>
+            <a:r>
+              <a:rPr sz="1600" b="1">
+                <a:solidFill>
+                  <a:srgbClr val="0B1F3A"/>
+                </a:solidFill>
+              </a:rPr>
+              <a:t>controllo dei lavoratori</a:t>
+            </a:r>
+            <a:r>
+              <a:rPr sz="1600" b="0">
+                <a:solidFill>
+                  <a:srgbClr val="0B1F3A"/>
+                </a:solidFill>
+              </a:rPr>
+              <a:t>? (Art. 26(7), Statuto art. 4)</a:t>
+            </a:r>
+          </a:p>
+          <a:p>
+            <a:pPr>
+              <a:spcAft>
+                <a:spcPts val="800"/>
+              </a:spcAft>
+            </a:pPr>
+            <a:r>
+              <a:rPr sz="1600" b="1">
+                <a:solidFill>
+                  <a:srgbClr val="0F6CBD"/>
+                </a:solidFill>
+              </a:rPr>
+              <a:t>•  </a:t>
+            </a:r>
+            <a:r>
+              <a:rPr sz="1600" b="0">
+                <a:solidFill>
+                  <a:srgbClr val="0B1F3A"/>
+                </a:solidFill>
+              </a:rPr>
+              <a:t>Un servizio peggiore al Sud tocca i diritti dei cittadini, ma la valutazione d'impatto sui diritti non è richiesta (Art. 27).</a:t>
+            </a:r>
+          </a:p>
+          <a:p>
+            <a:pPr>
+              <a:spcAft>
+                <a:spcPts val="800"/>
+              </a:spcAft>
+            </a:pPr>
+            <a:r>
+              <a:rPr sz="1600" b="1">
+                <a:solidFill>
+                  <a:srgbClr val="0F6CBD"/>
+                </a:solidFill>
+              </a:rPr>
+              <a:t>•  </a:t>
+            </a:r>
+            <a:r>
+              <a:rPr sz="1600" b="0">
+                <a:solidFill>
+                  <a:srgbClr val="0B1F3A"/>
+                </a:solidFill>
+              </a:rPr>
+              <a:t>Dati di un'infrastruttura critica mandati a un </a:t>
+            </a:r>
+            <a:r>
+              <a:rPr sz="1600" b="1">
+                <a:solidFill>
+                  <a:srgbClr val="0B1F3A"/>
+                </a:solidFill>
+              </a:rPr>
+              <a:t>LLM nel cloud</a:t>
+            </a:r>
+            <a:r>
+              <a:rPr sz="1600" b="0">
+                <a:solidFill>
+                  <a:srgbClr val="0B1F3A"/>
+                </a:solidFill>
+              </a:rPr>
+              <a:t>: riservatezza e dipendenza da un fornitore.</a:t>
+            </a:r>
+          </a:p>
+        </p:txBody>
+      </p:sp>
+    </p:spTree>
+  </p:cSld>
+  <p:clrMapOvr>
+    <a:masterClrMapping/>
+  </p:clrMapOvr>
+</p:sld>
+</file>
+
+<file path=ppt/slides/slide21.xml><?xml version="1.0" encoding="utf-8"?>
 <p:sld xmlns:a="http://schemas.openxmlformats.org/drawingml/2006/main" xmlns:p="http://schemas.openxmlformats.org/presentationml/2006/main" xmlns:r="http://schemas.openxmlformats.org/officeDocument/2006/relationships">
   <p:cSld>
     <p:spTree>

--- a/consegna/EnerGuard_Presentazione.pptx
+++ b/consegna/EnerGuard_Presentazione.pptx
@@ -4,30 +4,33 @@
   <p:sldMasterIdLst>
     <p:sldMasterId id="2147483648" r:id="rId1"/>
   </p:sldMasterIdLst>
+  <p:notesMasterIdLst>
+    <p:notesMasterId r:id="rId23"/>
+  </p:notesMasterIdLst>
   <p:sldIdLst>
-    <p:sldId id="256" r:id="rId7"/>
-    <p:sldId id="257" r:id="rId9"/>
-    <p:sldId id="258" r:id="rId10"/>
-    <p:sldId id="259" r:id="rId11"/>
-    <p:sldId id="260" r:id="rId12"/>
-    <p:sldId id="261" r:id="rId13"/>
-    <p:sldId id="262" r:id="rId14"/>
-    <p:sldId id="263" r:id="rId15"/>
-    <p:sldId id="264" r:id="rId16"/>
-    <p:sldId id="265" r:id="rId17"/>
-    <p:sldId id="266" r:id="rId18"/>
-    <p:sldId id="267" r:id="rId19"/>
-    <p:sldId id="268" r:id="rId20"/>
-    <p:sldId id="269" r:id="rId21"/>
-    <p:sldId id="270" r:id="rId22"/>
-    <p:sldId id="271" r:id="rId23"/>
-    <p:sldId id="272" r:id="rId24"/>
-    <p:sldId id="273" r:id="rId25"/>
-    <p:sldId id="274" r:id="rId26"/>
-    <p:sldId id="275" r:id="rId27"/>
-    <p:sldId id="276" r:id="rId28"/>
+    <p:sldId id="256" r:id="rId2"/>
+    <p:sldId id="257" r:id="rId3"/>
+    <p:sldId id="258" r:id="rId4"/>
+    <p:sldId id="259" r:id="rId5"/>
+    <p:sldId id="260" r:id="rId6"/>
+    <p:sldId id="261" r:id="rId7"/>
+    <p:sldId id="262" r:id="rId8"/>
+    <p:sldId id="263" r:id="rId9"/>
+    <p:sldId id="264" r:id="rId10"/>
+    <p:sldId id="265" r:id="rId11"/>
+    <p:sldId id="266" r:id="rId12"/>
+    <p:sldId id="267" r:id="rId13"/>
+    <p:sldId id="268" r:id="rId14"/>
+    <p:sldId id="269" r:id="rId15"/>
+    <p:sldId id="270" r:id="rId16"/>
+    <p:sldId id="271" r:id="rId17"/>
+    <p:sldId id="272" r:id="rId18"/>
+    <p:sldId id="273" r:id="rId19"/>
+    <p:sldId id="274" r:id="rId20"/>
+    <p:sldId id="275" r:id="rId21"/>
+    <p:sldId id="276" r:id="rId22"/>
   </p:sldIdLst>
-  <p:sldSz cx="12191695" cy="6858000" type="screen4x3"/>
+  <p:sldSz cx="12192000" cy="6858000"/>
   <p:notesSz cx="6858000" cy="9144000"/>
   <p:defaultTextStyle>
     <a:defPPr>
@@ -124,11 +127,27 @@
       </a:defRPr>
     </a:lvl9pPr>
   </p:defaultTextStyle>
+  <p:extLst>
+    <p:ext uri="{EFAFB233-063F-42B5-8137-9DF3F51BA10A}">
+      <p15:sldGuideLst xmlns:p15="http://schemas.microsoft.com/office/powerpoint/2012/main">
+        <p15:guide id="1" orient="horz" pos="2160">
+          <p15:clr>
+            <a:srgbClr val="A4A3A4"/>
+          </p15:clr>
+        </p15:guide>
+        <p15:guide id="2" pos="2880">
+          <p15:clr>
+            <a:srgbClr val="A4A3A4"/>
+          </p15:clr>
+        </p15:guide>
+      </p15:sldGuideLst>
+    </p:ext>
+  </p:extLst>
 </p:presentation>
 </file>
 
 <file path=ppt/notesMasters/notesMaster1.xml><?xml version="1.0" encoding="utf-8"?>
-<p:notesMaster xmlns:a="http://schemas.openxmlformats.org/drawingml/2006/main" xmlns:p="http://schemas.openxmlformats.org/presentationml/2006/main" xmlns:r="http://schemas.openxmlformats.org/officeDocument/2006/relationships">
+<p:notesMaster xmlns:a="http://schemas.openxmlformats.org/drawingml/2006/main" xmlns:r="http://schemas.openxmlformats.org/officeDocument/2006/relationships" xmlns:p="http://schemas.openxmlformats.org/presentationml/2006/main">
   <p:cSld>
     <p:bg>
       <p:bgRef idx="1001">
@@ -149,241 +168,16 @@
           <a:chExt cx="0" cy="0"/>
         </a:xfrm>
       </p:grpSpPr>
-      <p:sp>
-        <p:nvSpPr>
-          <p:cNvPr id="2" name="Header Placeholder 1"/>
-          <p:cNvSpPr>
-            <a:spLocks noGrp="1"/>
-          </p:cNvSpPr>
-          <p:nvPr>
-            <p:ph type="hdr" sz="quarter"/>
-          </p:nvPr>
-        </p:nvSpPr>
-        <p:spPr>
-          <a:xfrm>
-            <a:off x="0" y="0"/>
-            <a:ext cx="2971800" cy="457200"/>
-          </a:xfrm>
-          <a:prstGeom prst="rect">
-            <a:avLst/>
-          </a:prstGeom>
-        </p:spPr>
-        <p:txBody>
-          <a:bodyPr vert="horz" lIns="91440" tIns="45720" rIns="91440" bIns="45720" rtlCol="0"/>
-          <a:lstStyle>
-            <a:lvl1pPr algn="l">
-              <a:defRPr sz="1200"/>
-            </a:lvl1pPr>
-          </a:lstStyle>
-          <a:p>
-            <a:endParaRPr lang="en-US"/>
-          </a:p>
-        </p:txBody>
-      </p:sp>
-      <p:sp>
-        <p:nvSpPr>
-          <p:cNvPr id="3" name="Date Placeholder 2"/>
-          <p:cNvSpPr>
-            <a:spLocks noGrp="1"/>
-          </p:cNvSpPr>
-          <p:nvPr>
-            <p:ph type="dt" idx="1"/>
-          </p:nvPr>
-        </p:nvSpPr>
-        <p:spPr>
-          <a:xfrm>
-            <a:off x="3884613" y="0"/>
-            <a:ext cx="2971800" cy="457200"/>
-          </a:xfrm>
-          <a:prstGeom prst="rect">
-            <a:avLst/>
-          </a:prstGeom>
-        </p:spPr>
-        <p:txBody>
-          <a:bodyPr vert="horz" lIns="91440" tIns="45720" rIns="91440" bIns="45720" rtlCol="0"/>
-          <a:lstStyle>
-            <a:lvl1pPr algn="r">
-              <a:defRPr sz="1200"/>
-            </a:lvl1pPr>
-          </a:lstStyle>
-          <a:p>
-            <a:fld id="{0F89C1C7-3DCD-1040-A9CF-14679D8B5DDD}" type="datetimeFigureOut">
-              <a:rPr lang="en-US" smtClean="0"/>
-              <a:t>10/17/16</a:t>
-            </a:fld>
-            <a:endParaRPr lang="en-US"/>
-          </a:p>
-        </p:txBody>
-      </p:sp>
-      <p:sp>
-        <p:nvSpPr>
-          <p:cNvPr id="4" name="Slide Image Placeholder 3"/>
-          <p:cNvSpPr>
-            <a:spLocks noGrp="1" noRot="1" noChangeAspect="1"/>
-          </p:cNvSpPr>
-          <p:nvPr>
-            <p:ph type="sldImg" idx="2"/>
-          </p:nvPr>
-        </p:nvSpPr>
-        <p:spPr>
-          <a:xfrm>
-            <a:off x="1143000" y="685800"/>
-            <a:ext cx="4572000" cy="3429000"/>
-          </a:xfrm>
-          <a:prstGeom prst="rect">
-            <a:avLst/>
-          </a:prstGeom>
-          <a:noFill/>
-          <a:ln w="12700">
-            <a:solidFill>
-              <a:prstClr val="black"/>
-            </a:solidFill>
-          </a:ln>
-        </p:spPr>
-        <p:txBody>
-          <a:bodyPr vert="horz" lIns="91440" tIns="45720" rIns="91440" bIns="45720" rtlCol="0" anchor="ctr"/>
-          <a:lstStyle/>
-          <a:p>
-            <a:endParaRPr lang="en-US"/>
-          </a:p>
-        </p:txBody>
-      </p:sp>
-      <p:sp>
-        <p:nvSpPr>
-          <p:cNvPr id="5" name="Notes Placeholder 4"/>
-          <p:cNvSpPr>
-            <a:spLocks noGrp="1"/>
-          </p:cNvSpPr>
-          <p:nvPr>
-            <p:ph type="body" sz="quarter" idx="3"/>
-          </p:nvPr>
-        </p:nvSpPr>
-        <p:spPr>
-          <a:xfrm>
-            <a:off x="685800" y="4343400"/>
-            <a:ext cx="5486400" cy="4114800"/>
-          </a:xfrm>
-          <a:prstGeom prst="rect">
-            <a:avLst/>
-          </a:prstGeom>
-        </p:spPr>
-        <p:txBody>
-          <a:bodyPr vert="horz" lIns="91440" tIns="45720" rIns="91440" bIns="45720" rtlCol="0"/>
-          <a:lstStyle/>
-          <a:p>
-            <a:pPr lvl="0"/>
-            <a:r>
-              <a:rPr lang="en-US" smtClean="0"/>
-              <a:t>Click to edit Master text styles</a:t>
-            </a:r>
-          </a:p>
-          <a:p>
-            <a:pPr lvl="1"/>
-            <a:r>
-              <a:rPr lang="en-US" smtClean="0"/>
-              <a:t>Second level</a:t>
-            </a:r>
-          </a:p>
-          <a:p>
-            <a:pPr lvl="2"/>
-            <a:r>
-              <a:rPr lang="en-US" smtClean="0"/>
-              <a:t>Third level</a:t>
-            </a:r>
-          </a:p>
-          <a:p>
-            <a:pPr lvl="3"/>
-            <a:r>
-              <a:rPr lang="en-US" smtClean="0"/>
-              <a:t>Fourth level</a:t>
-            </a:r>
-          </a:p>
-          <a:p>
-            <a:pPr lvl="4"/>
-            <a:r>
-              <a:rPr lang="en-US" smtClean="0"/>
-              <a:t>Fifth level</a:t>
-            </a:r>
-            <a:endParaRPr lang="en-US"/>
-          </a:p>
-        </p:txBody>
-      </p:sp>
-      <p:sp>
-        <p:nvSpPr>
-          <p:cNvPr id="6" name="Footer Placeholder 5"/>
-          <p:cNvSpPr>
-            <a:spLocks noGrp="1"/>
-          </p:cNvSpPr>
-          <p:nvPr>
-            <p:ph type="ftr" sz="quarter" idx="4"/>
-          </p:nvPr>
-        </p:nvSpPr>
-        <p:spPr>
-          <a:xfrm>
-            <a:off x="0" y="8685213"/>
-            <a:ext cx="2971800" cy="457200"/>
-          </a:xfrm>
-          <a:prstGeom prst="rect">
-            <a:avLst/>
-          </a:prstGeom>
-        </p:spPr>
-        <p:txBody>
-          <a:bodyPr vert="horz" lIns="91440" tIns="45720" rIns="91440" bIns="45720" rtlCol="0" anchor="b"/>
-          <a:lstStyle>
-            <a:lvl1pPr algn="l">
-              <a:defRPr sz="1200"/>
-            </a:lvl1pPr>
-          </a:lstStyle>
-          <a:p>
-            <a:endParaRPr lang="en-US"/>
-          </a:p>
-        </p:txBody>
-      </p:sp>
-      <p:sp>
-        <p:nvSpPr>
-          <p:cNvPr id="7" name="Slide Number Placeholder 6"/>
-          <p:cNvSpPr>
-            <a:spLocks noGrp="1"/>
-          </p:cNvSpPr>
-          <p:nvPr>
-            <p:ph type="sldNum" sz="quarter" idx="5"/>
-          </p:nvPr>
-        </p:nvSpPr>
-        <p:spPr>
-          <a:xfrm>
-            <a:off x="3884613" y="8685213"/>
-            <a:ext cx="2971800" cy="457200"/>
-          </a:xfrm>
-          <a:prstGeom prst="rect">
-            <a:avLst/>
-          </a:prstGeom>
-        </p:spPr>
-        <p:txBody>
-          <a:bodyPr vert="horz" lIns="91440" tIns="45720" rIns="91440" bIns="45720" rtlCol="0" anchor="b"/>
-          <a:lstStyle>
-            <a:lvl1pPr algn="r">
-              <a:defRPr sz="1200"/>
-            </a:lvl1pPr>
-          </a:lstStyle>
-          <a:p>
-            <a:fld id="{BB5E49A5-4136-284D-997B-48E1D791AD67}" type="slidenum">
-              <a:rPr lang="en-US" smtClean="0"/>
-              <a:t>‹#›</a:t>
-            </a:fld>
-            <a:endParaRPr lang="en-US"/>
-          </a:p>
-        </p:txBody>
-      </p:sp>
     </p:spTree>
     <p:extLst>
       <p:ext uri="{BB962C8B-B14F-4D97-AF65-F5344CB8AC3E}">
-        <p14:creationId xmlns:p14="http://schemas.microsoft.com/office/powerpoint/2010/main" val="2623252185"/>
+        <p14:creationId xmlns:p14="http://schemas.microsoft.com/office/powerpoint/2010/main" val="2690835753"/>
       </p:ext>
     </p:extLst>
   </p:cSld>
   <p:clrMap bg1="lt1" tx1="dk1" bg2="lt2" tx2="dk2" accent1="accent1" accent2="accent2" accent3="accent3" accent4="accent4" accent5="accent5" accent6="accent6" hlink="hlink" folHlink="folHlink"/>
   <p:notesStyle>
-    <a:lvl1pPr marL="0" algn="l" defTabSz="457200" rtl="0" eaLnBrk="1" latinLnBrk="0" hangingPunct="1">
+    <a:lvl1pPr marL="0" algn="l" defTabSz="914400" rtl="0" eaLnBrk="1" latinLnBrk="0" hangingPunct="1">
       <a:defRPr sz="1200" kern="1200">
         <a:solidFill>
           <a:schemeClr val="tx1"/>
@@ -393,7 +187,7 @@
         <a:cs typeface="+mn-cs"/>
       </a:defRPr>
     </a:lvl1pPr>
-    <a:lvl2pPr marL="457200" algn="l" defTabSz="457200" rtl="0" eaLnBrk="1" latinLnBrk="0" hangingPunct="1">
+    <a:lvl2pPr marL="457200" algn="l" defTabSz="914400" rtl="0" eaLnBrk="1" latinLnBrk="0" hangingPunct="1">
       <a:defRPr sz="1200" kern="1200">
         <a:solidFill>
           <a:schemeClr val="tx1"/>
@@ -403,7 +197,7 @@
         <a:cs typeface="+mn-cs"/>
       </a:defRPr>
     </a:lvl2pPr>
-    <a:lvl3pPr marL="914400" algn="l" defTabSz="457200" rtl="0" eaLnBrk="1" latinLnBrk="0" hangingPunct="1">
+    <a:lvl3pPr marL="914400" algn="l" defTabSz="914400" rtl="0" eaLnBrk="1" latinLnBrk="0" hangingPunct="1">
       <a:defRPr sz="1200" kern="1200">
         <a:solidFill>
           <a:schemeClr val="tx1"/>
@@ -413,7 +207,7 @@
         <a:cs typeface="+mn-cs"/>
       </a:defRPr>
     </a:lvl3pPr>
-    <a:lvl4pPr marL="1371600" algn="l" defTabSz="457200" rtl="0" eaLnBrk="1" latinLnBrk="0" hangingPunct="1">
+    <a:lvl4pPr marL="1371600" algn="l" defTabSz="914400" rtl="0" eaLnBrk="1" latinLnBrk="0" hangingPunct="1">
       <a:defRPr sz="1200" kern="1200">
         <a:solidFill>
           <a:schemeClr val="tx1"/>
@@ -423,7 +217,7 @@
         <a:cs typeface="+mn-cs"/>
       </a:defRPr>
     </a:lvl4pPr>
-    <a:lvl5pPr marL="1828800" algn="l" defTabSz="457200" rtl="0" eaLnBrk="1" latinLnBrk="0" hangingPunct="1">
+    <a:lvl5pPr marL="1828800" algn="l" defTabSz="914400" rtl="0" eaLnBrk="1" latinLnBrk="0" hangingPunct="1">
       <a:defRPr sz="1200" kern="1200">
         <a:solidFill>
           <a:schemeClr val="tx1"/>
@@ -433,7 +227,7 @@
         <a:cs typeface="+mn-cs"/>
       </a:defRPr>
     </a:lvl5pPr>
-    <a:lvl6pPr marL="2286000" algn="l" defTabSz="457200" rtl="0" eaLnBrk="1" latinLnBrk="0" hangingPunct="1">
+    <a:lvl6pPr marL="2286000" algn="l" defTabSz="914400" rtl="0" eaLnBrk="1" latinLnBrk="0" hangingPunct="1">
       <a:defRPr sz="1200" kern="1200">
         <a:solidFill>
           <a:schemeClr val="tx1"/>
@@ -443,7 +237,7 @@
         <a:cs typeface="+mn-cs"/>
       </a:defRPr>
     </a:lvl6pPr>
-    <a:lvl7pPr marL="2743200" algn="l" defTabSz="457200" rtl="0" eaLnBrk="1" latinLnBrk="0" hangingPunct="1">
+    <a:lvl7pPr marL="2743200" algn="l" defTabSz="914400" rtl="0" eaLnBrk="1" latinLnBrk="0" hangingPunct="1">
       <a:defRPr sz="1200" kern="1200">
         <a:solidFill>
           <a:schemeClr val="tx1"/>
@@ -453,7 +247,7 @@
         <a:cs typeface="+mn-cs"/>
       </a:defRPr>
     </a:lvl7pPr>
-    <a:lvl8pPr marL="3200400" algn="l" defTabSz="457200" rtl="0" eaLnBrk="1" latinLnBrk="0" hangingPunct="1">
+    <a:lvl8pPr marL="3200400" algn="l" defTabSz="914400" rtl="0" eaLnBrk="1" latinLnBrk="0" hangingPunct="1">
       <a:defRPr sz="1200" kern="1200">
         <a:solidFill>
           <a:schemeClr val="tx1"/>
@@ -463,7 +257,7 @@
         <a:cs typeface="+mn-cs"/>
       </a:defRPr>
     </a:lvl8pPr>
-    <a:lvl9pPr marL="3657600" algn="l" defTabSz="457200" rtl="0" eaLnBrk="1" latinLnBrk="0" hangingPunct="1">
+    <a:lvl9pPr marL="3657600" algn="l" defTabSz="914400" rtl="0" eaLnBrk="1" latinLnBrk="0" hangingPunct="1">
       <a:defRPr sz="1200" kern="1200">
         <a:solidFill>
           <a:schemeClr val="tx1"/>
@@ -478,7 +272,7 @@
 </file>
 
 <file path=ppt/notesSlides/notesSlide1.xml><?xml version="1.0" encoding="utf-8"?>
-<p:notes xmlns:a="http://schemas.openxmlformats.org/drawingml/2006/main" xmlns:p="http://schemas.openxmlformats.org/presentationml/2006/main" xmlns:r="http://schemas.openxmlformats.org/officeDocument/2006/relationships">
+<p:notes xmlns:a="http://schemas.openxmlformats.org/drawingml/2006/main" xmlns:r="http://schemas.openxmlformats.org/officeDocument/2006/relationships" xmlns:p="http://schemas.openxmlformats.org/presentationml/2006/main">
   <p:cSld>
     <p:spTree>
       <p:nvGrpSpPr>
@@ -498,7 +292,7 @@
         <p:nvSpPr>
           <p:cNvPr id="2" name="Slide Image Placeholder 1"/>
           <p:cNvSpPr>
-            <a:spLocks noGrp="1"/>
+            <a:spLocks noGrp="1" noRot="1" noChangeAspect="1"/>
           </p:cNvSpPr>
           <p:nvPr>
             <p:ph type="sldImg" idx="2"/>
@@ -513,7 +307,7 @@
             <a:spLocks noGrp="1"/>
           </p:cNvSpPr>
           <p:nvPr>
-            <p:ph type="body" idx="3" sz="quarter"/>
+            <p:ph type="body" sz="quarter" idx="3"/>
           </p:nvPr>
         </p:nvSpPr>
         <p:spPr/>
@@ -534,7 +328,7 @@
             <a:spLocks noGrp="1"/>
           </p:cNvSpPr>
           <p:nvPr>
-            <p:ph type="sldNum" idx="5" sz="quarter"/>
+            <p:ph type="sldNum" sz="quarter" idx="5"/>
           </p:nvPr>
         </p:nvSpPr>
         <p:spPr/>
@@ -548,7 +342,7 @@
 </file>
 
 <file path=ppt/notesSlides/notesSlide10.xml><?xml version="1.0" encoding="utf-8"?>
-<p:notes xmlns:a="http://schemas.openxmlformats.org/drawingml/2006/main" xmlns:p="http://schemas.openxmlformats.org/presentationml/2006/main" xmlns:r="http://schemas.openxmlformats.org/officeDocument/2006/relationships">
+<p:notes xmlns:a="http://schemas.openxmlformats.org/drawingml/2006/main" xmlns:r="http://schemas.openxmlformats.org/officeDocument/2006/relationships" xmlns:p="http://schemas.openxmlformats.org/presentationml/2006/main">
   <p:cSld>
     <p:spTree>
       <p:nvGrpSpPr>
@@ -568,7 +362,7 @@
         <p:nvSpPr>
           <p:cNvPr id="2" name="Slide Image Placeholder 1"/>
           <p:cNvSpPr>
-            <a:spLocks noGrp="1"/>
+            <a:spLocks noGrp="1" noRot="1" noChangeAspect="1"/>
           </p:cNvSpPr>
           <p:nvPr>
             <p:ph type="sldImg" idx="2"/>
@@ -583,7 +377,7 @@
             <a:spLocks noGrp="1"/>
           </p:cNvSpPr>
           <p:nvPr>
-            <p:ph type="body" idx="3" sz="quarter"/>
+            <p:ph type="body" sz="quarter" idx="3"/>
           </p:nvPr>
         </p:nvSpPr>
         <p:spPr/>
@@ -604,7 +398,7 @@
             <a:spLocks noGrp="1"/>
           </p:cNvSpPr>
           <p:nvPr>
-            <p:ph type="sldNum" idx="5" sz="quarter"/>
+            <p:ph type="sldNum" sz="quarter" idx="5"/>
           </p:nvPr>
         </p:nvSpPr>
         <p:spPr/>
@@ -618,7 +412,7 @@
 </file>
 
 <file path=ppt/notesSlides/notesSlide11.xml><?xml version="1.0" encoding="utf-8"?>
-<p:notes xmlns:a="http://schemas.openxmlformats.org/drawingml/2006/main" xmlns:p="http://schemas.openxmlformats.org/presentationml/2006/main" xmlns:r="http://schemas.openxmlformats.org/officeDocument/2006/relationships">
+<p:notes xmlns:a="http://schemas.openxmlformats.org/drawingml/2006/main" xmlns:r="http://schemas.openxmlformats.org/officeDocument/2006/relationships" xmlns:p="http://schemas.openxmlformats.org/presentationml/2006/main">
   <p:cSld>
     <p:spTree>
       <p:nvGrpSpPr>
@@ -638,7 +432,7 @@
         <p:nvSpPr>
           <p:cNvPr id="2" name="Slide Image Placeholder 1"/>
           <p:cNvSpPr>
-            <a:spLocks noGrp="1"/>
+            <a:spLocks noGrp="1" noRot="1" noChangeAspect="1"/>
           </p:cNvSpPr>
           <p:nvPr>
             <p:ph type="sldImg" idx="2"/>
@@ -653,7 +447,7 @@
             <a:spLocks noGrp="1"/>
           </p:cNvSpPr>
           <p:nvPr>
-            <p:ph type="body" idx="3" sz="quarter"/>
+            <p:ph type="body" sz="quarter" idx="3"/>
           </p:nvPr>
         </p:nvSpPr>
         <p:spPr/>
@@ -674,7 +468,7 @@
             <a:spLocks noGrp="1"/>
           </p:cNvSpPr>
           <p:nvPr>
-            <p:ph type="sldNum" idx="5" sz="quarter"/>
+            <p:ph type="sldNum" sz="quarter" idx="5"/>
           </p:nvPr>
         </p:nvSpPr>
         <p:spPr/>
@@ -688,7 +482,7 @@
 </file>
 
 <file path=ppt/notesSlides/notesSlide12.xml><?xml version="1.0" encoding="utf-8"?>
-<p:notes xmlns:a="http://schemas.openxmlformats.org/drawingml/2006/main" xmlns:p="http://schemas.openxmlformats.org/presentationml/2006/main" xmlns:r="http://schemas.openxmlformats.org/officeDocument/2006/relationships">
+<p:notes xmlns:a="http://schemas.openxmlformats.org/drawingml/2006/main" xmlns:r="http://schemas.openxmlformats.org/officeDocument/2006/relationships" xmlns:p="http://schemas.openxmlformats.org/presentationml/2006/main">
   <p:cSld>
     <p:spTree>
       <p:nvGrpSpPr>
@@ -708,7 +502,7 @@
         <p:nvSpPr>
           <p:cNvPr id="2" name="Slide Image Placeholder 1"/>
           <p:cNvSpPr>
-            <a:spLocks noGrp="1"/>
+            <a:spLocks noGrp="1" noRot="1" noChangeAspect="1"/>
           </p:cNvSpPr>
           <p:nvPr>
             <p:ph type="sldImg" idx="2"/>
@@ -723,7 +517,7 @@
             <a:spLocks noGrp="1"/>
           </p:cNvSpPr>
           <p:nvPr>
-            <p:ph type="body" idx="3" sz="quarter"/>
+            <p:ph type="body" sz="quarter" idx="3"/>
           </p:nvPr>
         </p:nvSpPr>
         <p:spPr/>
@@ -732,7 +526,224 @@
           <a:lstStyle/>
           <a:p>
             <a:r>
-              <a:t>Prima di raccontare cosa abbiamo fatto, chiariamo l'unico conto che usiamo: guasti attesi dal sistema contro guasti registrati, ogni 100 impianti. Il sistema è pessimista ovunque per scelta; l'anomalia è una zona che si allontana molto più delle altre.</a:t>
+              <a:rPr dirty="0"/>
+              <a:t>Prima di </a:t>
+            </a:r>
+            <a:r>
+              <a:rPr dirty="0" err="1"/>
+              <a:t>raccontare</a:t>
+            </a:r>
+            <a:r>
+              <a:rPr dirty="0"/>
+              <a:t> </a:t>
+            </a:r>
+            <a:r>
+              <a:rPr dirty="0" err="1"/>
+              <a:t>cosa</a:t>
+            </a:r>
+            <a:r>
+              <a:rPr dirty="0"/>
+              <a:t> </a:t>
+            </a:r>
+            <a:r>
+              <a:rPr dirty="0" err="1"/>
+              <a:t>abbiamo</a:t>
+            </a:r>
+            <a:r>
+              <a:rPr dirty="0"/>
+              <a:t> </a:t>
+            </a:r>
+            <a:r>
+              <a:rPr dirty="0" err="1"/>
+              <a:t>fatto</a:t>
+            </a:r>
+            <a:r>
+              <a:rPr dirty="0"/>
+              <a:t>, </a:t>
+            </a:r>
+            <a:r>
+              <a:rPr dirty="0" err="1"/>
+              <a:t>chiariamo</a:t>
+            </a:r>
+            <a:r>
+              <a:rPr dirty="0"/>
+              <a:t> </a:t>
+            </a:r>
+            <a:r>
+              <a:rPr dirty="0" err="1"/>
+              <a:t>l'unico</a:t>
+            </a:r>
+            <a:r>
+              <a:rPr dirty="0"/>
+              <a:t> </a:t>
+            </a:r>
+            <a:r>
+              <a:rPr dirty="0" err="1"/>
+              <a:t>conto</a:t>
+            </a:r>
+            <a:r>
+              <a:rPr dirty="0"/>
+              <a:t> </a:t>
+            </a:r>
+            <a:r>
+              <a:rPr dirty="0" err="1"/>
+              <a:t>che</a:t>
+            </a:r>
+            <a:r>
+              <a:rPr dirty="0"/>
+              <a:t> </a:t>
+            </a:r>
+            <a:r>
+              <a:rPr dirty="0" err="1"/>
+              <a:t>usiamo</a:t>
+            </a:r>
+            <a:r>
+              <a:rPr dirty="0"/>
+              <a:t>: </a:t>
+            </a:r>
+            <a:r>
+              <a:rPr dirty="0" err="1"/>
+              <a:t>guasti</a:t>
+            </a:r>
+            <a:r>
+              <a:rPr dirty="0"/>
+              <a:t> </a:t>
+            </a:r>
+            <a:r>
+              <a:rPr dirty="0" err="1"/>
+              <a:t>attesi</a:t>
+            </a:r>
+            <a:r>
+              <a:rPr dirty="0"/>
+              <a:t> dal </a:t>
+            </a:r>
+            <a:r>
+              <a:rPr dirty="0" err="1"/>
+              <a:t>sistema</a:t>
+            </a:r>
+            <a:r>
+              <a:rPr dirty="0"/>
+              <a:t> </a:t>
+            </a:r>
+            <a:r>
+              <a:rPr dirty="0" err="1"/>
+              <a:t>contro</a:t>
+            </a:r>
+            <a:r>
+              <a:rPr dirty="0"/>
+              <a:t> </a:t>
+            </a:r>
+            <a:r>
+              <a:rPr dirty="0" err="1"/>
+              <a:t>guasti</a:t>
+            </a:r>
+            <a:r>
+              <a:rPr dirty="0"/>
+              <a:t> </a:t>
+            </a:r>
+            <a:r>
+              <a:rPr dirty="0" err="1"/>
+              <a:t>registrati</a:t>
+            </a:r>
+            <a:r>
+              <a:rPr dirty="0"/>
+              <a:t>, ogni 100 </a:t>
+            </a:r>
+            <a:r>
+              <a:rPr dirty="0" err="1"/>
+              <a:t>impianti</a:t>
+            </a:r>
+            <a:r>
+              <a:rPr dirty="0"/>
+              <a:t>. Il </a:t>
+            </a:r>
+            <a:r>
+              <a:rPr dirty="0" err="1"/>
+              <a:t>sistema</a:t>
+            </a:r>
+            <a:r>
+              <a:rPr dirty="0"/>
+              <a:t> è </a:t>
+            </a:r>
+            <a:r>
+              <a:rPr dirty="0" err="1"/>
+              <a:t>pessimista</a:t>
+            </a:r>
+            <a:r>
+              <a:rPr dirty="0"/>
+              <a:t> </a:t>
+            </a:r>
+            <a:r>
+              <a:rPr dirty="0" err="1"/>
+              <a:t>ovunque</a:t>
+            </a:r>
+            <a:r>
+              <a:rPr dirty="0"/>
+              <a:t> per </a:t>
+            </a:r>
+            <a:r>
+              <a:rPr dirty="0" err="1"/>
+              <a:t>scelta</a:t>
+            </a:r>
+            <a:r>
+              <a:rPr dirty="0"/>
+              <a:t>; </a:t>
+            </a:r>
+            <a:r>
+              <a:rPr dirty="0" err="1"/>
+              <a:t>l'anomalia</a:t>
+            </a:r>
+            <a:r>
+              <a:rPr dirty="0"/>
+              <a:t> è </a:t>
+            </a:r>
+            <a:r>
+              <a:rPr dirty="0" err="1"/>
+              <a:t>una</a:t>
+            </a:r>
+            <a:r>
+              <a:rPr dirty="0"/>
+              <a:t> zona </a:t>
+            </a:r>
+            <a:r>
+              <a:rPr dirty="0" err="1"/>
+              <a:t>che</a:t>
+            </a:r>
+            <a:r>
+              <a:rPr dirty="0"/>
+              <a:t> </a:t>
+            </a:r>
+            <a:r>
+              <a:rPr dirty="0" err="1"/>
+              <a:t>si</a:t>
+            </a:r>
+            <a:r>
+              <a:rPr dirty="0"/>
+              <a:t> </a:t>
+            </a:r>
+            <a:r>
+              <a:rPr dirty="0" err="1"/>
+              <a:t>allontana</a:t>
+            </a:r>
+            <a:r>
+              <a:rPr dirty="0"/>
+              <a:t> molto </a:t>
+            </a:r>
+            <a:r>
+              <a:rPr dirty="0" err="1"/>
+              <a:t>più</a:t>
+            </a:r>
+            <a:r>
+              <a:rPr dirty="0"/>
+              <a:t> delle </a:t>
+            </a:r>
+            <a:r>
+              <a:rPr dirty="0" err="1"/>
+              <a:t>altre</a:t>
+            </a:r>
+            <a:r>
+              <a:rPr dirty="0"/>
+              <a:t>.</a:t>
             </a:r>
           </a:p>
         </p:txBody>
@@ -744,7 +755,7 @@
             <a:spLocks noGrp="1"/>
           </p:cNvSpPr>
           <p:nvPr>
-            <p:ph type="sldNum" idx="5" sz="quarter"/>
+            <p:ph type="sldNum" sz="quarter" idx="5"/>
           </p:nvPr>
         </p:nvSpPr>
         <p:spPr/>
@@ -758,7 +769,7 @@
 </file>
 
 <file path=ppt/notesSlides/notesSlide13.xml><?xml version="1.0" encoding="utf-8"?>
-<p:notes xmlns:a="http://schemas.openxmlformats.org/drawingml/2006/main" xmlns:p="http://schemas.openxmlformats.org/presentationml/2006/main" xmlns:r="http://schemas.openxmlformats.org/officeDocument/2006/relationships">
+<p:notes xmlns:a="http://schemas.openxmlformats.org/drawingml/2006/main" xmlns:r="http://schemas.openxmlformats.org/officeDocument/2006/relationships" xmlns:p="http://schemas.openxmlformats.org/presentationml/2006/main">
   <p:cSld>
     <p:spTree>
       <p:nvGrpSpPr>
@@ -778,7 +789,7 @@
         <p:nvSpPr>
           <p:cNvPr id="2" name="Slide Image Placeholder 1"/>
           <p:cNvSpPr>
-            <a:spLocks noGrp="1"/>
+            <a:spLocks noGrp="1" noRot="1" noChangeAspect="1"/>
           </p:cNvSpPr>
           <p:nvPr>
             <p:ph type="sldImg" idx="2"/>
@@ -793,7 +804,7 @@
             <a:spLocks noGrp="1"/>
           </p:cNvSpPr>
           <p:nvPr>
-            <p:ph type="body" idx="3" sz="quarter"/>
+            <p:ph type="body" sz="quarter" idx="3"/>
           </p:nvPr>
         </p:nvSpPr>
         <p:spPr/>
@@ -814,7 +825,7 @@
             <a:spLocks noGrp="1"/>
           </p:cNvSpPr>
           <p:nvPr>
-            <p:ph type="sldNum" idx="5" sz="quarter"/>
+            <p:ph type="sldNum" sz="quarter" idx="5"/>
           </p:nvPr>
         </p:nvSpPr>
         <p:spPr/>
@@ -828,7 +839,7 @@
 </file>
 
 <file path=ppt/notesSlides/notesSlide14.xml><?xml version="1.0" encoding="utf-8"?>
-<p:notes xmlns:a="http://schemas.openxmlformats.org/drawingml/2006/main" xmlns:p="http://schemas.openxmlformats.org/presentationml/2006/main" xmlns:r="http://schemas.openxmlformats.org/officeDocument/2006/relationships">
+<p:notes xmlns:a="http://schemas.openxmlformats.org/drawingml/2006/main" xmlns:r="http://schemas.openxmlformats.org/officeDocument/2006/relationships" xmlns:p="http://schemas.openxmlformats.org/presentationml/2006/main">
   <p:cSld>
     <p:spTree>
       <p:nvGrpSpPr>
@@ -848,7 +859,7 @@
         <p:nvSpPr>
           <p:cNvPr id="2" name="Slide Image Placeholder 1"/>
           <p:cNvSpPr>
-            <a:spLocks noGrp="1"/>
+            <a:spLocks noGrp="1" noRot="1" noChangeAspect="1"/>
           </p:cNvSpPr>
           <p:nvPr>
             <p:ph type="sldImg" idx="2"/>
@@ -863,7 +874,7 @@
             <a:spLocks noGrp="1"/>
           </p:cNvSpPr>
           <p:nvPr>
-            <p:ph type="body" idx="3" sz="quarter"/>
+            <p:ph type="body" sz="quarter" idx="3"/>
           </p:nvPr>
         </p:nvSpPr>
         <p:spPr/>
@@ -884,7 +895,7 @@
             <a:spLocks noGrp="1"/>
           </p:cNvSpPr>
           <p:nvPr>
-            <p:ph type="sldNum" idx="5" sz="quarter"/>
+            <p:ph type="sldNum" sz="quarter" idx="5"/>
           </p:nvPr>
         </p:nvSpPr>
         <p:spPr/>
@@ -898,7 +909,7 @@
 </file>
 
 <file path=ppt/notesSlides/notesSlide15.xml><?xml version="1.0" encoding="utf-8"?>
-<p:notes xmlns:a="http://schemas.openxmlformats.org/drawingml/2006/main" xmlns:p="http://schemas.openxmlformats.org/presentationml/2006/main" xmlns:r="http://schemas.openxmlformats.org/officeDocument/2006/relationships">
+<p:notes xmlns:a="http://schemas.openxmlformats.org/drawingml/2006/main" xmlns:r="http://schemas.openxmlformats.org/officeDocument/2006/relationships" xmlns:p="http://schemas.openxmlformats.org/presentationml/2006/main">
   <p:cSld>
     <p:spTree>
       <p:nvGrpSpPr>
@@ -918,7 +929,7 @@
         <p:nvSpPr>
           <p:cNvPr id="2" name="Slide Image Placeholder 1"/>
           <p:cNvSpPr>
-            <a:spLocks noGrp="1"/>
+            <a:spLocks noGrp="1" noRot="1" noChangeAspect="1"/>
           </p:cNvSpPr>
           <p:nvPr>
             <p:ph type="sldImg" idx="2"/>
@@ -933,7 +944,7 @@
             <a:spLocks noGrp="1"/>
           </p:cNvSpPr>
           <p:nvPr>
-            <p:ph type="body" idx="3" sz="quarter"/>
+            <p:ph type="body" sz="quarter" idx="3"/>
           </p:nvPr>
         </p:nvSpPr>
         <p:spPr/>
@@ -954,7 +965,7 @@
             <a:spLocks noGrp="1"/>
           </p:cNvSpPr>
           <p:nvPr>
-            <p:ph type="sldNum" idx="5" sz="quarter"/>
+            <p:ph type="sldNum" sz="quarter" idx="5"/>
           </p:nvPr>
         </p:nvSpPr>
         <p:spPr/>
@@ -968,7 +979,7 @@
 </file>
 
 <file path=ppt/notesSlides/notesSlide16.xml><?xml version="1.0" encoding="utf-8"?>
-<p:notes xmlns:a="http://schemas.openxmlformats.org/drawingml/2006/main" xmlns:p="http://schemas.openxmlformats.org/presentationml/2006/main" xmlns:r="http://schemas.openxmlformats.org/officeDocument/2006/relationships">
+<p:notes xmlns:a="http://schemas.openxmlformats.org/drawingml/2006/main" xmlns:r="http://schemas.openxmlformats.org/officeDocument/2006/relationships" xmlns:p="http://schemas.openxmlformats.org/presentationml/2006/main">
   <p:cSld>
     <p:spTree>
       <p:nvGrpSpPr>
@@ -988,7 +999,7 @@
         <p:nvSpPr>
           <p:cNvPr id="2" name="Slide Image Placeholder 1"/>
           <p:cNvSpPr>
-            <a:spLocks noGrp="1"/>
+            <a:spLocks noGrp="1" noRot="1" noChangeAspect="1"/>
           </p:cNvSpPr>
           <p:nvPr>
             <p:ph type="sldImg" idx="2"/>
@@ -1003,7 +1014,7 @@
             <a:spLocks noGrp="1"/>
           </p:cNvSpPr>
           <p:nvPr>
-            <p:ph type="body" idx="3" sz="quarter"/>
+            <p:ph type="body" sz="quarter" idx="3"/>
           </p:nvPr>
         </p:nvSpPr>
         <p:spPr/>
@@ -1024,7 +1035,7 @@
             <a:spLocks noGrp="1"/>
           </p:cNvSpPr>
           <p:nvPr>
-            <p:ph type="sldNum" idx="5" sz="quarter"/>
+            <p:ph type="sldNum" sz="quarter" idx="5"/>
           </p:nvPr>
         </p:nvSpPr>
         <p:spPr/>
@@ -1038,7 +1049,7 @@
 </file>
 
 <file path=ppt/notesSlides/notesSlide17.xml><?xml version="1.0" encoding="utf-8"?>
-<p:notes xmlns:a="http://schemas.openxmlformats.org/drawingml/2006/main" xmlns:p="http://schemas.openxmlformats.org/presentationml/2006/main" xmlns:r="http://schemas.openxmlformats.org/officeDocument/2006/relationships">
+<p:notes xmlns:a="http://schemas.openxmlformats.org/drawingml/2006/main" xmlns:r="http://schemas.openxmlformats.org/officeDocument/2006/relationships" xmlns:p="http://schemas.openxmlformats.org/presentationml/2006/main">
   <p:cSld>
     <p:spTree>
       <p:nvGrpSpPr>
@@ -1058,7 +1069,7 @@
         <p:nvSpPr>
           <p:cNvPr id="2" name="Slide Image Placeholder 1"/>
           <p:cNvSpPr>
-            <a:spLocks noGrp="1"/>
+            <a:spLocks noGrp="1" noRot="1" noChangeAspect="1"/>
           </p:cNvSpPr>
           <p:nvPr>
             <p:ph type="sldImg" idx="2"/>
@@ -1073,7 +1084,7 @@
             <a:spLocks noGrp="1"/>
           </p:cNvSpPr>
           <p:nvPr>
-            <p:ph type="body" idx="3" sz="quarter"/>
+            <p:ph type="body" sz="quarter" idx="3"/>
           </p:nvPr>
         </p:nvSpPr>
         <p:spPr/>
@@ -1094,7 +1105,7 @@
             <a:spLocks noGrp="1"/>
           </p:cNvSpPr>
           <p:nvPr>
-            <p:ph type="sldNum" idx="5" sz="quarter"/>
+            <p:ph type="sldNum" sz="quarter" idx="5"/>
           </p:nvPr>
         </p:nvSpPr>
         <p:spPr/>
@@ -1108,7 +1119,7 @@
 </file>
 
 <file path=ppt/notesSlides/notesSlide18.xml><?xml version="1.0" encoding="utf-8"?>
-<p:notes xmlns:a="http://schemas.openxmlformats.org/drawingml/2006/main" xmlns:p="http://schemas.openxmlformats.org/presentationml/2006/main" xmlns:r="http://schemas.openxmlformats.org/officeDocument/2006/relationships">
+<p:notes xmlns:a="http://schemas.openxmlformats.org/drawingml/2006/main" xmlns:r="http://schemas.openxmlformats.org/officeDocument/2006/relationships" xmlns:p="http://schemas.openxmlformats.org/presentationml/2006/main">
   <p:cSld>
     <p:spTree>
       <p:nvGrpSpPr>
@@ -1128,7 +1139,7 @@
         <p:nvSpPr>
           <p:cNvPr id="2" name="Slide Image Placeholder 1"/>
           <p:cNvSpPr>
-            <a:spLocks noGrp="1"/>
+            <a:spLocks noGrp="1" noRot="1" noChangeAspect="1"/>
           </p:cNvSpPr>
           <p:nvPr>
             <p:ph type="sldImg" idx="2"/>
@@ -1143,7 +1154,7 @@
             <a:spLocks noGrp="1"/>
           </p:cNvSpPr>
           <p:nvPr>
-            <p:ph type="body" idx="3" sz="quarter"/>
+            <p:ph type="body" sz="quarter" idx="3"/>
           </p:nvPr>
         </p:nvSpPr>
         <p:spPr/>
@@ -1164,7 +1175,7 @@
             <a:spLocks noGrp="1"/>
           </p:cNvSpPr>
           <p:nvPr>
-            <p:ph type="sldNum" idx="5" sz="quarter"/>
+            <p:ph type="sldNum" sz="quarter" idx="5"/>
           </p:nvPr>
         </p:nvSpPr>
         <p:spPr/>
@@ -1178,7 +1189,7 @@
 </file>
 
 <file path=ppt/notesSlides/notesSlide19.xml><?xml version="1.0" encoding="utf-8"?>
-<p:notes xmlns:a="http://schemas.openxmlformats.org/drawingml/2006/main" xmlns:p="http://schemas.openxmlformats.org/presentationml/2006/main" xmlns:r="http://schemas.openxmlformats.org/officeDocument/2006/relationships">
+<p:notes xmlns:a="http://schemas.openxmlformats.org/drawingml/2006/main" xmlns:r="http://schemas.openxmlformats.org/officeDocument/2006/relationships" xmlns:p="http://schemas.openxmlformats.org/presentationml/2006/main">
   <p:cSld>
     <p:spTree>
       <p:nvGrpSpPr>
@@ -1198,7 +1209,7 @@
         <p:nvSpPr>
           <p:cNvPr id="2" name="Slide Image Placeholder 1"/>
           <p:cNvSpPr>
-            <a:spLocks noGrp="1"/>
+            <a:spLocks noGrp="1" noRot="1" noChangeAspect="1"/>
           </p:cNvSpPr>
           <p:nvPr>
             <p:ph type="sldImg" idx="2"/>
@@ -1213,7 +1224,7 @@
             <a:spLocks noGrp="1"/>
           </p:cNvSpPr>
           <p:nvPr>
-            <p:ph type="body" idx="3" sz="quarter"/>
+            <p:ph type="body" sz="quarter" idx="3"/>
           </p:nvPr>
         </p:nvSpPr>
         <p:spPr/>
@@ -1234,7 +1245,7 @@
             <a:spLocks noGrp="1"/>
           </p:cNvSpPr>
           <p:nvPr>
-            <p:ph type="sldNum" idx="5" sz="quarter"/>
+            <p:ph type="sldNum" sz="quarter" idx="5"/>
           </p:nvPr>
         </p:nvSpPr>
         <p:spPr/>
@@ -1248,7 +1259,7 @@
 </file>
 
 <file path=ppt/notesSlides/notesSlide2.xml><?xml version="1.0" encoding="utf-8"?>
-<p:notes xmlns:a="http://schemas.openxmlformats.org/drawingml/2006/main" xmlns:p="http://schemas.openxmlformats.org/presentationml/2006/main" xmlns:r="http://schemas.openxmlformats.org/officeDocument/2006/relationships">
+<p:notes xmlns:a="http://schemas.openxmlformats.org/drawingml/2006/main" xmlns:r="http://schemas.openxmlformats.org/officeDocument/2006/relationships" xmlns:p="http://schemas.openxmlformats.org/presentationml/2006/main">
   <p:cSld>
     <p:spTree>
       <p:nvGrpSpPr>
@@ -1268,7 +1279,7 @@
         <p:nvSpPr>
           <p:cNvPr id="2" name="Slide Image Placeholder 1"/>
           <p:cNvSpPr>
-            <a:spLocks noGrp="1"/>
+            <a:spLocks noGrp="1" noRot="1" noChangeAspect="1"/>
           </p:cNvSpPr>
           <p:nvPr>
             <p:ph type="sldImg" idx="2"/>
@@ -1283,7 +1294,7 @@
             <a:spLocks noGrp="1"/>
           </p:cNvSpPr>
           <p:nvPr>
-            <p:ph type="body" idx="3" sz="quarter"/>
+            <p:ph type="body" sz="quarter" idx="3"/>
           </p:nvPr>
         </p:nvSpPr>
         <p:spPr/>
@@ -1304,7 +1315,7 @@
             <a:spLocks noGrp="1"/>
           </p:cNvSpPr>
           <p:nvPr>
-            <p:ph type="sldNum" idx="5" sz="quarter"/>
+            <p:ph type="sldNum" sz="quarter" idx="5"/>
           </p:nvPr>
         </p:nvSpPr>
         <p:spPr/>
@@ -1318,7 +1329,7 @@
 </file>
 
 <file path=ppt/notesSlides/notesSlide20.xml><?xml version="1.0" encoding="utf-8"?>
-<p:notes xmlns:a="http://schemas.openxmlformats.org/drawingml/2006/main" xmlns:p="http://schemas.openxmlformats.org/presentationml/2006/main" xmlns:r="http://schemas.openxmlformats.org/officeDocument/2006/relationships">
+<p:notes xmlns:a="http://schemas.openxmlformats.org/drawingml/2006/main" xmlns:r="http://schemas.openxmlformats.org/officeDocument/2006/relationships" xmlns:p="http://schemas.openxmlformats.org/presentationml/2006/main">
   <p:cSld>
     <p:spTree>
       <p:nvGrpSpPr>
@@ -1338,7 +1349,7 @@
         <p:nvSpPr>
           <p:cNvPr id="2" name="Slide Image Placeholder 1"/>
           <p:cNvSpPr>
-            <a:spLocks noGrp="1"/>
+            <a:spLocks noGrp="1" noRot="1" noChangeAspect="1"/>
           </p:cNvSpPr>
           <p:nvPr>
             <p:ph type="sldImg" idx="2"/>
@@ -1353,7 +1364,7 @@
             <a:spLocks noGrp="1"/>
           </p:cNvSpPr>
           <p:nvPr>
-            <p:ph type="body" idx="3" sz="quarter"/>
+            <p:ph type="body" sz="quarter" idx="3"/>
           </p:nvPr>
         </p:nvSpPr>
         <p:spPr/>
@@ -1374,7 +1385,7 @@
             <a:spLocks noGrp="1"/>
           </p:cNvSpPr>
           <p:nvPr>
-            <p:ph type="sldNum" idx="5" sz="quarter"/>
+            <p:ph type="sldNum" sz="quarter" idx="5"/>
           </p:nvPr>
         </p:nvSpPr>
         <p:spPr/>
@@ -1388,7 +1399,7 @@
 </file>
 
 <file path=ppt/notesSlides/notesSlide21.xml><?xml version="1.0" encoding="utf-8"?>
-<p:notes xmlns:a="http://schemas.openxmlformats.org/drawingml/2006/main" xmlns:p="http://schemas.openxmlformats.org/presentationml/2006/main" xmlns:r="http://schemas.openxmlformats.org/officeDocument/2006/relationships">
+<p:notes xmlns:a="http://schemas.openxmlformats.org/drawingml/2006/main" xmlns:r="http://schemas.openxmlformats.org/officeDocument/2006/relationships" xmlns:p="http://schemas.openxmlformats.org/presentationml/2006/main">
   <p:cSld>
     <p:spTree>
       <p:nvGrpSpPr>
@@ -1408,7 +1419,7 @@
         <p:nvSpPr>
           <p:cNvPr id="2" name="Slide Image Placeholder 1"/>
           <p:cNvSpPr>
-            <a:spLocks noGrp="1"/>
+            <a:spLocks noGrp="1" noRot="1" noChangeAspect="1"/>
           </p:cNvSpPr>
           <p:nvPr>
             <p:ph type="sldImg" idx="2"/>
@@ -1423,7 +1434,7 @@
             <a:spLocks noGrp="1"/>
           </p:cNvSpPr>
           <p:nvPr>
-            <p:ph type="body" idx="3" sz="quarter"/>
+            <p:ph type="body" sz="quarter" idx="3"/>
           </p:nvPr>
         </p:nvSpPr>
         <p:spPr/>
@@ -1444,7 +1455,7 @@
             <a:spLocks noGrp="1"/>
           </p:cNvSpPr>
           <p:nvPr>
-            <p:ph type="sldNum" idx="5" sz="quarter"/>
+            <p:ph type="sldNum" sz="quarter" idx="5"/>
           </p:nvPr>
         </p:nvSpPr>
         <p:spPr/>
@@ -1458,7 +1469,7 @@
 </file>
 
 <file path=ppt/notesSlides/notesSlide3.xml><?xml version="1.0" encoding="utf-8"?>
-<p:notes xmlns:a="http://schemas.openxmlformats.org/drawingml/2006/main" xmlns:p="http://schemas.openxmlformats.org/presentationml/2006/main" xmlns:r="http://schemas.openxmlformats.org/officeDocument/2006/relationships">
+<p:notes xmlns:a="http://schemas.openxmlformats.org/drawingml/2006/main" xmlns:r="http://schemas.openxmlformats.org/officeDocument/2006/relationships" xmlns:p="http://schemas.openxmlformats.org/presentationml/2006/main">
   <p:cSld>
     <p:spTree>
       <p:nvGrpSpPr>
@@ -1478,7 +1489,7 @@
         <p:nvSpPr>
           <p:cNvPr id="2" name="Slide Image Placeholder 1"/>
           <p:cNvSpPr>
-            <a:spLocks noGrp="1"/>
+            <a:spLocks noGrp="1" noRot="1" noChangeAspect="1"/>
           </p:cNvSpPr>
           <p:nvPr>
             <p:ph type="sldImg" idx="2"/>
@@ -1493,7 +1504,7 @@
             <a:spLocks noGrp="1"/>
           </p:cNvSpPr>
           <p:nvPr>
-            <p:ph type="body" idx="3" sz="quarter"/>
+            <p:ph type="body" sz="quarter" idx="3"/>
           </p:nvPr>
         </p:nvSpPr>
         <p:spPr/>
@@ -1514,7 +1525,7 @@
             <a:spLocks noGrp="1"/>
           </p:cNvSpPr>
           <p:nvPr>
-            <p:ph type="sldNum" idx="5" sz="quarter"/>
+            <p:ph type="sldNum" sz="quarter" idx="5"/>
           </p:nvPr>
         </p:nvSpPr>
         <p:spPr/>
@@ -1528,7 +1539,7 @@
 </file>
 
 <file path=ppt/notesSlides/notesSlide4.xml><?xml version="1.0" encoding="utf-8"?>
-<p:notes xmlns:a="http://schemas.openxmlformats.org/drawingml/2006/main" xmlns:p="http://schemas.openxmlformats.org/presentationml/2006/main" xmlns:r="http://schemas.openxmlformats.org/officeDocument/2006/relationships">
+<p:notes xmlns:a="http://schemas.openxmlformats.org/drawingml/2006/main" xmlns:r="http://schemas.openxmlformats.org/officeDocument/2006/relationships" xmlns:p="http://schemas.openxmlformats.org/presentationml/2006/main">
   <p:cSld>
     <p:spTree>
       <p:nvGrpSpPr>
@@ -1548,7 +1559,7 @@
         <p:nvSpPr>
           <p:cNvPr id="2" name="Slide Image Placeholder 1"/>
           <p:cNvSpPr>
-            <a:spLocks noGrp="1"/>
+            <a:spLocks noGrp="1" noRot="1" noChangeAspect="1"/>
           </p:cNvSpPr>
           <p:nvPr>
             <p:ph type="sldImg" idx="2"/>
@@ -1563,7 +1574,7 @@
             <a:spLocks noGrp="1"/>
           </p:cNvSpPr>
           <p:nvPr>
-            <p:ph type="body" idx="3" sz="quarter"/>
+            <p:ph type="body" sz="quarter" idx="3"/>
           </p:nvPr>
         </p:nvSpPr>
         <p:spPr/>
@@ -1584,7 +1595,7 @@
             <a:spLocks noGrp="1"/>
           </p:cNvSpPr>
           <p:nvPr>
-            <p:ph type="sldNum" idx="5" sz="quarter"/>
+            <p:ph type="sldNum" sz="quarter" idx="5"/>
           </p:nvPr>
         </p:nvSpPr>
         <p:spPr/>
@@ -1598,7 +1609,7 @@
 </file>
 
 <file path=ppt/notesSlides/notesSlide5.xml><?xml version="1.0" encoding="utf-8"?>
-<p:notes xmlns:a="http://schemas.openxmlformats.org/drawingml/2006/main" xmlns:p="http://schemas.openxmlformats.org/presentationml/2006/main" xmlns:r="http://schemas.openxmlformats.org/officeDocument/2006/relationships">
+<p:notes xmlns:a="http://schemas.openxmlformats.org/drawingml/2006/main" xmlns:r="http://schemas.openxmlformats.org/officeDocument/2006/relationships" xmlns:p="http://schemas.openxmlformats.org/presentationml/2006/main">
   <p:cSld>
     <p:spTree>
       <p:nvGrpSpPr>
@@ -1618,7 +1629,7 @@
         <p:nvSpPr>
           <p:cNvPr id="2" name="Slide Image Placeholder 1"/>
           <p:cNvSpPr>
-            <a:spLocks noGrp="1"/>
+            <a:spLocks noGrp="1" noRot="1" noChangeAspect="1"/>
           </p:cNvSpPr>
           <p:nvPr>
             <p:ph type="sldImg" idx="2"/>
@@ -1633,7 +1644,7 @@
             <a:spLocks noGrp="1"/>
           </p:cNvSpPr>
           <p:nvPr>
-            <p:ph type="body" idx="3" sz="quarter"/>
+            <p:ph type="body" sz="quarter" idx="3"/>
           </p:nvPr>
         </p:nvSpPr>
         <p:spPr/>
@@ -1654,7 +1665,7 @@
             <a:spLocks noGrp="1"/>
           </p:cNvSpPr>
           <p:nvPr>
-            <p:ph type="sldNum" idx="5" sz="quarter"/>
+            <p:ph type="sldNum" sz="quarter" idx="5"/>
           </p:nvPr>
         </p:nvSpPr>
         <p:spPr/>
@@ -1668,7 +1679,7 @@
 </file>
 
 <file path=ppt/notesSlides/notesSlide6.xml><?xml version="1.0" encoding="utf-8"?>
-<p:notes xmlns:a="http://schemas.openxmlformats.org/drawingml/2006/main" xmlns:p="http://schemas.openxmlformats.org/presentationml/2006/main" xmlns:r="http://schemas.openxmlformats.org/officeDocument/2006/relationships">
+<p:notes xmlns:a="http://schemas.openxmlformats.org/drawingml/2006/main" xmlns:r="http://schemas.openxmlformats.org/officeDocument/2006/relationships" xmlns:p="http://schemas.openxmlformats.org/presentationml/2006/main">
   <p:cSld>
     <p:spTree>
       <p:nvGrpSpPr>
@@ -1688,7 +1699,7 @@
         <p:nvSpPr>
           <p:cNvPr id="2" name="Slide Image Placeholder 1"/>
           <p:cNvSpPr>
-            <a:spLocks noGrp="1"/>
+            <a:spLocks noGrp="1" noRot="1" noChangeAspect="1"/>
           </p:cNvSpPr>
           <p:nvPr>
             <p:ph type="sldImg" idx="2"/>
@@ -1703,7 +1714,7 @@
             <a:spLocks noGrp="1"/>
           </p:cNvSpPr>
           <p:nvPr>
-            <p:ph type="body" idx="3" sz="quarter"/>
+            <p:ph type="body" sz="quarter" idx="3"/>
           </p:nvPr>
         </p:nvSpPr>
         <p:spPr/>
@@ -1724,7 +1735,7 @@
             <a:spLocks noGrp="1"/>
           </p:cNvSpPr>
           <p:nvPr>
-            <p:ph type="sldNum" idx="5" sz="quarter"/>
+            <p:ph type="sldNum" sz="quarter" idx="5"/>
           </p:nvPr>
         </p:nvSpPr>
         <p:spPr/>
@@ -1738,7 +1749,7 @@
 </file>
 
 <file path=ppt/notesSlides/notesSlide7.xml><?xml version="1.0" encoding="utf-8"?>
-<p:notes xmlns:a="http://schemas.openxmlformats.org/drawingml/2006/main" xmlns:p="http://schemas.openxmlformats.org/presentationml/2006/main" xmlns:r="http://schemas.openxmlformats.org/officeDocument/2006/relationships">
+<p:notes xmlns:a="http://schemas.openxmlformats.org/drawingml/2006/main" xmlns:r="http://schemas.openxmlformats.org/officeDocument/2006/relationships" xmlns:p="http://schemas.openxmlformats.org/presentationml/2006/main">
   <p:cSld>
     <p:spTree>
       <p:nvGrpSpPr>
@@ -1758,7 +1769,7 @@
         <p:nvSpPr>
           <p:cNvPr id="2" name="Slide Image Placeholder 1"/>
           <p:cNvSpPr>
-            <a:spLocks noGrp="1"/>
+            <a:spLocks noGrp="1" noRot="1" noChangeAspect="1"/>
           </p:cNvSpPr>
           <p:nvPr>
             <p:ph type="sldImg" idx="2"/>
@@ -1773,7 +1784,7 @@
             <a:spLocks noGrp="1"/>
           </p:cNvSpPr>
           <p:nvPr>
-            <p:ph type="body" idx="3" sz="quarter"/>
+            <p:ph type="body" sz="quarter" idx="3"/>
           </p:nvPr>
         </p:nvSpPr>
         <p:spPr/>
@@ -1794,7 +1805,7 @@
             <a:spLocks noGrp="1"/>
           </p:cNvSpPr>
           <p:nvPr>
-            <p:ph type="sldNum" idx="5" sz="quarter"/>
+            <p:ph type="sldNum" sz="quarter" idx="5"/>
           </p:nvPr>
         </p:nvSpPr>
         <p:spPr/>
@@ -1808,7 +1819,7 @@
 </file>
 
 <file path=ppt/notesSlides/notesSlide8.xml><?xml version="1.0" encoding="utf-8"?>
-<p:notes xmlns:a="http://schemas.openxmlformats.org/drawingml/2006/main" xmlns:p="http://schemas.openxmlformats.org/presentationml/2006/main" xmlns:r="http://schemas.openxmlformats.org/officeDocument/2006/relationships">
+<p:notes xmlns:a="http://schemas.openxmlformats.org/drawingml/2006/main" xmlns:r="http://schemas.openxmlformats.org/officeDocument/2006/relationships" xmlns:p="http://schemas.openxmlformats.org/presentationml/2006/main">
   <p:cSld>
     <p:spTree>
       <p:nvGrpSpPr>
@@ -1828,7 +1839,7 @@
         <p:nvSpPr>
           <p:cNvPr id="2" name="Slide Image Placeholder 1"/>
           <p:cNvSpPr>
-            <a:spLocks noGrp="1"/>
+            <a:spLocks noGrp="1" noRot="1" noChangeAspect="1"/>
           </p:cNvSpPr>
           <p:nvPr>
             <p:ph type="sldImg" idx="2"/>
@@ -1843,7 +1854,7 @@
             <a:spLocks noGrp="1"/>
           </p:cNvSpPr>
           <p:nvPr>
-            <p:ph type="body" idx="3" sz="quarter"/>
+            <p:ph type="body" sz="quarter" idx="3"/>
           </p:nvPr>
         </p:nvSpPr>
         <p:spPr/>
@@ -1864,7 +1875,7 @@
             <a:spLocks noGrp="1"/>
           </p:cNvSpPr>
           <p:nvPr>
-            <p:ph type="sldNum" idx="5" sz="quarter"/>
+            <p:ph type="sldNum" sz="quarter" idx="5"/>
           </p:nvPr>
         </p:nvSpPr>
         <p:spPr/>
@@ -1878,7 +1889,7 @@
 </file>
 
 <file path=ppt/notesSlides/notesSlide9.xml><?xml version="1.0" encoding="utf-8"?>
-<p:notes xmlns:a="http://schemas.openxmlformats.org/drawingml/2006/main" xmlns:p="http://schemas.openxmlformats.org/presentationml/2006/main" xmlns:r="http://schemas.openxmlformats.org/officeDocument/2006/relationships">
+<p:notes xmlns:a="http://schemas.openxmlformats.org/drawingml/2006/main" xmlns:r="http://schemas.openxmlformats.org/officeDocument/2006/relationships" xmlns:p="http://schemas.openxmlformats.org/presentationml/2006/main">
   <p:cSld>
     <p:spTree>
       <p:nvGrpSpPr>
@@ -1898,7 +1909,7 @@
         <p:nvSpPr>
           <p:cNvPr id="2" name="Slide Image Placeholder 1"/>
           <p:cNvSpPr>
-            <a:spLocks noGrp="1"/>
+            <a:spLocks noGrp="1" noRot="1" noChangeAspect="1"/>
           </p:cNvSpPr>
           <p:nvPr>
             <p:ph type="sldImg" idx="2"/>
@@ -1913,7 +1924,7 @@
             <a:spLocks noGrp="1"/>
           </p:cNvSpPr>
           <p:nvPr>
-            <p:ph type="body" idx="3" sz="quarter"/>
+            <p:ph type="body" sz="quarter" idx="3"/>
           </p:nvPr>
         </p:nvSpPr>
         <p:spPr/>
@@ -1934,7 +1945,7 @@
             <a:spLocks noGrp="1"/>
           </p:cNvSpPr>
           <p:nvPr>
-            <p:ph type="sldNum" idx="5" sz="quarter"/>
+            <p:ph type="sldNum" sz="quarter" idx="5"/>
           </p:nvPr>
         </p:nvSpPr>
         <p:spPr/>
@@ -1985,10 +1996,9 @@
           <a:lstStyle/>
           <a:p>
             <a:r>
-              <a:rPr lang="en-US" smtClean="0"/>
+              <a:rPr lang="en-US"/>
               <a:t>Click to edit Master title style</a:t>
             </a:r>
-            <a:endParaRPr lang="en-US"/>
           </a:p>
         </p:txBody>
       </p:sp>
@@ -2104,10 +2114,9 @@
           </a:lstStyle>
           <a:p>
             <a:r>
-              <a:rPr lang="en-US" smtClean="0"/>
+              <a:rPr lang="en-US"/>
               <a:t>Click to edit Master subtitle style</a:t>
             </a:r>
-            <a:endParaRPr lang="en-US"/>
           </a:p>
         </p:txBody>
       </p:sp>
@@ -2128,7 +2137,7 @@
           <a:p>
             <a:fld id="{5BCAD085-E8A6-8845-BD4E-CB4CCA059FC4}" type="datetimeFigureOut">
               <a:rPr lang="en-US" smtClean="0"/>
-              <a:t>1/27/13</a:t>
+              <a:t>10/9/2026</a:t>
             </a:fld>
             <a:endParaRPr lang="en-US"/>
           </a:p>
@@ -2170,7 +2179,7 @@
           <a:p>
             <a:fld id="{C1FF6DA9-008F-8B48-92A6-B652298478BF}" type="slidenum">
               <a:rPr lang="en-US" smtClean="0"/>
-              <a:t>‹#›</a:t>
+              <a:t>‹N›</a:t>
             </a:fld>
             <a:endParaRPr lang="en-US"/>
           </a:p>
@@ -2222,10 +2231,9 @@
           <a:lstStyle/>
           <a:p>
             <a:r>
-              <a:rPr lang="en-US" smtClean="0"/>
+              <a:rPr lang="en-US"/>
               <a:t>Click to edit Master title style</a:t>
             </a:r>
-            <a:endParaRPr lang="en-US"/>
           </a:p>
         </p:txBody>
       </p:sp>
@@ -2246,38 +2254,37 @@
           <a:p>
             <a:pPr lvl="0"/>
             <a:r>
-              <a:rPr lang="en-US" smtClean="0"/>
+              <a:rPr lang="en-US"/>
               <a:t>Click to edit Master text styles</a:t>
             </a:r>
           </a:p>
           <a:p>
             <a:pPr lvl="1"/>
             <a:r>
-              <a:rPr lang="en-US" smtClean="0"/>
+              <a:rPr lang="en-US"/>
               <a:t>Second level</a:t>
             </a:r>
           </a:p>
           <a:p>
             <a:pPr lvl="2"/>
             <a:r>
-              <a:rPr lang="en-US" smtClean="0"/>
+              <a:rPr lang="en-US"/>
               <a:t>Third level</a:t>
             </a:r>
           </a:p>
           <a:p>
             <a:pPr lvl="3"/>
             <a:r>
-              <a:rPr lang="en-US" smtClean="0"/>
+              <a:rPr lang="en-US"/>
               <a:t>Fourth level</a:t>
             </a:r>
           </a:p>
           <a:p>
             <a:pPr lvl="4"/>
             <a:r>
-              <a:rPr lang="en-US" smtClean="0"/>
+              <a:rPr lang="en-US"/>
               <a:t>Fifth level</a:t>
             </a:r>
-            <a:endParaRPr lang="en-US"/>
           </a:p>
         </p:txBody>
       </p:sp>
@@ -2298,7 +2305,7 @@
           <a:p>
             <a:fld id="{5BCAD085-E8A6-8845-BD4E-CB4CCA059FC4}" type="datetimeFigureOut">
               <a:rPr lang="en-US" smtClean="0"/>
-              <a:t>1/27/13</a:t>
+              <a:t>10/9/2026</a:t>
             </a:fld>
             <a:endParaRPr lang="en-US"/>
           </a:p>
@@ -2340,7 +2347,7 @@
           <a:p>
             <a:fld id="{C1FF6DA9-008F-8B48-92A6-B652298478BF}" type="slidenum">
               <a:rPr lang="en-US" smtClean="0"/>
-              <a:t>‹#›</a:t>
+              <a:t>‹N›</a:t>
             </a:fld>
             <a:endParaRPr lang="en-US"/>
           </a:p>
@@ -2397,10 +2404,9 @@
           <a:lstStyle/>
           <a:p>
             <a:r>
-              <a:rPr lang="en-US" smtClean="0"/>
+              <a:rPr lang="en-US"/>
               <a:t>Click to edit Master title style</a:t>
             </a:r>
-            <a:endParaRPr lang="en-US"/>
           </a:p>
         </p:txBody>
       </p:sp>
@@ -2426,38 +2432,37 @@
           <a:p>
             <a:pPr lvl="0"/>
             <a:r>
-              <a:rPr lang="en-US" smtClean="0"/>
+              <a:rPr lang="en-US"/>
               <a:t>Click to edit Master text styles</a:t>
             </a:r>
           </a:p>
           <a:p>
             <a:pPr lvl="1"/>
             <a:r>
-              <a:rPr lang="en-US" smtClean="0"/>
+              <a:rPr lang="en-US"/>
               <a:t>Second level</a:t>
             </a:r>
           </a:p>
           <a:p>
             <a:pPr lvl="2"/>
             <a:r>
-              <a:rPr lang="en-US" smtClean="0"/>
+              <a:rPr lang="en-US"/>
               <a:t>Third level</a:t>
             </a:r>
           </a:p>
           <a:p>
             <a:pPr lvl="3"/>
             <a:r>
-              <a:rPr lang="en-US" smtClean="0"/>
+              <a:rPr lang="en-US"/>
               <a:t>Fourth level</a:t>
             </a:r>
           </a:p>
           <a:p>
             <a:pPr lvl="4"/>
             <a:r>
-              <a:rPr lang="en-US" smtClean="0"/>
+              <a:rPr lang="en-US"/>
               <a:t>Fifth level</a:t>
             </a:r>
-            <a:endParaRPr lang="en-US"/>
           </a:p>
         </p:txBody>
       </p:sp>
@@ -2478,7 +2483,7 @@
           <a:p>
             <a:fld id="{5BCAD085-E8A6-8845-BD4E-CB4CCA059FC4}" type="datetimeFigureOut">
               <a:rPr lang="en-US" smtClean="0"/>
-              <a:t>1/27/13</a:t>
+              <a:t>10/9/2026</a:t>
             </a:fld>
             <a:endParaRPr lang="en-US"/>
           </a:p>
@@ -2520,7 +2525,7 @@
           <a:p>
             <a:fld id="{C1FF6DA9-008F-8B48-92A6-B652298478BF}" type="slidenum">
               <a:rPr lang="en-US" smtClean="0"/>
-              <a:t>‹#›</a:t>
+              <a:t>‹N›</a:t>
             </a:fld>
             <a:endParaRPr lang="en-US"/>
           </a:p>
@@ -2572,10 +2577,9 @@
           <a:lstStyle/>
           <a:p>
             <a:r>
-              <a:rPr lang="en-US" smtClean="0"/>
+              <a:rPr lang="en-US"/>
               <a:t>Click to edit Master title style</a:t>
             </a:r>
-            <a:endParaRPr lang="en-US"/>
           </a:p>
         </p:txBody>
       </p:sp>
@@ -2596,38 +2600,37 @@
           <a:p>
             <a:pPr lvl="0"/>
             <a:r>
-              <a:rPr lang="en-US" smtClean="0"/>
+              <a:rPr lang="en-US"/>
               <a:t>Click to edit Master text styles</a:t>
             </a:r>
           </a:p>
           <a:p>
             <a:pPr lvl="1"/>
             <a:r>
-              <a:rPr lang="en-US" smtClean="0"/>
+              <a:rPr lang="en-US"/>
               <a:t>Second level</a:t>
             </a:r>
           </a:p>
           <a:p>
             <a:pPr lvl="2"/>
             <a:r>
-              <a:rPr lang="en-US" smtClean="0"/>
+              <a:rPr lang="en-US"/>
               <a:t>Third level</a:t>
             </a:r>
           </a:p>
           <a:p>
             <a:pPr lvl="3"/>
             <a:r>
-              <a:rPr lang="en-US" smtClean="0"/>
+              <a:rPr lang="en-US"/>
               <a:t>Fourth level</a:t>
             </a:r>
           </a:p>
           <a:p>
             <a:pPr lvl="4"/>
             <a:r>
-              <a:rPr lang="en-US" smtClean="0"/>
+              <a:rPr lang="en-US"/>
               <a:t>Fifth level</a:t>
             </a:r>
-            <a:endParaRPr lang="en-US"/>
           </a:p>
         </p:txBody>
       </p:sp>
@@ -2648,7 +2651,7 @@
           <a:p>
             <a:fld id="{5BCAD085-E8A6-8845-BD4E-CB4CCA059FC4}" type="datetimeFigureOut">
               <a:rPr lang="en-US" smtClean="0"/>
-              <a:t>1/27/13</a:t>
+              <a:t>10/9/2026</a:t>
             </a:fld>
             <a:endParaRPr lang="en-US"/>
           </a:p>
@@ -2690,7 +2693,7 @@
           <a:p>
             <a:fld id="{C1FF6DA9-008F-8B48-92A6-B652298478BF}" type="slidenum">
               <a:rPr lang="en-US" smtClean="0"/>
-              <a:t>‹#›</a:t>
+              <a:t>‹N›</a:t>
             </a:fld>
             <a:endParaRPr lang="en-US"/>
           </a:p>
@@ -2751,10 +2754,9 @@
           </a:lstStyle>
           <a:p>
             <a:r>
-              <a:rPr lang="en-US" smtClean="0"/>
+              <a:rPr lang="en-US"/>
               <a:t>Click to edit Master title style</a:t>
             </a:r>
-            <a:endParaRPr lang="en-US"/>
           </a:p>
         </p:txBody>
       </p:sp>
@@ -2871,7 +2873,7 @@
           <a:p>
             <a:pPr lvl="0"/>
             <a:r>
-              <a:rPr lang="en-US" smtClean="0"/>
+              <a:rPr lang="en-US"/>
               <a:t>Click to edit Master text styles</a:t>
             </a:r>
           </a:p>
@@ -2894,7 +2896,7 @@
           <a:p>
             <a:fld id="{5BCAD085-E8A6-8845-BD4E-CB4CCA059FC4}" type="datetimeFigureOut">
               <a:rPr lang="en-US" smtClean="0"/>
-              <a:t>1/27/13</a:t>
+              <a:t>10/9/2026</a:t>
             </a:fld>
             <a:endParaRPr lang="en-US"/>
           </a:p>
@@ -2936,7 +2938,7 @@
           <a:p>
             <a:fld id="{C1FF6DA9-008F-8B48-92A6-B652298478BF}" type="slidenum">
               <a:rPr lang="en-US" smtClean="0"/>
-              <a:t>‹#›</a:t>
+              <a:t>‹N›</a:t>
             </a:fld>
             <a:endParaRPr lang="en-US"/>
           </a:p>
@@ -2988,10 +2990,9 @@
           <a:lstStyle/>
           <a:p>
             <a:r>
-              <a:rPr lang="en-US" smtClean="0"/>
+              <a:rPr lang="en-US"/>
               <a:t>Click to edit Master title style</a:t>
             </a:r>
-            <a:endParaRPr lang="en-US"/>
           </a:p>
         </p:txBody>
       </p:sp>
@@ -3045,38 +3046,37 @@
           <a:p>
             <a:pPr lvl="0"/>
             <a:r>
-              <a:rPr lang="en-US" smtClean="0"/>
+              <a:rPr lang="en-US"/>
               <a:t>Click to edit Master text styles</a:t>
             </a:r>
           </a:p>
           <a:p>
             <a:pPr lvl="1"/>
             <a:r>
-              <a:rPr lang="en-US" smtClean="0"/>
+              <a:rPr lang="en-US"/>
               <a:t>Second level</a:t>
             </a:r>
           </a:p>
           <a:p>
             <a:pPr lvl="2"/>
             <a:r>
-              <a:rPr lang="en-US" smtClean="0"/>
+              <a:rPr lang="en-US"/>
               <a:t>Third level</a:t>
             </a:r>
           </a:p>
           <a:p>
             <a:pPr lvl="3"/>
             <a:r>
-              <a:rPr lang="en-US" smtClean="0"/>
+              <a:rPr lang="en-US"/>
               <a:t>Fourth level</a:t>
             </a:r>
           </a:p>
           <a:p>
             <a:pPr lvl="4"/>
             <a:r>
-              <a:rPr lang="en-US" smtClean="0"/>
+              <a:rPr lang="en-US"/>
               <a:t>Fifth level</a:t>
             </a:r>
-            <a:endParaRPr lang="en-US"/>
           </a:p>
         </p:txBody>
       </p:sp>
@@ -3130,38 +3130,37 @@
           <a:p>
             <a:pPr lvl="0"/>
             <a:r>
-              <a:rPr lang="en-US" smtClean="0"/>
+              <a:rPr lang="en-US"/>
               <a:t>Click to edit Master text styles</a:t>
             </a:r>
           </a:p>
           <a:p>
             <a:pPr lvl="1"/>
             <a:r>
-              <a:rPr lang="en-US" smtClean="0"/>
+              <a:rPr lang="en-US"/>
               <a:t>Second level</a:t>
             </a:r>
           </a:p>
           <a:p>
             <a:pPr lvl="2"/>
             <a:r>
-              <a:rPr lang="en-US" smtClean="0"/>
+              <a:rPr lang="en-US"/>
               <a:t>Third level</a:t>
             </a:r>
           </a:p>
           <a:p>
             <a:pPr lvl="3"/>
             <a:r>
-              <a:rPr lang="en-US" smtClean="0"/>
+              <a:rPr lang="en-US"/>
               <a:t>Fourth level</a:t>
             </a:r>
           </a:p>
           <a:p>
             <a:pPr lvl="4"/>
             <a:r>
-              <a:rPr lang="en-US" smtClean="0"/>
+              <a:rPr lang="en-US"/>
               <a:t>Fifth level</a:t>
             </a:r>
-            <a:endParaRPr lang="en-US"/>
           </a:p>
         </p:txBody>
       </p:sp>
@@ -3182,7 +3181,7 @@
           <a:p>
             <a:fld id="{5BCAD085-E8A6-8845-BD4E-CB4CCA059FC4}" type="datetimeFigureOut">
               <a:rPr lang="en-US" smtClean="0"/>
-              <a:t>1/27/13</a:t>
+              <a:t>10/9/2026</a:t>
             </a:fld>
             <a:endParaRPr lang="en-US"/>
           </a:p>
@@ -3224,7 +3223,7 @@
           <a:p>
             <a:fld id="{C1FF6DA9-008F-8B48-92A6-B652298478BF}" type="slidenum">
               <a:rPr lang="en-US" smtClean="0"/>
-              <a:t>‹#›</a:t>
+              <a:t>‹N›</a:t>
             </a:fld>
             <a:endParaRPr lang="en-US"/>
           </a:p>
@@ -3280,10 +3279,9 @@
           </a:lstStyle>
           <a:p>
             <a:r>
-              <a:rPr lang="en-US" smtClean="0"/>
+              <a:rPr lang="en-US"/>
               <a:t>Click to edit Master title style</a:t>
             </a:r>
-            <a:endParaRPr lang="en-US"/>
           </a:p>
         </p:txBody>
       </p:sp>
@@ -3346,7 +3344,7 @@
           <a:p>
             <a:pPr lvl="0"/>
             <a:r>
-              <a:rPr lang="en-US" smtClean="0"/>
+              <a:rPr lang="en-US"/>
               <a:t>Click to edit Master text styles</a:t>
             </a:r>
           </a:p>
@@ -3402,38 +3400,37 @@
           <a:p>
             <a:pPr lvl="0"/>
             <a:r>
-              <a:rPr lang="en-US" smtClean="0"/>
+              <a:rPr lang="en-US"/>
               <a:t>Click to edit Master text styles</a:t>
             </a:r>
           </a:p>
           <a:p>
             <a:pPr lvl="1"/>
             <a:r>
-              <a:rPr lang="en-US" smtClean="0"/>
+              <a:rPr lang="en-US"/>
               <a:t>Second level</a:t>
             </a:r>
           </a:p>
           <a:p>
             <a:pPr lvl="2"/>
             <a:r>
-              <a:rPr lang="en-US" smtClean="0"/>
+              <a:rPr lang="en-US"/>
               <a:t>Third level</a:t>
             </a:r>
           </a:p>
           <a:p>
             <a:pPr lvl="3"/>
             <a:r>
-              <a:rPr lang="en-US" smtClean="0"/>
+              <a:rPr lang="en-US"/>
               <a:t>Fourth level</a:t>
             </a:r>
           </a:p>
           <a:p>
             <a:pPr lvl="4"/>
             <a:r>
-              <a:rPr lang="en-US" smtClean="0"/>
+              <a:rPr lang="en-US"/>
               <a:t>Fifth level</a:t>
             </a:r>
-            <a:endParaRPr lang="en-US"/>
           </a:p>
         </p:txBody>
       </p:sp>
@@ -3496,7 +3493,7 @@
           <a:p>
             <a:pPr lvl="0"/>
             <a:r>
-              <a:rPr lang="en-US" smtClean="0"/>
+              <a:rPr lang="en-US"/>
               <a:t>Click to edit Master text styles</a:t>
             </a:r>
           </a:p>
@@ -3552,38 +3549,37 @@
           <a:p>
             <a:pPr lvl="0"/>
             <a:r>
-              <a:rPr lang="en-US" smtClean="0"/>
+              <a:rPr lang="en-US"/>
               <a:t>Click to edit Master text styles</a:t>
             </a:r>
           </a:p>
           <a:p>
             <a:pPr lvl="1"/>
             <a:r>
-              <a:rPr lang="en-US" smtClean="0"/>
+              <a:rPr lang="en-US"/>
               <a:t>Second level</a:t>
             </a:r>
           </a:p>
           <a:p>
             <a:pPr lvl="2"/>
             <a:r>
-              <a:rPr lang="en-US" smtClean="0"/>
+              <a:rPr lang="en-US"/>
               <a:t>Third level</a:t>
             </a:r>
           </a:p>
           <a:p>
             <a:pPr lvl="3"/>
             <a:r>
-              <a:rPr lang="en-US" smtClean="0"/>
+              <a:rPr lang="en-US"/>
               <a:t>Fourth level</a:t>
             </a:r>
           </a:p>
           <a:p>
             <a:pPr lvl="4"/>
             <a:r>
-              <a:rPr lang="en-US" smtClean="0"/>
+              <a:rPr lang="en-US"/>
               <a:t>Fifth level</a:t>
             </a:r>
-            <a:endParaRPr lang="en-US"/>
           </a:p>
         </p:txBody>
       </p:sp>
@@ -3604,7 +3600,7 @@
           <a:p>
             <a:fld id="{5BCAD085-E8A6-8845-BD4E-CB4CCA059FC4}" type="datetimeFigureOut">
               <a:rPr lang="en-US" smtClean="0"/>
-              <a:t>1/27/13</a:t>
+              <a:t>10/9/2026</a:t>
             </a:fld>
             <a:endParaRPr lang="en-US"/>
           </a:p>
@@ -3646,7 +3642,7 @@
           <a:p>
             <a:fld id="{C1FF6DA9-008F-8B48-92A6-B652298478BF}" type="slidenum">
               <a:rPr lang="en-US" smtClean="0"/>
-              <a:t>‹#›</a:t>
+              <a:t>‹N›</a:t>
             </a:fld>
             <a:endParaRPr lang="en-US"/>
           </a:p>
@@ -3698,10 +3694,9 @@
           <a:lstStyle/>
           <a:p>
             <a:r>
-              <a:rPr lang="en-US" smtClean="0"/>
+              <a:rPr lang="en-US"/>
               <a:t>Click to edit Master title style</a:t>
             </a:r>
-            <a:endParaRPr lang="en-US"/>
           </a:p>
         </p:txBody>
       </p:sp>
@@ -3722,7 +3717,7 @@
           <a:p>
             <a:fld id="{5BCAD085-E8A6-8845-BD4E-CB4CCA059FC4}" type="datetimeFigureOut">
               <a:rPr lang="en-US" smtClean="0"/>
-              <a:t>1/27/13</a:t>
+              <a:t>10/9/2026</a:t>
             </a:fld>
             <a:endParaRPr lang="en-US"/>
           </a:p>
@@ -3764,7 +3759,7 @@
           <a:p>
             <a:fld id="{C1FF6DA9-008F-8B48-92A6-B652298478BF}" type="slidenum">
               <a:rPr lang="en-US" smtClean="0"/>
-              <a:t>‹#›</a:t>
+              <a:t>‹N›</a:t>
             </a:fld>
             <a:endParaRPr lang="en-US"/>
           </a:p>
@@ -3817,7 +3812,7 @@
           <a:p>
             <a:fld id="{5BCAD085-E8A6-8845-BD4E-CB4CCA059FC4}" type="datetimeFigureOut">
               <a:rPr lang="en-US" smtClean="0"/>
-              <a:t>1/27/13</a:t>
+              <a:t>10/9/2026</a:t>
             </a:fld>
             <a:endParaRPr lang="en-US"/>
           </a:p>
@@ -3859,7 +3854,7 @@
           <a:p>
             <a:fld id="{C1FF6DA9-008F-8B48-92A6-B652298478BF}" type="slidenum">
               <a:rPr lang="en-US" smtClean="0"/>
-              <a:t>‹#›</a:t>
+              <a:t>‹N›</a:t>
             </a:fld>
             <a:endParaRPr lang="en-US"/>
           </a:p>
@@ -3920,10 +3915,9 @@
           </a:lstStyle>
           <a:p>
             <a:r>
-              <a:rPr lang="en-US" smtClean="0"/>
+              <a:rPr lang="en-US"/>
               <a:t>Click to edit Master title style</a:t>
             </a:r>
-            <a:endParaRPr lang="en-US"/>
           </a:p>
         </p:txBody>
       </p:sp>
@@ -3977,38 +3971,37 @@
           <a:p>
             <a:pPr lvl="0"/>
             <a:r>
-              <a:rPr lang="en-US" smtClean="0"/>
+              <a:rPr lang="en-US"/>
               <a:t>Click to edit Master text styles</a:t>
             </a:r>
           </a:p>
           <a:p>
             <a:pPr lvl="1"/>
             <a:r>
-              <a:rPr lang="en-US" smtClean="0"/>
+              <a:rPr lang="en-US"/>
               <a:t>Second level</a:t>
             </a:r>
           </a:p>
           <a:p>
             <a:pPr lvl="2"/>
             <a:r>
-              <a:rPr lang="en-US" smtClean="0"/>
+              <a:rPr lang="en-US"/>
               <a:t>Third level</a:t>
             </a:r>
           </a:p>
           <a:p>
             <a:pPr lvl="3"/>
             <a:r>
-              <a:rPr lang="en-US" smtClean="0"/>
+              <a:rPr lang="en-US"/>
               <a:t>Fourth level</a:t>
             </a:r>
           </a:p>
           <a:p>
             <a:pPr lvl="4"/>
             <a:r>
-              <a:rPr lang="en-US" smtClean="0"/>
+              <a:rPr lang="en-US"/>
               <a:t>Fifth level</a:t>
             </a:r>
-            <a:endParaRPr lang="en-US"/>
           </a:p>
         </p:txBody>
       </p:sp>
@@ -4071,7 +4064,7 @@
           <a:p>
             <a:pPr lvl="0"/>
             <a:r>
-              <a:rPr lang="en-US" smtClean="0"/>
+              <a:rPr lang="en-US"/>
               <a:t>Click to edit Master text styles</a:t>
             </a:r>
           </a:p>
@@ -4094,7 +4087,7 @@
           <a:p>
             <a:fld id="{5BCAD085-E8A6-8845-BD4E-CB4CCA059FC4}" type="datetimeFigureOut">
               <a:rPr lang="en-US" smtClean="0"/>
-              <a:t>1/27/13</a:t>
+              <a:t>10/9/2026</a:t>
             </a:fld>
             <a:endParaRPr lang="en-US"/>
           </a:p>
@@ -4136,7 +4129,7 @@
           <a:p>
             <a:fld id="{C1FF6DA9-008F-8B48-92A6-B652298478BF}" type="slidenum">
               <a:rPr lang="en-US" smtClean="0"/>
-              <a:t>‹#›</a:t>
+              <a:t>‹N›</a:t>
             </a:fld>
             <a:endParaRPr lang="en-US"/>
           </a:p>
@@ -4197,10 +4190,9 @@
           </a:lstStyle>
           <a:p>
             <a:r>
-              <a:rPr lang="en-US" smtClean="0"/>
+              <a:rPr lang="en-US"/>
               <a:t>Click to edit Master title style</a:t>
             </a:r>
-            <a:endParaRPr lang="en-US"/>
           </a:p>
         </p:txBody>
       </p:sp>
@@ -4324,7 +4316,7 @@
           <a:p>
             <a:pPr lvl="0"/>
             <a:r>
-              <a:rPr lang="en-US" smtClean="0"/>
+              <a:rPr lang="en-US"/>
               <a:t>Click to edit Master text styles</a:t>
             </a:r>
           </a:p>
@@ -4347,7 +4339,7 @@
           <a:p>
             <a:fld id="{5BCAD085-E8A6-8845-BD4E-CB4CCA059FC4}" type="datetimeFigureOut">
               <a:rPr lang="en-US" smtClean="0"/>
-              <a:t>1/27/13</a:t>
+              <a:t>10/9/2026</a:t>
             </a:fld>
             <a:endParaRPr lang="en-US"/>
           </a:p>
@@ -4389,7 +4381,7 @@
           <a:p>
             <a:fld id="{C1FF6DA9-008F-8B48-92A6-B652298478BF}" type="slidenum">
               <a:rPr lang="en-US" smtClean="0"/>
-              <a:t>‹#›</a:t>
+              <a:t>‹N›</a:t>
             </a:fld>
             <a:endParaRPr lang="en-US"/>
           </a:p>
@@ -4456,10 +4448,9 @@
           <a:lstStyle/>
           <a:p>
             <a:r>
-              <a:rPr lang="en-US" smtClean="0"/>
+              <a:rPr lang="en-US"/>
               <a:t>Click to edit Master title style</a:t>
             </a:r>
-            <a:endParaRPr lang="en-US"/>
           </a:p>
         </p:txBody>
       </p:sp>
@@ -4490,38 +4481,37 @@
           <a:p>
             <a:pPr lvl="0"/>
             <a:r>
-              <a:rPr lang="en-US" smtClean="0"/>
+              <a:rPr lang="en-US"/>
               <a:t>Click to edit Master text styles</a:t>
             </a:r>
           </a:p>
           <a:p>
             <a:pPr lvl="1"/>
             <a:r>
-              <a:rPr lang="en-US" smtClean="0"/>
+              <a:rPr lang="en-US"/>
               <a:t>Second level</a:t>
             </a:r>
           </a:p>
           <a:p>
             <a:pPr lvl="2"/>
             <a:r>
-              <a:rPr lang="en-US" smtClean="0"/>
+              <a:rPr lang="en-US"/>
               <a:t>Third level</a:t>
             </a:r>
           </a:p>
           <a:p>
             <a:pPr lvl="3"/>
             <a:r>
-              <a:rPr lang="en-US" smtClean="0"/>
+              <a:rPr lang="en-US"/>
               <a:t>Fourth level</a:t>
             </a:r>
           </a:p>
           <a:p>
             <a:pPr lvl="4"/>
             <a:r>
-              <a:rPr lang="en-US" smtClean="0"/>
+              <a:rPr lang="en-US"/>
               <a:t>Fifth level</a:t>
             </a:r>
-            <a:endParaRPr lang="en-US"/>
           </a:p>
         </p:txBody>
       </p:sp>
@@ -4560,7 +4550,7 @@
           <a:p>
             <a:fld id="{5BCAD085-E8A6-8845-BD4E-CB4CCA059FC4}" type="datetimeFigureOut">
               <a:rPr lang="en-US" smtClean="0"/>
-              <a:t>1/27/13</a:t>
+              <a:t>10/9/2026</a:t>
             </a:fld>
             <a:endParaRPr lang="en-US"/>
           </a:p>
@@ -4638,9 +4628,58 @@
           <a:p>
             <a:fld id="{C1FF6DA9-008F-8B48-92A6-B652298478BF}" type="slidenum">
               <a:rPr lang="en-US" smtClean="0"/>
-              <a:t>‹#›</a:t>
+              <a:t>‹N›</a:t>
             </a:fld>
             <a:endParaRPr lang="en-US"/>
+          </a:p>
+        </p:txBody>
+      </p:sp>
+      <p:sp>
+        <p:nvSpPr>
+          <p:cNvPr id="8" name="CasellaDiTesto 7">
+            <a:extLst>
+              <a:ext uri="{FF2B5EF4-FFF2-40B4-BE49-F238E27FC236}">
+                <a16:creationId xmlns:a16="http://schemas.microsoft.com/office/drawing/2014/main" id="{3639E0FE-D373-965B-4232-56C5FD754320}"/>
+              </a:ext>
+            </a:extLst>
+          </p:cNvPr>
+          <p:cNvSpPr txBox="1"/>
+          <p:nvPr userDrawn="1">
+            <p:extLst>
+              <p:ext uri="{1162E1C5-73C7-4A58-AE30-91384D911F3F}">
+                <p184:classification xmlns:p184="http://schemas.microsoft.com/office/powerpoint/2018/4/main" val="hdr"/>
+              </p:ext>
+            </p:extLst>
+          </p:nvPr>
+        </p:nvSpPr>
+        <p:spPr>
+          <a:xfrm>
+            <a:off x="5844350" y="63500"/>
+            <a:ext cx="531812" cy="121920"/>
+          </a:xfrm>
+          <a:prstGeom prst="rect">
+            <a:avLst/>
+          </a:prstGeom>
+        </p:spPr>
+        <p:txBody>
+          <a:bodyPr horzOverflow="overflow" lIns="0" tIns="0" rIns="0" bIns="0">
+            <a:spAutoFit/>
+          </a:bodyPr>
+          <a:lstStyle/>
+          <a:p>
+            <a:pPr algn="l"/>
+            <a:r>
+              <a:rPr lang="it-IT" sz="800">
+                <a:solidFill>
+                  <a:srgbClr val="000000">
+                    <a:alpha val="50000"/>
+                  </a:srgbClr>
+                </a:solidFill>
+                <a:latin typeface="Arial" panose="020B0604020202020204" pitchFamily="34" charset="0"/>
+                <a:cs typeface="Arial" panose="020B0604020202020204" pitchFamily="34" charset="0"/>
+              </a:rPr>
+              <a:t>INTERNAL</a:t>
+            </a:r>
           </a:p>
         </p:txBody>
       </p:sp>
@@ -4919,7 +4958,7 @@
 </file>
 
 <file path=ppt/slides/slide1.xml><?xml version="1.0" encoding="utf-8"?>
-<p:sld xmlns:a="http://schemas.openxmlformats.org/drawingml/2006/main" xmlns:p="http://schemas.openxmlformats.org/presentationml/2006/main" xmlns:r="http://schemas.openxmlformats.org/officeDocument/2006/relationships">
+<p:sld xmlns:a="http://schemas.openxmlformats.org/drawingml/2006/main" xmlns:r="http://schemas.openxmlformats.org/officeDocument/2006/relationships" xmlns:p="http://schemas.openxmlformats.org/presentationml/2006/main">
   <p:cSld>
     <p:spTree>
       <p:nvGrpSpPr>
@@ -4927,7 +4966,14 @@
         <p:cNvGrpSpPr/>
         <p:nvPr/>
       </p:nvGrpSpPr>
-      <p:grpSpPr/>
+      <p:grpSpPr>
+        <a:xfrm>
+          <a:off x="0" y="0"/>
+          <a:ext cx="0" cy="0"/>
+          <a:chOff x="0" y="0"/>
+          <a:chExt cx="0" cy="0"/>
+        </a:xfrm>
+      </p:grpSpPr>
       <p:sp>
         <p:nvSpPr>
           <p:cNvPr id="2" name="Rectangle 1"/>
@@ -4968,6 +5014,7 @@
           <a:lstStyle/>
           <a:p>
             <a:pPr algn="ctr"/>
+            <a:endParaRPr/>
           </a:p>
         </p:txBody>
       </p:sp>
@@ -5011,6 +5058,7 @@
           <a:lstStyle/>
           <a:p>
             <a:pPr algn="ctr"/>
+            <a:endParaRPr/>
           </a:p>
         </p:txBody>
       </p:sp>
@@ -5152,7 +5200,7 @@
 </file>
 
 <file path=ppt/slides/slide10.xml><?xml version="1.0" encoding="utf-8"?>
-<p:sld xmlns:a="http://schemas.openxmlformats.org/drawingml/2006/main" xmlns:p="http://schemas.openxmlformats.org/presentationml/2006/main" xmlns:r="http://schemas.openxmlformats.org/officeDocument/2006/relationships">
+<p:sld xmlns:a="http://schemas.openxmlformats.org/drawingml/2006/main" xmlns:r="http://schemas.openxmlformats.org/officeDocument/2006/relationships" xmlns:p="http://schemas.openxmlformats.org/presentationml/2006/main">
   <p:cSld>
     <p:spTree>
       <p:nvGrpSpPr>
@@ -5160,7 +5208,14 @@
         <p:cNvGrpSpPr/>
         <p:nvPr/>
       </p:nvGrpSpPr>
-      <p:grpSpPr/>
+      <p:grpSpPr>
+        <a:xfrm>
+          <a:off x="0" y="0"/>
+          <a:ext cx="0" cy="0"/>
+          <a:chOff x="0" y="0"/>
+          <a:chExt cx="0" cy="0"/>
+        </a:xfrm>
+      </p:grpSpPr>
       <p:sp>
         <p:nvSpPr>
           <p:cNvPr id="2" name="Rectangle 1"/>
@@ -5201,6 +5256,7 @@
           <a:lstStyle/>
           <a:p>
             <a:pPr algn="ctr"/>
+            <a:endParaRPr/>
           </a:p>
         </p:txBody>
       </p:sp>
@@ -5320,6 +5376,7 @@
           <a:lstStyle/>
           <a:p>
             <a:pPr algn="ctr"/>
+            <a:endParaRPr/>
           </a:p>
         </p:txBody>
       </p:sp>
@@ -5332,7 +5389,7 @@
           <p:nvPr/>
         </p:nvPicPr>
         <p:blipFill>
-          <a:blip r:embed="rId2"/>
+          <a:blip r:embed="rId3"/>
           <a:stretch>
             <a:fillRect/>
           </a:stretch>
@@ -5603,7 +5660,7 @@
 </file>
 
 <file path=ppt/slides/slide11.xml><?xml version="1.0" encoding="utf-8"?>
-<p:sld xmlns:a="http://schemas.openxmlformats.org/drawingml/2006/main" xmlns:p="http://schemas.openxmlformats.org/presentationml/2006/main" xmlns:r="http://schemas.openxmlformats.org/officeDocument/2006/relationships">
+<p:sld xmlns:a="http://schemas.openxmlformats.org/drawingml/2006/main" xmlns:r="http://schemas.openxmlformats.org/officeDocument/2006/relationships" xmlns:p="http://schemas.openxmlformats.org/presentationml/2006/main">
   <p:cSld>
     <p:spTree>
       <p:nvGrpSpPr>
@@ -5611,7 +5668,14 @@
         <p:cNvGrpSpPr/>
         <p:nvPr/>
       </p:nvGrpSpPr>
-      <p:grpSpPr/>
+      <p:grpSpPr>
+        <a:xfrm>
+          <a:off x="0" y="0"/>
+          <a:ext cx="0" cy="0"/>
+          <a:chOff x="0" y="0"/>
+          <a:chExt cx="0" cy="0"/>
+        </a:xfrm>
+      </p:grpSpPr>
       <p:sp>
         <p:nvSpPr>
           <p:cNvPr id="2" name="Rectangle 1"/>
@@ -5652,6 +5716,7 @@
           <a:lstStyle/>
           <a:p>
             <a:pPr algn="ctr"/>
+            <a:endParaRPr/>
           </a:p>
         </p:txBody>
       </p:sp>
@@ -5771,6 +5836,7 @@
           <a:lstStyle/>
           <a:p>
             <a:pPr algn="ctr"/>
+            <a:endParaRPr/>
           </a:p>
         </p:txBody>
       </p:sp>
@@ -5783,7 +5849,7 @@
           <p:nvPr/>
         </p:nvPicPr>
         <p:blipFill>
-          <a:blip r:embed="rId2"/>
+          <a:blip r:embed="rId3"/>
           <a:stretch>
             <a:fillRect/>
           </a:stretch>
@@ -5959,7 +6025,7 @@
 </file>
 
 <file path=ppt/slides/slide12.xml><?xml version="1.0" encoding="utf-8"?>
-<p:sld xmlns:a="http://schemas.openxmlformats.org/drawingml/2006/main" xmlns:p="http://schemas.openxmlformats.org/presentationml/2006/main" xmlns:r="http://schemas.openxmlformats.org/officeDocument/2006/relationships">
+<p:sld xmlns:a="http://schemas.openxmlformats.org/drawingml/2006/main" xmlns:r="http://schemas.openxmlformats.org/officeDocument/2006/relationships" xmlns:p="http://schemas.openxmlformats.org/presentationml/2006/main">
   <p:cSld>
     <p:spTree>
       <p:nvGrpSpPr>
@@ -5967,7 +6033,14 @@
         <p:cNvGrpSpPr/>
         <p:nvPr/>
       </p:nvGrpSpPr>
-      <p:grpSpPr/>
+      <p:grpSpPr>
+        <a:xfrm>
+          <a:off x="0" y="0"/>
+          <a:ext cx="0" cy="0"/>
+          <a:chOff x="0" y="0"/>
+          <a:chExt cx="0" cy="0"/>
+        </a:xfrm>
+      </p:grpSpPr>
       <p:sp>
         <p:nvSpPr>
           <p:cNvPr id="2" name="Rectangle 1"/>
@@ -6008,6 +6081,7 @@
           <a:lstStyle/>
           <a:p>
             <a:pPr algn="ctr"/>
+            <a:endParaRPr/>
           </a:p>
         </p:txBody>
       </p:sp>
@@ -6127,6 +6201,7 @@
           <a:lstStyle/>
           <a:p>
             <a:pPr algn="ctr"/>
+            <a:endParaRPr/>
           </a:p>
         </p:txBody>
       </p:sp>
@@ -6139,7 +6214,7 @@
           <p:nvPr/>
         </p:nvPicPr>
         <p:blipFill>
-          <a:blip r:embed="rId2"/>
+          <a:blip r:embed="rId3"/>
           <a:stretch>
             <a:fillRect/>
           </a:stretch>
@@ -6194,6 +6269,7 @@
           <a:lstStyle/>
           <a:p>
             <a:pPr algn="ctr"/>
+            <a:endParaRPr/>
           </a:p>
         </p:txBody>
       </p:sp>
@@ -6237,6 +6313,7 @@
           <a:lstStyle/>
           <a:p>
             <a:pPr algn="ctr"/>
+            <a:endParaRPr/>
           </a:p>
         </p:txBody>
       </p:sp>
@@ -6333,6 +6410,7 @@
           <a:lstStyle/>
           <a:p>
             <a:pPr algn="ctr"/>
+            <a:endParaRPr/>
           </a:p>
         </p:txBody>
       </p:sp>
@@ -6376,6 +6454,7 @@
           <a:lstStyle/>
           <a:p>
             <a:pPr algn="ctr"/>
+            <a:endParaRPr/>
           </a:p>
         </p:txBody>
       </p:sp>
@@ -6472,6 +6551,7 @@
           <a:lstStyle/>
           <a:p>
             <a:pPr algn="ctr"/>
+            <a:endParaRPr/>
           </a:p>
         </p:txBody>
       </p:sp>
@@ -6515,6 +6595,7 @@
           <a:lstStyle/>
           <a:p>
             <a:pPr algn="ctr"/>
+            <a:endParaRPr/>
           </a:p>
         </p:txBody>
       </p:sp>
@@ -6546,12 +6627,28 @@
               </a:spcAft>
             </a:pPr>
             <a:r>
-              <a:rPr sz="1300" b="1">
-                <a:solidFill>
-                  <a:srgbClr val="0B1F3A"/>
-                </a:solidFill>
-              </a:rPr>
-              <a:t>La differenza (numeri in alto)</a:t>
+              <a:rPr sz="1300" b="1" dirty="0">
+                <a:solidFill>
+                  <a:srgbClr val="0B1F3A"/>
+                </a:solidFill>
+              </a:rPr>
+              <a:t>La </a:t>
+            </a:r>
+            <a:r>
+              <a:rPr sz="1300" b="1" dirty="0" err="1">
+                <a:solidFill>
+                  <a:srgbClr val="0B1F3A"/>
+                </a:solidFill>
+              </a:rPr>
+              <a:t>differenza</a:t>
+            </a:r>
+            <a:r>
+              <a:rPr sz="1300" b="1" dirty="0">
+                <a:solidFill>
+                  <a:srgbClr val="0B1F3A"/>
+                </a:solidFill>
+              </a:rPr>
+              <a:t> (numeri in alto)</a:t>
             </a:r>
           </a:p>
           <a:p>
@@ -6561,12 +6658,220 @@
               </a:spcAft>
             </a:pPr>
             <a:r>
-              <a:rPr sz="1300" b="0">
-                <a:solidFill>
-                  <a:srgbClr val="0B1F3A"/>
-                </a:solidFill>
-              </a:rPr>
-              <a:t>Se attesi e registrati si allontanano di oltre 10 guasti ogni 100 impianti, scatta l'allarme. Succede solo al Sud: 42 attesi, 24 registrati, 18 di differenza.</a:t>
+              <a:rPr sz="1300" b="0" dirty="0">
+                <a:solidFill>
+                  <a:srgbClr val="0B1F3A"/>
+                </a:solidFill>
+              </a:rPr>
+              <a:t>Se </a:t>
+            </a:r>
+            <a:r>
+              <a:rPr sz="1300" b="0" dirty="0" err="1">
+                <a:solidFill>
+                  <a:srgbClr val="0B1F3A"/>
+                </a:solidFill>
+              </a:rPr>
+              <a:t>attesi</a:t>
+            </a:r>
+            <a:r>
+              <a:rPr sz="1300" b="0" dirty="0">
+                <a:solidFill>
+                  <a:srgbClr val="0B1F3A"/>
+                </a:solidFill>
+              </a:rPr>
+              <a:t> e </a:t>
+            </a:r>
+            <a:r>
+              <a:rPr sz="1300" b="0" dirty="0" err="1">
+                <a:solidFill>
+                  <a:srgbClr val="0B1F3A"/>
+                </a:solidFill>
+              </a:rPr>
+              <a:t>registrati</a:t>
+            </a:r>
+            <a:r>
+              <a:rPr sz="1300" b="0" dirty="0">
+                <a:solidFill>
+                  <a:srgbClr val="0B1F3A"/>
+                </a:solidFill>
+              </a:rPr>
+              <a:t> </a:t>
+            </a:r>
+            <a:r>
+              <a:rPr sz="1300" b="0" dirty="0" err="1">
+                <a:solidFill>
+                  <a:srgbClr val="0B1F3A"/>
+                </a:solidFill>
+              </a:rPr>
+              <a:t>si</a:t>
+            </a:r>
+            <a:r>
+              <a:rPr sz="1300" b="0" dirty="0">
+                <a:solidFill>
+                  <a:srgbClr val="0B1F3A"/>
+                </a:solidFill>
+              </a:rPr>
+              <a:t> </a:t>
+            </a:r>
+            <a:r>
+              <a:rPr sz="1300" b="0" dirty="0" err="1">
+                <a:solidFill>
+                  <a:srgbClr val="0B1F3A"/>
+                </a:solidFill>
+              </a:rPr>
+              <a:t>allontanano</a:t>
+            </a:r>
+            <a:r>
+              <a:rPr sz="1300" b="0" dirty="0">
+                <a:solidFill>
+                  <a:srgbClr val="0B1F3A"/>
+                </a:solidFill>
+              </a:rPr>
+              <a:t> di </a:t>
+            </a:r>
+            <a:r>
+              <a:rPr sz="1300" b="0" dirty="0" err="1">
+                <a:solidFill>
+                  <a:srgbClr val="0B1F3A"/>
+                </a:solidFill>
+              </a:rPr>
+              <a:t>oltre</a:t>
+            </a:r>
+            <a:r>
+              <a:rPr sz="1300" b="0" dirty="0">
+                <a:solidFill>
+                  <a:srgbClr val="0B1F3A"/>
+                </a:solidFill>
+              </a:rPr>
+              <a:t> 10 </a:t>
+            </a:r>
+            <a:r>
+              <a:rPr sz="1300" b="0" dirty="0" err="1">
+                <a:solidFill>
+                  <a:srgbClr val="0B1F3A"/>
+                </a:solidFill>
+              </a:rPr>
+              <a:t>guasti</a:t>
+            </a:r>
+            <a:r>
+              <a:rPr sz="1300" b="0" dirty="0">
+                <a:solidFill>
+                  <a:srgbClr val="0B1F3A"/>
+                </a:solidFill>
+              </a:rPr>
+              <a:t> ogni 100 </a:t>
+            </a:r>
+            <a:r>
+              <a:rPr sz="1300" b="0" dirty="0" err="1">
+                <a:solidFill>
+                  <a:srgbClr val="0B1F3A"/>
+                </a:solidFill>
+              </a:rPr>
+              <a:t>impianti</a:t>
+            </a:r>
+            <a:r>
+              <a:rPr sz="1300" b="0" dirty="0">
+                <a:solidFill>
+                  <a:srgbClr val="0B1F3A"/>
+                </a:solidFill>
+              </a:rPr>
+              <a:t>, </a:t>
+            </a:r>
+            <a:r>
+              <a:rPr sz="1300" b="0" dirty="0" err="1">
+                <a:solidFill>
+                  <a:srgbClr val="0B1F3A"/>
+                </a:solidFill>
+              </a:rPr>
+              <a:t>scatta</a:t>
+            </a:r>
+            <a:r>
+              <a:rPr sz="1300" b="0" dirty="0">
+                <a:solidFill>
+                  <a:srgbClr val="0B1F3A"/>
+                </a:solidFill>
+              </a:rPr>
+              <a:t> </a:t>
+            </a:r>
+            <a:r>
+              <a:rPr sz="1300" b="0" dirty="0" err="1">
+                <a:solidFill>
+                  <a:srgbClr val="0B1F3A"/>
+                </a:solidFill>
+              </a:rPr>
+              <a:t>l'allarme</a:t>
+            </a:r>
+            <a:r>
+              <a:rPr sz="1300" b="0" dirty="0">
+                <a:solidFill>
+                  <a:srgbClr val="0B1F3A"/>
+                </a:solidFill>
+              </a:rPr>
+              <a:t>. </a:t>
+            </a:r>
+            <a:r>
+              <a:rPr sz="1300" b="0" dirty="0" err="1">
+                <a:solidFill>
+                  <a:srgbClr val="0B1F3A"/>
+                </a:solidFill>
+              </a:rPr>
+              <a:t>Succede</a:t>
+            </a:r>
+            <a:r>
+              <a:rPr sz="1300" b="0" dirty="0">
+                <a:solidFill>
+                  <a:srgbClr val="0B1F3A"/>
+                </a:solidFill>
+              </a:rPr>
+              <a:t> solo al Sud: 42 </a:t>
+            </a:r>
+            <a:r>
+              <a:rPr sz="1300" b="0" dirty="0" err="1">
+                <a:solidFill>
+                  <a:srgbClr val="0B1F3A"/>
+                </a:solidFill>
+              </a:rPr>
+              <a:t>attesi</a:t>
+            </a:r>
+            <a:r>
+              <a:rPr sz="1300" b="0" dirty="0">
+                <a:solidFill>
+                  <a:srgbClr val="0B1F3A"/>
+                </a:solidFill>
+              </a:rPr>
+              <a:t>, 24 </a:t>
+            </a:r>
+            <a:r>
+              <a:rPr sz="1300" b="0" dirty="0" err="1">
+                <a:solidFill>
+                  <a:srgbClr val="0B1F3A"/>
+                </a:solidFill>
+              </a:rPr>
+              <a:t>registrati</a:t>
+            </a:r>
+            <a:r>
+              <a:rPr sz="1300" b="0" dirty="0">
+                <a:solidFill>
+                  <a:srgbClr val="0B1F3A"/>
+                </a:solidFill>
+              </a:rPr>
+              <a:t>, 18 di </a:t>
+            </a:r>
+            <a:r>
+              <a:rPr sz="1300" b="0" dirty="0" err="1">
+                <a:solidFill>
+                  <a:srgbClr val="0B1F3A"/>
+                </a:solidFill>
+              </a:rPr>
+              <a:t>differenza</a:t>
+            </a:r>
+            <a:r>
+              <a:rPr sz="1300" b="0" dirty="0">
+                <a:solidFill>
+                  <a:srgbClr val="0B1F3A"/>
+                </a:solidFill>
+              </a:rPr>
+              <a:t>.</a:t>
             </a:r>
           </a:p>
         </p:txBody>
@@ -6611,6 +6916,7 @@
           <a:lstStyle/>
           <a:p>
             <a:pPr algn="ctr"/>
+            <a:endParaRPr/>
           </a:p>
         </p:txBody>
       </p:sp>
@@ -6654,6 +6960,7 @@
           <a:lstStyle/>
           <a:p>
             <a:pPr algn="ctr"/>
+            <a:endParaRPr/>
           </a:p>
         </p:txBody>
       </p:sp>
@@ -6719,7 +7026,7 @@
 </file>
 
 <file path=ppt/slides/slide13.xml><?xml version="1.0" encoding="utf-8"?>
-<p:sld xmlns:a="http://schemas.openxmlformats.org/drawingml/2006/main" xmlns:p="http://schemas.openxmlformats.org/presentationml/2006/main" xmlns:r="http://schemas.openxmlformats.org/officeDocument/2006/relationships">
+<p:sld xmlns:a="http://schemas.openxmlformats.org/drawingml/2006/main" xmlns:r="http://schemas.openxmlformats.org/officeDocument/2006/relationships" xmlns:p="http://schemas.openxmlformats.org/presentationml/2006/main">
   <p:cSld>
     <p:spTree>
       <p:nvGrpSpPr>
@@ -6727,7 +7034,14 @@
         <p:cNvGrpSpPr/>
         <p:nvPr/>
       </p:nvGrpSpPr>
-      <p:grpSpPr/>
+      <p:grpSpPr>
+        <a:xfrm>
+          <a:off x="0" y="0"/>
+          <a:ext cx="0" cy="0"/>
+          <a:chOff x="0" y="0"/>
+          <a:chExt cx="0" cy="0"/>
+        </a:xfrm>
+      </p:grpSpPr>
       <p:sp>
         <p:nvSpPr>
           <p:cNvPr id="2" name="Rectangle 1"/>
@@ -6768,6 +7082,7 @@
           <a:lstStyle/>
           <a:p>
             <a:pPr algn="ctr"/>
+            <a:endParaRPr/>
           </a:p>
         </p:txBody>
       </p:sp>
@@ -6887,6 +7202,7 @@
           <a:lstStyle/>
           <a:p>
             <a:pPr algn="ctr"/>
+            <a:endParaRPr/>
           </a:p>
         </p:txBody>
       </p:sp>
@@ -6930,6 +7246,7 @@
           <a:lstStyle/>
           <a:p>
             <a:pPr algn="ctr"/>
+            <a:endParaRPr/>
           </a:p>
         </p:txBody>
       </p:sp>
@@ -6973,6 +7290,7 @@
           <a:lstStyle/>
           <a:p>
             <a:pPr algn="ctr"/>
+            <a:endParaRPr/>
           </a:p>
         </p:txBody>
       </p:sp>
@@ -7123,6 +7441,7 @@
           <a:lstStyle/>
           <a:p>
             <a:pPr algn="ctr"/>
+            <a:endParaRPr/>
           </a:p>
         </p:txBody>
       </p:sp>
@@ -7166,6 +7485,7 @@
           <a:lstStyle/>
           <a:p>
             <a:pPr algn="ctr"/>
+            <a:endParaRPr/>
           </a:p>
         </p:txBody>
       </p:sp>
@@ -7316,6 +7636,7 @@
           <a:lstStyle/>
           <a:p>
             <a:pPr algn="ctr"/>
+            <a:endParaRPr/>
           </a:p>
         </p:txBody>
       </p:sp>
@@ -7359,6 +7680,7 @@
           <a:lstStyle/>
           <a:p>
             <a:pPr algn="ctr"/>
+            <a:endParaRPr/>
           </a:p>
         </p:txBody>
       </p:sp>
@@ -7509,6 +7831,7 @@
           <a:lstStyle/>
           <a:p>
             <a:pPr algn="ctr"/>
+            <a:endParaRPr/>
           </a:p>
         </p:txBody>
       </p:sp>
@@ -7552,6 +7875,7 @@
           <a:lstStyle/>
           <a:p>
             <a:pPr algn="ctr"/>
+            <a:endParaRPr/>
           </a:p>
         </p:txBody>
       </p:sp>
@@ -7671,7 +7995,7 @@
 </file>
 
 <file path=ppt/slides/slide14.xml><?xml version="1.0" encoding="utf-8"?>
-<p:sld xmlns:a="http://schemas.openxmlformats.org/drawingml/2006/main" xmlns:p="http://schemas.openxmlformats.org/presentationml/2006/main" xmlns:r="http://schemas.openxmlformats.org/officeDocument/2006/relationships">
+<p:sld xmlns:a="http://schemas.openxmlformats.org/drawingml/2006/main" xmlns:r="http://schemas.openxmlformats.org/officeDocument/2006/relationships" xmlns:p="http://schemas.openxmlformats.org/presentationml/2006/main">
   <p:cSld>
     <p:spTree>
       <p:nvGrpSpPr>
@@ -7679,7 +8003,14 @@
         <p:cNvGrpSpPr/>
         <p:nvPr/>
       </p:nvGrpSpPr>
-      <p:grpSpPr/>
+      <p:grpSpPr>
+        <a:xfrm>
+          <a:off x="0" y="0"/>
+          <a:ext cx="0" cy="0"/>
+          <a:chOff x="0" y="0"/>
+          <a:chExt cx="0" cy="0"/>
+        </a:xfrm>
+      </p:grpSpPr>
       <p:sp>
         <p:nvSpPr>
           <p:cNvPr id="2" name="Rectangle 1"/>
@@ -7720,6 +8051,7 @@
           <a:lstStyle/>
           <a:p>
             <a:pPr algn="ctr"/>
+            <a:endParaRPr/>
           </a:p>
         </p:txBody>
       </p:sp>
@@ -7839,6 +8171,7 @@
           <a:lstStyle/>
           <a:p>
             <a:pPr algn="ctr"/>
+            <a:endParaRPr/>
           </a:p>
         </p:txBody>
       </p:sp>
@@ -7851,7 +8184,7 @@
           <p:nvPr/>
         </p:nvPicPr>
         <p:blipFill>
-          <a:blip r:embed="rId2"/>
+          <a:blip r:embed="rId3"/>
           <a:stretch>
             <a:fillRect/>
           </a:stretch>
@@ -7894,7 +8227,7 @@
               </a:spcAft>
             </a:pPr>
             <a:r>
-              <a:rPr sz="1500" b="1">
+              <a:rPr sz="1500" b="1" dirty="0">
                 <a:solidFill>
                   <a:srgbClr val="0F6CBD"/>
                 </a:solidFill>
@@ -7902,39 +8235,231 @@
               <a:t>•  </a:t>
             </a:r>
             <a:r>
-              <a:rPr sz="1500" b="0">
-                <a:solidFill>
-                  <a:srgbClr val="0B1F3A"/>
-                </a:solidFill>
-              </a:rPr>
-              <a:t>Contiamo i guasti veri di ogni zona e quanti il sistema ne aveva segnalati: </a:t>
-            </a:r>
-            <a:r>
-              <a:rPr sz="1500" b="1">
-                <a:solidFill>
-                  <a:srgbClr val="0B1F3A"/>
-                </a:solidFill>
-              </a:rPr>
-              <a:t>Nord 20 su 28</a:t>
-            </a:r>
-            <a:r>
-              <a:rPr sz="1500" b="0">
-                <a:solidFill>
-                  <a:srgbClr val="0B1F3A"/>
-                </a:solidFill>
-              </a:rPr>
-              <a:t>, Centro 18 su 24, Sud 30 su 34, </a:t>
-            </a:r>
-            <a:r>
-              <a:rPr sz="1500" b="1">
-                <a:solidFill>
-                  <a:srgbClr val="0B1F3A"/>
-                </a:solidFill>
-              </a:rPr>
-              <a:t>Isole 40 su 43</a:t>
-            </a:r>
-            <a:r>
-              <a:rPr sz="1500" b="0">
+              <a:rPr sz="1500" b="0" dirty="0" err="1">
+                <a:solidFill>
+                  <a:srgbClr val="0B1F3A"/>
+                </a:solidFill>
+              </a:rPr>
+              <a:t>Contiamo</a:t>
+            </a:r>
+            <a:r>
+              <a:rPr sz="1500" b="0" dirty="0">
+                <a:solidFill>
+                  <a:srgbClr val="0B1F3A"/>
+                </a:solidFill>
+              </a:rPr>
+              <a:t> </a:t>
+            </a:r>
+            <a:r>
+              <a:rPr sz="1500" b="0" dirty="0" err="1">
+                <a:solidFill>
+                  <a:srgbClr val="0B1F3A"/>
+                </a:solidFill>
+              </a:rPr>
+              <a:t>i</a:t>
+            </a:r>
+            <a:r>
+              <a:rPr sz="1500" b="0" dirty="0">
+                <a:solidFill>
+                  <a:srgbClr val="0B1F3A"/>
+                </a:solidFill>
+              </a:rPr>
+              <a:t> </a:t>
+            </a:r>
+            <a:r>
+              <a:rPr sz="1500" b="0" dirty="0" err="1">
+                <a:solidFill>
+                  <a:srgbClr val="0B1F3A"/>
+                </a:solidFill>
+              </a:rPr>
+              <a:t>guasti</a:t>
+            </a:r>
+            <a:r>
+              <a:rPr sz="1500" b="0" dirty="0">
+                <a:solidFill>
+                  <a:srgbClr val="0B1F3A"/>
+                </a:solidFill>
+              </a:rPr>
+              <a:t> </a:t>
+            </a:r>
+            <a:r>
+              <a:rPr sz="1500" b="0" dirty="0" err="1">
+                <a:solidFill>
+                  <a:srgbClr val="0B1F3A"/>
+                </a:solidFill>
+              </a:rPr>
+              <a:t>veri</a:t>
+            </a:r>
+            <a:r>
+              <a:rPr sz="1500" b="0" dirty="0">
+                <a:solidFill>
+                  <a:srgbClr val="0B1F3A"/>
+                </a:solidFill>
+              </a:rPr>
+              <a:t> di ogni zona e </a:t>
+            </a:r>
+            <a:r>
+              <a:rPr sz="1500" b="0" dirty="0" err="1">
+                <a:solidFill>
+                  <a:srgbClr val="0B1F3A"/>
+                </a:solidFill>
+              </a:rPr>
+              <a:t>quanti</a:t>
+            </a:r>
+            <a:r>
+              <a:rPr sz="1500" b="0" dirty="0">
+                <a:solidFill>
+                  <a:srgbClr val="0B1F3A"/>
+                </a:solidFill>
+              </a:rPr>
+              <a:t> il </a:t>
+            </a:r>
+            <a:r>
+              <a:rPr sz="1500" b="0" dirty="0" err="1">
+                <a:solidFill>
+                  <a:srgbClr val="0B1F3A"/>
+                </a:solidFill>
+              </a:rPr>
+              <a:t>sistema</a:t>
+            </a:r>
+            <a:r>
+              <a:rPr sz="1500" b="0" dirty="0">
+                <a:solidFill>
+                  <a:srgbClr val="0B1F3A"/>
+                </a:solidFill>
+              </a:rPr>
+              <a:t> ne </a:t>
+            </a:r>
+            <a:r>
+              <a:rPr sz="1500" b="0" dirty="0" err="1">
+                <a:solidFill>
+                  <a:srgbClr val="0B1F3A"/>
+                </a:solidFill>
+              </a:rPr>
+              <a:t>aveva</a:t>
+            </a:r>
+            <a:r>
+              <a:rPr sz="1500" b="0" dirty="0">
+                <a:solidFill>
+                  <a:srgbClr val="0B1F3A"/>
+                </a:solidFill>
+              </a:rPr>
+              <a:t> </a:t>
+            </a:r>
+            <a:r>
+              <a:rPr sz="1500" b="0" dirty="0" err="1">
+                <a:solidFill>
+                  <a:srgbClr val="0B1F3A"/>
+                </a:solidFill>
+              </a:rPr>
+              <a:t>segnalati</a:t>
+            </a:r>
+            <a:r>
+              <a:rPr sz="1500" b="0" dirty="0">
+                <a:solidFill>
+                  <a:srgbClr val="0B1F3A"/>
+                </a:solidFill>
+              </a:rPr>
+              <a:t>: </a:t>
+            </a:r>
+            <a:r>
+              <a:rPr sz="1500" b="1" dirty="0">
+                <a:solidFill>
+                  <a:srgbClr val="0B1F3A"/>
+                </a:solidFill>
+              </a:rPr>
+              <a:t>Nord 20 </a:t>
+            </a:r>
+            <a:r>
+              <a:rPr sz="1500" b="1" dirty="0" err="1">
+                <a:solidFill>
+                  <a:srgbClr val="0B1F3A"/>
+                </a:solidFill>
+              </a:rPr>
+              <a:t>su</a:t>
+            </a:r>
+            <a:r>
+              <a:rPr sz="1500" b="1" dirty="0">
+                <a:solidFill>
+                  <a:srgbClr val="0B1F3A"/>
+                </a:solidFill>
+              </a:rPr>
+              <a:t> 28</a:t>
+            </a:r>
+            <a:r>
+              <a:rPr sz="1500" b="0" dirty="0">
+                <a:solidFill>
+                  <a:srgbClr val="0B1F3A"/>
+                </a:solidFill>
+              </a:rPr>
+              <a:t>, Centro 18 </a:t>
+            </a:r>
+            <a:r>
+              <a:rPr sz="1500" b="0" dirty="0" err="1">
+                <a:solidFill>
+                  <a:srgbClr val="0B1F3A"/>
+                </a:solidFill>
+              </a:rPr>
+              <a:t>su</a:t>
+            </a:r>
+            <a:r>
+              <a:rPr sz="1500" b="0" dirty="0">
+                <a:solidFill>
+                  <a:srgbClr val="0B1F3A"/>
+                </a:solidFill>
+              </a:rPr>
+              <a:t> 24, Sud 30 </a:t>
+            </a:r>
+            <a:r>
+              <a:rPr sz="1500" b="0" dirty="0" err="1">
+                <a:solidFill>
+                  <a:srgbClr val="0B1F3A"/>
+                </a:solidFill>
+              </a:rPr>
+              <a:t>su</a:t>
+            </a:r>
+            <a:r>
+              <a:rPr sz="1500" b="0" dirty="0">
+                <a:solidFill>
+                  <a:srgbClr val="0B1F3A"/>
+                </a:solidFill>
+              </a:rPr>
+              <a:t> 34, </a:t>
+            </a:r>
+            <a:r>
+              <a:rPr sz="1500" b="1" dirty="0" err="1">
+                <a:solidFill>
+                  <a:srgbClr val="0B1F3A"/>
+                </a:solidFill>
+              </a:rPr>
+              <a:t>Isole</a:t>
+            </a:r>
+            <a:r>
+              <a:rPr sz="1500" b="1" dirty="0">
+                <a:solidFill>
+                  <a:srgbClr val="0B1F3A"/>
+                </a:solidFill>
+              </a:rPr>
+              <a:t> 40 </a:t>
+            </a:r>
+            <a:r>
+              <a:rPr sz="1500" b="1" dirty="0" err="1">
+                <a:solidFill>
+                  <a:srgbClr val="0B1F3A"/>
+                </a:solidFill>
+              </a:rPr>
+              <a:t>su</a:t>
+            </a:r>
+            <a:r>
+              <a:rPr sz="1500" b="1" dirty="0">
+                <a:solidFill>
+                  <a:srgbClr val="0B1F3A"/>
+                </a:solidFill>
+              </a:rPr>
+              <a:t> 43</a:t>
+            </a:r>
+            <a:r>
+              <a:rPr sz="1500" b="0" dirty="0">
                 <a:solidFill>
                   <a:srgbClr val="0B1F3A"/>
                 </a:solidFill>
@@ -7949,7 +8474,7 @@
               </a:spcAft>
             </a:pPr>
             <a:r>
-              <a:rPr sz="1500" b="1">
+              <a:rPr sz="1500" b="1" dirty="0">
                 <a:solidFill>
                   <a:srgbClr val="0F6CBD"/>
                 </a:solidFill>
@@ -7957,28 +8482,244 @@
               <a:t>•  </a:t>
             </a:r>
             <a:r>
-              <a:rPr sz="1500" b="0">
-                <a:solidFill>
-                  <a:srgbClr val="0B1F3A"/>
-                </a:solidFill>
-              </a:rPr>
-              <a:t>Sembra che il Nord sia servito molto peggio. Ma sono </a:t>
-            </a:r>
-            <a:r>
-              <a:rPr sz="1500" b="1">
-                <a:solidFill>
-                  <a:srgbClr val="0B1F3A"/>
-                </a:solidFill>
-              </a:rPr>
-              <a:t>pochi casi</a:t>
-            </a:r>
-            <a:r>
-              <a:rPr sz="1500" b="0">
-                <a:solidFill>
-                  <a:srgbClr val="0B1F3A"/>
-                </a:solidFill>
-              </a:rPr>
-              <a:t>: bastano 3-4 guasti in più o in meno per cambiare il voto di un punto intero.</a:t>
+              <a:rPr sz="1500" b="0" dirty="0" err="1">
+                <a:solidFill>
+                  <a:srgbClr val="0B1F3A"/>
+                </a:solidFill>
+              </a:rPr>
+              <a:t>Sembra</a:t>
+            </a:r>
+            <a:r>
+              <a:rPr sz="1500" b="0" dirty="0">
+                <a:solidFill>
+                  <a:srgbClr val="0B1F3A"/>
+                </a:solidFill>
+              </a:rPr>
+              <a:t> </a:t>
+            </a:r>
+            <a:r>
+              <a:rPr sz="1500" b="0" dirty="0" err="1">
+                <a:solidFill>
+                  <a:srgbClr val="0B1F3A"/>
+                </a:solidFill>
+              </a:rPr>
+              <a:t>che</a:t>
+            </a:r>
+            <a:r>
+              <a:rPr sz="1500" b="0" dirty="0">
+                <a:solidFill>
+                  <a:srgbClr val="0B1F3A"/>
+                </a:solidFill>
+              </a:rPr>
+              <a:t> il Nord </a:t>
+            </a:r>
+            <a:r>
+              <a:rPr sz="1500" b="0" dirty="0" err="1">
+                <a:solidFill>
+                  <a:srgbClr val="0B1F3A"/>
+                </a:solidFill>
+              </a:rPr>
+              <a:t>sia</a:t>
+            </a:r>
+            <a:r>
+              <a:rPr sz="1500" b="0" dirty="0">
+                <a:solidFill>
+                  <a:srgbClr val="0B1F3A"/>
+                </a:solidFill>
+              </a:rPr>
+              <a:t> </a:t>
+            </a:r>
+            <a:r>
+              <a:rPr sz="1500" b="0" dirty="0" err="1">
+                <a:solidFill>
+                  <a:srgbClr val="0B1F3A"/>
+                </a:solidFill>
+              </a:rPr>
+              <a:t>servito</a:t>
+            </a:r>
+            <a:r>
+              <a:rPr sz="1500" b="0" dirty="0">
+                <a:solidFill>
+                  <a:srgbClr val="0B1F3A"/>
+                </a:solidFill>
+              </a:rPr>
+              <a:t> molto </a:t>
+            </a:r>
+            <a:r>
+              <a:rPr sz="1500" b="0" dirty="0" err="1">
+                <a:solidFill>
+                  <a:srgbClr val="0B1F3A"/>
+                </a:solidFill>
+              </a:rPr>
+              <a:t>peggio</a:t>
+            </a:r>
+            <a:r>
+              <a:rPr sz="1500" b="0" dirty="0">
+                <a:solidFill>
+                  <a:srgbClr val="0B1F3A"/>
+                </a:solidFill>
+              </a:rPr>
+              <a:t>. Ma </a:t>
+            </a:r>
+            <a:r>
+              <a:rPr sz="1500" b="0" dirty="0" err="1">
+                <a:solidFill>
+                  <a:srgbClr val="0B1F3A"/>
+                </a:solidFill>
+              </a:rPr>
+              <a:t>sono</a:t>
+            </a:r>
+            <a:r>
+              <a:rPr sz="1500" b="0" dirty="0">
+                <a:solidFill>
+                  <a:srgbClr val="0B1F3A"/>
+                </a:solidFill>
+              </a:rPr>
+              <a:t> </a:t>
+            </a:r>
+            <a:r>
+              <a:rPr sz="1500" b="1" dirty="0" err="1">
+                <a:solidFill>
+                  <a:srgbClr val="0B1F3A"/>
+                </a:solidFill>
+              </a:rPr>
+              <a:t>pochi</a:t>
+            </a:r>
+            <a:r>
+              <a:rPr sz="1500" b="1" dirty="0">
+                <a:solidFill>
+                  <a:srgbClr val="0B1F3A"/>
+                </a:solidFill>
+              </a:rPr>
+              <a:t> </a:t>
+            </a:r>
+            <a:r>
+              <a:rPr sz="1500" b="1" dirty="0" err="1">
+                <a:solidFill>
+                  <a:srgbClr val="0B1F3A"/>
+                </a:solidFill>
+              </a:rPr>
+              <a:t>casi</a:t>
+            </a:r>
+            <a:r>
+              <a:rPr sz="1500" b="0" dirty="0">
+                <a:solidFill>
+                  <a:srgbClr val="0B1F3A"/>
+                </a:solidFill>
+              </a:rPr>
+              <a:t>: </a:t>
+            </a:r>
+            <a:r>
+              <a:rPr sz="1500" b="0" dirty="0" err="1">
+                <a:solidFill>
+                  <a:srgbClr val="0B1F3A"/>
+                </a:solidFill>
+              </a:rPr>
+              <a:t>bastano</a:t>
+            </a:r>
+            <a:r>
+              <a:rPr sz="1500" b="0" dirty="0">
+                <a:solidFill>
+                  <a:srgbClr val="0B1F3A"/>
+                </a:solidFill>
+              </a:rPr>
+              <a:t> 3-4 </a:t>
+            </a:r>
+            <a:r>
+              <a:rPr sz="1500" b="0" dirty="0" err="1">
+                <a:solidFill>
+                  <a:srgbClr val="0B1F3A"/>
+                </a:solidFill>
+              </a:rPr>
+              <a:t>guasti</a:t>
+            </a:r>
+            <a:r>
+              <a:rPr sz="1500" b="0" dirty="0">
+                <a:solidFill>
+                  <a:srgbClr val="0B1F3A"/>
+                </a:solidFill>
+              </a:rPr>
+              <a:t> in </a:t>
+            </a:r>
+            <a:r>
+              <a:rPr sz="1500" b="0" dirty="0" err="1">
+                <a:solidFill>
+                  <a:srgbClr val="0B1F3A"/>
+                </a:solidFill>
+              </a:rPr>
+              <a:t>più</a:t>
+            </a:r>
+            <a:r>
+              <a:rPr sz="1500" b="0" dirty="0">
+                <a:solidFill>
+                  <a:srgbClr val="0B1F3A"/>
+                </a:solidFill>
+              </a:rPr>
+              <a:t> o in </a:t>
+            </a:r>
+            <a:r>
+              <a:rPr sz="1500" b="0" dirty="0" err="1">
+                <a:solidFill>
+                  <a:srgbClr val="0B1F3A"/>
+                </a:solidFill>
+              </a:rPr>
+              <a:t>meno</a:t>
+            </a:r>
+            <a:r>
+              <a:rPr sz="1500" b="0" dirty="0">
+                <a:solidFill>
+                  <a:srgbClr val="0B1F3A"/>
+                </a:solidFill>
+              </a:rPr>
+              <a:t> per </a:t>
+            </a:r>
+            <a:r>
+              <a:rPr sz="1500" b="0" dirty="0" err="1">
+                <a:solidFill>
+                  <a:srgbClr val="0B1F3A"/>
+                </a:solidFill>
+              </a:rPr>
+              <a:t>cambiare</a:t>
+            </a:r>
+            <a:r>
+              <a:rPr sz="1500" b="0" dirty="0">
+                <a:solidFill>
+                  <a:srgbClr val="0B1F3A"/>
+                </a:solidFill>
+              </a:rPr>
+              <a:t> il </a:t>
+            </a:r>
+            <a:r>
+              <a:rPr sz="1500" b="0" dirty="0" err="1">
+                <a:solidFill>
+                  <a:srgbClr val="0B1F3A"/>
+                </a:solidFill>
+              </a:rPr>
+              <a:t>voto</a:t>
+            </a:r>
+            <a:r>
+              <a:rPr sz="1500" b="0" dirty="0">
+                <a:solidFill>
+                  <a:srgbClr val="0B1F3A"/>
+                </a:solidFill>
+              </a:rPr>
+              <a:t> di un punto </a:t>
+            </a:r>
+            <a:r>
+              <a:rPr sz="1500" b="0" dirty="0" err="1">
+                <a:solidFill>
+                  <a:srgbClr val="0B1F3A"/>
+                </a:solidFill>
+              </a:rPr>
+              <a:t>intero</a:t>
+            </a:r>
+            <a:r>
+              <a:rPr sz="1500" b="0" dirty="0">
+                <a:solidFill>
+                  <a:srgbClr val="0B1F3A"/>
+                </a:solidFill>
+              </a:rPr>
+              <a:t>.</a:t>
             </a:r>
           </a:p>
           <a:p>
@@ -7988,7 +8729,7 @@
               </a:spcAft>
             </a:pPr>
             <a:r>
-              <a:rPr sz="1500" b="1">
+              <a:rPr sz="1500" b="1" dirty="0">
                 <a:solidFill>
                   <a:srgbClr val="0F6CBD"/>
                 </a:solidFill>
@@ -7996,12 +8737,108 @@
               <a:t>•  </a:t>
             </a:r>
             <a:r>
-              <a:rPr sz="1500" b="0">
-                <a:solidFill>
-                  <a:srgbClr val="0B1F3A"/>
-                </a:solidFill>
-              </a:rPr>
-              <a:t>È come lanciare una moneta 10 volte e ottenere 7 teste: non basta per dire che è truccata.</a:t>
+              <a:rPr sz="1500" b="0" dirty="0">
+                <a:solidFill>
+                  <a:srgbClr val="0B1F3A"/>
+                </a:solidFill>
+              </a:rPr>
+              <a:t>È come </a:t>
+            </a:r>
+            <a:r>
+              <a:rPr sz="1500" b="0" dirty="0" err="1">
+                <a:solidFill>
+                  <a:srgbClr val="0B1F3A"/>
+                </a:solidFill>
+              </a:rPr>
+              <a:t>lanciare</a:t>
+            </a:r>
+            <a:r>
+              <a:rPr sz="1500" b="0" dirty="0">
+                <a:solidFill>
+                  <a:srgbClr val="0B1F3A"/>
+                </a:solidFill>
+              </a:rPr>
+              <a:t> </a:t>
+            </a:r>
+            <a:r>
+              <a:rPr sz="1500" b="0" dirty="0" err="1">
+                <a:solidFill>
+                  <a:srgbClr val="0B1F3A"/>
+                </a:solidFill>
+              </a:rPr>
+              <a:t>una</a:t>
+            </a:r>
+            <a:r>
+              <a:rPr sz="1500" b="0" dirty="0">
+                <a:solidFill>
+                  <a:srgbClr val="0B1F3A"/>
+                </a:solidFill>
+              </a:rPr>
+              <a:t> </a:t>
+            </a:r>
+            <a:r>
+              <a:rPr sz="1500" b="0" dirty="0" err="1">
+                <a:solidFill>
+                  <a:srgbClr val="0B1F3A"/>
+                </a:solidFill>
+              </a:rPr>
+              <a:t>moneta</a:t>
+            </a:r>
+            <a:r>
+              <a:rPr sz="1500" b="0" dirty="0">
+                <a:solidFill>
+                  <a:srgbClr val="0B1F3A"/>
+                </a:solidFill>
+              </a:rPr>
+              <a:t> 10 volte e </a:t>
+            </a:r>
+            <a:r>
+              <a:rPr sz="1500" b="0" dirty="0" err="1">
+                <a:solidFill>
+                  <a:srgbClr val="0B1F3A"/>
+                </a:solidFill>
+              </a:rPr>
+              <a:t>ottenere</a:t>
+            </a:r>
+            <a:r>
+              <a:rPr sz="1500" b="0" dirty="0">
+                <a:solidFill>
+                  <a:srgbClr val="0B1F3A"/>
+                </a:solidFill>
+              </a:rPr>
+              <a:t> 7 teste: non basta per dire </a:t>
+            </a:r>
+            <a:r>
+              <a:rPr sz="1500" b="0" dirty="0" err="1">
+                <a:solidFill>
+                  <a:srgbClr val="0B1F3A"/>
+                </a:solidFill>
+              </a:rPr>
+              <a:t>che</a:t>
+            </a:r>
+            <a:r>
+              <a:rPr sz="1500" b="0" dirty="0">
+                <a:solidFill>
+                  <a:srgbClr val="0B1F3A"/>
+                </a:solidFill>
+              </a:rPr>
+              <a:t> è </a:t>
+            </a:r>
+            <a:r>
+              <a:rPr sz="1500" b="0" dirty="0" err="1">
+                <a:solidFill>
+                  <a:srgbClr val="0B1F3A"/>
+                </a:solidFill>
+              </a:rPr>
+              <a:t>truccata</a:t>
+            </a:r>
+            <a:r>
+              <a:rPr sz="1500" b="0" dirty="0">
+                <a:solidFill>
+                  <a:srgbClr val="0B1F3A"/>
+                </a:solidFill>
+              </a:rPr>
+              <a:t>.</a:t>
             </a:r>
           </a:p>
           <a:p>
@@ -8011,7 +8848,7 @@
               </a:spcAft>
             </a:pPr>
             <a:r>
-              <a:rPr sz="1500" b="1">
+              <a:rPr sz="1500" b="1" dirty="0">
                 <a:solidFill>
                   <a:srgbClr val="0F6CBD"/>
                 </a:solidFill>
@@ -8019,28 +8856,180 @@
               <a:t>•  </a:t>
             </a:r>
             <a:r>
-              <a:rPr sz="1500" b="0">
-                <a:solidFill>
-                  <a:srgbClr val="0B1F3A"/>
-                </a:solidFill>
-              </a:rPr>
-              <a:t>Le barre mostrano di quanto il voto potrebbe cambiare. </a:t>
-            </a:r>
-            <a:r>
-              <a:rPr sz="1500" b="1">
-                <a:solidFill>
-                  <a:srgbClr val="0B1F3A"/>
-                </a:solidFill>
-              </a:rPr>
-              <a:t>Si sovrappongono</a:t>
-            </a:r>
-            <a:r>
-              <a:rPr sz="1500" b="0">
-                <a:solidFill>
-                  <a:srgbClr val="0B1F3A"/>
-                </a:solidFill>
-              </a:rPr>
-              <a:t>: è un campanello d'allarme, non una prova.</a:t>
+              <a:rPr sz="1500" b="0" dirty="0">
+                <a:solidFill>
+                  <a:srgbClr val="0B1F3A"/>
+                </a:solidFill>
+              </a:rPr>
+              <a:t>Le barre </a:t>
+            </a:r>
+            <a:r>
+              <a:rPr sz="1500" b="0" dirty="0" err="1">
+                <a:solidFill>
+                  <a:srgbClr val="0B1F3A"/>
+                </a:solidFill>
+              </a:rPr>
+              <a:t>mostrano</a:t>
+            </a:r>
+            <a:r>
+              <a:rPr sz="1500" b="0" dirty="0">
+                <a:solidFill>
+                  <a:srgbClr val="0B1F3A"/>
+                </a:solidFill>
+              </a:rPr>
+              <a:t> di </a:t>
+            </a:r>
+            <a:r>
+              <a:rPr sz="1500" b="0" dirty="0" err="1">
+                <a:solidFill>
+                  <a:srgbClr val="0B1F3A"/>
+                </a:solidFill>
+              </a:rPr>
+              <a:t>quanto</a:t>
+            </a:r>
+            <a:r>
+              <a:rPr sz="1500" b="0" dirty="0">
+                <a:solidFill>
+                  <a:srgbClr val="0B1F3A"/>
+                </a:solidFill>
+              </a:rPr>
+              <a:t> il </a:t>
+            </a:r>
+            <a:r>
+              <a:rPr sz="1500" b="0" dirty="0" err="1">
+                <a:solidFill>
+                  <a:srgbClr val="0B1F3A"/>
+                </a:solidFill>
+              </a:rPr>
+              <a:t>voto</a:t>
+            </a:r>
+            <a:r>
+              <a:rPr sz="1500" b="0" dirty="0">
+                <a:solidFill>
+                  <a:srgbClr val="0B1F3A"/>
+                </a:solidFill>
+              </a:rPr>
+              <a:t> </a:t>
+            </a:r>
+            <a:r>
+              <a:rPr sz="1500" b="0" dirty="0" err="1">
+                <a:solidFill>
+                  <a:srgbClr val="0B1F3A"/>
+                </a:solidFill>
+              </a:rPr>
+              <a:t>potrebbe</a:t>
+            </a:r>
+            <a:r>
+              <a:rPr sz="1500" b="0" dirty="0">
+                <a:solidFill>
+                  <a:srgbClr val="0B1F3A"/>
+                </a:solidFill>
+              </a:rPr>
+              <a:t> </a:t>
+            </a:r>
+            <a:r>
+              <a:rPr sz="1500" b="0" dirty="0" err="1">
+                <a:solidFill>
+                  <a:srgbClr val="0B1F3A"/>
+                </a:solidFill>
+              </a:rPr>
+              <a:t>cambiare</a:t>
+            </a:r>
+            <a:r>
+              <a:rPr sz="1500" b="0" dirty="0">
+                <a:solidFill>
+                  <a:srgbClr val="0B1F3A"/>
+                </a:solidFill>
+              </a:rPr>
+              <a:t>. </a:t>
+            </a:r>
+            <a:r>
+              <a:rPr sz="1500" b="1" dirty="0">
+                <a:solidFill>
+                  <a:srgbClr val="0B1F3A"/>
+                </a:solidFill>
+              </a:rPr>
+              <a:t>Si </a:t>
+            </a:r>
+            <a:r>
+              <a:rPr sz="1500" b="1" dirty="0" err="1">
+                <a:solidFill>
+                  <a:srgbClr val="0B1F3A"/>
+                </a:solidFill>
+              </a:rPr>
+              <a:t>sovrappongono</a:t>
+            </a:r>
+            <a:r>
+              <a:rPr sz="1500" b="0" dirty="0">
+                <a:solidFill>
+                  <a:srgbClr val="0B1F3A"/>
+                </a:solidFill>
+              </a:rPr>
+              <a:t>: è un </a:t>
+            </a:r>
+            <a:r>
+              <a:rPr sz="1500" b="0" dirty="0" err="1">
+                <a:solidFill>
+                  <a:srgbClr val="0B1F3A"/>
+                </a:solidFill>
+              </a:rPr>
+              <a:t>campanello</a:t>
+            </a:r>
+            <a:r>
+              <a:rPr sz="1500" b="0" dirty="0">
+                <a:solidFill>
+                  <a:srgbClr val="0B1F3A"/>
+                </a:solidFill>
+              </a:rPr>
+              <a:t> </a:t>
+            </a:r>
+            <a:r>
+              <a:rPr sz="1500" b="0" dirty="0" err="1">
+                <a:solidFill>
+                  <a:srgbClr val="0B1F3A"/>
+                </a:solidFill>
+              </a:rPr>
+              <a:t>d'allarme</a:t>
+            </a:r>
+            <a:r>
+              <a:rPr sz="1500" b="0" dirty="0">
+                <a:solidFill>
+                  <a:srgbClr val="0B1F3A"/>
+                </a:solidFill>
+              </a:rPr>
+              <a:t>, non </a:t>
+            </a:r>
+            <a:r>
+              <a:rPr sz="1500" b="0" dirty="0" err="1">
+                <a:solidFill>
+                  <a:srgbClr val="0B1F3A"/>
+                </a:solidFill>
+              </a:rPr>
+              <a:t>una</a:t>
+            </a:r>
+            <a:r>
+              <a:rPr sz="1500" b="0" dirty="0">
+                <a:solidFill>
+                  <a:srgbClr val="0B1F3A"/>
+                </a:solidFill>
+              </a:rPr>
+              <a:t> </a:t>
+            </a:r>
+            <a:r>
+              <a:rPr sz="1500" b="0" dirty="0" err="1">
+                <a:solidFill>
+                  <a:srgbClr val="0B1F3A"/>
+                </a:solidFill>
+              </a:rPr>
+              <a:t>prova</a:t>
+            </a:r>
+            <a:r>
+              <a:rPr sz="1500" b="0" dirty="0">
+                <a:solidFill>
+                  <a:srgbClr val="0B1F3A"/>
+                </a:solidFill>
+              </a:rPr>
+              <a:t>.</a:t>
             </a:r>
           </a:p>
         </p:txBody>
@@ -8085,6 +9074,7 @@
           <a:lstStyle/>
           <a:p>
             <a:pPr algn="ctr"/>
+            <a:endParaRPr/>
           </a:p>
         </p:txBody>
       </p:sp>
@@ -8128,6 +9118,7 @@
           <a:lstStyle/>
           <a:p>
             <a:pPr algn="ctr"/>
+            <a:endParaRPr/>
           </a:p>
         </p:txBody>
       </p:sp>
@@ -8193,7 +9184,7 @@
 </file>
 
 <file path=ppt/slides/slide15.xml><?xml version="1.0" encoding="utf-8"?>
-<p:sld xmlns:a="http://schemas.openxmlformats.org/drawingml/2006/main" xmlns:p="http://schemas.openxmlformats.org/presentationml/2006/main" xmlns:r="http://schemas.openxmlformats.org/officeDocument/2006/relationships">
+<p:sld xmlns:a="http://schemas.openxmlformats.org/drawingml/2006/main" xmlns:r="http://schemas.openxmlformats.org/officeDocument/2006/relationships" xmlns:p="http://schemas.openxmlformats.org/presentationml/2006/main">
   <p:cSld>
     <p:spTree>
       <p:nvGrpSpPr>
@@ -8201,7 +9192,14 @@
         <p:cNvGrpSpPr/>
         <p:nvPr/>
       </p:nvGrpSpPr>
-      <p:grpSpPr/>
+      <p:grpSpPr>
+        <a:xfrm>
+          <a:off x="0" y="0"/>
+          <a:ext cx="0" cy="0"/>
+          <a:chOff x="0" y="0"/>
+          <a:chExt cx="0" cy="0"/>
+        </a:xfrm>
+      </p:grpSpPr>
       <p:sp>
         <p:nvSpPr>
           <p:cNvPr id="2" name="Rectangle 1"/>
@@ -8242,6 +9240,7 @@
           <a:lstStyle/>
           <a:p>
             <a:pPr algn="ctr"/>
+            <a:endParaRPr/>
           </a:p>
         </p:txBody>
       </p:sp>
@@ -8361,6 +9360,7 @@
           <a:lstStyle/>
           <a:p>
             <a:pPr algn="ctr"/>
+            <a:endParaRPr/>
           </a:p>
         </p:txBody>
       </p:sp>
@@ -8373,7 +9373,7 @@
           <p:nvPr/>
         </p:nvPicPr>
         <p:blipFill>
-          <a:blip r:embed="rId2"/>
+          <a:blip r:embed="rId3"/>
           <a:stretch>
             <a:fillRect/>
           </a:stretch>
@@ -8549,7 +9549,7 @@
 </file>
 
 <file path=ppt/slides/slide16.xml><?xml version="1.0" encoding="utf-8"?>
-<p:sld xmlns:a="http://schemas.openxmlformats.org/drawingml/2006/main" xmlns:p="http://schemas.openxmlformats.org/presentationml/2006/main" xmlns:r="http://schemas.openxmlformats.org/officeDocument/2006/relationships">
+<p:sld xmlns:a="http://schemas.openxmlformats.org/drawingml/2006/main" xmlns:r="http://schemas.openxmlformats.org/officeDocument/2006/relationships" xmlns:p="http://schemas.openxmlformats.org/presentationml/2006/main">
   <p:cSld>
     <p:spTree>
       <p:nvGrpSpPr>
@@ -8557,7 +9557,14 @@
         <p:cNvGrpSpPr/>
         <p:nvPr/>
       </p:nvGrpSpPr>
-      <p:grpSpPr/>
+      <p:grpSpPr>
+        <a:xfrm>
+          <a:off x="0" y="0"/>
+          <a:ext cx="0" cy="0"/>
+          <a:chOff x="0" y="0"/>
+          <a:chExt cx="0" cy="0"/>
+        </a:xfrm>
+      </p:grpSpPr>
       <p:sp>
         <p:nvSpPr>
           <p:cNvPr id="2" name="Rectangle 1"/>
@@ -8598,6 +9605,7 @@
           <a:lstStyle/>
           <a:p>
             <a:pPr algn="ctr"/>
+            <a:endParaRPr/>
           </a:p>
         </p:txBody>
       </p:sp>
@@ -8717,6 +9725,7 @@
           <a:lstStyle/>
           <a:p>
             <a:pPr algn="ctr"/>
+            <a:endParaRPr/>
           </a:p>
         </p:txBody>
       </p:sp>
@@ -8830,6 +9839,7 @@
           <a:lstStyle/>
           <a:p>
             <a:pPr algn="ctr"/>
+            <a:endParaRPr/>
           </a:p>
         </p:txBody>
       </p:sp>
@@ -8873,6 +9883,7 @@
           <a:lstStyle/>
           <a:p>
             <a:pPr algn="ctr"/>
+            <a:endParaRPr/>
           </a:p>
         </p:txBody>
       </p:sp>
@@ -8984,6 +9995,7 @@
           <a:lstStyle/>
           <a:p>
             <a:pPr algn="ctr"/>
+            <a:endParaRPr/>
           </a:p>
         </p:txBody>
       </p:sp>
@@ -9027,6 +10039,7 @@
           <a:lstStyle/>
           <a:p>
             <a:pPr algn="ctr"/>
+            <a:endParaRPr/>
           </a:p>
         </p:txBody>
       </p:sp>
@@ -9138,6 +10151,7 @@
           <a:lstStyle/>
           <a:p>
             <a:pPr algn="ctr"/>
+            <a:endParaRPr/>
           </a:p>
         </p:txBody>
       </p:sp>
@@ -9181,6 +10195,7 @@
           <a:lstStyle/>
           <a:p>
             <a:pPr algn="ctr"/>
+            <a:endParaRPr/>
           </a:p>
         </p:txBody>
       </p:sp>
@@ -9354,7 +10369,7 @@
 </file>
 
 <file path=ppt/slides/slide17.xml><?xml version="1.0" encoding="utf-8"?>
-<p:sld xmlns:a="http://schemas.openxmlformats.org/drawingml/2006/main" xmlns:p="http://schemas.openxmlformats.org/presentationml/2006/main" xmlns:r="http://schemas.openxmlformats.org/officeDocument/2006/relationships">
+<p:sld xmlns:a="http://schemas.openxmlformats.org/drawingml/2006/main" xmlns:r="http://schemas.openxmlformats.org/officeDocument/2006/relationships" xmlns:p="http://schemas.openxmlformats.org/presentationml/2006/main">
   <p:cSld>
     <p:spTree>
       <p:nvGrpSpPr>
@@ -9362,7 +10377,14 @@
         <p:cNvGrpSpPr/>
         <p:nvPr/>
       </p:nvGrpSpPr>
-      <p:grpSpPr/>
+      <p:grpSpPr>
+        <a:xfrm>
+          <a:off x="0" y="0"/>
+          <a:ext cx="0" cy="0"/>
+          <a:chOff x="0" y="0"/>
+          <a:chExt cx="0" cy="0"/>
+        </a:xfrm>
+      </p:grpSpPr>
       <p:sp>
         <p:nvSpPr>
           <p:cNvPr id="2" name="Rectangle 1"/>
@@ -9403,6 +10425,7 @@
           <a:lstStyle/>
           <a:p>
             <a:pPr algn="ctr"/>
+            <a:endParaRPr/>
           </a:p>
         </p:txBody>
       </p:sp>
@@ -9522,6 +10545,7 @@
           <a:lstStyle/>
           <a:p>
             <a:pPr algn="ctr"/>
+            <a:endParaRPr/>
           </a:p>
         </p:txBody>
       </p:sp>
@@ -9565,6 +10589,7 @@
           <a:lstStyle/>
           <a:p>
             <a:pPr algn="ctr"/>
+            <a:endParaRPr/>
           </a:p>
         </p:txBody>
       </p:sp>
@@ -9596,12 +10621,28 @@
               </a:spcAft>
             </a:pPr>
             <a:r>
-              <a:rPr sz="1400" b="1">
-                <a:solidFill>
-                  <a:srgbClr val="0B1F3A"/>
-                </a:solidFill>
-              </a:rPr>
-              <a:t>Cosa ha misurato la dashboard</a:t>
+              <a:rPr sz="1400" b="1" dirty="0">
+                <a:solidFill>
+                  <a:srgbClr val="0B1F3A"/>
+                </a:solidFill>
+              </a:rPr>
+              <a:t>Cosa ha </a:t>
+            </a:r>
+            <a:r>
+              <a:rPr sz="1400" b="1" dirty="0" err="1">
+                <a:solidFill>
+                  <a:srgbClr val="0B1F3A"/>
+                </a:solidFill>
+              </a:rPr>
+              <a:t>misurato</a:t>
+            </a:r>
+            <a:r>
+              <a:rPr sz="1400" b="1" dirty="0">
+                <a:solidFill>
+                  <a:srgbClr val="0B1F3A"/>
+                </a:solidFill>
+              </a:rPr>
+              <a:t> la dashboard</a:t>
             </a:r>
           </a:p>
           <a:p>
@@ -9611,7 +10652,7 @@
               </a:spcAft>
             </a:pPr>
             <a:r>
-              <a:rPr sz="1400" b="1">
+              <a:rPr sz="1400" b="1" dirty="0">
                 <a:solidFill>
                   <a:srgbClr val="0F6CBD"/>
                 </a:solidFill>
@@ -9619,7 +10660,7 @@
               <a:t>•  </a:t>
             </a:r>
             <a:r>
-              <a:rPr sz="1400" b="1">
+              <a:rPr sz="1400" b="1" dirty="0">
                 <a:solidFill>
                   <a:srgbClr val="0B1F3A"/>
                 </a:solidFill>
@@ -9627,12 +10668,60 @@
               <a:t>0</a:t>
             </a:r>
             <a:r>
-              <a:rPr sz="1400" b="0">
-                <a:solidFill>
-                  <a:srgbClr val="0B1F3A"/>
-                </a:solidFill>
-              </a:rPr>
-              <a:t> decisioni importanti partite senza una persona.</a:t>
+              <a:rPr sz="1400" b="0" dirty="0">
+                <a:solidFill>
+                  <a:srgbClr val="0B1F3A"/>
+                </a:solidFill>
+              </a:rPr>
+              <a:t> </a:t>
+            </a:r>
+            <a:r>
+              <a:rPr sz="1400" b="0" dirty="0" err="1">
+                <a:solidFill>
+                  <a:srgbClr val="0B1F3A"/>
+                </a:solidFill>
+              </a:rPr>
+              <a:t>decisioni</a:t>
+            </a:r>
+            <a:r>
+              <a:rPr sz="1400" b="0" dirty="0">
+                <a:solidFill>
+                  <a:srgbClr val="0B1F3A"/>
+                </a:solidFill>
+              </a:rPr>
+              <a:t> </a:t>
+            </a:r>
+            <a:r>
+              <a:rPr sz="1400" b="0" dirty="0" err="1">
+                <a:solidFill>
+                  <a:srgbClr val="0B1F3A"/>
+                </a:solidFill>
+              </a:rPr>
+              <a:t>importanti</a:t>
+            </a:r>
+            <a:r>
+              <a:rPr sz="1400" b="0" dirty="0">
+                <a:solidFill>
+                  <a:srgbClr val="0B1F3A"/>
+                </a:solidFill>
+              </a:rPr>
+              <a:t> partite senza </a:t>
+            </a:r>
+            <a:r>
+              <a:rPr sz="1400" b="0" dirty="0" err="1">
+                <a:solidFill>
+                  <a:srgbClr val="0B1F3A"/>
+                </a:solidFill>
+              </a:rPr>
+              <a:t>una</a:t>
+            </a:r>
+            <a:r>
+              <a:rPr sz="1400" b="0" dirty="0">
+                <a:solidFill>
+                  <a:srgbClr val="0B1F3A"/>
+                </a:solidFill>
+              </a:rPr>
+              <a:t> persona.</a:t>
             </a:r>
           </a:p>
           <a:p>
@@ -9642,7 +10731,7 @@
               </a:spcAft>
             </a:pPr>
             <a:r>
-              <a:rPr sz="1400" b="1">
+              <a:rPr sz="1400" b="1" dirty="0">
                 <a:solidFill>
                   <a:srgbClr val="0F6CBD"/>
                 </a:solidFill>
@@ -9650,28 +10739,188 @@
               <a:t>•  </a:t>
             </a:r>
             <a:r>
-              <a:rPr sz="1400" b="0">
-                <a:solidFill>
-                  <a:srgbClr val="0B1F3A"/>
-                </a:solidFill>
-              </a:rPr>
-              <a:t>Le persone hanno corretto il sistema </a:t>
-            </a:r>
-            <a:r>
-              <a:rPr sz="1400" b="1">
-                <a:solidFill>
-                  <a:srgbClr val="0B1F3A"/>
-                </a:solidFill>
-              </a:rPr>
-              <a:t>35 volte su 100</a:t>
-            </a:r>
-            <a:r>
-              <a:rPr sz="1400" b="0">
-                <a:solidFill>
-                  <a:srgbClr val="0B1F3A"/>
-                </a:solidFill>
-              </a:rPr>
-              <a:t>: né troppo poco (approvano senza leggere) né troppo (sistema inutile).</a:t>
+              <a:rPr sz="1400" b="0" dirty="0">
+                <a:solidFill>
+                  <a:srgbClr val="0B1F3A"/>
+                </a:solidFill>
+              </a:rPr>
+              <a:t>Le </a:t>
+            </a:r>
+            <a:r>
+              <a:rPr sz="1400" b="0" dirty="0" err="1">
+                <a:solidFill>
+                  <a:srgbClr val="0B1F3A"/>
+                </a:solidFill>
+              </a:rPr>
+              <a:t>persone</a:t>
+            </a:r>
+            <a:r>
+              <a:rPr sz="1400" b="0" dirty="0">
+                <a:solidFill>
+                  <a:srgbClr val="0B1F3A"/>
+                </a:solidFill>
+              </a:rPr>
+              <a:t> </a:t>
+            </a:r>
+            <a:r>
+              <a:rPr sz="1400" b="0" dirty="0" err="1">
+                <a:solidFill>
+                  <a:srgbClr val="0B1F3A"/>
+                </a:solidFill>
+              </a:rPr>
+              <a:t>hanno</a:t>
+            </a:r>
+            <a:r>
+              <a:rPr sz="1400" b="0" dirty="0">
+                <a:solidFill>
+                  <a:srgbClr val="0B1F3A"/>
+                </a:solidFill>
+              </a:rPr>
+              <a:t> </a:t>
+            </a:r>
+            <a:r>
+              <a:rPr sz="1400" b="0" dirty="0" err="1">
+                <a:solidFill>
+                  <a:srgbClr val="0B1F3A"/>
+                </a:solidFill>
+              </a:rPr>
+              <a:t>corretto</a:t>
+            </a:r>
+            <a:r>
+              <a:rPr sz="1400" b="0" dirty="0">
+                <a:solidFill>
+                  <a:srgbClr val="0B1F3A"/>
+                </a:solidFill>
+              </a:rPr>
+              <a:t> il </a:t>
+            </a:r>
+            <a:r>
+              <a:rPr sz="1400" b="0" dirty="0" err="1">
+                <a:solidFill>
+                  <a:srgbClr val="0B1F3A"/>
+                </a:solidFill>
+              </a:rPr>
+              <a:t>sistema</a:t>
+            </a:r>
+            <a:r>
+              <a:rPr sz="1400" b="0" dirty="0">
+                <a:solidFill>
+                  <a:srgbClr val="0B1F3A"/>
+                </a:solidFill>
+              </a:rPr>
+              <a:t> </a:t>
+            </a:r>
+            <a:r>
+              <a:rPr sz="1400" b="1" dirty="0">
+                <a:solidFill>
+                  <a:srgbClr val="0B1F3A"/>
+                </a:solidFill>
+              </a:rPr>
+              <a:t>35 volte </a:t>
+            </a:r>
+            <a:r>
+              <a:rPr sz="1400" b="1" dirty="0" err="1">
+                <a:solidFill>
+                  <a:srgbClr val="0B1F3A"/>
+                </a:solidFill>
+              </a:rPr>
+              <a:t>su</a:t>
+            </a:r>
+            <a:r>
+              <a:rPr sz="1400" b="1" dirty="0">
+                <a:solidFill>
+                  <a:srgbClr val="0B1F3A"/>
+                </a:solidFill>
+              </a:rPr>
+              <a:t> 100</a:t>
+            </a:r>
+            <a:r>
+              <a:rPr sz="1400" b="0" dirty="0">
+                <a:solidFill>
+                  <a:srgbClr val="0B1F3A"/>
+                </a:solidFill>
+              </a:rPr>
+              <a:t>: né </a:t>
+            </a:r>
+            <a:r>
+              <a:rPr sz="1400" b="0" dirty="0" err="1">
+                <a:solidFill>
+                  <a:srgbClr val="0B1F3A"/>
+                </a:solidFill>
+              </a:rPr>
+              <a:t>troppo</a:t>
+            </a:r>
+            <a:r>
+              <a:rPr sz="1400" b="0" dirty="0">
+                <a:solidFill>
+                  <a:srgbClr val="0B1F3A"/>
+                </a:solidFill>
+              </a:rPr>
+              <a:t> poco (</a:t>
+            </a:r>
+            <a:r>
+              <a:rPr sz="1400" b="0" dirty="0" err="1">
+                <a:solidFill>
+                  <a:srgbClr val="0B1F3A"/>
+                </a:solidFill>
+              </a:rPr>
+              <a:t>approvano</a:t>
+            </a:r>
+            <a:r>
+              <a:rPr sz="1400" b="0" dirty="0">
+                <a:solidFill>
+                  <a:srgbClr val="0B1F3A"/>
+                </a:solidFill>
+              </a:rPr>
+              <a:t> senza </a:t>
+            </a:r>
+            <a:r>
+              <a:rPr sz="1400" b="0" dirty="0" err="1">
+                <a:solidFill>
+                  <a:srgbClr val="0B1F3A"/>
+                </a:solidFill>
+              </a:rPr>
+              <a:t>leggere</a:t>
+            </a:r>
+            <a:r>
+              <a:rPr sz="1400" b="0" dirty="0">
+                <a:solidFill>
+                  <a:srgbClr val="0B1F3A"/>
+                </a:solidFill>
+              </a:rPr>
+              <a:t>) né </a:t>
+            </a:r>
+            <a:r>
+              <a:rPr sz="1400" b="0" dirty="0" err="1">
+                <a:solidFill>
+                  <a:srgbClr val="0B1F3A"/>
+                </a:solidFill>
+              </a:rPr>
+              <a:t>troppo</a:t>
+            </a:r>
+            <a:r>
+              <a:rPr sz="1400" b="0" dirty="0">
+                <a:solidFill>
+                  <a:srgbClr val="0B1F3A"/>
+                </a:solidFill>
+              </a:rPr>
+              <a:t> (</a:t>
+            </a:r>
+            <a:r>
+              <a:rPr sz="1400" b="0" dirty="0" err="1">
+                <a:solidFill>
+                  <a:srgbClr val="0B1F3A"/>
+                </a:solidFill>
+              </a:rPr>
+              <a:t>sistema</a:t>
+            </a:r>
+            <a:r>
+              <a:rPr sz="1400" b="0" dirty="0">
+                <a:solidFill>
+                  <a:srgbClr val="0B1F3A"/>
+                </a:solidFill>
+              </a:rPr>
+              <a:t> inutile).</a:t>
             </a:r>
           </a:p>
           <a:p>
@@ -9681,7 +10930,7 @@
               </a:spcAft>
             </a:pPr>
             <a:r>
-              <a:rPr sz="1400" b="1">
+              <a:rPr sz="1400" b="1" dirty="0">
                 <a:solidFill>
                   <a:srgbClr val="0F6CBD"/>
                 </a:solidFill>
@@ -9689,20 +10938,100 @@
               <a:t>•  </a:t>
             </a:r>
             <a:r>
-              <a:rPr sz="1400" b="1">
-                <a:solidFill>
-                  <a:srgbClr val="0B1F3A"/>
-                </a:solidFill>
-              </a:rPr>
-              <a:t>6 motivazioni su 100</a:t>
-            </a:r>
-            <a:r>
-              <a:rPr sz="1400" b="0">
-                <a:solidFill>
-                  <a:srgbClr val="0B1F3A"/>
-                </a:solidFill>
-              </a:rPr>
-              <a:t> troppo brevi: quella di OP-022.</a:t>
+              <a:rPr sz="1400" b="1" dirty="0">
+                <a:solidFill>
+                  <a:srgbClr val="0B1F3A"/>
+                </a:solidFill>
+              </a:rPr>
+              <a:t>6 </a:t>
+            </a:r>
+            <a:r>
+              <a:rPr sz="1400" b="1" dirty="0" err="1">
+                <a:solidFill>
+                  <a:srgbClr val="0B1F3A"/>
+                </a:solidFill>
+              </a:rPr>
+              <a:t>motivazioni</a:t>
+            </a:r>
+            <a:r>
+              <a:rPr sz="1400" b="1" dirty="0">
+                <a:solidFill>
+                  <a:srgbClr val="0B1F3A"/>
+                </a:solidFill>
+              </a:rPr>
+              <a:t> </a:t>
+            </a:r>
+            <a:r>
+              <a:rPr sz="1400" b="1" dirty="0" err="1">
+                <a:solidFill>
+                  <a:srgbClr val="0B1F3A"/>
+                </a:solidFill>
+              </a:rPr>
+              <a:t>su</a:t>
+            </a:r>
+            <a:r>
+              <a:rPr sz="1400" b="1" dirty="0">
+                <a:solidFill>
+                  <a:srgbClr val="0B1F3A"/>
+                </a:solidFill>
+              </a:rPr>
+              <a:t> 100</a:t>
+            </a:r>
+            <a:r>
+              <a:rPr sz="1400" b="0" dirty="0">
+                <a:solidFill>
+                  <a:srgbClr val="0B1F3A"/>
+                </a:solidFill>
+              </a:rPr>
+              <a:t> </a:t>
+            </a:r>
+            <a:r>
+              <a:rPr sz="1400" b="0" dirty="0" err="1">
+                <a:solidFill>
+                  <a:srgbClr val="0B1F3A"/>
+                </a:solidFill>
+              </a:rPr>
+              <a:t>troppo</a:t>
+            </a:r>
+            <a:r>
+              <a:rPr sz="1400" b="0" dirty="0">
+                <a:solidFill>
+                  <a:srgbClr val="0B1F3A"/>
+                </a:solidFill>
+              </a:rPr>
+              <a:t> </a:t>
+            </a:r>
+            <a:r>
+              <a:rPr sz="1400" b="0" dirty="0" err="1">
+                <a:solidFill>
+                  <a:srgbClr val="0B1F3A"/>
+                </a:solidFill>
+              </a:rPr>
+              <a:t>brevi</a:t>
+            </a:r>
+            <a:r>
+              <a:rPr sz="1400" b="0" dirty="0">
+                <a:solidFill>
+                  <a:srgbClr val="0B1F3A"/>
+                </a:solidFill>
+              </a:rPr>
+              <a:t>: </a:t>
+            </a:r>
+            <a:r>
+              <a:rPr sz="1400" b="0" dirty="0" err="1">
+                <a:solidFill>
+                  <a:srgbClr val="0B1F3A"/>
+                </a:solidFill>
+              </a:rPr>
+              <a:t>quella</a:t>
+            </a:r>
+            <a:r>
+              <a:rPr sz="1400" b="0" dirty="0">
+                <a:solidFill>
+                  <a:srgbClr val="0B1F3A"/>
+                </a:solidFill>
+              </a:rPr>
+              <a:t> di OP-022.</a:t>
             </a:r>
           </a:p>
           <a:p>
@@ -9712,7 +11041,7 @@
               </a:spcAft>
             </a:pPr>
             <a:r>
-              <a:rPr sz="1400" b="1">
+              <a:rPr sz="1400" b="1" dirty="0">
                 <a:solidFill>
                   <a:srgbClr val="0F6CBD"/>
                 </a:solidFill>
@@ -9720,23 +11049,79 @@
               <a:t>•  </a:t>
             </a:r>
             <a:r>
-              <a:rPr sz="1400" b="0">
-                <a:solidFill>
-                  <a:srgbClr val="0B1F3A"/>
-                </a:solidFill>
-              </a:rPr>
-              <a:t>Tempo tipico dall'arrivo in coda alla decisione: </a:t>
-            </a:r>
-            <a:r>
-              <a:rPr sz="1400" b="1">
-                <a:solidFill>
-                  <a:srgbClr val="0B1F3A"/>
-                </a:solidFill>
-              </a:rPr>
-              <a:t>8 minuti</a:t>
-            </a:r>
-            <a:r>
-              <a:rPr sz="1400" b="0">
+              <a:rPr sz="1400" b="0" dirty="0">
+                <a:solidFill>
+                  <a:srgbClr val="0B1F3A"/>
+                </a:solidFill>
+              </a:rPr>
+              <a:t>Tempo </a:t>
+            </a:r>
+            <a:r>
+              <a:rPr sz="1400" b="0" dirty="0" err="1">
+                <a:solidFill>
+                  <a:srgbClr val="0B1F3A"/>
+                </a:solidFill>
+              </a:rPr>
+              <a:t>tipico</a:t>
+            </a:r>
+            <a:r>
+              <a:rPr sz="1400" b="0" dirty="0">
+                <a:solidFill>
+                  <a:srgbClr val="0B1F3A"/>
+                </a:solidFill>
+              </a:rPr>
+              <a:t> </a:t>
+            </a:r>
+            <a:r>
+              <a:rPr sz="1400" b="0" dirty="0" err="1">
+                <a:solidFill>
+                  <a:srgbClr val="0B1F3A"/>
+                </a:solidFill>
+              </a:rPr>
+              <a:t>dall'arrivo</a:t>
+            </a:r>
+            <a:r>
+              <a:rPr sz="1400" b="0" dirty="0">
+                <a:solidFill>
+                  <a:srgbClr val="0B1F3A"/>
+                </a:solidFill>
+              </a:rPr>
+              <a:t> in coda alla </a:t>
+            </a:r>
+            <a:r>
+              <a:rPr sz="1400" b="0" dirty="0" err="1">
+                <a:solidFill>
+                  <a:srgbClr val="0B1F3A"/>
+                </a:solidFill>
+              </a:rPr>
+              <a:t>decisione</a:t>
+            </a:r>
+            <a:r>
+              <a:rPr sz="1400" b="0" dirty="0">
+                <a:solidFill>
+                  <a:srgbClr val="0B1F3A"/>
+                </a:solidFill>
+              </a:rPr>
+              <a:t>: </a:t>
+            </a:r>
+            <a:r>
+              <a:rPr sz="1400" b="1" dirty="0">
+                <a:solidFill>
+                  <a:srgbClr val="0B1F3A"/>
+                </a:solidFill>
+              </a:rPr>
+              <a:t>8 </a:t>
+            </a:r>
+            <a:r>
+              <a:rPr sz="1400" b="1" dirty="0" err="1">
+                <a:solidFill>
+                  <a:srgbClr val="0B1F3A"/>
+                </a:solidFill>
+              </a:rPr>
+              <a:t>minuti</a:t>
+            </a:r>
+            <a:r>
+              <a:rPr sz="1400" b="0" dirty="0">
                 <a:solidFill>
                   <a:srgbClr val="0B1F3A"/>
                 </a:solidFill>
@@ -9751,7 +11136,7 @@
               </a:spcAft>
             </a:pPr>
             <a:r>
-              <a:rPr sz="1400" b="1">
+              <a:rPr sz="1400" b="1" dirty="0">
                 <a:solidFill>
                   <a:srgbClr val="0F6CBD"/>
                 </a:solidFill>
@@ -9759,20 +11144,180 @@
               <a:t>•  </a:t>
             </a:r>
             <a:r>
-              <a:rPr sz="1400" b="1">
-                <a:solidFill>
-                  <a:srgbClr val="0B1F3A"/>
-                </a:solidFill>
-              </a:rPr>
-              <a:t>96 spiegazioni su 100</a:t>
-            </a:r>
-            <a:r>
-              <a:rPr sz="1400" b="0">
-                <a:solidFill>
-                  <a:srgbClr val="0B1F3A"/>
-                </a:solidFill>
-              </a:rPr>
-              <a:t> dall'LLM; 3 scartate dai controlli perché non citavano il motivo principale.</a:t>
+              <a:rPr sz="1400" b="1" dirty="0">
+                <a:solidFill>
+                  <a:srgbClr val="0B1F3A"/>
+                </a:solidFill>
+              </a:rPr>
+              <a:t>96 </a:t>
+            </a:r>
+            <a:r>
+              <a:rPr sz="1400" b="1" dirty="0" err="1">
+                <a:solidFill>
+                  <a:srgbClr val="0B1F3A"/>
+                </a:solidFill>
+              </a:rPr>
+              <a:t>spiegazioni</a:t>
+            </a:r>
+            <a:r>
+              <a:rPr sz="1400" b="1" dirty="0">
+                <a:solidFill>
+                  <a:srgbClr val="0B1F3A"/>
+                </a:solidFill>
+              </a:rPr>
+              <a:t> </a:t>
+            </a:r>
+            <a:r>
+              <a:rPr sz="1400" b="1" dirty="0" err="1">
+                <a:solidFill>
+                  <a:srgbClr val="0B1F3A"/>
+                </a:solidFill>
+              </a:rPr>
+              <a:t>su</a:t>
+            </a:r>
+            <a:r>
+              <a:rPr sz="1400" b="1" dirty="0">
+                <a:solidFill>
+                  <a:srgbClr val="0B1F3A"/>
+                </a:solidFill>
+              </a:rPr>
+              <a:t> 100</a:t>
+            </a:r>
+            <a:r>
+              <a:rPr sz="1400" b="0" dirty="0">
+                <a:solidFill>
+                  <a:srgbClr val="0B1F3A"/>
+                </a:solidFill>
+              </a:rPr>
+              <a:t> </a:t>
+            </a:r>
+            <a:r>
+              <a:rPr sz="1400" b="0" dirty="0" err="1">
+                <a:solidFill>
+                  <a:srgbClr val="0B1F3A"/>
+                </a:solidFill>
+              </a:rPr>
+              <a:t>dall'LLM</a:t>
+            </a:r>
+            <a:r>
+              <a:rPr sz="1400" b="0" dirty="0">
+                <a:solidFill>
+                  <a:srgbClr val="0B1F3A"/>
+                </a:solidFill>
+              </a:rPr>
+              <a:t>; 3 </a:t>
+            </a:r>
+            <a:r>
+              <a:rPr sz="1400" b="0" dirty="0" err="1">
+                <a:solidFill>
+                  <a:srgbClr val="0B1F3A"/>
+                </a:solidFill>
+              </a:rPr>
+              <a:t>scartate</a:t>
+            </a:r>
+            <a:r>
+              <a:rPr sz="1400" b="0" dirty="0">
+                <a:solidFill>
+                  <a:srgbClr val="0B1F3A"/>
+                </a:solidFill>
+              </a:rPr>
+              <a:t> </a:t>
+            </a:r>
+            <a:r>
+              <a:rPr sz="1400" b="0" dirty="0" err="1">
+                <a:solidFill>
+                  <a:srgbClr val="0B1F3A"/>
+                </a:solidFill>
+              </a:rPr>
+              <a:t>dai</a:t>
+            </a:r>
+            <a:r>
+              <a:rPr sz="1400" b="0" dirty="0">
+                <a:solidFill>
+                  <a:srgbClr val="0B1F3A"/>
+                </a:solidFill>
+              </a:rPr>
+              <a:t> </a:t>
+            </a:r>
+            <a:r>
+              <a:rPr sz="1400" b="0" dirty="0" err="1">
+                <a:solidFill>
+                  <a:srgbClr val="0B1F3A"/>
+                </a:solidFill>
+              </a:rPr>
+              <a:t>controlli</a:t>
+            </a:r>
+            <a:r>
+              <a:rPr sz="1400" b="0" dirty="0">
+                <a:solidFill>
+                  <a:srgbClr val="0B1F3A"/>
+                </a:solidFill>
+              </a:rPr>
+              <a:t> </a:t>
+            </a:r>
+            <a:r>
+              <a:rPr sz="1400" b="0" dirty="0" err="1">
+                <a:solidFill>
+                  <a:srgbClr val="0B1F3A"/>
+                </a:solidFill>
+              </a:rPr>
+              <a:t>perché</a:t>
+            </a:r>
+            <a:r>
+              <a:rPr sz="1400" b="0" dirty="0">
+                <a:solidFill>
+                  <a:srgbClr val="0B1F3A"/>
+                </a:solidFill>
+              </a:rPr>
+              <a:t> non </a:t>
+            </a:r>
+            <a:r>
+              <a:rPr sz="1400" b="0" dirty="0" err="1">
+                <a:solidFill>
+                  <a:srgbClr val="0B1F3A"/>
+                </a:solidFill>
+              </a:rPr>
+              <a:t>citavano</a:t>
+            </a:r>
+            <a:r>
+              <a:rPr sz="1400" b="0" dirty="0">
+                <a:solidFill>
+                  <a:srgbClr val="0B1F3A"/>
+                </a:solidFill>
+              </a:rPr>
+              <a:t> il </a:t>
+            </a:r>
+            <a:r>
+              <a:rPr sz="1400" b="0" dirty="0" err="1">
+                <a:solidFill>
+                  <a:srgbClr val="0B1F3A"/>
+                </a:solidFill>
+              </a:rPr>
+              <a:t>motivo</a:t>
+            </a:r>
+            <a:r>
+              <a:rPr sz="1400" b="0" dirty="0">
+                <a:solidFill>
+                  <a:srgbClr val="0B1F3A"/>
+                </a:solidFill>
+              </a:rPr>
+              <a:t> </a:t>
+            </a:r>
+            <a:r>
+              <a:rPr sz="1400" b="0" dirty="0" err="1">
+                <a:solidFill>
+                  <a:srgbClr val="0B1F3A"/>
+                </a:solidFill>
+              </a:rPr>
+              <a:t>principale</a:t>
+            </a:r>
+            <a:r>
+              <a:rPr sz="1400" b="0" dirty="0">
+                <a:solidFill>
+                  <a:srgbClr val="0B1F3A"/>
+                </a:solidFill>
+              </a:rPr>
+              <a:t>.</a:t>
             </a:r>
           </a:p>
           <a:p>
@@ -9782,7 +11327,7 @@
               </a:spcAft>
             </a:pPr>
             <a:r>
-              <a:rPr sz="1400" b="1">
+              <a:rPr sz="1400" b="1" dirty="0">
                 <a:solidFill>
                   <a:srgbClr val="0F6CBD"/>
                 </a:solidFill>
@@ -9790,15 +11335,47 @@
               <a:t>•  </a:t>
             </a:r>
             <a:r>
-              <a:rPr sz="1400" b="0">
-                <a:solidFill>
-                  <a:srgbClr val="0B1F3A"/>
-                </a:solidFill>
-              </a:rPr>
-              <a:t>Coda da 45 a 28 decisioni; registro </a:t>
-            </a:r>
-            <a:r>
-              <a:rPr sz="1400" b="1">
+              <a:rPr sz="1400" b="0" dirty="0">
+                <a:solidFill>
+                  <a:srgbClr val="0B1F3A"/>
+                </a:solidFill>
+              </a:rPr>
+              <a:t>Coda da 45 a 28 </a:t>
+            </a:r>
+            <a:r>
+              <a:rPr sz="1400" b="0" dirty="0" err="1">
+                <a:solidFill>
+                  <a:srgbClr val="0B1F3A"/>
+                </a:solidFill>
+              </a:rPr>
+              <a:t>decisioni</a:t>
+            </a:r>
+            <a:r>
+              <a:rPr sz="1400" b="0" dirty="0">
+                <a:solidFill>
+                  <a:srgbClr val="0B1F3A"/>
+                </a:solidFill>
+              </a:rPr>
+              <a:t>; </a:t>
+            </a:r>
+            <a:r>
+              <a:rPr sz="1400" b="0" dirty="0" err="1">
+                <a:solidFill>
+                  <a:srgbClr val="0B1F3A"/>
+                </a:solidFill>
+              </a:rPr>
+              <a:t>registro</a:t>
+            </a:r>
+            <a:r>
+              <a:rPr sz="1400" b="0" dirty="0">
+                <a:solidFill>
+                  <a:srgbClr val="0B1F3A"/>
+                </a:solidFill>
+              </a:rPr>
+              <a:t> </a:t>
+            </a:r>
+            <a:r>
+              <a:rPr sz="1400" b="1" dirty="0" err="1">
                 <a:solidFill>
                   <a:srgbClr val="0B1F3A"/>
                 </a:solidFill>
@@ -9806,7 +11383,7 @@
               <a:t>integro</a:t>
             </a:r>
             <a:r>
-              <a:rPr sz="1400" b="0">
+              <a:rPr sz="1400" b="0" dirty="0">
                 <a:solidFill>
                   <a:srgbClr val="0B1F3A"/>
                 </a:solidFill>
@@ -9835,10 +11412,34 @@
                 <a:tableStyleId>{5C22544A-7EE6-4342-B048-85BDC9FD1C3A}</a:tableStyleId>
               </a:tblPr>
               <a:tblGrid>
-                <a:gridCol w="1188720"/>
-                <a:gridCol w="731520"/>
-                <a:gridCol w="1188720"/>
-                <a:gridCol w="2743200"/>
+                <a:gridCol w="1188720">
+                  <a:extLst>
+                    <a:ext uri="{9D8B030D-6E8A-4147-A177-3AD203B41FA5}">
+                      <a16:colId xmlns:a16="http://schemas.microsoft.com/office/drawing/2014/main" val="20000"/>
+                    </a:ext>
+                  </a:extLst>
+                </a:gridCol>
+                <a:gridCol w="731520">
+                  <a:extLst>
+                    <a:ext uri="{9D8B030D-6E8A-4147-A177-3AD203B41FA5}">
+                      <a16:colId xmlns:a16="http://schemas.microsoft.com/office/drawing/2014/main" val="20001"/>
+                    </a:ext>
+                  </a:extLst>
+                </a:gridCol>
+                <a:gridCol w="1188720">
+                  <a:extLst>
+                    <a:ext uri="{9D8B030D-6E8A-4147-A177-3AD203B41FA5}">
+                      <a16:colId xmlns:a16="http://schemas.microsoft.com/office/drawing/2014/main" val="20002"/>
+                    </a:ext>
+                  </a:extLst>
+                </a:gridCol>
+                <a:gridCol w="2743200">
+                  <a:extLst>
+                    <a:ext uri="{9D8B030D-6E8A-4147-A177-3AD203B41FA5}">
+                      <a16:colId xmlns:a16="http://schemas.microsoft.com/office/drawing/2014/main" val="20003"/>
+                    </a:ext>
+                  </a:extLst>
+                </a:gridCol>
               </a:tblGrid>
               <a:tr h="658368">
                 <a:tc>
@@ -9893,6 +11494,11 @@
                   </a:txBody>
                   <a:tcPr/>
                 </a:tc>
+                <a:extLst>
+                  <a:ext uri="{0D108BD9-81ED-4DB2-BD59-A6C34878D82A}">
+                    <a16:rowId xmlns:a16="http://schemas.microsoft.com/office/drawing/2014/main" val="10000"/>
+                  </a:ext>
+                </a:extLst>
               </a:tr>
               <a:tr h="658368">
                 <a:tc>
@@ -9947,6 +11553,11 @@
                   </a:txBody>
                   <a:tcPr/>
                 </a:tc>
+                <a:extLst>
+                  <a:ext uri="{0D108BD9-81ED-4DB2-BD59-A6C34878D82A}">
+                    <a16:rowId xmlns:a16="http://schemas.microsoft.com/office/drawing/2014/main" val="10001"/>
+                  </a:ext>
+                </a:extLst>
               </a:tr>
               <a:tr h="658368">
                 <a:tc>
@@ -10001,6 +11612,11 @@
                   </a:txBody>
                   <a:tcPr/>
                 </a:tc>
+                <a:extLst>
+                  <a:ext uri="{0D108BD9-81ED-4DB2-BD59-A6C34878D82A}">
+                    <a16:rowId xmlns:a16="http://schemas.microsoft.com/office/drawing/2014/main" val="10002"/>
+                  </a:ext>
+                </a:extLst>
               </a:tr>
               <a:tr h="658368">
                 <a:tc>
@@ -10055,6 +11671,11 @@
                   </a:txBody>
                   <a:tcPr/>
                 </a:tc>
+                <a:extLst>
+                  <a:ext uri="{0D108BD9-81ED-4DB2-BD59-A6C34878D82A}">
+                    <a16:rowId xmlns:a16="http://schemas.microsoft.com/office/drawing/2014/main" val="10003"/>
+                  </a:ext>
+                </a:extLst>
               </a:tr>
               <a:tr h="658368">
                 <a:tc>
@@ -10109,6 +11730,11 @@
                   </a:txBody>
                   <a:tcPr/>
                 </a:tc>
+                <a:extLst>
+                  <a:ext uri="{0D108BD9-81ED-4DB2-BD59-A6C34878D82A}">
+                    <a16:rowId xmlns:a16="http://schemas.microsoft.com/office/drawing/2014/main" val="10004"/>
+                  </a:ext>
+                </a:extLst>
               </a:tr>
             </a:tbl>
           </a:graphicData>
@@ -10154,6 +11780,7 @@
           <a:lstStyle/>
           <a:p>
             <a:pPr algn="ctr"/>
+            <a:endParaRPr/>
           </a:p>
         </p:txBody>
       </p:sp>
@@ -10197,6 +11824,7 @@
           <a:lstStyle/>
           <a:p>
             <a:pPr algn="ctr"/>
+            <a:endParaRPr/>
           </a:p>
         </p:txBody>
       </p:sp>
@@ -10228,13 +11856,26 @@
               </a:spcAft>
             </a:pPr>
             <a:r>
-              <a:rPr sz="1300" b="1">
-                <a:solidFill>
-                  <a:srgbClr val="0B1F3A"/>
-                </a:solidFill>
-              </a:rPr>
-              <a:t>La lezione</a:t>
-            </a:r>
+              <a:rPr sz="1300" b="1" dirty="0">
+                <a:solidFill>
+                  <a:srgbClr val="0B1F3A"/>
+                </a:solidFill>
+              </a:rPr>
+              <a:t>La </a:t>
+            </a:r>
+            <a:r>
+              <a:rPr sz="1300" b="1" dirty="0" err="1">
+                <a:solidFill>
+                  <a:srgbClr val="0B1F3A"/>
+                </a:solidFill>
+              </a:rPr>
+              <a:t>lezione</a:t>
+            </a:r>
+            <a:endParaRPr sz="1300" b="1" dirty="0">
+              <a:solidFill>
+                <a:srgbClr val="0B1F3A"/>
+              </a:solidFill>
+            </a:endParaRPr>
           </a:p>
           <a:p>
             <a:pPr>
@@ -10243,12 +11884,308 @@
               </a:spcAft>
             </a:pPr>
             <a:r>
-              <a:rPr sz="1300" b="0">
-                <a:solidFill>
-                  <a:srgbClr val="0B1F3A"/>
-                </a:solidFill>
-              </a:rPr>
-              <a:t>Anche l'umano sbaglia: delle 6 correzioni, 2 sono andate contro un guasto vero, entrambe nelle Isole. Per questo la dashboard misura le correzioni per zona: è proprio lì che il segnale è salito.</a:t>
+              <a:rPr sz="1300" b="0" dirty="0" err="1">
+                <a:solidFill>
+                  <a:srgbClr val="0B1F3A"/>
+                </a:solidFill>
+              </a:rPr>
+              <a:t>Anche</a:t>
+            </a:r>
+            <a:r>
+              <a:rPr sz="1300" b="0" dirty="0">
+                <a:solidFill>
+                  <a:srgbClr val="0B1F3A"/>
+                </a:solidFill>
+              </a:rPr>
+              <a:t> </a:t>
+            </a:r>
+            <a:r>
+              <a:rPr sz="1300" b="0" dirty="0" err="1">
+                <a:solidFill>
+                  <a:srgbClr val="0B1F3A"/>
+                </a:solidFill>
+              </a:rPr>
+              <a:t>l'umano</a:t>
+            </a:r>
+            <a:r>
+              <a:rPr sz="1300" b="0" dirty="0">
+                <a:solidFill>
+                  <a:srgbClr val="0B1F3A"/>
+                </a:solidFill>
+              </a:rPr>
+              <a:t> </a:t>
+            </a:r>
+            <a:r>
+              <a:rPr sz="1300" b="0" dirty="0" err="1">
+                <a:solidFill>
+                  <a:srgbClr val="0B1F3A"/>
+                </a:solidFill>
+              </a:rPr>
+              <a:t>sbaglia</a:t>
+            </a:r>
+            <a:r>
+              <a:rPr sz="1300" b="0" dirty="0">
+                <a:solidFill>
+                  <a:srgbClr val="0B1F3A"/>
+                </a:solidFill>
+              </a:rPr>
+              <a:t>: delle 6 </a:t>
+            </a:r>
+            <a:r>
+              <a:rPr sz="1300" b="0" dirty="0" err="1">
+                <a:solidFill>
+                  <a:srgbClr val="0B1F3A"/>
+                </a:solidFill>
+              </a:rPr>
+              <a:t>correzioni</a:t>
+            </a:r>
+            <a:r>
+              <a:rPr sz="1300" b="0" dirty="0">
+                <a:solidFill>
+                  <a:srgbClr val="0B1F3A"/>
+                </a:solidFill>
+              </a:rPr>
+              <a:t>, 2 </a:t>
+            </a:r>
+            <a:r>
+              <a:rPr sz="1300" b="0" dirty="0" err="1">
+                <a:solidFill>
+                  <a:srgbClr val="0B1F3A"/>
+                </a:solidFill>
+              </a:rPr>
+              <a:t>sono</a:t>
+            </a:r>
+            <a:r>
+              <a:rPr sz="1300" b="0" dirty="0">
+                <a:solidFill>
+                  <a:srgbClr val="0B1F3A"/>
+                </a:solidFill>
+              </a:rPr>
+              <a:t> </a:t>
+            </a:r>
+            <a:r>
+              <a:rPr sz="1300" b="0" dirty="0" err="1">
+                <a:solidFill>
+                  <a:srgbClr val="0B1F3A"/>
+                </a:solidFill>
+              </a:rPr>
+              <a:t>andate</a:t>
+            </a:r>
+            <a:r>
+              <a:rPr sz="1300" b="0" dirty="0">
+                <a:solidFill>
+                  <a:srgbClr val="0B1F3A"/>
+                </a:solidFill>
+              </a:rPr>
+              <a:t> </a:t>
+            </a:r>
+            <a:r>
+              <a:rPr sz="1300" b="0" dirty="0" err="1">
+                <a:solidFill>
+                  <a:srgbClr val="0B1F3A"/>
+                </a:solidFill>
+              </a:rPr>
+              <a:t>contro</a:t>
+            </a:r>
+            <a:r>
+              <a:rPr sz="1300" b="0" dirty="0">
+                <a:solidFill>
+                  <a:srgbClr val="0B1F3A"/>
+                </a:solidFill>
+              </a:rPr>
+              <a:t> un </a:t>
+            </a:r>
+            <a:r>
+              <a:rPr sz="1300" b="0" dirty="0" err="1">
+                <a:solidFill>
+                  <a:srgbClr val="0B1F3A"/>
+                </a:solidFill>
+              </a:rPr>
+              <a:t>guasto</a:t>
+            </a:r>
+            <a:r>
+              <a:rPr sz="1300" b="0" dirty="0">
+                <a:solidFill>
+                  <a:srgbClr val="0B1F3A"/>
+                </a:solidFill>
+              </a:rPr>
+              <a:t> </a:t>
+            </a:r>
+            <a:r>
+              <a:rPr sz="1300" b="0" dirty="0" err="1">
+                <a:solidFill>
+                  <a:srgbClr val="0B1F3A"/>
+                </a:solidFill>
+              </a:rPr>
+              <a:t>vero</a:t>
+            </a:r>
+            <a:r>
+              <a:rPr sz="1300" b="0" dirty="0">
+                <a:solidFill>
+                  <a:srgbClr val="0B1F3A"/>
+                </a:solidFill>
+              </a:rPr>
+              <a:t>, </a:t>
+            </a:r>
+            <a:r>
+              <a:rPr sz="1300" b="0" dirty="0" err="1">
+                <a:solidFill>
+                  <a:srgbClr val="0B1F3A"/>
+                </a:solidFill>
+              </a:rPr>
+              <a:t>entrambe</a:t>
+            </a:r>
+            <a:r>
+              <a:rPr sz="1300" b="0" dirty="0">
+                <a:solidFill>
+                  <a:srgbClr val="0B1F3A"/>
+                </a:solidFill>
+              </a:rPr>
+              <a:t> </a:t>
+            </a:r>
+            <a:r>
+              <a:rPr sz="1300" b="0" dirty="0" err="1">
+                <a:solidFill>
+                  <a:srgbClr val="0B1F3A"/>
+                </a:solidFill>
+              </a:rPr>
+              <a:t>nelle</a:t>
+            </a:r>
+            <a:r>
+              <a:rPr sz="1300" b="0" dirty="0">
+                <a:solidFill>
+                  <a:srgbClr val="0B1F3A"/>
+                </a:solidFill>
+              </a:rPr>
+              <a:t> </a:t>
+            </a:r>
+            <a:r>
+              <a:rPr sz="1300" b="0" dirty="0" err="1">
+                <a:solidFill>
+                  <a:srgbClr val="0B1F3A"/>
+                </a:solidFill>
+              </a:rPr>
+              <a:t>Isole</a:t>
+            </a:r>
+            <a:r>
+              <a:rPr sz="1300" b="0" dirty="0">
+                <a:solidFill>
+                  <a:srgbClr val="0B1F3A"/>
+                </a:solidFill>
+              </a:rPr>
+              <a:t>. Per </a:t>
+            </a:r>
+            <a:r>
+              <a:rPr sz="1300" b="0" dirty="0" err="1">
+                <a:solidFill>
+                  <a:srgbClr val="0B1F3A"/>
+                </a:solidFill>
+              </a:rPr>
+              <a:t>questo</a:t>
+            </a:r>
+            <a:r>
+              <a:rPr sz="1300" b="0" dirty="0">
+                <a:solidFill>
+                  <a:srgbClr val="0B1F3A"/>
+                </a:solidFill>
+              </a:rPr>
+              <a:t> la dashboard </a:t>
+            </a:r>
+            <a:r>
+              <a:rPr sz="1300" b="0" dirty="0" err="1">
+                <a:solidFill>
+                  <a:srgbClr val="0B1F3A"/>
+                </a:solidFill>
+              </a:rPr>
+              <a:t>misura</a:t>
+            </a:r>
+            <a:r>
+              <a:rPr sz="1300" b="0" dirty="0">
+                <a:solidFill>
+                  <a:srgbClr val="0B1F3A"/>
+                </a:solidFill>
+              </a:rPr>
+              <a:t> le </a:t>
+            </a:r>
+            <a:r>
+              <a:rPr sz="1300" b="0" dirty="0" err="1">
+                <a:solidFill>
+                  <a:srgbClr val="0B1F3A"/>
+                </a:solidFill>
+              </a:rPr>
+              <a:t>correzioni</a:t>
+            </a:r>
+            <a:r>
+              <a:rPr sz="1300" b="0" dirty="0">
+                <a:solidFill>
+                  <a:srgbClr val="0B1F3A"/>
+                </a:solidFill>
+              </a:rPr>
+              <a:t> per zona: è proprio </a:t>
+            </a:r>
+            <a:r>
+              <a:rPr sz="1300" b="0" dirty="0" err="1">
+                <a:solidFill>
+                  <a:srgbClr val="0B1F3A"/>
+                </a:solidFill>
+              </a:rPr>
+              <a:t>lì</a:t>
+            </a:r>
+            <a:r>
+              <a:rPr sz="1300" b="0" dirty="0">
+                <a:solidFill>
+                  <a:srgbClr val="0B1F3A"/>
+                </a:solidFill>
+              </a:rPr>
+              <a:t> </a:t>
+            </a:r>
+            <a:r>
+              <a:rPr sz="1300" b="0" dirty="0" err="1">
+                <a:solidFill>
+                  <a:srgbClr val="0B1F3A"/>
+                </a:solidFill>
+              </a:rPr>
+              <a:t>che</a:t>
+            </a:r>
+            <a:r>
+              <a:rPr sz="1300" b="0" dirty="0">
+                <a:solidFill>
+                  <a:srgbClr val="0B1F3A"/>
+                </a:solidFill>
+              </a:rPr>
+              <a:t> il </a:t>
+            </a:r>
+            <a:r>
+              <a:rPr sz="1300" b="0" dirty="0" err="1">
+                <a:solidFill>
+                  <a:srgbClr val="0B1F3A"/>
+                </a:solidFill>
+              </a:rPr>
+              <a:t>segnale</a:t>
+            </a:r>
+            <a:r>
+              <a:rPr sz="1300" b="0" dirty="0">
+                <a:solidFill>
+                  <a:srgbClr val="0B1F3A"/>
+                </a:solidFill>
+              </a:rPr>
+              <a:t> è </a:t>
+            </a:r>
+            <a:r>
+              <a:rPr sz="1300" b="0" dirty="0" err="1">
+                <a:solidFill>
+                  <a:srgbClr val="0B1F3A"/>
+                </a:solidFill>
+              </a:rPr>
+              <a:t>salito</a:t>
+            </a:r>
+            <a:r>
+              <a:rPr sz="1300" b="0" dirty="0">
+                <a:solidFill>
+                  <a:srgbClr val="0B1F3A"/>
+                </a:solidFill>
+              </a:rPr>
+              <a:t>.</a:t>
             </a:r>
           </a:p>
         </p:txBody>
@@ -10262,7 +12199,7 @@
 </file>
 
 <file path=ppt/slides/slide18.xml><?xml version="1.0" encoding="utf-8"?>
-<p:sld xmlns:a="http://schemas.openxmlformats.org/drawingml/2006/main" xmlns:p="http://schemas.openxmlformats.org/presentationml/2006/main" xmlns:r="http://schemas.openxmlformats.org/officeDocument/2006/relationships">
+<p:sld xmlns:a="http://schemas.openxmlformats.org/drawingml/2006/main" xmlns:r="http://schemas.openxmlformats.org/officeDocument/2006/relationships" xmlns:p="http://schemas.openxmlformats.org/presentationml/2006/main">
   <p:cSld>
     <p:spTree>
       <p:nvGrpSpPr>
@@ -10270,7 +12207,14 @@
         <p:cNvGrpSpPr/>
         <p:nvPr/>
       </p:nvGrpSpPr>
-      <p:grpSpPr/>
+      <p:grpSpPr>
+        <a:xfrm>
+          <a:off x="0" y="0"/>
+          <a:ext cx="0" cy="0"/>
+          <a:chOff x="0" y="0"/>
+          <a:chExt cx="0" cy="0"/>
+        </a:xfrm>
+      </p:grpSpPr>
       <p:sp>
         <p:nvSpPr>
           <p:cNvPr id="2" name="Rectangle 1"/>
@@ -10311,6 +12255,7 @@
           <a:lstStyle/>
           <a:p>
             <a:pPr algn="ctr"/>
+            <a:endParaRPr/>
           </a:p>
         </p:txBody>
       </p:sp>
@@ -10430,6 +12375,7 @@
           <a:lstStyle/>
           <a:p>
             <a:pPr algn="ctr"/>
+            <a:endParaRPr/>
           </a:p>
         </p:txBody>
       </p:sp>
@@ -10442,7 +12388,7 @@
           <p:nvPr/>
         </p:nvPicPr>
         <p:blipFill>
-          <a:blip r:embed="rId2"/>
+          <a:blip r:embed="rId3"/>
           <a:stretch>
             <a:fillRect/>
           </a:stretch>
@@ -10471,7 +12417,7 @@
           <p:nvPr/>
         </p:nvPicPr>
         <p:blipFill>
-          <a:blip r:embed="rId3"/>
+          <a:blip r:embed="rId4"/>
           <a:stretch>
             <a:fillRect/>
           </a:stretch>
@@ -10519,7 +12465,7 @@
               </a:spcAft>
             </a:pPr>
             <a:r>
-              <a:rPr sz="1500" b="1">
+              <a:rPr sz="1500" b="1" dirty="0">
                 <a:solidFill>
                   <a:srgbClr val="0F6CBD"/>
                 </a:solidFill>
@@ -10527,7 +12473,7 @@
               <a:t>•  </a:t>
             </a:r>
             <a:r>
-              <a:rPr sz="1500" b="1">
+              <a:rPr sz="1500" b="1" dirty="0">
                 <a:solidFill>
                   <a:srgbClr val="0B1F3A"/>
                 </a:solidFill>
@@ -10535,12 +12481,140 @@
               <a:t>Per persona</a:t>
             </a:r>
             <a:r>
-              <a:rPr sz="1500" b="0">
-                <a:solidFill>
-                  <a:srgbClr val="0B1F3A"/>
-                </a:solidFill>
-              </a:rPr>
-              <a:t> (tabella in alto): il prudente OP-031 approva 4 volte su 10, il frettoloso OP-022 8 su 10. La dashboard distingue i due stili.</a:t>
+              <a:rPr sz="1500" b="0" dirty="0">
+                <a:solidFill>
+                  <a:srgbClr val="0B1F3A"/>
+                </a:solidFill>
+              </a:rPr>
+              <a:t> (</a:t>
+            </a:r>
+            <a:r>
+              <a:rPr sz="1500" b="0" dirty="0" err="1">
+                <a:solidFill>
+                  <a:srgbClr val="0B1F3A"/>
+                </a:solidFill>
+              </a:rPr>
+              <a:t>tabella</a:t>
+            </a:r>
+            <a:r>
+              <a:rPr sz="1500" b="0" dirty="0">
+                <a:solidFill>
+                  <a:srgbClr val="0B1F3A"/>
+                </a:solidFill>
+              </a:rPr>
+              <a:t> in alto): il </a:t>
+            </a:r>
+            <a:r>
+              <a:rPr sz="1500" b="0" dirty="0" err="1">
+                <a:solidFill>
+                  <a:srgbClr val="0B1F3A"/>
+                </a:solidFill>
+              </a:rPr>
+              <a:t>prudente</a:t>
+            </a:r>
+            <a:r>
+              <a:rPr sz="1500" b="0" dirty="0">
+                <a:solidFill>
+                  <a:srgbClr val="0B1F3A"/>
+                </a:solidFill>
+              </a:rPr>
+              <a:t> OP-031 </a:t>
+            </a:r>
+            <a:r>
+              <a:rPr sz="1500" b="0" dirty="0" err="1">
+                <a:solidFill>
+                  <a:srgbClr val="0B1F3A"/>
+                </a:solidFill>
+              </a:rPr>
+              <a:t>approva</a:t>
+            </a:r>
+            <a:r>
+              <a:rPr sz="1500" b="0" dirty="0">
+                <a:solidFill>
+                  <a:srgbClr val="0B1F3A"/>
+                </a:solidFill>
+              </a:rPr>
+              <a:t> 4 volte </a:t>
+            </a:r>
+            <a:r>
+              <a:rPr sz="1500" b="0" dirty="0" err="1">
+                <a:solidFill>
+                  <a:srgbClr val="0B1F3A"/>
+                </a:solidFill>
+              </a:rPr>
+              <a:t>su</a:t>
+            </a:r>
+            <a:r>
+              <a:rPr sz="1500" b="0" dirty="0">
+                <a:solidFill>
+                  <a:srgbClr val="0B1F3A"/>
+                </a:solidFill>
+              </a:rPr>
+              <a:t> 10, il </a:t>
+            </a:r>
+            <a:r>
+              <a:rPr sz="1500" b="0" dirty="0" err="1">
+                <a:solidFill>
+                  <a:srgbClr val="0B1F3A"/>
+                </a:solidFill>
+              </a:rPr>
+              <a:t>frettoloso</a:t>
+            </a:r>
+            <a:r>
+              <a:rPr sz="1500" b="0" dirty="0">
+                <a:solidFill>
+                  <a:srgbClr val="0B1F3A"/>
+                </a:solidFill>
+              </a:rPr>
+              <a:t> OP-022 8 </a:t>
+            </a:r>
+            <a:r>
+              <a:rPr sz="1500" b="0" dirty="0" err="1">
+                <a:solidFill>
+                  <a:srgbClr val="0B1F3A"/>
+                </a:solidFill>
+              </a:rPr>
+              <a:t>su</a:t>
+            </a:r>
+            <a:r>
+              <a:rPr sz="1500" b="0" dirty="0">
+                <a:solidFill>
+                  <a:srgbClr val="0B1F3A"/>
+                </a:solidFill>
+              </a:rPr>
+              <a:t> 10. La dashboard distingue </a:t>
+            </a:r>
+            <a:r>
+              <a:rPr sz="1500" b="0" dirty="0" err="1">
+                <a:solidFill>
+                  <a:srgbClr val="0B1F3A"/>
+                </a:solidFill>
+              </a:rPr>
+              <a:t>i</a:t>
+            </a:r>
+            <a:r>
+              <a:rPr sz="1500" b="0" dirty="0">
+                <a:solidFill>
+                  <a:srgbClr val="0B1F3A"/>
+                </a:solidFill>
+              </a:rPr>
+              <a:t> due </a:t>
+            </a:r>
+            <a:r>
+              <a:rPr sz="1500" b="0" dirty="0" err="1">
+                <a:solidFill>
+                  <a:srgbClr val="0B1F3A"/>
+                </a:solidFill>
+              </a:rPr>
+              <a:t>stili</a:t>
+            </a:r>
+            <a:r>
+              <a:rPr sz="1500" b="0" dirty="0">
+                <a:solidFill>
+                  <a:srgbClr val="0B1F3A"/>
+                </a:solidFill>
+              </a:rPr>
+              <a:t>.</a:t>
             </a:r>
           </a:p>
           <a:p>
@@ -10550,7 +12624,7 @@
               </a:spcAft>
             </a:pPr>
             <a:r>
-              <a:rPr sz="1500" b="1">
+              <a:rPr sz="1500" b="1" dirty="0">
                 <a:solidFill>
                   <a:srgbClr val="0F6CBD"/>
                 </a:solidFill>
@@ -10558,28 +12632,188 @@
               <a:t>•  </a:t>
             </a:r>
             <a:r>
-              <a:rPr sz="1500" b="0">
-                <a:solidFill>
-                  <a:srgbClr val="0B1F3A"/>
-                </a:solidFill>
-              </a:rPr>
-              <a:t>Dopo la motivazione troppo breve di OP-022 l'allarme "possibile approvazione a occhi chiusi" è </a:t>
-            </a:r>
-            <a:r>
-              <a:rPr sz="1500" b="1">
-                <a:solidFill>
-                  <a:srgbClr val="0B1F3A"/>
-                </a:solidFill>
-              </a:rPr>
-              <a:t>scattato davvero</a:t>
-            </a:r>
-            <a:r>
-              <a:rPr sz="1500" b="0">
-                <a:solidFill>
-                  <a:srgbClr val="0B1F3A"/>
-                </a:solidFill>
-              </a:rPr>
-              <a:t>; con le decisioni successive, ben motivate, è rientrato.</a:t>
+              <a:rPr sz="1500" b="0" dirty="0">
+                <a:solidFill>
+                  <a:srgbClr val="0B1F3A"/>
+                </a:solidFill>
+              </a:rPr>
+              <a:t>Dopo la </a:t>
+            </a:r>
+            <a:r>
+              <a:rPr sz="1500" b="0" dirty="0" err="1">
+                <a:solidFill>
+                  <a:srgbClr val="0B1F3A"/>
+                </a:solidFill>
+              </a:rPr>
+              <a:t>motivazione</a:t>
+            </a:r>
+            <a:r>
+              <a:rPr sz="1500" b="0" dirty="0">
+                <a:solidFill>
+                  <a:srgbClr val="0B1F3A"/>
+                </a:solidFill>
+              </a:rPr>
+              <a:t> </a:t>
+            </a:r>
+            <a:r>
+              <a:rPr sz="1500" b="0" dirty="0" err="1">
+                <a:solidFill>
+                  <a:srgbClr val="0B1F3A"/>
+                </a:solidFill>
+              </a:rPr>
+              <a:t>troppo</a:t>
+            </a:r>
+            <a:r>
+              <a:rPr sz="1500" b="0" dirty="0">
+                <a:solidFill>
+                  <a:srgbClr val="0B1F3A"/>
+                </a:solidFill>
+              </a:rPr>
+              <a:t> breve di OP-022 </a:t>
+            </a:r>
+            <a:r>
+              <a:rPr sz="1500" b="0" dirty="0" err="1">
+                <a:solidFill>
+                  <a:srgbClr val="0B1F3A"/>
+                </a:solidFill>
+              </a:rPr>
+              <a:t>l'allarme</a:t>
+            </a:r>
+            <a:r>
+              <a:rPr sz="1500" b="0" dirty="0">
+                <a:solidFill>
+                  <a:srgbClr val="0B1F3A"/>
+                </a:solidFill>
+              </a:rPr>
+              <a:t> "</a:t>
+            </a:r>
+            <a:r>
+              <a:rPr sz="1500" b="0" dirty="0" err="1">
+                <a:solidFill>
+                  <a:srgbClr val="0B1F3A"/>
+                </a:solidFill>
+              </a:rPr>
+              <a:t>possibile</a:t>
+            </a:r>
+            <a:r>
+              <a:rPr sz="1500" b="0" dirty="0">
+                <a:solidFill>
+                  <a:srgbClr val="0B1F3A"/>
+                </a:solidFill>
+              </a:rPr>
+              <a:t> </a:t>
+            </a:r>
+            <a:r>
+              <a:rPr sz="1500" b="0" dirty="0" err="1">
+                <a:solidFill>
+                  <a:srgbClr val="0B1F3A"/>
+                </a:solidFill>
+              </a:rPr>
+              <a:t>approvazione</a:t>
+            </a:r>
+            <a:r>
+              <a:rPr sz="1500" b="0" dirty="0">
+                <a:solidFill>
+                  <a:srgbClr val="0B1F3A"/>
+                </a:solidFill>
+              </a:rPr>
+              <a:t> a </a:t>
+            </a:r>
+            <a:r>
+              <a:rPr sz="1500" b="0" dirty="0" err="1">
+                <a:solidFill>
+                  <a:srgbClr val="0B1F3A"/>
+                </a:solidFill>
+              </a:rPr>
+              <a:t>occhi</a:t>
+            </a:r>
+            <a:r>
+              <a:rPr sz="1500" b="0" dirty="0">
+                <a:solidFill>
+                  <a:srgbClr val="0B1F3A"/>
+                </a:solidFill>
+              </a:rPr>
+              <a:t> </a:t>
+            </a:r>
+            <a:r>
+              <a:rPr sz="1500" b="0" dirty="0" err="1">
+                <a:solidFill>
+                  <a:srgbClr val="0B1F3A"/>
+                </a:solidFill>
+              </a:rPr>
+              <a:t>chiusi</a:t>
+            </a:r>
+            <a:r>
+              <a:rPr sz="1500" b="0" dirty="0">
+                <a:solidFill>
+                  <a:srgbClr val="0B1F3A"/>
+                </a:solidFill>
+              </a:rPr>
+              <a:t>" è </a:t>
+            </a:r>
+            <a:r>
+              <a:rPr sz="1500" b="1" dirty="0" err="1">
+                <a:solidFill>
+                  <a:srgbClr val="0B1F3A"/>
+                </a:solidFill>
+              </a:rPr>
+              <a:t>scattato</a:t>
+            </a:r>
+            <a:r>
+              <a:rPr sz="1500" b="1" dirty="0">
+                <a:solidFill>
+                  <a:srgbClr val="0B1F3A"/>
+                </a:solidFill>
+              </a:rPr>
+              <a:t> </a:t>
+            </a:r>
+            <a:r>
+              <a:rPr sz="1500" b="1" dirty="0" err="1">
+                <a:solidFill>
+                  <a:srgbClr val="0B1F3A"/>
+                </a:solidFill>
+              </a:rPr>
+              <a:t>davvero</a:t>
+            </a:r>
+            <a:r>
+              <a:rPr sz="1500" b="0" dirty="0">
+                <a:solidFill>
+                  <a:srgbClr val="0B1F3A"/>
+                </a:solidFill>
+              </a:rPr>
+              <a:t>; con le </a:t>
+            </a:r>
+            <a:r>
+              <a:rPr sz="1500" b="0" dirty="0" err="1">
+                <a:solidFill>
+                  <a:srgbClr val="0B1F3A"/>
+                </a:solidFill>
+              </a:rPr>
+              <a:t>decisioni</a:t>
+            </a:r>
+            <a:r>
+              <a:rPr sz="1500" b="0" dirty="0">
+                <a:solidFill>
+                  <a:srgbClr val="0B1F3A"/>
+                </a:solidFill>
+              </a:rPr>
+              <a:t> successive, ben motivate, è </a:t>
+            </a:r>
+            <a:r>
+              <a:rPr sz="1500" b="0" dirty="0" err="1">
+                <a:solidFill>
+                  <a:srgbClr val="0B1F3A"/>
+                </a:solidFill>
+              </a:rPr>
+              <a:t>rientrato</a:t>
+            </a:r>
+            <a:r>
+              <a:rPr sz="1500" b="0" dirty="0">
+                <a:solidFill>
+                  <a:srgbClr val="0B1F3A"/>
+                </a:solidFill>
+              </a:rPr>
+              <a:t>.</a:t>
             </a:r>
           </a:p>
           <a:p>
@@ -10589,7 +12823,7 @@
               </a:spcAft>
             </a:pPr>
             <a:r>
-              <a:rPr sz="1500" b="1">
+              <a:rPr sz="1500" b="1" dirty="0">
                 <a:solidFill>
                   <a:srgbClr val="0F6CBD"/>
                 </a:solidFill>
@@ -10597,7 +12831,7 @@
               <a:t>•  </a:t>
             </a:r>
             <a:r>
-              <a:rPr sz="1500" b="1">
+              <a:rPr sz="1500" b="1" dirty="0">
                 <a:solidFill>
                   <a:srgbClr val="0B1F3A"/>
                 </a:solidFill>
@@ -10605,12 +12839,284 @@
               <a:t>Per zona</a:t>
             </a:r>
             <a:r>
-              <a:rPr sz="1500" b="0">
-                <a:solidFill>
-                  <a:srgbClr val="0B1F3A"/>
-                </a:solidFill>
-              </a:rPr>
-              <a:t> (tabella in basso): nelle Isole le persone correggono il sistema 1 volta su 2, contro 1 su 3 in media. Sotto la soglia d'allarme (il doppio), ma è il segnale giusto: lì 2 correzioni su 3 erano sbagliate.</a:t>
+              <a:rPr sz="1500" b="0" dirty="0">
+                <a:solidFill>
+                  <a:srgbClr val="0B1F3A"/>
+                </a:solidFill>
+              </a:rPr>
+              <a:t> (</a:t>
+            </a:r>
+            <a:r>
+              <a:rPr sz="1500" b="0" dirty="0" err="1">
+                <a:solidFill>
+                  <a:srgbClr val="0B1F3A"/>
+                </a:solidFill>
+              </a:rPr>
+              <a:t>tabella</a:t>
+            </a:r>
+            <a:r>
+              <a:rPr sz="1500" b="0" dirty="0">
+                <a:solidFill>
+                  <a:srgbClr val="0B1F3A"/>
+                </a:solidFill>
+              </a:rPr>
+              <a:t> in basso): </a:t>
+            </a:r>
+            <a:r>
+              <a:rPr sz="1500" b="0" dirty="0" err="1">
+                <a:solidFill>
+                  <a:srgbClr val="0B1F3A"/>
+                </a:solidFill>
+              </a:rPr>
+              <a:t>nelle</a:t>
+            </a:r>
+            <a:r>
+              <a:rPr sz="1500" b="0" dirty="0">
+                <a:solidFill>
+                  <a:srgbClr val="0B1F3A"/>
+                </a:solidFill>
+              </a:rPr>
+              <a:t> </a:t>
+            </a:r>
+            <a:r>
+              <a:rPr sz="1500" b="0" dirty="0" err="1">
+                <a:solidFill>
+                  <a:srgbClr val="0B1F3A"/>
+                </a:solidFill>
+              </a:rPr>
+              <a:t>Isole</a:t>
+            </a:r>
+            <a:r>
+              <a:rPr sz="1500" b="0" dirty="0">
+                <a:solidFill>
+                  <a:srgbClr val="0B1F3A"/>
+                </a:solidFill>
+              </a:rPr>
+              <a:t> le </a:t>
+            </a:r>
+            <a:r>
+              <a:rPr sz="1500" b="0" dirty="0" err="1">
+                <a:solidFill>
+                  <a:srgbClr val="0B1F3A"/>
+                </a:solidFill>
+              </a:rPr>
+              <a:t>persone</a:t>
+            </a:r>
+            <a:r>
+              <a:rPr sz="1500" b="0" dirty="0">
+                <a:solidFill>
+                  <a:srgbClr val="0B1F3A"/>
+                </a:solidFill>
+              </a:rPr>
+              <a:t> </a:t>
+            </a:r>
+            <a:r>
+              <a:rPr sz="1500" b="0" dirty="0" err="1">
+                <a:solidFill>
+                  <a:srgbClr val="0B1F3A"/>
+                </a:solidFill>
+              </a:rPr>
+              <a:t>correggono</a:t>
+            </a:r>
+            <a:r>
+              <a:rPr sz="1500" b="0" dirty="0">
+                <a:solidFill>
+                  <a:srgbClr val="0B1F3A"/>
+                </a:solidFill>
+              </a:rPr>
+              <a:t> il </a:t>
+            </a:r>
+            <a:r>
+              <a:rPr sz="1500" b="0" dirty="0" err="1">
+                <a:solidFill>
+                  <a:srgbClr val="0B1F3A"/>
+                </a:solidFill>
+              </a:rPr>
+              <a:t>sistema</a:t>
+            </a:r>
+            <a:r>
+              <a:rPr sz="1500" b="0" dirty="0">
+                <a:solidFill>
+                  <a:srgbClr val="0B1F3A"/>
+                </a:solidFill>
+              </a:rPr>
+              <a:t> 1 volta </a:t>
+            </a:r>
+            <a:r>
+              <a:rPr sz="1500" b="0" dirty="0" err="1">
+                <a:solidFill>
+                  <a:srgbClr val="0B1F3A"/>
+                </a:solidFill>
+              </a:rPr>
+              <a:t>su</a:t>
+            </a:r>
+            <a:r>
+              <a:rPr sz="1500" b="0" dirty="0">
+                <a:solidFill>
+                  <a:srgbClr val="0B1F3A"/>
+                </a:solidFill>
+              </a:rPr>
+              <a:t> 2, </a:t>
+            </a:r>
+            <a:r>
+              <a:rPr sz="1500" b="0" dirty="0" err="1">
+                <a:solidFill>
+                  <a:srgbClr val="0B1F3A"/>
+                </a:solidFill>
+              </a:rPr>
+              <a:t>contro</a:t>
+            </a:r>
+            <a:r>
+              <a:rPr sz="1500" b="0" dirty="0">
+                <a:solidFill>
+                  <a:srgbClr val="0B1F3A"/>
+                </a:solidFill>
+              </a:rPr>
+              <a:t> 1 </a:t>
+            </a:r>
+            <a:r>
+              <a:rPr sz="1500" b="0" dirty="0" err="1">
+                <a:solidFill>
+                  <a:srgbClr val="0B1F3A"/>
+                </a:solidFill>
+              </a:rPr>
+              <a:t>su</a:t>
+            </a:r>
+            <a:r>
+              <a:rPr sz="1500" b="0" dirty="0">
+                <a:solidFill>
+                  <a:srgbClr val="0B1F3A"/>
+                </a:solidFill>
+              </a:rPr>
+              <a:t> 3 in media. Sotto la </a:t>
+            </a:r>
+            <a:r>
+              <a:rPr sz="1500" b="0" dirty="0" err="1">
+                <a:solidFill>
+                  <a:srgbClr val="0B1F3A"/>
+                </a:solidFill>
+              </a:rPr>
+              <a:t>soglia</a:t>
+            </a:r>
+            <a:r>
+              <a:rPr sz="1500" b="0" dirty="0">
+                <a:solidFill>
+                  <a:srgbClr val="0B1F3A"/>
+                </a:solidFill>
+              </a:rPr>
+              <a:t> </a:t>
+            </a:r>
+            <a:r>
+              <a:rPr sz="1500" b="0" dirty="0" err="1">
+                <a:solidFill>
+                  <a:srgbClr val="0B1F3A"/>
+                </a:solidFill>
+              </a:rPr>
+              <a:t>d'allarme</a:t>
+            </a:r>
+            <a:r>
+              <a:rPr sz="1500" b="0" dirty="0">
+                <a:solidFill>
+                  <a:srgbClr val="0B1F3A"/>
+                </a:solidFill>
+              </a:rPr>
+              <a:t> (il doppio), ma è il </a:t>
+            </a:r>
+            <a:r>
+              <a:rPr sz="1500" b="0" dirty="0" err="1">
+                <a:solidFill>
+                  <a:srgbClr val="0B1F3A"/>
+                </a:solidFill>
+              </a:rPr>
+              <a:t>segnale</a:t>
+            </a:r>
+            <a:r>
+              <a:rPr sz="1500" b="0" dirty="0">
+                <a:solidFill>
+                  <a:srgbClr val="0B1F3A"/>
+                </a:solidFill>
+              </a:rPr>
+              <a:t> giusto: </a:t>
+            </a:r>
+            <a:r>
+              <a:rPr sz="1500" b="0" dirty="0" err="1">
+                <a:solidFill>
+                  <a:srgbClr val="0B1F3A"/>
+                </a:solidFill>
+              </a:rPr>
+              <a:t>lì</a:t>
+            </a:r>
+            <a:r>
+              <a:rPr sz="1500" b="0" dirty="0">
+                <a:solidFill>
+                  <a:srgbClr val="0B1F3A"/>
+                </a:solidFill>
+              </a:rPr>
+              <a:t> 2 </a:t>
+            </a:r>
+            <a:r>
+              <a:rPr sz="1500" b="0" dirty="0" err="1">
+                <a:solidFill>
+                  <a:srgbClr val="0B1F3A"/>
+                </a:solidFill>
+              </a:rPr>
+              <a:t>correzioni</a:t>
+            </a:r>
+            <a:r>
+              <a:rPr sz="1500" b="0" dirty="0">
+                <a:solidFill>
+                  <a:srgbClr val="0B1F3A"/>
+                </a:solidFill>
+              </a:rPr>
+              <a:t> </a:t>
+            </a:r>
+            <a:r>
+              <a:rPr sz="1500" b="0" dirty="0" err="1">
+                <a:solidFill>
+                  <a:srgbClr val="0B1F3A"/>
+                </a:solidFill>
+              </a:rPr>
+              <a:t>su</a:t>
+            </a:r>
+            <a:r>
+              <a:rPr sz="1500" b="0" dirty="0">
+                <a:solidFill>
+                  <a:srgbClr val="0B1F3A"/>
+                </a:solidFill>
+              </a:rPr>
+              <a:t> 3 </a:t>
+            </a:r>
+            <a:r>
+              <a:rPr sz="1500" b="0" dirty="0" err="1">
+                <a:solidFill>
+                  <a:srgbClr val="0B1F3A"/>
+                </a:solidFill>
+              </a:rPr>
+              <a:t>erano</a:t>
+            </a:r>
+            <a:r>
+              <a:rPr sz="1500" b="0" dirty="0">
+                <a:solidFill>
+                  <a:srgbClr val="0B1F3A"/>
+                </a:solidFill>
+              </a:rPr>
+              <a:t> </a:t>
+            </a:r>
+            <a:r>
+              <a:rPr sz="1500" b="0" dirty="0" err="1">
+                <a:solidFill>
+                  <a:srgbClr val="0B1F3A"/>
+                </a:solidFill>
+              </a:rPr>
+              <a:t>sbagliate</a:t>
+            </a:r>
+            <a:r>
+              <a:rPr sz="1500" b="0" dirty="0">
+                <a:solidFill>
+                  <a:srgbClr val="0B1F3A"/>
+                </a:solidFill>
+              </a:rPr>
+              <a:t>.</a:t>
             </a:r>
           </a:p>
           <a:p>
@@ -10620,7 +13126,7 @@
               </a:spcAft>
             </a:pPr>
             <a:r>
-              <a:rPr sz="1500" b="1">
+              <a:rPr sz="1500" b="1" dirty="0">
                 <a:solidFill>
                   <a:srgbClr val="0F6CBD"/>
                 </a:solidFill>
@@ -10628,15 +13134,55 @@
               <a:t>•  </a:t>
             </a:r>
             <a:r>
-              <a:rPr sz="1500" b="0">
-                <a:solidFill>
-                  <a:srgbClr val="0B1F3A"/>
-                </a:solidFill>
-              </a:rPr>
-              <a:t>Queste metriche misurano </a:t>
-            </a:r>
-            <a:r>
-              <a:rPr sz="1500" b="1">
+              <a:rPr sz="1500" b="0" dirty="0" err="1">
+                <a:solidFill>
+                  <a:srgbClr val="0B1F3A"/>
+                </a:solidFill>
+              </a:rPr>
+              <a:t>Queste</a:t>
+            </a:r>
+            <a:r>
+              <a:rPr sz="1500" b="0" dirty="0">
+                <a:solidFill>
+                  <a:srgbClr val="0B1F3A"/>
+                </a:solidFill>
+              </a:rPr>
+              <a:t> </a:t>
+            </a:r>
+            <a:r>
+              <a:rPr sz="1500" b="0" dirty="0" err="1">
+                <a:solidFill>
+                  <a:srgbClr val="0B1F3A"/>
+                </a:solidFill>
+              </a:rPr>
+              <a:t>metriche</a:t>
+            </a:r>
+            <a:r>
+              <a:rPr sz="1500" b="0" dirty="0">
+                <a:solidFill>
+                  <a:srgbClr val="0B1F3A"/>
+                </a:solidFill>
+              </a:rPr>
+              <a:t> </a:t>
+            </a:r>
+            <a:r>
+              <a:rPr sz="1500" b="0" dirty="0" err="1">
+                <a:solidFill>
+                  <a:srgbClr val="0B1F3A"/>
+                </a:solidFill>
+              </a:rPr>
+              <a:t>misurano</a:t>
+            </a:r>
+            <a:r>
+              <a:rPr sz="1500" b="0" dirty="0">
+                <a:solidFill>
+                  <a:srgbClr val="0B1F3A"/>
+                </a:solidFill>
+              </a:rPr>
+              <a:t> </a:t>
+            </a:r>
+            <a:r>
+              <a:rPr sz="1500" b="1" dirty="0" err="1">
                 <a:solidFill>
                   <a:srgbClr val="0B1F3A"/>
                 </a:solidFill>
@@ -10644,12 +13190,156 @@
               <a:t>persone</a:t>
             </a:r>
             <a:r>
-              <a:rPr sz="1500" b="0">
-                <a:solidFill>
-                  <a:srgbClr val="0B1F3A"/>
-                </a:solidFill>
-              </a:rPr>
-              <a:t>: in un'azienda vera servono informativa ai lavoratori e regole chiare su come si usano.</a:t>
+              <a:rPr sz="1500" b="0" dirty="0">
+                <a:solidFill>
+                  <a:srgbClr val="0B1F3A"/>
+                </a:solidFill>
+              </a:rPr>
+              <a:t>: in </a:t>
+            </a:r>
+            <a:r>
+              <a:rPr sz="1500" b="0" dirty="0" err="1">
+                <a:solidFill>
+                  <a:srgbClr val="0B1F3A"/>
+                </a:solidFill>
+              </a:rPr>
+              <a:t>un'azienda</a:t>
+            </a:r>
+            <a:r>
+              <a:rPr sz="1500" b="0" dirty="0">
+                <a:solidFill>
+                  <a:srgbClr val="0B1F3A"/>
+                </a:solidFill>
+              </a:rPr>
+              <a:t> vera </a:t>
+            </a:r>
+            <a:r>
+              <a:rPr sz="1500" b="0" dirty="0" err="1">
+                <a:solidFill>
+                  <a:srgbClr val="0B1F3A"/>
+                </a:solidFill>
+              </a:rPr>
+              <a:t>servono</a:t>
+            </a:r>
+            <a:r>
+              <a:rPr sz="1500" b="0" dirty="0">
+                <a:solidFill>
+                  <a:srgbClr val="0B1F3A"/>
+                </a:solidFill>
+              </a:rPr>
+              <a:t> </a:t>
+            </a:r>
+            <a:r>
+              <a:rPr sz="1500" b="0" dirty="0" err="1">
+                <a:solidFill>
+                  <a:srgbClr val="0B1F3A"/>
+                </a:solidFill>
+              </a:rPr>
+              <a:t>informativa</a:t>
+            </a:r>
+            <a:r>
+              <a:rPr sz="1500" b="0" dirty="0">
+                <a:solidFill>
+                  <a:srgbClr val="0B1F3A"/>
+                </a:solidFill>
+              </a:rPr>
+              <a:t> ai </a:t>
+            </a:r>
+            <a:r>
+              <a:rPr sz="1500" b="0" dirty="0" err="1">
+                <a:solidFill>
+                  <a:srgbClr val="0B1F3A"/>
+                </a:solidFill>
+              </a:rPr>
+              <a:t>lavoratori</a:t>
+            </a:r>
+            <a:r>
+              <a:rPr sz="1500" b="0" dirty="0">
+                <a:solidFill>
+                  <a:srgbClr val="0B1F3A"/>
+                </a:solidFill>
+              </a:rPr>
+              <a:t> e </a:t>
+            </a:r>
+            <a:r>
+              <a:rPr sz="1500" b="0" dirty="0" err="1">
+                <a:solidFill>
+                  <a:srgbClr val="0B1F3A"/>
+                </a:solidFill>
+              </a:rPr>
+              <a:t>regole</a:t>
+            </a:r>
+            <a:r>
+              <a:rPr sz="1500" b="0" dirty="0">
+                <a:solidFill>
+                  <a:srgbClr val="0B1F3A"/>
+                </a:solidFill>
+              </a:rPr>
+              <a:t> </a:t>
+            </a:r>
+            <a:r>
+              <a:rPr sz="1500" b="0" dirty="0" err="1">
+                <a:solidFill>
+                  <a:srgbClr val="0B1F3A"/>
+                </a:solidFill>
+              </a:rPr>
+              <a:t>chiare</a:t>
+            </a:r>
+            <a:r>
+              <a:rPr sz="1500" b="0" dirty="0">
+                <a:solidFill>
+                  <a:srgbClr val="0B1F3A"/>
+                </a:solidFill>
+              </a:rPr>
+              <a:t> </a:t>
+            </a:r>
+            <a:r>
+              <a:rPr sz="1500" b="0" dirty="0" err="1">
+                <a:solidFill>
+                  <a:srgbClr val="0B1F3A"/>
+                </a:solidFill>
+              </a:rPr>
+              <a:t>su</a:t>
+            </a:r>
+            <a:r>
+              <a:rPr sz="1500" b="0" dirty="0">
+                <a:solidFill>
+                  <a:srgbClr val="0B1F3A"/>
+                </a:solidFill>
+              </a:rPr>
+              <a:t> come </a:t>
+            </a:r>
+            <a:r>
+              <a:rPr sz="1500" b="0" dirty="0" err="1">
+                <a:solidFill>
+                  <a:srgbClr val="0B1F3A"/>
+                </a:solidFill>
+              </a:rPr>
+              <a:t>si</a:t>
+            </a:r>
+            <a:r>
+              <a:rPr sz="1500" b="0" dirty="0">
+                <a:solidFill>
+                  <a:srgbClr val="0B1F3A"/>
+                </a:solidFill>
+              </a:rPr>
+              <a:t> </a:t>
+            </a:r>
+            <a:r>
+              <a:rPr sz="1500" b="0" dirty="0" err="1">
+                <a:solidFill>
+                  <a:srgbClr val="0B1F3A"/>
+                </a:solidFill>
+              </a:rPr>
+              <a:t>usano</a:t>
+            </a:r>
+            <a:r>
+              <a:rPr sz="1500" b="0" dirty="0">
+                <a:solidFill>
+                  <a:srgbClr val="0B1F3A"/>
+                </a:solidFill>
+              </a:rPr>
+              <a:t>.</a:t>
             </a:r>
           </a:p>
         </p:txBody>
@@ -10663,7 +13353,7 @@
 </file>
 
 <file path=ppt/slides/slide19.xml><?xml version="1.0" encoding="utf-8"?>
-<p:sld xmlns:a="http://schemas.openxmlformats.org/drawingml/2006/main" xmlns:p="http://schemas.openxmlformats.org/presentationml/2006/main" xmlns:r="http://schemas.openxmlformats.org/officeDocument/2006/relationships">
+<p:sld xmlns:a="http://schemas.openxmlformats.org/drawingml/2006/main" xmlns:r="http://schemas.openxmlformats.org/officeDocument/2006/relationships" xmlns:p="http://schemas.openxmlformats.org/presentationml/2006/main">
   <p:cSld>
     <p:spTree>
       <p:nvGrpSpPr>
@@ -10671,7 +13361,14 @@
         <p:cNvGrpSpPr/>
         <p:nvPr/>
       </p:nvGrpSpPr>
-      <p:grpSpPr/>
+      <p:grpSpPr>
+        <a:xfrm>
+          <a:off x="0" y="0"/>
+          <a:ext cx="0" cy="0"/>
+          <a:chOff x="0" y="0"/>
+          <a:chExt cx="0" cy="0"/>
+        </a:xfrm>
+      </p:grpSpPr>
       <p:sp>
         <p:nvSpPr>
           <p:cNvPr id="2" name="Rectangle 1"/>
@@ -10712,6 +13409,7 @@
           <a:lstStyle/>
           <a:p>
             <a:pPr algn="ctr"/>
+            <a:endParaRPr/>
           </a:p>
         </p:txBody>
       </p:sp>
@@ -10831,6 +13529,7 @@
           <a:lstStyle/>
           <a:p>
             <a:pPr algn="ctr"/>
+            <a:endParaRPr/>
           </a:p>
         </p:txBody>
       </p:sp>
@@ -10874,6 +13573,7 @@
           <a:lstStyle/>
           <a:p>
             <a:pPr algn="ctr"/>
+            <a:endParaRPr/>
           </a:p>
         </p:txBody>
       </p:sp>
@@ -10917,6 +13617,7 @@
           <a:lstStyle/>
           <a:p>
             <a:pPr algn="ctr"/>
+            <a:endParaRPr/>
           </a:p>
         </p:txBody>
       </p:sp>
@@ -11013,6 +13714,7 @@
           <a:lstStyle/>
           <a:p>
             <a:pPr algn="ctr"/>
+            <a:endParaRPr/>
           </a:p>
         </p:txBody>
       </p:sp>
@@ -11056,6 +13758,7 @@
           <a:lstStyle/>
           <a:p>
             <a:pPr algn="ctr"/>
+            <a:endParaRPr/>
           </a:p>
         </p:txBody>
       </p:sp>
@@ -11152,6 +13855,7 @@
           <a:lstStyle/>
           <a:p>
             <a:pPr algn="ctr"/>
+            <a:endParaRPr/>
           </a:p>
         </p:txBody>
       </p:sp>
@@ -11195,6 +13899,7 @@
           <a:lstStyle/>
           <a:p>
             <a:pPr algn="ctr"/>
+            <a:endParaRPr/>
           </a:p>
         </p:txBody>
       </p:sp>
@@ -11291,6 +13996,7 @@
           <a:lstStyle/>
           <a:p>
             <a:pPr algn="ctr"/>
+            <a:endParaRPr/>
           </a:p>
         </p:txBody>
       </p:sp>
@@ -11334,6 +14040,7 @@
           <a:lstStyle/>
           <a:p>
             <a:pPr algn="ctr"/>
+            <a:endParaRPr/>
           </a:p>
         </p:txBody>
       </p:sp>
@@ -11430,6 +14137,7 @@
           <a:lstStyle/>
           <a:p>
             <a:pPr algn="ctr"/>
+            <a:endParaRPr/>
           </a:p>
         </p:txBody>
       </p:sp>
@@ -11473,6 +14181,7 @@
           <a:lstStyle/>
           <a:p>
             <a:pPr algn="ctr"/>
+            <a:endParaRPr/>
           </a:p>
         </p:txBody>
       </p:sp>
@@ -11569,6 +14278,7 @@
           <a:lstStyle/>
           <a:p>
             <a:pPr algn="ctr"/>
+            <a:endParaRPr/>
           </a:p>
         </p:txBody>
       </p:sp>
@@ -11612,6 +14322,7 @@
           <a:lstStyle/>
           <a:p>
             <a:pPr algn="ctr"/>
+            <a:endParaRPr/>
           </a:p>
         </p:txBody>
       </p:sp>
@@ -11677,7 +14388,7 @@
 </file>
 
 <file path=ppt/slides/slide2.xml><?xml version="1.0" encoding="utf-8"?>
-<p:sld xmlns:a="http://schemas.openxmlformats.org/drawingml/2006/main" xmlns:p="http://schemas.openxmlformats.org/presentationml/2006/main" xmlns:r="http://schemas.openxmlformats.org/officeDocument/2006/relationships">
+<p:sld xmlns:a="http://schemas.openxmlformats.org/drawingml/2006/main" xmlns:r="http://schemas.openxmlformats.org/officeDocument/2006/relationships" xmlns:p="http://schemas.openxmlformats.org/presentationml/2006/main">
   <p:cSld>
     <p:spTree>
       <p:nvGrpSpPr>
@@ -11685,7 +14396,14 @@
         <p:cNvGrpSpPr/>
         <p:nvPr/>
       </p:nvGrpSpPr>
-      <p:grpSpPr/>
+      <p:grpSpPr>
+        <a:xfrm>
+          <a:off x="0" y="0"/>
+          <a:ext cx="0" cy="0"/>
+          <a:chOff x="0" y="0"/>
+          <a:chExt cx="0" cy="0"/>
+        </a:xfrm>
+      </p:grpSpPr>
       <p:sp>
         <p:nvSpPr>
           <p:cNvPr id="2" name="Rectangle 1"/>
@@ -11726,6 +14444,7 @@
           <a:lstStyle/>
           <a:p>
             <a:pPr algn="ctr"/>
+            <a:endParaRPr/>
           </a:p>
         </p:txBody>
       </p:sp>
@@ -11845,6 +14564,7 @@
           <a:lstStyle/>
           <a:p>
             <a:pPr algn="ctr"/>
+            <a:endParaRPr/>
           </a:p>
         </p:txBody>
       </p:sp>
@@ -12067,6 +14787,7 @@
           <a:lstStyle/>
           <a:p>
             <a:pPr algn="ctr"/>
+            <a:endParaRPr/>
           </a:p>
         </p:txBody>
       </p:sp>
@@ -12110,6 +14831,7 @@
           <a:lstStyle/>
           <a:p>
             <a:pPr algn="ctr"/>
+            <a:endParaRPr/>
           </a:p>
         </p:txBody>
       </p:sp>
@@ -12206,6 +14928,7 @@
           <a:lstStyle/>
           <a:p>
             <a:pPr algn="ctr"/>
+            <a:endParaRPr/>
           </a:p>
         </p:txBody>
       </p:sp>
@@ -12249,6 +14972,7 @@
           <a:lstStyle/>
           <a:p>
             <a:pPr algn="ctr"/>
+            <a:endParaRPr/>
           </a:p>
         </p:txBody>
       </p:sp>
@@ -12345,6 +15069,7 @@
           <a:lstStyle/>
           <a:p>
             <a:pPr algn="ctr"/>
+            <a:endParaRPr/>
           </a:p>
         </p:txBody>
       </p:sp>
@@ -12388,6 +15113,7 @@
           <a:lstStyle/>
           <a:p>
             <a:pPr algn="ctr"/>
+            <a:endParaRPr/>
           </a:p>
         </p:txBody>
       </p:sp>
@@ -12484,6 +15210,7 @@
           <a:lstStyle/>
           <a:p>
             <a:pPr algn="ctr"/>
+            <a:endParaRPr/>
           </a:p>
         </p:txBody>
       </p:sp>
@@ -12527,6 +15254,7 @@
           <a:lstStyle/>
           <a:p>
             <a:pPr algn="ctr"/>
+            <a:endParaRPr/>
           </a:p>
         </p:txBody>
       </p:sp>
@@ -12592,7 +15320,7 @@
 </file>
 
 <file path=ppt/slides/slide20.xml><?xml version="1.0" encoding="utf-8"?>
-<p:sld xmlns:a="http://schemas.openxmlformats.org/drawingml/2006/main" xmlns:p="http://schemas.openxmlformats.org/presentationml/2006/main" xmlns:r="http://schemas.openxmlformats.org/officeDocument/2006/relationships">
+<p:sld xmlns:a="http://schemas.openxmlformats.org/drawingml/2006/main" xmlns:r="http://schemas.openxmlformats.org/officeDocument/2006/relationships" xmlns:p="http://schemas.openxmlformats.org/presentationml/2006/main">
   <p:cSld>
     <p:spTree>
       <p:nvGrpSpPr>
@@ -12600,7 +15328,14 @@
         <p:cNvGrpSpPr/>
         <p:nvPr/>
       </p:nvGrpSpPr>
-      <p:grpSpPr/>
+      <p:grpSpPr>
+        <a:xfrm>
+          <a:off x="0" y="0"/>
+          <a:ext cx="0" cy="0"/>
+          <a:chOff x="0" y="0"/>
+          <a:chExt cx="0" cy="0"/>
+        </a:xfrm>
+      </p:grpSpPr>
       <p:sp>
         <p:nvSpPr>
           <p:cNvPr id="2" name="Rectangle 1"/>
@@ -12641,6 +15376,7 @@
           <a:lstStyle/>
           <a:p>
             <a:pPr algn="ctr"/>
+            <a:endParaRPr/>
           </a:p>
         </p:txBody>
       </p:sp>
@@ -12760,6 +15496,7 @@
           <a:lstStyle/>
           <a:p>
             <a:pPr algn="ctr"/>
+            <a:endParaRPr/>
           </a:p>
         </p:txBody>
       </p:sp>
@@ -12903,6 +15640,7 @@
           <a:lstStyle/>
           <a:p>
             <a:pPr algn="ctr"/>
+            <a:endParaRPr/>
           </a:p>
         </p:txBody>
       </p:sp>
@@ -13093,7 +15831,7 @@
 </file>
 
 <file path=ppt/slides/slide21.xml><?xml version="1.0" encoding="utf-8"?>
-<p:sld xmlns:a="http://schemas.openxmlformats.org/drawingml/2006/main" xmlns:p="http://schemas.openxmlformats.org/presentationml/2006/main" xmlns:r="http://schemas.openxmlformats.org/officeDocument/2006/relationships">
+<p:sld xmlns:a="http://schemas.openxmlformats.org/drawingml/2006/main" xmlns:r="http://schemas.openxmlformats.org/officeDocument/2006/relationships" xmlns:p="http://schemas.openxmlformats.org/presentationml/2006/main">
   <p:cSld>
     <p:spTree>
       <p:nvGrpSpPr>
@@ -13101,7 +15839,14 @@
         <p:cNvGrpSpPr/>
         <p:nvPr/>
       </p:nvGrpSpPr>
-      <p:grpSpPr/>
+      <p:grpSpPr>
+        <a:xfrm>
+          <a:off x="0" y="0"/>
+          <a:ext cx="0" cy="0"/>
+          <a:chOff x="0" y="0"/>
+          <a:chExt cx="0" cy="0"/>
+        </a:xfrm>
+      </p:grpSpPr>
       <p:sp>
         <p:nvSpPr>
           <p:cNvPr id="2" name="Rectangle 1"/>
@@ -13142,6 +15887,7 @@
           <a:lstStyle/>
           <a:p>
             <a:pPr algn="ctr"/>
+            <a:endParaRPr/>
           </a:p>
         </p:txBody>
       </p:sp>
@@ -13245,7 +15991,7 @@
 </file>
 
 <file path=ppt/slides/slide3.xml><?xml version="1.0" encoding="utf-8"?>
-<p:sld xmlns:a="http://schemas.openxmlformats.org/drawingml/2006/main" xmlns:p="http://schemas.openxmlformats.org/presentationml/2006/main" xmlns:r="http://schemas.openxmlformats.org/officeDocument/2006/relationships">
+<p:sld xmlns:a="http://schemas.openxmlformats.org/drawingml/2006/main" xmlns:r="http://schemas.openxmlformats.org/officeDocument/2006/relationships" xmlns:p="http://schemas.openxmlformats.org/presentationml/2006/main">
   <p:cSld>
     <p:spTree>
       <p:nvGrpSpPr>
@@ -13253,7 +15999,14 @@
         <p:cNvGrpSpPr/>
         <p:nvPr/>
       </p:nvGrpSpPr>
-      <p:grpSpPr/>
+      <p:grpSpPr>
+        <a:xfrm>
+          <a:off x="0" y="0"/>
+          <a:ext cx="0" cy="0"/>
+          <a:chOff x="0" y="0"/>
+          <a:chExt cx="0" cy="0"/>
+        </a:xfrm>
+      </p:grpSpPr>
       <p:sp>
         <p:nvSpPr>
           <p:cNvPr id="2" name="Rectangle 1"/>
@@ -13294,6 +16047,7 @@
           <a:lstStyle/>
           <a:p>
             <a:pPr algn="ctr"/>
+            <a:endParaRPr/>
           </a:p>
         </p:txBody>
       </p:sp>
@@ -13413,6 +16167,7 @@
           <a:lstStyle/>
           <a:p>
             <a:pPr algn="ctr"/>
+            <a:endParaRPr/>
           </a:p>
         </p:txBody>
       </p:sp>
@@ -13456,6 +16211,7 @@
           <a:lstStyle/>
           <a:p>
             <a:pPr algn="ctr"/>
+            <a:endParaRPr/>
           </a:p>
         </p:txBody>
       </p:sp>
@@ -13499,6 +16255,7 @@
           <a:lstStyle/>
           <a:p>
             <a:pPr algn="ctr"/>
+            <a:endParaRPr/>
           </a:p>
         </p:txBody>
       </p:sp>
@@ -13595,6 +16352,7 @@
           <a:lstStyle/>
           <a:p>
             <a:pPr algn="ctr"/>
+            <a:endParaRPr/>
           </a:p>
         </p:txBody>
       </p:sp>
@@ -13638,6 +16396,7 @@
           <a:lstStyle/>
           <a:p>
             <a:pPr algn="ctr"/>
+            <a:endParaRPr/>
           </a:p>
         </p:txBody>
       </p:sp>
@@ -13734,6 +16493,7 @@
           <a:lstStyle/>
           <a:p>
             <a:pPr algn="ctr"/>
+            <a:endParaRPr/>
           </a:p>
         </p:txBody>
       </p:sp>
@@ -13777,6 +16537,7 @@
           <a:lstStyle/>
           <a:p>
             <a:pPr algn="ctr"/>
+            <a:endParaRPr/>
           </a:p>
         </p:txBody>
       </p:sp>
@@ -13873,6 +16634,7 @@
           <a:lstStyle/>
           <a:p>
             <a:pPr algn="ctr"/>
+            <a:endParaRPr/>
           </a:p>
         </p:txBody>
       </p:sp>
@@ -13916,6 +16678,7 @@
           <a:lstStyle/>
           <a:p>
             <a:pPr algn="ctr"/>
+            <a:endParaRPr/>
           </a:p>
         </p:txBody>
       </p:sp>
@@ -14012,6 +16775,7 @@
           <a:lstStyle/>
           <a:p>
             <a:pPr algn="ctr"/>
+            <a:endParaRPr/>
           </a:p>
         </p:txBody>
       </p:sp>
@@ -14055,6 +16819,7 @@
           <a:lstStyle/>
           <a:p>
             <a:pPr algn="ctr"/>
+            <a:endParaRPr/>
           </a:p>
         </p:txBody>
       </p:sp>
@@ -14151,6 +16916,7 @@
           <a:lstStyle/>
           <a:p>
             <a:pPr algn="ctr"/>
+            <a:endParaRPr/>
           </a:p>
         </p:txBody>
       </p:sp>
@@ -14194,6 +16960,7 @@
           <a:lstStyle/>
           <a:p>
             <a:pPr algn="ctr"/>
+            <a:endParaRPr/>
           </a:p>
         </p:txBody>
       </p:sp>
@@ -14290,6 +17057,7 @@
           <a:lstStyle/>
           <a:p>
             <a:pPr algn="ctr"/>
+            <a:endParaRPr/>
           </a:p>
         </p:txBody>
       </p:sp>
@@ -14333,6 +17101,7 @@
           <a:lstStyle/>
           <a:p>
             <a:pPr algn="ctr"/>
+            <a:endParaRPr/>
           </a:p>
         </p:txBody>
       </p:sp>
@@ -14429,6 +17198,7 @@
           <a:lstStyle/>
           <a:p>
             <a:pPr algn="ctr"/>
+            <a:endParaRPr/>
           </a:p>
         </p:txBody>
       </p:sp>
@@ -14472,6 +17242,7 @@
           <a:lstStyle/>
           <a:p>
             <a:pPr algn="ctr"/>
+            <a:endParaRPr/>
           </a:p>
         </p:txBody>
       </p:sp>
@@ -14568,6 +17339,7 @@
           <a:lstStyle/>
           <a:p>
             <a:pPr algn="ctr"/>
+            <a:endParaRPr/>
           </a:p>
         </p:txBody>
       </p:sp>
@@ -14611,6 +17383,7 @@
           <a:lstStyle/>
           <a:p>
             <a:pPr algn="ctr"/>
+            <a:endParaRPr/>
           </a:p>
         </p:txBody>
       </p:sp>
@@ -14707,6 +17480,7 @@
           <a:lstStyle/>
           <a:p>
             <a:pPr algn="ctr"/>
+            <a:endParaRPr/>
           </a:p>
         </p:txBody>
       </p:sp>
@@ -14750,6 +17524,7 @@
           <a:lstStyle/>
           <a:p>
             <a:pPr algn="ctr"/>
+            <a:endParaRPr/>
           </a:p>
         </p:txBody>
       </p:sp>
@@ -14815,7 +17590,7 @@
 </file>
 
 <file path=ppt/slides/slide4.xml><?xml version="1.0" encoding="utf-8"?>
-<p:sld xmlns:a="http://schemas.openxmlformats.org/drawingml/2006/main" xmlns:p="http://schemas.openxmlformats.org/presentationml/2006/main" xmlns:r="http://schemas.openxmlformats.org/officeDocument/2006/relationships">
+<p:sld xmlns:a="http://schemas.openxmlformats.org/drawingml/2006/main" xmlns:r="http://schemas.openxmlformats.org/officeDocument/2006/relationships" xmlns:p="http://schemas.openxmlformats.org/presentationml/2006/main">
   <p:cSld>
     <p:spTree>
       <p:nvGrpSpPr>
@@ -14823,7 +17598,14 @@
         <p:cNvGrpSpPr/>
         <p:nvPr/>
       </p:nvGrpSpPr>
-      <p:grpSpPr/>
+      <p:grpSpPr>
+        <a:xfrm>
+          <a:off x="0" y="0"/>
+          <a:ext cx="0" cy="0"/>
+          <a:chOff x="0" y="0"/>
+          <a:chExt cx="0" cy="0"/>
+        </a:xfrm>
+      </p:grpSpPr>
       <p:sp>
         <p:nvSpPr>
           <p:cNvPr id="2" name="Rectangle 1"/>
@@ -14864,6 +17646,7 @@
           <a:lstStyle/>
           <a:p>
             <a:pPr algn="ctr"/>
+            <a:endParaRPr/>
           </a:p>
         </p:txBody>
       </p:sp>
@@ -14983,6 +17766,7 @@
           <a:lstStyle/>
           <a:p>
             <a:pPr algn="ctr"/>
+            <a:endParaRPr/>
           </a:p>
         </p:txBody>
       </p:sp>
@@ -14995,7 +17779,7 @@
           <p:nvPr/>
         </p:nvPicPr>
         <p:blipFill>
-          <a:blip r:embed="rId2"/>
+          <a:blip r:embed="rId3"/>
           <a:stretch>
             <a:fillRect/>
           </a:stretch>
@@ -15229,6 +18013,7 @@
           <a:lstStyle/>
           <a:p>
             <a:pPr algn="ctr"/>
+            <a:endParaRPr/>
           </a:p>
         </p:txBody>
       </p:sp>
@@ -15272,6 +18057,7 @@
           <a:lstStyle/>
           <a:p>
             <a:pPr algn="ctr"/>
+            <a:endParaRPr/>
           </a:p>
         </p:txBody>
       </p:sp>
@@ -15337,7 +18123,7 @@
 </file>
 
 <file path=ppt/slides/slide5.xml><?xml version="1.0" encoding="utf-8"?>
-<p:sld xmlns:a="http://schemas.openxmlformats.org/drawingml/2006/main" xmlns:p="http://schemas.openxmlformats.org/presentationml/2006/main" xmlns:r="http://schemas.openxmlformats.org/officeDocument/2006/relationships">
+<p:sld xmlns:a="http://schemas.openxmlformats.org/drawingml/2006/main" xmlns:r="http://schemas.openxmlformats.org/officeDocument/2006/relationships" xmlns:p="http://schemas.openxmlformats.org/presentationml/2006/main">
   <p:cSld>
     <p:spTree>
       <p:nvGrpSpPr>
@@ -15345,7 +18131,14 @@
         <p:cNvGrpSpPr/>
         <p:nvPr/>
       </p:nvGrpSpPr>
-      <p:grpSpPr/>
+      <p:grpSpPr>
+        <a:xfrm>
+          <a:off x="0" y="0"/>
+          <a:ext cx="0" cy="0"/>
+          <a:chOff x="0" y="0"/>
+          <a:chExt cx="0" cy="0"/>
+        </a:xfrm>
+      </p:grpSpPr>
       <p:sp>
         <p:nvSpPr>
           <p:cNvPr id="2" name="Rectangle 1"/>
@@ -15386,6 +18179,7 @@
           <a:lstStyle/>
           <a:p>
             <a:pPr algn="ctr"/>
+            <a:endParaRPr/>
           </a:p>
         </p:txBody>
       </p:sp>
@@ -15505,6 +18299,7 @@
           <a:lstStyle/>
           <a:p>
             <a:pPr algn="ctr"/>
+            <a:endParaRPr/>
           </a:p>
         </p:txBody>
       </p:sp>
@@ -15517,7 +18312,7 @@
           <p:nvPr/>
         </p:nvPicPr>
         <p:blipFill>
-          <a:blip r:embed="rId2"/>
+          <a:blip r:embed="rId3"/>
           <a:stretch>
             <a:fillRect/>
           </a:stretch>
@@ -15751,6 +18546,7 @@
           <a:lstStyle/>
           <a:p>
             <a:pPr algn="ctr"/>
+            <a:endParaRPr/>
           </a:p>
         </p:txBody>
       </p:sp>
@@ -15794,6 +18590,7 @@
           <a:lstStyle/>
           <a:p>
             <a:pPr algn="ctr"/>
+            <a:endParaRPr/>
           </a:p>
         </p:txBody>
       </p:sp>
@@ -15859,7 +18656,7 @@
 </file>
 
 <file path=ppt/slides/slide6.xml><?xml version="1.0" encoding="utf-8"?>
-<p:sld xmlns:a="http://schemas.openxmlformats.org/drawingml/2006/main" xmlns:p="http://schemas.openxmlformats.org/presentationml/2006/main" xmlns:r="http://schemas.openxmlformats.org/officeDocument/2006/relationships">
+<p:sld xmlns:a="http://schemas.openxmlformats.org/drawingml/2006/main" xmlns:r="http://schemas.openxmlformats.org/officeDocument/2006/relationships" xmlns:p="http://schemas.openxmlformats.org/presentationml/2006/main">
   <p:cSld>
     <p:spTree>
       <p:nvGrpSpPr>
@@ -15867,7 +18664,14 @@
         <p:cNvGrpSpPr/>
         <p:nvPr/>
       </p:nvGrpSpPr>
-      <p:grpSpPr/>
+      <p:grpSpPr>
+        <a:xfrm>
+          <a:off x="0" y="0"/>
+          <a:ext cx="0" cy="0"/>
+          <a:chOff x="0" y="0"/>
+          <a:chExt cx="0" cy="0"/>
+        </a:xfrm>
+      </p:grpSpPr>
       <p:sp>
         <p:nvSpPr>
           <p:cNvPr id="2" name="Rectangle 1"/>
@@ -15908,6 +18712,7 @@
           <a:lstStyle/>
           <a:p>
             <a:pPr algn="ctr"/>
+            <a:endParaRPr/>
           </a:p>
         </p:txBody>
       </p:sp>
@@ -16027,6 +18832,7 @@
           <a:lstStyle/>
           <a:p>
             <a:pPr algn="ctr"/>
+            <a:endParaRPr/>
           </a:p>
         </p:txBody>
       </p:sp>
@@ -16039,7 +18845,7 @@
           <p:nvPr/>
         </p:nvPicPr>
         <p:blipFill>
-          <a:blip r:embed="rId2"/>
+          <a:blip r:embed="rId3"/>
           <a:stretch>
             <a:fillRect/>
           </a:stretch>
@@ -16106,7 +18912,7 @@
 </file>
 
 <file path=ppt/slides/slide7.xml><?xml version="1.0" encoding="utf-8"?>
-<p:sld xmlns:a="http://schemas.openxmlformats.org/drawingml/2006/main" xmlns:p="http://schemas.openxmlformats.org/presentationml/2006/main" xmlns:r="http://schemas.openxmlformats.org/officeDocument/2006/relationships">
+<p:sld xmlns:a="http://schemas.openxmlformats.org/drawingml/2006/main" xmlns:r="http://schemas.openxmlformats.org/officeDocument/2006/relationships" xmlns:p="http://schemas.openxmlformats.org/presentationml/2006/main">
   <p:cSld>
     <p:spTree>
       <p:nvGrpSpPr>
@@ -16114,7 +18920,14 @@
         <p:cNvGrpSpPr/>
         <p:nvPr/>
       </p:nvGrpSpPr>
-      <p:grpSpPr/>
+      <p:grpSpPr>
+        <a:xfrm>
+          <a:off x="0" y="0"/>
+          <a:ext cx="0" cy="0"/>
+          <a:chOff x="0" y="0"/>
+          <a:chExt cx="0" cy="0"/>
+        </a:xfrm>
+      </p:grpSpPr>
       <p:sp>
         <p:nvSpPr>
           <p:cNvPr id="2" name="Rectangle 1"/>
@@ -16155,6 +18968,7 @@
           <a:lstStyle/>
           <a:p>
             <a:pPr algn="ctr"/>
+            <a:endParaRPr/>
           </a:p>
         </p:txBody>
       </p:sp>
@@ -16274,6 +19088,7 @@
           <a:lstStyle/>
           <a:p>
             <a:pPr algn="ctr"/>
+            <a:endParaRPr/>
           </a:p>
         </p:txBody>
       </p:sp>
@@ -16296,9 +19111,27 @@
                 <a:tableStyleId>{5C22544A-7EE6-4342-B048-85BDC9FD1C3A}</a:tableStyleId>
               </a:tblPr>
               <a:tblGrid>
-                <a:gridCol w="2743200"/>
-                <a:gridCol w="2103120"/>
-                <a:gridCol w="1737360"/>
+                <a:gridCol w="2743200">
+                  <a:extLst>
+                    <a:ext uri="{9D8B030D-6E8A-4147-A177-3AD203B41FA5}">
+                      <a16:colId xmlns:a16="http://schemas.microsoft.com/office/drawing/2014/main" val="20000"/>
+                    </a:ext>
+                  </a:extLst>
+                </a:gridCol>
+                <a:gridCol w="2103120">
+                  <a:extLst>
+                    <a:ext uri="{9D8B030D-6E8A-4147-A177-3AD203B41FA5}">
+                      <a16:colId xmlns:a16="http://schemas.microsoft.com/office/drawing/2014/main" val="20001"/>
+                    </a:ext>
+                  </a:extLst>
+                </a:gridCol>
+                <a:gridCol w="1737360">
+                  <a:extLst>
+                    <a:ext uri="{9D8B030D-6E8A-4147-A177-3AD203B41FA5}">
+                      <a16:colId xmlns:a16="http://schemas.microsoft.com/office/drawing/2014/main" val="20002"/>
+                    </a:ext>
+                  </a:extLst>
+                </a:gridCol>
               </a:tblGrid>
               <a:tr h="525780">
                 <a:tc>
@@ -16340,6 +19173,11 @@
                   </a:txBody>
                   <a:tcPr/>
                 </a:tc>
+                <a:extLst>
+                  <a:ext uri="{0D108BD9-81ED-4DB2-BD59-A6C34878D82A}">
+                    <a16:rowId xmlns:a16="http://schemas.microsoft.com/office/drawing/2014/main" val="10000"/>
+                  </a:ext>
+                </a:extLst>
               </a:tr>
               <a:tr h="525780">
                 <a:tc>
@@ -16381,6 +19219,11 @@
                   </a:txBody>
                   <a:tcPr/>
                 </a:tc>
+                <a:extLst>
+                  <a:ext uri="{0D108BD9-81ED-4DB2-BD59-A6C34878D82A}">
+                    <a16:rowId xmlns:a16="http://schemas.microsoft.com/office/drawing/2014/main" val="10001"/>
+                  </a:ext>
+                </a:extLst>
               </a:tr>
               <a:tr h="525780">
                 <a:tc>
@@ -16422,6 +19265,11 @@
                   </a:txBody>
                   <a:tcPr/>
                 </a:tc>
+                <a:extLst>
+                  <a:ext uri="{0D108BD9-81ED-4DB2-BD59-A6C34878D82A}">
+                    <a16:rowId xmlns:a16="http://schemas.microsoft.com/office/drawing/2014/main" val="10002"/>
+                  </a:ext>
+                </a:extLst>
               </a:tr>
               <a:tr h="525780">
                 <a:tc>
@@ -16463,6 +19311,11 @@
                   </a:txBody>
                   <a:tcPr/>
                 </a:tc>
+                <a:extLst>
+                  <a:ext uri="{0D108BD9-81ED-4DB2-BD59-A6C34878D82A}">
+                    <a16:rowId xmlns:a16="http://schemas.microsoft.com/office/drawing/2014/main" val="10003"/>
+                  </a:ext>
+                </a:extLst>
               </a:tr>
               <a:tr h="525780">
                 <a:tc>
@@ -16504,6 +19357,11 @@
                   </a:txBody>
                   <a:tcPr/>
                 </a:tc>
+                <a:extLst>
+                  <a:ext uri="{0D108BD9-81ED-4DB2-BD59-A6C34878D82A}">
+                    <a16:rowId xmlns:a16="http://schemas.microsoft.com/office/drawing/2014/main" val="10004"/>
+                  </a:ext>
+                </a:extLst>
               </a:tr>
               <a:tr h="525780">
                 <a:tc>
@@ -16545,6 +19403,11 @@
                   </a:txBody>
                   <a:tcPr/>
                 </a:tc>
+                <a:extLst>
+                  <a:ext uri="{0D108BD9-81ED-4DB2-BD59-A6C34878D82A}">
+                    <a16:rowId xmlns:a16="http://schemas.microsoft.com/office/drawing/2014/main" val="10005"/>
+                  </a:ext>
+                </a:extLst>
               </a:tr>
               <a:tr h="525780">
                 <a:tc>
@@ -16586,6 +19449,11 @@
                   </a:txBody>
                   <a:tcPr/>
                 </a:tc>
+                <a:extLst>
+                  <a:ext uri="{0D108BD9-81ED-4DB2-BD59-A6C34878D82A}">
+                    <a16:rowId xmlns:a16="http://schemas.microsoft.com/office/drawing/2014/main" val="10006"/>
+                  </a:ext>
+                </a:extLst>
               </a:tr>
               <a:tr h="525780">
                 <a:tc>
@@ -16627,6 +19495,11 @@
                   </a:txBody>
                   <a:tcPr/>
                 </a:tc>
+                <a:extLst>
+                  <a:ext uri="{0D108BD9-81ED-4DB2-BD59-A6C34878D82A}">
+                    <a16:rowId xmlns:a16="http://schemas.microsoft.com/office/drawing/2014/main" val="10007"/>
+                  </a:ext>
+                </a:extLst>
               </a:tr>
             </a:tbl>
           </a:graphicData>
@@ -16641,7 +19514,7 @@
           <p:nvPr/>
         </p:nvPicPr>
         <p:blipFill>
-          <a:blip r:embed="rId2"/>
+          <a:blip r:embed="rId3"/>
           <a:stretch>
             <a:fillRect/>
           </a:stretch>
@@ -16810,7 +19683,7 @@
 </file>
 
 <file path=ppt/slides/slide8.xml><?xml version="1.0" encoding="utf-8"?>
-<p:sld xmlns:a="http://schemas.openxmlformats.org/drawingml/2006/main" xmlns:p="http://schemas.openxmlformats.org/presentationml/2006/main" xmlns:r="http://schemas.openxmlformats.org/officeDocument/2006/relationships">
+<p:sld xmlns:a="http://schemas.openxmlformats.org/drawingml/2006/main" xmlns:r="http://schemas.openxmlformats.org/officeDocument/2006/relationships" xmlns:p="http://schemas.openxmlformats.org/presentationml/2006/main">
   <p:cSld>
     <p:spTree>
       <p:nvGrpSpPr>
@@ -16818,7 +19691,14 @@
         <p:cNvGrpSpPr/>
         <p:nvPr/>
       </p:nvGrpSpPr>
-      <p:grpSpPr/>
+      <p:grpSpPr>
+        <a:xfrm>
+          <a:off x="0" y="0"/>
+          <a:ext cx="0" cy="0"/>
+          <a:chOff x="0" y="0"/>
+          <a:chExt cx="0" cy="0"/>
+        </a:xfrm>
+      </p:grpSpPr>
       <p:sp>
         <p:nvSpPr>
           <p:cNvPr id="2" name="Rectangle 1"/>
@@ -16859,6 +19739,7 @@
           <a:lstStyle/>
           <a:p>
             <a:pPr algn="ctr"/>
+            <a:endParaRPr/>
           </a:p>
         </p:txBody>
       </p:sp>
@@ -16978,6 +19859,7 @@
           <a:lstStyle/>
           <a:p>
             <a:pPr algn="ctr"/>
+            <a:endParaRPr/>
           </a:p>
         </p:txBody>
       </p:sp>
@@ -16990,7 +19872,7 @@
           <p:nvPr/>
         </p:nvPicPr>
         <p:blipFill>
-          <a:blip r:embed="rId2"/>
+          <a:blip r:embed="rId3"/>
           <a:stretch>
             <a:fillRect/>
           </a:stretch>
@@ -17252,6 +20134,7 @@
           <a:lstStyle/>
           <a:p>
             <a:pPr algn="ctr"/>
+            <a:endParaRPr/>
           </a:p>
         </p:txBody>
       </p:sp>
@@ -17295,6 +20178,7 @@
           <a:lstStyle/>
           <a:p>
             <a:pPr algn="ctr"/>
+            <a:endParaRPr/>
           </a:p>
         </p:txBody>
       </p:sp>
@@ -17360,7 +20244,7 @@
 </file>
 
 <file path=ppt/slides/slide9.xml><?xml version="1.0" encoding="utf-8"?>
-<p:sld xmlns:a="http://schemas.openxmlformats.org/drawingml/2006/main" xmlns:p="http://schemas.openxmlformats.org/presentationml/2006/main" xmlns:r="http://schemas.openxmlformats.org/officeDocument/2006/relationships">
+<p:sld xmlns:a="http://schemas.openxmlformats.org/drawingml/2006/main" xmlns:r="http://schemas.openxmlformats.org/officeDocument/2006/relationships" xmlns:p="http://schemas.openxmlformats.org/presentationml/2006/main">
   <p:cSld>
     <p:spTree>
       <p:nvGrpSpPr>
@@ -17368,7 +20252,14 @@
         <p:cNvGrpSpPr/>
         <p:nvPr/>
       </p:nvGrpSpPr>
-      <p:grpSpPr/>
+      <p:grpSpPr>
+        <a:xfrm>
+          <a:off x="0" y="0"/>
+          <a:ext cx="0" cy="0"/>
+          <a:chOff x="0" y="0"/>
+          <a:chExt cx="0" cy="0"/>
+        </a:xfrm>
+      </p:grpSpPr>
       <p:sp>
         <p:nvSpPr>
           <p:cNvPr id="2" name="Rectangle 1"/>
@@ -17409,6 +20300,7 @@
           <a:lstStyle/>
           <a:p>
             <a:pPr algn="ctr"/>
+            <a:endParaRPr/>
           </a:p>
         </p:txBody>
       </p:sp>
@@ -17528,6 +20420,7 @@
           <a:lstStyle/>
           <a:p>
             <a:pPr algn="ctr"/>
+            <a:endParaRPr/>
           </a:p>
         </p:txBody>
       </p:sp>
@@ -17540,7 +20433,7 @@
           <p:nvPr/>
         </p:nvPicPr>
         <p:blipFill>
-          <a:blip r:embed="rId2"/>
+          <a:blip r:embed="rId3"/>
           <a:stretch>
             <a:fillRect/>
           </a:stretch>
@@ -18162,7 +21055,7 @@
 </file>
 
 <file path=ppt/theme/theme2.xml><?xml version="1.0" encoding="utf-8"?>
-<a:theme xmlns:a="http://schemas.openxmlformats.org/drawingml/2006/main" name="Office Theme">
+<a:theme xmlns:a="http://schemas.openxmlformats.org/drawingml/2006/main" name="Tema di Office">
   <a:themeElements>
     <a:clrScheme name="Office">
       <a:dk1>
@@ -18172,44 +21065,44 @@
         <a:sysClr val="window" lastClr="FFFFFF"/>
       </a:lt1>
       <a:dk2>
-        <a:srgbClr val="1F497D"/>
+        <a:srgbClr val="0E2841"/>
       </a:dk2>
       <a:lt2>
-        <a:srgbClr val="EEECE1"/>
+        <a:srgbClr val="E8E8E8"/>
       </a:lt2>
       <a:accent1>
-        <a:srgbClr val="4F81BD"/>
+        <a:srgbClr val="156082"/>
       </a:accent1>
       <a:accent2>
-        <a:srgbClr val="C0504D"/>
+        <a:srgbClr val="E97132"/>
       </a:accent2>
       <a:accent3>
-        <a:srgbClr val="9BBB59"/>
+        <a:srgbClr val="196B24"/>
       </a:accent3>
       <a:accent4>
-        <a:srgbClr val="8064A2"/>
+        <a:srgbClr val="0F9ED5"/>
       </a:accent4>
       <a:accent5>
-        <a:srgbClr val="4BACC6"/>
+        <a:srgbClr val="A02B93"/>
       </a:accent5>
       <a:accent6>
-        <a:srgbClr val="F79646"/>
+        <a:srgbClr val="4EA72E"/>
       </a:accent6>
       <a:hlink>
-        <a:srgbClr val="0000FF"/>
+        <a:srgbClr val="467886"/>
       </a:hlink>
       <a:folHlink>
-        <a:srgbClr val="800080"/>
+        <a:srgbClr val="96607D"/>
       </a:folHlink>
     </a:clrScheme>
     <a:fontScheme name="Office">
       <a:majorFont>
-        <a:latin typeface="Calibri"/>
+        <a:latin typeface="Aptos Display" panose="02110004020202020204"/>
         <a:ea typeface=""/>
         <a:cs typeface=""/>
-        <a:font script="Jpan" typeface="ＭＳ Ｐゴシック"/>
+        <a:font script="Jpan" typeface="游ゴシック Light"/>
         <a:font script="Hang" typeface="맑은 고딕"/>
-        <a:font script="Hans" typeface="宋体"/>
+        <a:font script="Hans" typeface="等线 Light"/>
         <a:font script="Hant" typeface="新細明體"/>
         <a:font script="Arab" typeface="Times New Roman"/>
         <a:font script="Hebr" typeface="Times New Roman"/>
@@ -18237,14 +21130,31 @@
         <a:font script="Viet" typeface="Times New Roman"/>
         <a:font script="Uigh" typeface="Microsoft Uighur"/>
         <a:font script="Geor" typeface="Sylfaen"/>
+        <a:font script="Armn" typeface="Arial"/>
+        <a:font script="Bugi" typeface="Leelawadee UI"/>
+        <a:font script="Bopo" typeface="Microsoft JhengHei"/>
+        <a:font script="Java" typeface="Javanese Text"/>
+        <a:font script="Lisu" typeface="Segoe UI"/>
+        <a:font script="Mymr" typeface="Myanmar Text"/>
+        <a:font script="Nkoo" typeface="Ebrima"/>
+        <a:font script="Olck" typeface="Nirmala UI"/>
+        <a:font script="Osma" typeface="Ebrima"/>
+        <a:font script="Phag" typeface="Phagspa"/>
+        <a:font script="Syrn" typeface="Estrangelo Edessa"/>
+        <a:font script="Syrj" typeface="Estrangelo Edessa"/>
+        <a:font script="Syre" typeface="Estrangelo Edessa"/>
+        <a:font script="Sora" typeface="Nirmala UI"/>
+        <a:font script="Tale" typeface="Microsoft Tai Le"/>
+        <a:font script="Talu" typeface="Microsoft New Tai Lue"/>
+        <a:font script="Tfng" typeface="Ebrima"/>
       </a:majorFont>
       <a:minorFont>
-        <a:latin typeface="Calibri"/>
+        <a:latin typeface="Aptos" panose="02110004020202020204"/>
         <a:ea typeface=""/>
         <a:cs typeface=""/>
-        <a:font script="Jpan" typeface="ＭＳ Ｐゴシック"/>
+        <a:font script="Jpan" typeface="游ゴシック"/>
         <a:font script="Hang" typeface="맑은 고딕"/>
-        <a:font script="Hans" typeface="宋体"/>
+        <a:font script="Hans" typeface="等线"/>
         <a:font script="Hant" typeface="新細明體"/>
         <a:font script="Arab" typeface="Arial"/>
         <a:font script="Hebr" typeface="Arial"/>
@@ -18272,6 +21182,23 @@
         <a:font script="Viet" typeface="Arial"/>
         <a:font script="Uigh" typeface="Microsoft Uighur"/>
         <a:font script="Geor" typeface="Sylfaen"/>
+        <a:font script="Armn" typeface="Arial"/>
+        <a:font script="Bugi" typeface="Leelawadee UI"/>
+        <a:font script="Bopo" typeface="Microsoft JhengHei"/>
+        <a:font script="Java" typeface="Javanese Text"/>
+        <a:font script="Lisu" typeface="Segoe UI"/>
+        <a:font script="Mymr" typeface="Myanmar Text"/>
+        <a:font script="Nkoo" typeface="Ebrima"/>
+        <a:font script="Olck" typeface="Nirmala UI"/>
+        <a:font script="Osma" typeface="Ebrima"/>
+        <a:font script="Phag" typeface="Phagspa"/>
+        <a:font script="Syrn" typeface="Estrangelo Edessa"/>
+        <a:font script="Syrj" typeface="Estrangelo Edessa"/>
+        <a:font script="Syre" typeface="Estrangelo Edessa"/>
+        <a:font script="Sora" typeface="Nirmala UI"/>
+        <a:font script="Tale" typeface="Microsoft Tai Le"/>
+        <a:font script="Talu" typeface="Microsoft New Tai Lue"/>
+        <a:font script="Tfng" typeface="Ebrima"/>
       </a:minorFont>
     </a:fontScheme>
     <a:fmtScheme name="Office">
@@ -18283,180 +21210,136 @@
           <a:gsLst>
             <a:gs pos="0">
               <a:schemeClr val="phClr">
-                <a:tint val="50000"/>
-                <a:satMod val="300000"/>
+                <a:lumMod val="110000"/>
+                <a:satMod val="105000"/>
+                <a:tint val="67000"/>
               </a:schemeClr>
             </a:gs>
-            <a:gs pos="35000">
+            <a:gs pos="50000">
               <a:schemeClr val="phClr">
-                <a:tint val="37000"/>
-                <a:satMod val="300000"/>
+                <a:lumMod val="105000"/>
+                <a:satMod val="103000"/>
+                <a:tint val="73000"/>
               </a:schemeClr>
             </a:gs>
             <a:gs pos="100000">
               <a:schemeClr val="phClr">
-                <a:tint val="15000"/>
-                <a:satMod val="350000"/>
+                <a:lumMod val="105000"/>
+                <a:satMod val="109000"/>
+                <a:tint val="81000"/>
               </a:schemeClr>
             </a:gs>
           </a:gsLst>
-          <a:lin ang="16200000" scaled="1"/>
+          <a:lin ang="5400000" scaled="0"/>
         </a:gradFill>
         <a:gradFill rotWithShape="1">
           <a:gsLst>
             <a:gs pos="0">
               <a:schemeClr val="phClr">
-                <a:tint val="100000"/>
+                <a:satMod val="103000"/>
+                <a:lumMod val="102000"/>
+                <a:tint val="94000"/>
+              </a:schemeClr>
+            </a:gs>
+            <a:gs pos="50000">
+              <a:schemeClr val="phClr">
+                <a:satMod val="110000"/>
+                <a:lumMod val="100000"/>
                 <a:shade val="100000"/>
-                <a:satMod val="130000"/>
               </a:schemeClr>
             </a:gs>
             <a:gs pos="100000">
               <a:schemeClr val="phClr">
-                <a:tint val="50000"/>
-                <a:shade val="100000"/>
-                <a:satMod val="350000"/>
+                <a:lumMod val="99000"/>
+                <a:satMod val="120000"/>
+                <a:shade val="78000"/>
               </a:schemeClr>
             </a:gs>
           </a:gsLst>
-          <a:lin ang="16200000" scaled="0"/>
+          <a:lin ang="5400000" scaled="0"/>
         </a:gradFill>
       </a:fillStyleLst>
       <a:lnStyleLst>
-        <a:ln w="9525" cap="flat" cmpd="sng" algn="ctr">
+        <a:ln w="12700" cap="flat" cmpd="sng" algn="ctr">
           <a:solidFill>
-            <a:schemeClr val="phClr">
-              <a:shade val="95000"/>
-              <a:satMod val="105000"/>
-            </a:schemeClr>
+            <a:schemeClr val="phClr"/>
           </a:solidFill>
           <a:prstDash val="solid"/>
+          <a:miter lim="800000"/>
+        </a:ln>
+        <a:ln w="19050" cap="flat" cmpd="sng" algn="ctr">
+          <a:solidFill>
+            <a:schemeClr val="phClr"/>
+          </a:solidFill>
+          <a:prstDash val="solid"/>
+          <a:miter lim="800000"/>
         </a:ln>
         <a:ln w="25400" cap="flat" cmpd="sng" algn="ctr">
           <a:solidFill>
             <a:schemeClr val="phClr"/>
           </a:solidFill>
           <a:prstDash val="solid"/>
-        </a:ln>
-        <a:ln w="38100" cap="flat" cmpd="sng" algn="ctr">
-          <a:solidFill>
-            <a:schemeClr val="phClr"/>
-          </a:solidFill>
-          <a:prstDash val="solid"/>
+          <a:miter lim="800000"/>
         </a:ln>
       </a:lnStyleLst>
       <a:effectStyleLst>
         <a:effectStyle>
+          <a:effectLst/>
+        </a:effectStyle>
+        <a:effectStyle>
+          <a:effectLst/>
+        </a:effectStyle>
+        <a:effectStyle>
           <a:effectLst>
-            <a:outerShdw blurRad="40000" dist="20000" dir="5400000" rotWithShape="0">
+            <a:outerShdw blurRad="57150" dist="19050" dir="5400000" algn="ctr" rotWithShape="0">
               <a:srgbClr val="000000">
-                <a:alpha val="38000"/>
+                <a:alpha val="63000"/>
               </a:srgbClr>
             </a:outerShdw>
           </a:effectLst>
-        </a:effectStyle>
-        <a:effectStyle>
-          <a:effectLst>
-            <a:outerShdw blurRad="40000" dist="23000" dir="5400000" rotWithShape="0">
-              <a:srgbClr val="000000">
-                <a:alpha val="35000"/>
-              </a:srgbClr>
-            </a:outerShdw>
-          </a:effectLst>
-        </a:effectStyle>
-        <a:effectStyle>
-          <a:effectLst>
-            <a:outerShdw blurRad="40000" dist="23000" dir="5400000" rotWithShape="0">
-              <a:srgbClr val="000000">
-                <a:alpha val="35000"/>
-              </a:srgbClr>
-            </a:outerShdw>
-          </a:effectLst>
-          <a:scene3d>
-            <a:camera prst="orthographicFront">
-              <a:rot lat="0" lon="0" rev="0"/>
-            </a:camera>
-            <a:lightRig rig="threePt" dir="t">
-              <a:rot lat="0" lon="0" rev="1200000"/>
-            </a:lightRig>
-          </a:scene3d>
-          <a:sp3d>
-            <a:bevelT w="63500" h="25400"/>
-          </a:sp3d>
         </a:effectStyle>
       </a:effectStyleLst>
       <a:bgFillStyleLst>
         <a:solidFill>
           <a:schemeClr val="phClr"/>
         </a:solidFill>
+        <a:solidFill>
+          <a:schemeClr val="phClr">
+            <a:tint val="95000"/>
+            <a:satMod val="170000"/>
+          </a:schemeClr>
+        </a:solidFill>
         <a:gradFill rotWithShape="1">
           <a:gsLst>
             <a:gs pos="0">
               <a:schemeClr val="phClr">
-                <a:tint val="40000"/>
-                <a:satMod val="350000"/>
+                <a:tint val="93000"/>
+                <a:satMod val="150000"/>
+                <a:shade val="98000"/>
+                <a:lumMod val="102000"/>
               </a:schemeClr>
             </a:gs>
-            <a:gs pos="40000">
+            <a:gs pos="50000">
               <a:schemeClr val="phClr">
-                <a:tint val="45000"/>
-                <a:shade val="99000"/>
-                <a:satMod val="350000"/>
+                <a:tint val="98000"/>
+                <a:satMod val="130000"/>
+                <a:shade val="90000"/>
+                <a:lumMod val="103000"/>
               </a:schemeClr>
             </a:gs>
             <a:gs pos="100000">
               <a:schemeClr val="phClr">
-                <a:shade val="20000"/>
-                <a:satMod val="255000"/>
+                <a:shade val="63000"/>
+                <a:satMod val="120000"/>
               </a:schemeClr>
             </a:gs>
           </a:gsLst>
-          <a:path path="circle">
-            <a:fillToRect l="50000" t="-80000" r="50000" b="180000"/>
-          </a:path>
-        </a:gradFill>
-        <a:gradFill rotWithShape="1">
-          <a:gsLst>
-            <a:gs pos="0">
-              <a:schemeClr val="phClr">
-                <a:tint val="80000"/>
-                <a:satMod val="300000"/>
-              </a:schemeClr>
-            </a:gs>
-            <a:gs pos="100000">
-              <a:schemeClr val="phClr">
-                <a:shade val="30000"/>
-                <a:satMod val="200000"/>
-              </a:schemeClr>
-            </a:gs>
-          </a:gsLst>
-          <a:path path="circle">
-            <a:fillToRect l="50000" t="50000" r="50000" b="50000"/>
-          </a:path>
+          <a:lin ang="5400000" scaled="0"/>
         </a:gradFill>
       </a:bgFillStyleLst>
     </a:fmtScheme>
   </a:themeElements>
   <a:objectDefaults>
-    <a:spDef>
-      <a:spPr/>
-      <a:bodyPr/>
-      <a:lstStyle/>
-      <a:style>
-        <a:lnRef idx="1">
-          <a:schemeClr val="accent1"/>
-        </a:lnRef>
-        <a:fillRef idx="3">
-          <a:schemeClr val="accent1"/>
-        </a:fillRef>
-        <a:effectRef idx="2">
-          <a:schemeClr val="accent1"/>
-        </a:effectRef>
-        <a:fontRef idx="minor">
-          <a:schemeClr val="lt1"/>
-        </a:fontRef>
-      </a:style>
-    </a:spDef>
     <a:lnDef>
       <a:spPr/>
       <a:bodyPr/>
@@ -18478,5 +21361,10 @@
     </a:lnDef>
   </a:objectDefaults>
   <a:extraClrSchemeLst/>
+  <a:extLst>
+    <a:ext uri="{05A4C25C-085E-4340-85A3-A5531E510DB2}">
+      <thm15:themeFamily xmlns:thm15="http://schemas.microsoft.com/office/thememl/2012/main" name="Office Theme" id="{2E142A2C-CD16-42D6-873A-C26D2A0506FA}" vid="{1BDDFF52-6CD6-40A5-AB3C-68EB2F1E4D0A}"/>
+    </a:ext>
+  </a:extLst>
 </a:theme>
 </file>